--- a/demo_session/deck_cophi_baseline.pptx
+++ b/demo_session/deck_cophi_baseline.pptx
@@ -3321,7 +3321,7 @@
                 </a:solidFill>
                 <a:latin typeface="Arial"/>
               </a:rPr>
-              <a:t>The model samples the pupil at 3.3 pixels per actuator; every camera on the table oversamples the 96 × 96 lattice, so resolution costs no photons — the time to a picometer is set by well depth × frame rate, not by pixel count</a:t>
+              <a:t>The model samples the pupil at 3.3 pixels per actuator; every camera on the table oversamples the 96 × 96 lattice, so resolution costs no photons — the time to a picometer is well depth × frame rate, not pixel count</a:t>
             </a:r>
           </a:p>
         </p:txBody>
@@ -4338,7 +4338,7 @@
                 </a:solidFill>
                 <a:latin typeface="Arial"/>
               </a:rPr>
-              <a:t>Resolution is free down to 1 : 1</a:t>
+              <a:t>Resolution is free down to ~1.5 pixels per actuator:</a:t>
             </a:r>
             <a:r>
               <a:rPr sz="1500" b="0">
@@ -4347,7 +4347,39 @@
                 </a:solidFill>
                 <a:latin typeface="Arial"/>
               </a:rPr>
-              <a:t> (ruling: every mode of interest is commanded at full actuator resolution, so nothing coarser is modeled): a camera's photons per second are pixels × well × rate over the pupil, and binning finer pixels onto the lattice changes nothing but the read noise per sample.  Below ~1.5 pixels per actuator the actuator-space fit collapses (the blur demo's box kernel), which is why 5 pixels per actuator is the floor on this table.</a:t>
+              <a:t> a camera's photons per second are pixels × well × rate over the pupil; binning finer pixels onto the lattice changes only the read noise per sample.</a:t>
+            </a:r>
+          </a:p>
+          <a:p>
+            <a:pPr marL="594360" indent="-137160">
+              <a:spcAft>
+                <a:spcPts val="500"/>
+              </a:spcAft>
+            </a:pPr>
+            <a:r>
+              <a:rPr sz="1300" b="0">
+                <a:solidFill>
+                  <a:srgbClr val="6E6E6E"/>
+                </a:solidFill>
+                <a:latin typeface="Arial"/>
+              </a:rPr>
+              <a:t>–  below ~1.5 px per actuator the actuator fit collapses (the blur demo's box kernel) — 5 px per actuator is the floor on this table</a:t>
+            </a:r>
+          </a:p>
+          <a:p>
+            <a:pPr marL="594360" indent="-137160">
+              <a:spcAft>
+                <a:spcPts val="500"/>
+              </a:spcAft>
+            </a:pPr>
+            <a:r>
+              <a:rPr sz="1300" b="0">
+                <a:solidFill>
+                  <a:srgbClr val="6E6E6E"/>
+                </a:solidFill>
+                <a:latin typeface="Arial"/>
+              </a:rPr>
+              <a:t>–  nothing coarser is modeled (ruling: every mode of interest is commanded at full actuator resolution)</a:t>
             </a:r>
           </a:p>
           <a:p>
@@ -4372,7 +4404,7 @@
                 </a:solidFill>
                 <a:latin typeface="Arial"/>
               </a:rPr>
-              <a:t>The cameras were put on the model grid by binning</a:t>
+              <a:t>Cameras were put on the model grid by binning</a:t>
             </a:r>
             <a:r>
               <a:rPr sz="1500" b="0">
@@ -4381,7 +4413,7 @@
                 </a:solidFill>
                 <a:latin typeface="Arial"/>
               </a:rPr>
-              <a:t> (well × k², read × k): the pm-per-reading rows are the full camera's photons, at the model's sampling.</a:t>
+              <a:t> (well × k², read × k): the pm-per-reading rows are the full camera's photons at the model's sampling.</a:t>
             </a:r>
           </a:p>
         </p:txBody>
@@ -4394,7 +4426,7 @@
         </p:nvSpPr>
         <p:spPr>
           <a:xfrm>
-            <a:off x="411480" y="6430899"/>
+            <a:off x="411480" y="6834505"/>
             <a:ext cx="11368735" cy="274320"/>
           </a:xfrm>
           <a:prstGeom prst="rect">
@@ -4493,7 +4525,7 @@
                 </a:solidFill>
                 <a:latin typeface="Arial"/>
               </a:rPr>
-              <a:t>HET = the heterodyne (COPHI) reading; IFO = the record's Twyman-Green polarization interferometer.  Same seed, surface and matrix: HET matches the IFO's floor, halves its mirror-rig random-surface error, and is exact where the IFO's reading is not</a:t>
+              <a:t>HET = the heterodyne (COPHI) reading; IFO = the record's Twyman-Green polarization interferometer.  Same seed, surface and matrix: HET matches the IFO's floor, halves its mirror-rig random-surface error, and is exact where the IFO is not</a:t>
             </a:r>
           </a:p>
         </p:txBody>
@@ -5478,7 +5510,7 @@
         </p:nvSpPr>
         <p:spPr>
           <a:xfrm>
-            <a:off x="411480" y="5623560"/>
+            <a:off x="411480" y="4135374"/>
             <a:ext cx="11368735" cy="274320"/>
           </a:xfrm>
           <a:prstGeom prst="rect">
@@ -5498,7 +5530,7 @@
               </a:spcAft>
             </a:pPr>
             <a:r>
-              <a:rPr sz="1200" b="0">
+              <a:rPr sz="1500" b="0">
                 <a:solidFill>
                   <a:srgbClr val="282828"/>
                 </a:solidFill>
@@ -5507,22 +5539,22 @@
               <a:t>•  </a:t>
             </a:r>
             <a:r>
-              <a:rPr sz="1200" b="1">
+              <a:rPr sz="1500" b="1">
                 <a:solidFill>
                   <a:srgbClr val="282828"/>
                 </a:solidFill>
                 <a:latin typeface="Arial"/>
               </a:rPr>
-              <a:t>The one-step rows sit 0.5 % low for HET on both rigs — and that is the estimator, not the reading:</a:t>
-            </a:r>
-            <a:r>
-              <a:rPr sz="1200" b="0">
+              <a:t>The one-step rows sit 0.5 % low for HET on both rigs — the estimator, not the reading:</a:t>
+            </a:r>
+            <a:r>
+              <a:rPr sz="1500" b="0">
                 <a:solidFill>
                   <a:srgbClr val="282828"/>
                 </a:solidFill>
                 <a:latin typeface="Arial"/>
               </a:rPr>
-              <a:t> a synthetic 1.000 nm poke reads at slope 1.000000 at the pixel level; the LO placement, the vector sum, the polarizers and the mask each cleared; at λ_m = 10⁻⁵ the gain is 1.0007.  It is the one-step Tikhonov shrinkage at the record's λ_m = 10⁻³ — the "matrix bias" every gauge carries, now a number.</a:t>
+              <a:t> the reading is exact (a 1.000 nm poke reads at slope 1.000000); the 0.5 % is the one-step Tikhonov shrinkage at the record's λ_m = 10⁻³ (1.0007 at 10⁻⁵) — the "matrix bias" every gauge carries, now a number.</a:t>
             </a:r>
           </a:p>
           <a:p>
@@ -5532,7 +5564,7 @@
               </a:spcAft>
             </a:pPr>
             <a:r>
-              <a:rPr sz="1200" b="0">
+              <a:rPr sz="1500" b="0">
                 <a:solidFill>
                   <a:srgbClr val="282828"/>
                 </a:solidFill>
@@ -5541,22 +5573,22 @@
               <a:t>•  </a:t>
             </a:r>
             <a:r>
-              <a:rPr sz="1200" b="1">
+              <a:rPr sz="1500" b="1">
                 <a:solidFill>
                   <a:srgbClr val="282828"/>
                 </a:solidFill>
                 <a:latin typeface="Arial"/>
               </a:rPr>
-              <a:t>Driven to convergence (the gauge's servo use), HET reads exactly on the mirror rig; the IFO then shows its polarization gain in the open:</a:t>
-            </a:r>
-            <a:r>
-              <a:rPr sz="1200" b="0">
+              <a:t>Driven to convergence (the servo use), HET reads exactly on the mirror rig, and the IFO shows its polarization gain in the open:</a:t>
+            </a:r>
+            <a:r>
+              <a:rPr sz="1500" b="0">
                 <a:solidFill>
                   <a:srgbClr val="282828"/>
                 </a:solidFill>
                 <a:latin typeface="Arial"/>
               </a:rPr>
-              <a:t> IFO/HET = 1.006–1.009 on the lens rig and 0.989 on the mirror rig.  The IFO's lens-rig "1.000" was +0.5–1 % of polarization gain cancelling the 0.5 % shrinkage.</a:t>
+              <a:t> IFO/HET = 1.006–1.009 (lens rig), 0.989 (mirror rig); the IFO's lens-rig "1.000" was polarization gain cancelling the shrinkage.</a:t>
             </a:r>
           </a:p>
         </p:txBody>
@@ -5569,7 +5601,7 @@
         </p:nvSpPr>
         <p:spPr>
           <a:xfrm>
-            <a:off x="411480" y="7129272"/>
+            <a:off x="411480" y="5938266"/>
             <a:ext cx="11368735" cy="274320"/>
           </a:xfrm>
           <a:prstGeom prst="rect">
@@ -5668,7 +5700,7 @@
                 </a:solidFill>
                 <a:latin typeface="Arial"/>
               </a:rPr>
-              <a:t>A heterodyne read is photon-limited at full well: pixels × well × frame rate decides; Feng's baseline camera is seven minutes per picometer, the deepest-well 1k global-shutter part is 40 seconds</a:t>
+              <a:t>A heterodyne read is photon-limited at full well: pixels × well × frame rate decides; Feng's baseline camera is seven minutes per picometer, the deepest-well 1k global-shutter part is 40 seconds, the lock-in 3.4 s</a:t>
             </a:r>
           </a:p>
         </p:txBody>
@@ -6594,7 +6626,7 @@
                 </a:solidFill>
                 <a:latin typeface="Arial"/>
               </a:rPr>
-              <a:t>The metric</a:t>
+              <a:t>The metric:</a:t>
             </a:r>
             <a:r>
               <a:rPr sz="1200" b="0">
@@ -6603,7 +6635,23 @@
                 </a:solidFill>
                 <a:latin typeface="Arial"/>
               </a:rPr>
-              <a:t> is the piston-free robust floor over the unpoked actuators (1.48 MAD, median of 12 draws): the raw single-actuator noise is mostly a common piston (165 vs 76 pm), unobservable and inert on a DM.  The composite deck puts every gauge on this metric.</a:t>
+              <a:t> the piston-free robust floor over the unpoked actuators (1.48 MAD, median of 12 draws).</a:t>
+            </a:r>
+          </a:p>
+          <a:p>
+            <a:pPr marL="594360" indent="-137160">
+              <a:spcAft>
+                <a:spcPts val="500"/>
+              </a:spcAft>
+            </a:pPr>
+            <a:r>
+              <a:rPr sz="1050" b="0">
+                <a:solidFill>
+                  <a:srgbClr val="6E6E6E"/>
+                </a:solidFill>
+                <a:latin typeface="Arial"/>
+              </a:rPr>
+              <a:t>–  the raw single-actuator noise is mostly a common piston (165 vs 76 pm) — unobservable and inert on a DM; the composite deck puts every gauge on this metric</a:t>
             </a:r>
           </a:p>
         </p:txBody>
@@ -6660,7 +6708,23 @@
                 </a:solidFill>
                 <a:latin typeface="Arial"/>
               </a:rPr>
-              <a:t> (σ_φ² ∝ I₀ + r²): the Photonfocus's 220 e⁻ costs 22 % in σ at half well and it still wins on well × rate; the baseline's and the C-RED's read noise are assumed (not in Feng's deck; the survey's low-gain value unconfirmed).</a:t>
+              <a:t> (σ_φ² ∝ I₀ + r²): the Photonfocus's 220 e⁻ costs 22 % in σ at half well and it still wins on well × rate.</a:t>
+            </a:r>
+          </a:p>
+          <a:p>
+            <a:pPr marL="594360" indent="-137160">
+              <a:spcAft>
+                <a:spcPts val="500"/>
+              </a:spcAft>
+            </a:pPr>
+            <a:r>
+              <a:rPr sz="1050" b="0">
+                <a:solidFill>
+                  <a:srgbClr val="6E6E6E"/>
+                </a:solidFill>
+                <a:latin typeface="Arial"/>
+              </a:rPr>
+              <a:t>–  the baseline's and the C-RED's read noise are assumed (not in Feng's deck; the survey's value unconfirmed)</a:t>
             </a:r>
           </a:p>
           <a:p>
@@ -6694,7 +6758,23 @@
                 </a:solidFill>
                 <a:latin typeface="Arial"/>
               </a:rPr>
-              <a:t> one reading gives SNR 0.02–0.05; SNR 1 takes (pm per reading)² readings — the seconds-per-pm column; SNR 10 takes 100× that.  A hold loop never needs SNR 10 in one measurement: it integrates readings (next slide).</a:t>
+              <a:t> one reading gives SNR 0.02–0.05; SNR 1 takes (pm per reading)² readings — the seconds-per-pm column; SNR 10 takes 100× that.</a:t>
+            </a:r>
+          </a:p>
+          <a:p>
+            <a:pPr marL="594360" indent="-137160">
+              <a:spcAft>
+                <a:spcPts val="500"/>
+              </a:spcAft>
+            </a:pPr>
+            <a:r>
+              <a:rPr sz="1050" b="0">
+                <a:solidFill>
+                  <a:srgbClr val="6E6E6E"/>
+                </a:solidFill>
+                <a:latin typeface="Arial"/>
+              </a:rPr>
+              <a:t>–  a hold loop never needs SNR 10 in one measurement: it integrates readings (next slide)</a:t>
             </a:r>
           </a:p>
           <a:p>
@@ -6719,7 +6799,7 @@
                 </a:solidFill>
                 <a:latin typeface="Arial"/>
               </a:rPr>
-              <a:t>The per-pixel noise measured on the bench equals the tCophi formula to 1.000 ± 0.002</a:t>
+              <a:t>Model and bench agree:</a:t>
             </a:r>
             <a:r>
               <a:rPr sz="1200" b="0">
@@ -6728,7 +6808,7 @@
                 </a:solidFill>
                 <a:latin typeface="Arial"/>
               </a:rPr>
-              <a:t> on every camera, rig and train — the model and the bench agree.</a:t>
+              <a:t> the per-pixel noise on the bench equals the tCophi formula to 1.000 ± 0.002 on every camera, rig and train.</a:t>
             </a:r>
           </a:p>
           <a:p>
@@ -6753,7 +6833,7 @@
                 </a:solidFill>
                 <a:latin typeface="Arial"/>
               </a:rPr>
-              <a:t>Rolling-shutter sCMOS are out:</a:t>
+              <a:t>Rolling-shutter cameras are out:</a:t>
             </a:r>
             <a:r>
               <a:rPr sz="1200" b="0">
@@ -6762,7 +6842,7 @@
                 </a:solidFill>
                 <a:latin typeface="Arial"/>
               </a:rPr>
-              <a:t> rows exposed in sequence see different beat phases — a phase ramp across the image; true global shutter, hardware trigger from the Rb clock, streamable at full frame.</a:t>
+              <a:t> rows exposed in sequence see different beat phases — a phase ramp across the image.  Needed: true global shutter, hardware trigger from the Rb clock, full-frame streaming.</a:t>
             </a:r>
           </a:p>
           <a:p>
@@ -6796,7 +6876,7 @@
                 </a:solidFill>
                 <a:latin typeface="Arial"/>
               </a:rPr>
-              <a:t> a 1k camera oversamples the 96 × 96 lattice ten to one; well depth × frame rate is the budget (NOTE_detectors_survey).</a:t>
+              <a:t> a 1k camera oversamples the lattice ten to one; well depth × frame rate is the budget.</a:t>
             </a:r>
           </a:p>
         </p:txBody>
@@ -6809,7 +6889,7 @@
         </p:nvSpPr>
         <p:spPr>
           <a:xfrm>
-            <a:off x="6400800" y="5404104"/>
+            <a:off x="6400800" y="5361940"/>
             <a:ext cx="5394960" cy="274320"/>
           </a:xfrm>
           <a:prstGeom prst="rect">
@@ -6908,7 +6988,7 @@
                 </a:solidFill>
                 <a:latin typeface="Arial"/>
               </a:rPr>
-              <a:t>COPHI holds 3 pm against the record's drifts; the baseline camera needs a 16 s cycle, the Photonfocus 1.6 s; the LO's pointing is the term the loop cannot see past</a:t>
+              <a:t>COPHI holds 3 pm against the record's drifts: Feng's baseline camera needs a 16 s cycle, the Photonfocus 1.6 s, the lock-in camera 0.125 s (3.09 pm, fiber term inert); the LO's pointing is the term the loop cannot see past</a:t>
             </a:r>
           </a:p>
         </p:txBody>
@@ -7495,25 +7575,41 @@
                 </a:solidFill>
                 <a:latin typeface="Arial"/>
               </a:rPr>
-              <a:t> the matrix takes an LO tilt as a DM tilt one-for-one (a 1 nrad tilt reads as a surface tilt of 1.008 × θ/2), and the loop drives the DM to follow it.  </a:t>
-            </a:r>
-            <a:r>
-              <a:rPr sz="1200" b="1">
-                <a:solidFill>
-                  <a:srgbClr val="282828"/>
-                </a:solidFill>
-                <a:latin typeface="Arial"/>
-              </a:rPr>
-              <a:t>The LO pointing must hold ~10 prad per cycle — ~10 pm of fiber-tip motion at the collimator's focal length — or be referenced.</a:t>
-            </a:r>
-            <a:r>
-              <a:rPr sz="1200" b="0">
-                <a:solidFill>
-                  <a:srgbClr val="282828"/>
-                </a:solidFill>
-                <a:latin typeface="Arial"/>
-              </a:rPr>
-              <a:t>  That is the architecture requirement the plain-splitter layout adds, beside the fiber's.</a:t>
+              <a:t> the matrix takes an LO tilt as a DM tilt one-for-one (1 nrad reads as a surface tilt of 1.008 × θ/2), and the loop drives the DM to follow it.</a:t>
+            </a:r>
+          </a:p>
+          <a:p>
+            <a:pPr marL="594360" indent="-137160">
+              <a:spcAft>
+                <a:spcPts val="500"/>
+              </a:spcAft>
+            </a:pPr>
+            <a:r>
+              <a:rPr sz="1050" b="0">
+                <a:solidFill>
+                  <a:srgbClr val="6E6E6E"/>
+                </a:solidFill>
+                <a:latin typeface="Arial"/>
+              </a:rPr>
+              <a:t>–  </a:t>
+            </a:r>
+            <a:r>
+              <a:rPr sz="1050" b="1">
+                <a:solidFill>
+                  <a:srgbClr val="6E6E6E"/>
+                </a:solidFill>
+                <a:latin typeface="Arial"/>
+              </a:rPr>
+              <a:t>the LO pointing must hold ~10 prad per cycle (~10 pm of fiber-tip motion at the collimator's focal length), or be referenced</a:t>
+            </a:r>
+            <a:r>
+              <a:rPr sz="1050" b="0">
+                <a:solidFill>
+                  <a:srgbClr val="6E6E6E"/>
+                </a:solidFill>
+                <a:latin typeface="Arial"/>
+              </a:rPr>
+              <a:t> — the requirement the plain-splitter layout adds, beside the fiber's</a:t>
             </a:r>
           </a:p>
           <a:p>
@@ -7547,25 +7643,57 @@
                 </a:solidFill>
                 <a:latin typeface="Arial"/>
               </a:rPr>
-              <a:t> the four-step cannot cancel a differential fiber-phase walk within its own four frames.  Budget at the photon floor (mirror rig, median-fill convention): </a:t>
-            </a:r>
-            <a:r>
-              <a:rPr sz="1200" b="1">
-                <a:solidFill>
-                  <a:srgbClr val="282828"/>
+              <a:t> the four-step cannot cancel a differential fiber-phase walk within its own four frames.</a:t>
+            </a:r>
+          </a:p>
+          <a:p>
+            <a:pPr marL="594360" indent="-137160">
+              <a:spcAft>
+                <a:spcPts val="500"/>
+              </a:spcAft>
+            </a:pPr>
+            <a:r>
+              <a:rPr sz="1050" b="0">
+                <a:solidFill>
+                  <a:srgbClr val="6E6E6E"/>
+                </a:solidFill>
+                <a:latin typeface="Arial"/>
+              </a:rPr>
+              <a:t>–  budget at the photon floor (mirror rig): </a:t>
+            </a:r>
+            <a:r>
+              <a:rPr sz="1050" b="1">
+                <a:solidFill>
+                  <a:srgbClr val="6E6E6E"/>
                 </a:solidFill>
                 <a:latin typeface="Arial"/>
               </a:rPr>
               <a:t>3.9 × 10⁻³ rad per frame = 0.39 nm of differential OPD per 33 ms, ~12 nm/s, ~1.2 mK/s per meter of uncommon fiber</a:t>
             </a:r>
             <a:r>
-              <a:rPr sz="1200" b="0">
-                <a:solidFill>
-                  <a:srgbClr val="282828"/>
-                </a:solidFill>
-                <a:latin typeface="Arial"/>
-              </a:rPr>
-              <a:t> — co-routed, thermally tied, or servoed.</a:t>
+              <a:rPr sz="1050" b="0">
+                <a:solidFill>
+                  <a:srgbClr val="6E6E6E"/>
+                </a:solidFill>
+                <a:latin typeface="Arial"/>
+              </a:rPr>
+              <a:t> — co-routed, thermally tied, or servoed</a:t>
+            </a:r>
+          </a:p>
+          <a:p>
+            <a:pPr marL="594360" indent="-137160">
+              <a:spcAft>
+                <a:spcPts val="500"/>
+              </a:spcAft>
+            </a:pPr>
+            <a:r>
+              <a:rPr sz="1050" b="0">
+                <a:solidFill>
+                  <a:srgbClr val="6E6E6E"/>
+                </a:solidFill>
+                <a:latin typeface="Arial"/>
+              </a:rPr>
+              <a:t>–  with the lock-in camera the walk is a per-sample piston: inert (record)</a:t>
             </a:r>
           </a:p>
           <a:p>
@@ -7592,14 +7720,37 @@
               </a:rPr>
               <a:t>How the loop reaches 3 pm from 55 pm readings — two integrators:</a:t>
             </a:r>
-            <a:r>
-              <a:rPr sz="1200" b="0">
-                <a:solidFill>
-                  <a:srgbClr val="282828"/>
-                </a:solidFill>
-                <a:latin typeface="Arial"/>
-              </a:rPr>
-              <a:t> the estimator's regularization (λ_m) is a spatial low-pass over the response matrix's small-singular-value directions, where photon and read noise live — it trades a 0.5 % gain for a lower floor (the converged estimator removes the bias but admits ×2.1 the white noise if run to a zero update); and the loop itself averages across cycles at gain g (steady state σ_n √(g/(2 − g)), plus M readings per cycle).  In the loop the one-step and the converged estimator agree to 0.1 pm on every row, so the bias costs nothing there; the converged mode is for the open-loop absolute read.</a:t>
+          </a:p>
+          <a:p>
+            <a:pPr marL="594360" indent="-137160">
+              <a:spcAft>
+                <a:spcPts val="500"/>
+              </a:spcAft>
+            </a:pPr>
+            <a:r>
+              <a:rPr sz="1050" b="0">
+                <a:solidFill>
+                  <a:srgbClr val="6E6E6E"/>
+                </a:solidFill>
+                <a:latin typeface="Arial"/>
+              </a:rPr>
+              <a:t>–  the estimator's regularization (λ_m) is a spatial low-pass over the matrix's small-singular-value directions, where photon and read noise live; it trades a 0.5 % gain for a lower floor (the converged estimator removes the bias but admits ×2.1 the white noise)</a:t>
+            </a:r>
+          </a:p>
+          <a:p>
+            <a:pPr marL="594360" indent="-137160">
+              <a:spcAft>
+                <a:spcPts val="500"/>
+              </a:spcAft>
+            </a:pPr>
+            <a:r>
+              <a:rPr sz="1050" b="0">
+                <a:solidFill>
+                  <a:srgbClr val="6E6E6E"/>
+                </a:solidFill>
+                <a:latin typeface="Arial"/>
+              </a:rPr>
+              <a:t>–  the loop averages across cycles at gain g (steady state σ_n √(g/(2 − g)), plus M readings per cycle); in the loop the one-step and converged estimators agree to 0.1 pm on every row</a:t>
             </a:r>
           </a:p>
           <a:p>
@@ -7646,8 +7797,8 @@
         </p:nvSpPr>
         <p:spPr>
           <a:xfrm>
-            <a:off x="6400800" y="6650736"/>
-            <a:ext cx="5394960" cy="274320"/>
+            <a:off x="457200" y="6172200"/>
+            <a:ext cx="11338560" cy="274320"/>
           </a:xfrm>
           <a:prstGeom prst="rect">
             <a:avLst/>
@@ -7729,7 +7880,7 @@
                 </a:solidFill>
                 <a:latin typeface="Arial"/>
               </a:rPr>
-              <a:t>Capture from cold: two colors frequency-multiplexed on one camera</a:t>
+              <a:t>Capture from a cold start: two colors frequency-multiplexed on one camera</a:t>
             </a:r>
           </a:p>
           <a:p>
@@ -8006,7 +8157,7 @@
                 </a:solidFill>
                 <a:latin typeface="Arial"/>
               </a:rPr>
-              <a:t>Capture from cold: the numbers, and the parts it adds</a:t>
+              <a:t>Capture from a cold start: the numbers, and the parts it adds</a:t>
             </a:r>
           </a:p>
           <a:p>
@@ -8022,7 +8173,7 @@
                 </a:solidFill>
                 <a:latin typeface="Arial"/>
               </a:rPr>
-              <a:t>Zero wrong fringe orders on the whole capture ladder to 480 nm rms; a single color wraps from 40 nm; the temporal unwrapping a continuous reading gets free holds a running loop, not a cold start</a:t>
+              <a:t>Zero wrong fringe orders on the whole capture ladder to 480 nm rms; a single color wraps from 40 nm; temporal unwrapping holds a running loop, not a cold start</a:t>
             </a:r>
           </a:p>
         </p:txBody>
@@ -8123,43 +8274,82 @@
                 </a:solidFill>
                 <a:latin typeface="Arial"/>
               </a:rPr>
-              <a:t> 632.8 + 652.8 nm (synthetic Λ = 20.65 µm, range ±5.2 µm), read by its own buckets per color (crosstalk 4 × 10⁻¹⁶ rad).  </a:t>
-            </a:r>
-            <a:r>
-              <a:rPr sz="1200" b="1">
-                <a:solidFill>
-                  <a:srgbClr val="282828"/>
-                </a:solidFill>
-                <a:latin typeface="Arial"/>
-              </a:rPr>
-              <a:t>Zero wrong orders to 480 nm rms, noise-free and on both cameras</a:t>
-            </a:r>
-            <a:r>
-              <a:rPr sz="1200" b="0">
-                <a:solidFill>
-                  <a:srgbClr val="282828"/>
-                </a:solidFill>
-                <a:latin typeface="Arial"/>
-              </a:rPr>
-              <a:t> (0.15 / 0.10 nm per pixel); the single color is 74 % wrong at 480.  </a:t>
-            </a:r>
-            <a:r>
-              <a:rPr sz="1200" b="1">
-                <a:solidFill>
-                  <a:srgbClr val="282828"/>
-                </a:solidFill>
-                <a:latin typeface="Arial"/>
-              </a:rPr>
-              <a:t>A 200 nm rms figure is captured from cold in one multiplexed reading, 0.27 s.</a:t>
-            </a:r>
-            <a:r>
-              <a:rPr sz="1200" b="0">
-                <a:solidFill>
-                  <a:srgbClr val="282828"/>
-                </a:solidFill>
-                <a:latin typeface="Arial"/>
-              </a:rPr>
-              <a:t>  Any Δλ from 1 to ~100 nm resolves (the fine requirement at Δλ = 20 nm is 1.7 nm against ~0.1 nm per pixel): the synthetic-wavelength ladder needs one rung for this job.</a:t>
+              <a:t> 632.8 + 652.8 nm (synthetic Λ = 20.65 µm, range ±5.2 µm), each color read by its own buckets (crosstalk 4 × 10⁻¹⁶ rad).</a:t>
+            </a:r>
+          </a:p>
+          <a:p>
+            <a:pPr marL="594360" indent="-137160">
+              <a:spcAft>
+                <a:spcPts val="500"/>
+              </a:spcAft>
+            </a:pPr>
+            <a:r>
+              <a:rPr sz="1050" b="0">
+                <a:solidFill>
+                  <a:srgbClr val="6E6E6E"/>
+                </a:solidFill>
+                <a:latin typeface="Arial"/>
+              </a:rPr>
+              <a:t>–  </a:t>
+            </a:r>
+            <a:r>
+              <a:rPr sz="1050" b="1">
+                <a:solidFill>
+                  <a:srgbClr val="6E6E6E"/>
+                </a:solidFill>
+                <a:latin typeface="Arial"/>
+              </a:rPr>
+              <a:t>zero wrong orders to 480 nm rms, both cameras</a:t>
+            </a:r>
+            <a:r>
+              <a:rPr sz="1050" b="0">
+                <a:solidFill>
+                  <a:srgbClr val="6E6E6E"/>
+                </a:solidFill>
+                <a:latin typeface="Arial"/>
+              </a:rPr>
+              <a:t> (0.15 / 0.10 nm per pixel); one color is 74 % wrong at 480</a:t>
+            </a:r>
+          </a:p>
+          <a:p>
+            <a:pPr marL="594360" indent="-137160">
+              <a:spcAft>
+                <a:spcPts val="500"/>
+              </a:spcAft>
+            </a:pPr>
+            <a:r>
+              <a:rPr sz="1050" b="0">
+                <a:solidFill>
+                  <a:srgbClr val="6E6E6E"/>
+                </a:solidFill>
+                <a:latin typeface="Arial"/>
+              </a:rPr>
+              <a:t>–  </a:t>
+            </a:r>
+            <a:r>
+              <a:rPr sz="1050" b="1">
+                <a:solidFill>
+                  <a:srgbClr val="6E6E6E"/>
+                </a:solidFill>
+                <a:latin typeface="Arial"/>
+              </a:rPr>
+              <a:t>a 200 nm rms figure is captured from cold in one 0.27 s reading</a:t>
+            </a:r>
+          </a:p>
+          <a:p>
+            <a:pPr marL="594360" indent="-137160">
+              <a:spcAft>
+                <a:spcPts val="500"/>
+              </a:spcAft>
+            </a:pPr>
+            <a:r>
+              <a:rPr sz="1050" b="0">
+                <a:solidFill>
+                  <a:srgbClr val="6E6E6E"/>
+                </a:solidFill>
+                <a:latin typeface="Arial"/>
+              </a:rPr>
+              <a:t>–  any Δλ from 1 to ~100 nm works (the fine requirement at Δλ = 20 nm is 1.7 nm against ~0.1 nm per pixel): one rung of the synthetic-wavelength ladder is enough here</a:t>
             </a:r>
           </a:p>
           <a:p>
@@ -8227,7 +8417,7 @@
                 </a:solidFill>
                 <a:latin typeface="Arial"/>
               </a:rPr>
-              <a:t> one reference at a time, so the two colors are read on alternate I/Q samples (2 ms per pair) — zero wrong orders to 480 nm rms, 0.12 nm per pixel; temporal unwrapping at 1 kHz tolerates 158 µm/s at the peak pixel.</a:t>
+              <a:t> one reference at a time, so the two colors alternate on I/Q samples (2 ms per pair) — zero wrong orders to 480 nm rms, 0.12 nm per pixel; temporal unwrapping at 1 kHz tolerates 158 µm/s.</a:t>
             </a:r>
           </a:p>
         </p:txBody>
@@ -10115,7 +10305,7 @@
         </p:nvSpPr>
         <p:spPr>
           <a:xfrm>
-            <a:off x="457200" y="6217920"/>
+            <a:off x="457200" y="6446520"/>
             <a:ext cx="11368735" cy="274320"/>
           </a:xfrm>
           <a:prstGeom prst="rect">
@@ -10141,7 +10331,7 @@
                 </a:solidFill>
                 <a:latin typeface="Arial"/>
               </a:rPr>
-              <a:t>Camera timings are TO's records on an IMX250MZR-class camera (2448 × 2048, 75 fps; well ~10 ke⁻ and read 2.4 e⁻ unconfirmed; the IFO's four analyzer frames in one exposure; S and P on the mono variant at 18.8 readings/s).  The sensors are 10–40× slower than photons ÷ full-sensor rate would say: the ZWFS image's bright core sets the exposure (dynamic range), the frame mean sits at half well, and two polarization orientations go unused — the IFO's uniform pupil does not pay those.  Parts counts and TRL to follow (campaign brief sec. 9.1).</a:t>
+              <a:t>Camera timings: TO's records on an IMX250MZR-class polarization camera (2448 × 2048, 75 fps; well ~10 ke⁻, read 2.4 e⁻, unconfirmed).  The sensors run 10–40× slower than photons ÷ sensor rate would say: the ZWFS core sets the exposure, the frame mean sits at half well, two orientations go unused.  Parts counts and TRL to follow (campaign brief sec. 9.1).</a:t>
             </a:r>
           </a:p>
         </p:txBody>
@@ -11415,7 +11605,48 @@
                 </a:solidFill>
                 <a:latin typeface="Arial"/>
               </a:rPr>
-              <a:t> every record is at 3.3–4 px per actuator (the IFO's mirror-rig image, distorted by more than a pitch at the edge, reads to 2 pm there); the collapse band is the blur demo's; the 5–20 rows follow from the well-bound photon rule and the data rates.  </a:t>
+              <a:t> every record is at 3.3–4 px per actuator (the IFO's mirror-rig image, distorted by more than a pitch at the edge, still reads to 2 pm); the collapse band is the blur demo's; the 5–20 rows follow from the well-bound photon rule and the data rates.</a:t>
+            </a:r>
+          </a:p>
+          <a:p>
+            <a:pPr marL="594360" indent="-137160">
+              <a:spcAft>
+                <a:spcPts val="500"/>
+              </a:spcAft>
+            </a:pPr>
+            <a:r>
+              <a:rPr sz="1300" b="0">
+                <a:solidFill>
+                  <a:srgbClr val="6E6E6E"/>
+                </a:solidFill>
+                <a:latin typeface="Arial"/>
+              </a:rPr>
+              <a:t>–  </a:t>
+            </a:r>
+            <a:r>
+              <a:rPr sz="1300" b="1">
+                <a:solidFill>
+                  <a:srgbClr val="6E6E6E"/>
+                </a:solidFill>
+                <a:latin typeface="Arial"/>
+              </a:rPr>
+              <a:t>a per-gauge sweep at 1, 1.5, 2 and 4 px per actuator is a one-day format run — the item that turns this table into records</a:t>
+            </a:r>
+          </a:p>
+          <a:p>
+            <a:pPr>
+              <a:spcAft>
+                <a:spcPts val="600"/>
+              </a:spcAft>
+            </a:pPr>
+            <a:r>
+              <a:rPr sz="1500" b="0">
+                <a:solidFill>
+                  <a:srgbClr val="282828"/>
+                </a:solidFill>
+                <a:latin typeface="Arial"/>
+              </a:rPr>
+              <a:t>•  </a:t>
             </a:r>
             <a:r>
               <a:rPr sz="1500" b="1">
@@ -11424,7 +11655,7 @@
                 </a:solidFill>
                 <a:latin typeface="Arial"/>
               </a:rPr>
-              <a:t>A per-gauge sweep at 1, 1.5, 2, 4 px per actuator is a one-day format run — the item that turns this table into records.</a:t>
+              <a:t>Where the three differ:</a:t>
             </a:r>
             <a:r>
               <a:rPr sz="1500" b="0">
@@ -11433,7 +11664,7 @@
                 </a:solidFill>
                 <a:latin typeface="Arial"/>
               </a:rPr>
-              <a:t>  Where the three differ: the IFO and HET read against a reference and are indifferent above 2; the vector ZWFS solves pixel by pixel from two images, wants ≥ 4, and pays processing for more; the lock-in fixes HET's sampling at the device (5.3 / 10.6) with the processing on-chip.  Regularization and calibration do not change with pixel count above 2.</a:t>
+              <a:t> the IFO and HET read against a reference and are indifferent above 2 px; the vector ZWFS solves pixel by pixel from two images, wants ≥ 4, and pays processing for more; the lock-in fixes HET's sampling at the device (5.3 / 10.6) with the processing on-chip.  Regularization and calibration do not change with pixel count above 2.</a:t>
             </a:r>
           </a:p>
         </p:txBody>
@@ -11446,7 +11677,7 @@
         </p:nvSpPr>
         <p:spPr>
           <a:xfrm>
-            <a:off x="411480" y="6166866"/>
+            <a:off x="411480" y="6401562"/>
             <a:ext cx="11368735" cy="274320"/>
           </a:xfrm>
           <a:prstGeom prst="rect">
@@ -12440,7 +12671,7 @@
                 </a:solidFill>
                 <a:latin typeface="Arial"/>
               </a:rPr>
-              <a:t>For hold alone,</a:t>
+              <a:t>For hold alone, the vector Zernike is cheapest in photons</a:t>
             </a:r>
             <a:r>
               <a:rPr sz="1100" b="0">
@@ -12449,7 +12680,7 @@
                 </a:solidFill>
                 <a:latin typeface="Arial"/>
               </a:rPr>
-              <a:t> the vector Zernike is cheapest in photons by ~50× and needs no stabilities of its own — but on the assumed polarization camera it is the slowest in time (~60 s per cycle); Feng's camera makes COPHI slow (16 s), the Photonfocus fast (1.6 s), </a:t>
+              <a:t> (~50×) and needs no stabilities of its own — but on the assumed polarization camera it is the slowest (~60 s per cycle).  Feng's camera makes COPHI slow (16 s), the Photonfocus fast (1.6 s), </a:t>
             </a:r>
             <a:r>
               <a:rPr sz="1100" b="1">
@@ -12458,7 +12689,7 @@
                 </a:solidFill>
                 <a:latin typeface="Arial"/>
               </a:rPr>
-              <a:t>the lock-in the fastest reading on the table (0.125 s; records)</a:t>
+              <a:t>the lock-in the fastest on the table (0.125 s)</a:t>
             </a:r>
             <a:r>
               <a:rPr sz="1100" b="0">
@@ -12467,7 +12698,7 @@
                 </a:solidFill>
                 <a:latin typeface="Arial"/>
               </a:rPr>
-              <a:t> if its well is as surveyed — with the fiber term inert.</a:t>
+              <a:t> if its well is as surveyed.</a:t>
             </a:r>
           </a:p>
           <a:p>
@@ -12492,7 +12723,7 @@
                 </a:solidFill>
                 <a:latin typeface="Arial"/>
               </a:rPr>
-              <a:t>For capture and the absolute figure,</a:t>
+              <a:t>For capture and the absolute figure:</a:t>
             </a:r>
             <a:r>
               <a:rPr sz="1100" b="0">
@@ -12501,7 +12732,23 @@
                 </a:solidFill>
                 <a:latin typeface="Arial"/>
               </a:rPr>
-              <a:t> COPHI in either form.  </a:t>
+              <a:t> COPHI in either form.</a:t>
+            </a:r>
+          </a:p>
+          <a:p>
+            <a:pPr>
+              <a:spcAft>
+                <a:spcPts val="600"/>
+              </a:spcAft>
+            </a:pPr>
+            <a:r>
+              <a:rPr sz="1100" b="0">
+                <a:solidFill>
+                  <a:srgbClr val="282828"/>
+                </a:solidFill>
+                <a:latin typeface="Arial"/>
+              </a:rPr>
+              <a:t>•  </a:t>
             </a:r>
             <a:r>
               <a:rPr sz="1100" b="1">
@@ -12510,7 +12757,7 @@
                 </a:solidFill>
                 <a:latin typeface="Arial"/>
               </a:rPr>
-              <a:t>What decides it for a flight DM:</a:t>
+              <a:t>For a flight DM:</a:t>
             </a:r>
             <a:r>
               <a:rPr sz="1100" b="0">
@@ -12519,7 +12766,7 @@
                 </a:solidFill>
                 <a:latin typeface="Arial"/>
               </a:rPr>
-              <a:t> hold only and photons scarce → the Zernike sensor with a camera chosen for it; hold + capture + absolute, or speed → COPHI, with the lock-in the fastest by 20–500×; </a:t>
+              <a:t> hold only and photons scarce → the Zernike sensor with a camera chosen for it; hold + capture + absolute, or speed → COPHI (the lock-in fastest by 20–500×).  </a:t>
             </a:r>
             <a:r>
               <a:rPr sz="1100" b="1">
@@ -12528,7 +12775,7 @@
                 </a:solidFill>
                 <a:latin typeface="Arial"/>
               </a:rPr>
-              <a:t>the hybrid</a:t>
+              <a:t>The hybrid</a:t>
             </a:r>
             <a:r>
               <a:rPr sz="1100" b="0">
@@ -12537,7 +12784,7 @@
                 </a:solidFill>
                 <a:latin typeface="Arial"/>
               </a:rPr>
-              <a:t> — a Zernike sensor for the hold, COPHI's two-color read for capture and commissioning — stays the conservative answer until the lock-in's vendor numbers are in.</a:t>
+              <a:t> — Zernike for the hold, COPHI's two-color read for capture and commissioning — stays the conservative answer until the lock-in's vendor numbers are in.</a:t>
             </a:r>
           </a:p>
         </p:txBody>
@@ -12550,7 +12797,7 @@
         </p:nvSpPr>
         <p:spPr>
           <a:xfrm>
-            <a:off x="411480" y="6664452"/>
+            <a:off x="411480" y="6986270"/>
             <a:ext cx="11368735" cy="274320"/>
           </a:xfrm>
           <a:prstGeom prst="rect">
@@ -12649,7 +12896,7 @@
                 </a:solidFill>
                 <a:latin typeface="Arial"/>
               </a:rPr>
-              <a:t>COPHI is a credible fifth gauge: it matches the IFO's floor, reads exactly, and captures from cold in one reading; its cost is the fiber and the LO, and its speed is the camera's</a:t>
+              <a:t>COPHI is a credible fifth gauge: it matches the IFO's floor, reads exactly, and captures from cold in one reading; its cost is the fiber and the LO, its speed is the camera's</a:t>
             </a:r>
           </a:p>
         </p:txBody>
@@ -12750,7 +12997,7 @@
                 </a:solidFill>
                 <a:latin typeface="Arial"/>
               </a:rPr>
-              <a:t> as the fifth column, with the converged estimator for every gauge and the piston-free photon metric (both found here, both apply to the record).</a:t>
+              <a:t> as the fifth column, with the converged estimator and the piston-free photon metric for every gauge (both found here, both apply to the record).</a:t>
             </a:r>
           </a:p>
           <a:p>
@@ -12818,25 +13065,57 @@
                 </a:solidFill>
                 <a:latin typeface="Arial"/>
               </a:rPr>
-              <a:t> the Photonfocus-class 1k global-shutter part (42 s per pm, 3 pm held in 1.6 s cycles) over Feng's baseline (7 min, 16 s); verify the survey against the vendor sheets before a part is named.  </a:t>
-            </a:r>
-            <a:r>
-              <a:rPr sz="1200" b="1">
-                <a:solidFill>
-                  <a:srgbClr val="282828"/>
-                </a:solidFill>
-                <a:latin typeface="Arial"/>
-              </a:rPr>
-              <a:t>The lock-in camera is the fast form</a:t>
-            </a:r>
-            <a:r>
-              <a:rPr sz="1200" b="0">
-                <a:solidFill>
-                  <a:srgbClr val="282828"/>
-                </a:solidFill>
-                <a:latin typeface="Arial"/>
-              </a:rPr>
-              <a:t> (1.1 s per pm as surveyed) — one vendor question from a number.</a:t>
+              <a:t> the Photonfocus-class 1k global-shutter part (42 s per pm, 3 pm held in 1.6 s cycles) over Feng's baseline (7 min, 16 s).</a:t>
+            </a:r>
+          </a:p>
+          <a:p>
+            <a:pPr marL="594360" indent="-137160">
+              <a:spcAft>
+                <a:spcPts val="500"/>
+              </a:spcAft>
+            </a:pPr>
+            <a:r>
+              <a:rPr sz="1050" b="0">
+                <a:solidFill>
+                  <a:srgbClr val="6E6E6E"/>
+                </a:solidFill>
+                <a:latin typeface="Arial"/>
+              </a:rPr>
+              <a:t>–  verify the survey against the vendor sheets before a part is named</a:t>
+            </a:r>
+          </a:p>
+          <a:p>
+            <a:pPr marL="594360" indent="-137160">
+              <a:spcAft>
+                <a:spcPts val="500"/>
+              </a:spcAft>
+            </a:pPr>
+            <a:r>
+              <a:rPr sz="1050" b="0">
+                <a:solidFill>
+                  <a:srgbClr val="6E6E6E"/>
+                </a:solidFill>
+                <a:latin typeface="Arial"/>
+              </a:rPr>
+              <a:t>–  </a:t>
+            </a:r>
+            <a:r>
+              <a:rPr sz="1050" b="1">
+                <a:solidFill>
+                  <a:srgbClr val="6E6E6E"/>
+                </a:solidFill>
+                <a:latin typeface="Arial"/>
+              </a:rPr>
+              <a:t>the lock-in camera is the fast form</a:t>
+            </a:r>
+            <a:r>
+              <a:rPr sz="1050" b="0">
+                <a:solidFill>
+                  <a:srgbClr val="6E6E6E"/>
+                </a:solidFill>
+                <a:latin typeface="Arial"/>
+              </a:rPr>
+              <a:t> (3.4 s per pm as surveyed, 0.125 s cycles) — one vendor question from a number</a:t>
             </a:r>
           </a:p>
           <a:p>
@@ -12961,7 +13240,7 @@
                 </a:solidFill>
                 <a:latin typeface="Arial"/>
               </a:rPr>
-              <a:t> the chromatic refocus of the tail at Δλ = 20 nm (dispersive glass in the model); the LO referenced against the test arm's own flat; the electronics table's parts counts and TRL for all five gauges; Kent's ZWFS reconstruction when it arrives.</a:t>
+              <a:t> the tail's chromatic refocus at Δλ = 20 nm (dispersive glass in the model); the LO referenced against the test arm's own flat; parts counts and TRL for all five gauges; Kent's ZWFS reconstruction when it arrives.</a:t>
             </a:r>
           </a:p>
         </p:txBody>
@@ -16398,8 +16677,8 @@
         </p:nvSpPr>
         <p:spPr>
           <a:xfrm>
-            <a:off x="6400800" y="1999488"/>
-            <a:ext cx="5394960" cy="274320"/>
+            <a:off x="6172200" y="2103120"/>
+            <a:ext cx="4343400" cy="274320"/>
           </a:xfrm>
           <a:prstGeom prst="rect">
             <a:avLst/>
@@ -17581,7 +17860,7 @@
                 </a:solidFill>
                 <a:latin typeface="Arial"/>
               </a:rPr>
-              <a:t>Feng's camera takes four frames per beat and the computer demodulates; a lock-in camera demodulates in every pixel at a kHz beat and reads the full lattice in a second — the parallel implementation, same optics, same RF chain; its rows run through every results table that follows</a:t>
+              <a:t>Feng's camera takes four frames per beat and the computer demodulates; a lock-in camera demodulates in every pixel at a kHz beat and reads the whole lattice in a second — same optics, same RF chain; its rows run through every table that follows</a:t>
             </a:r>
           </a:p>
         </p:txBody>
@@ -17658,7 +17937,7 @@
               </a:spcAft>
             </a:pPr>
             <a:r>
-              <a:rPr sz="1200" b="0">
+              <a:rPr sz="1400" b="0">
                 <a:solidFill>
                   <a:srgbClr val="282828"/>
                 </a:solidFill>
@@ -17667,7 +17946,7 @@
               <a:t>•  </a:t>
             </a:r>
             <a:r>
-              <a:rPr sz="1200" b="1">
+              <a:rPr sz="1400" b="1">
                 <a:solidFill>
                   <a:srgbClr val="282828"/>
                 </a:solidFill>
@@ -17676,31 +17955,13 @@
               <a:t>Ruling:</a:t>
             </a:r>
             <a:r>
-              <a:rPr sz="1200" b="0">
+              <a:rPr sz="1400" b="0">
                 <a:solidFill>
                   <a:srgbClr val="282828"/>
                 </a:solidFill>
                 <a:latin typeface="Arial"/>
               </a:rPr>
-              <a:t> every mode of interest (EFC probes among them) is commanded at full actuator resolution — no coarse or low-order sensor forms.  The second implementation is a </a:t>
-            </a:r>
-            <a:r>
-              <a:rPr sz="1200" b="1">
-                <a:solidFill>
-                  <a:srgbClr val="282828"/>
-                </a:solidFill>
-                <a:latin typeface="Arial"/>
-              </a:rPr>
-              <a:t>well-free, per-pixel demodulating reading at ≥ 1 element per actuator</a:t>
-            </a:r>
-            <a:r>
-              <a:rPr sz="1200" b="0">
-                <a:solidFill>
-                  <a:srgbClr val="282828"/>
-                </a:solidFill>
-                <a:latin typeface="Arial"/>
-              </a:rPr>
-              <a:t>, assumed to exist at 1:1 or better.</a:t>
+              <a:t> every mode we care about (EFC probes included) runs at full actuator resolution — so the second implementation is a per-pixel demodulating reading at ≥ 1 element per actuator, assumed to exist.</a:t>
             </a:r>
           </a:p>
           <a:p>
@@ -17710,7 +17971,7 @@
               </a:spcAft>
             </a:pPr>
             <a:r>
-              <a:rPr sz="1200" b="0">
+              <a:rPr sz="1400" b="0">
                 <a:solidFill>
                   <a:srgbClr val="282828"/>
                 </a:solidFill>
@@ -17719,7 +17980,7 @@
               <a:t>•  </a:t>
             </a:r>
             <a:r>
-              <a:rPr sz="1200" b="1">
+              <a:rPr sz="1400" b="1">
                 <a:solidFill>
                   <a:srgbClr val="282828"/>
                 </a:solidFill>
@@ -17728,13 +17989,61 @@
               <a:t>Lock-in</a:t>
             </a:r>
             <a:r>
-              <a:rPr sz="1200" b="0">
+              <a:rPr sz="1400" b="0">
                 <a:solidFill>
                   <a:srgbClr val="282828"/>
                 </a:solidFill>
                 <a:latin typeface="Arial"/>
               </a:rPr>
-              <a:t> = synchronous detection inside each pixel: the photocurrent is steered into in-phase and quadrature stores by the external reference (our Rb-clocked beat, now at kHz), the DC never reaches the well, I and Q leave at the frame rate — the four-bucket replaced by thousands of cycles integrated on-chip.</a:t>
+              <a:t> = synchronous detection inside each pixel:</a:t>
+            </a:r>
+          </a:p>
+          <a:p>
+            <a:pPr marL="594360" indent="-137160">
+              <a:spcAft>
+                <a:spcPts val="500"/>
+              </a:spcAft>
+            </a:pPr>
+            <a:r>
+              <a:rPr sz="1250" b="0">
+                <a:solidFill>
+                  <a:srgbClr val="6E6E6E"/>
+                </a:solidFill>
+                <a:latin typeface="Arial"/>
+              </a:rPr>
+              <a:t>–  the photocurrent is multiplied by the beat reference and by its 90°-shifted copy, and integrated</a:t>
+            </a:r>
+          </a:p>
+          <a:p>
+            <a:pPr marL="594360" indent="-137160">
+              <a:spcAft>
+                <a:spcPts val="500"/>
+              </a:spcAft>
+            </a:pPr>
+            <a:r>
+              <a:rPr sz="1250" b="0">
+                <a:solidFill>
+                  <a:srgbClr val="6E6E6E"/>
+                </a:solidFill>
+                <a:latin typeface="Arial"/>
+              </a:rPr>
+              <a:t>–  the stores are I = I₀γ cos φ (in-phase) and Q = I₀γ sin φ (quadrature) — not intensities; φ = atan2(Q, I)</a:t>
+            </a:r>
+          </a:p>
+          <a:p>
+            <a:pPr marL="594360" indent="-137160">
+              <a:spcAft>
+                <a:spcPts val="500"/>
+              </a:spcAft>
+            </a:pPr>
+            <a:r>
+              <a:rPr sz="1250" b="0">
+                <a:solidFill>
+                  <a:srgbClr val="6E6E6E"/>
+                </a:solidFill>
+                <a:latin typeface="Arial"/>
+              </a:rPr>
+              <a:t>–  the DC term never reaches the well; I and Q leave at the frame rate</a:t>
             </a:r>
           </a:p>
           <a:p>
@@ -17744,7 +18053,7 @@
               </a:spcAft>
             </a:pPr>
             <a:r>
-              <a:rPr sz="1200" b="0">
+              <a:rPr sz="1400" b="0">
                 <a:solidFill>
                   <a:srgbClr val="282828"/>
                 </a:solidFill>
@@ -17753,7 +18062,7 @@
               <a:t>•  </a:t>
             </a:r>
             <a:r>
-              <a:rPr sz="1200" b="1">
+              <a:rPr sz="1400" b="1">
                 <a:solidFill>
                   <a:srgbClr val="282828"/>
                 </a:solidFill>
@@ -17762,13 +18071,29 @@
               <a:t>Surveyed (unverified):</a:t>
             </a:r>
             <a:r>
-              <a:rPr sz="1200" b="0">
+              <a:rPr sz="1400" b="0">
                 <a:solidFill>
                   <a:srgbClr val="282828"/>
                 </a:solidFill>
                 <a:latin typeface="Arial"/>
               </a:rPr>
-              <a:t> Heliotis heliCam C4 / C4M — 542 × 512 (1024 × 1102), in-pixel lock-in 1–250 kHz, 500 ke⁻ well, 2 × 10-bit I/Q, external reference input; four generations shipped, one vendor.  Also ranked: brute-force 128² CMOS at 20–40 kfps; iToF demodulators with the beat moved to MHz; digital-pixel ROICs (Lincoln DFPA); silicon-photonic coherent FPAs.  SPADs and Geiger-mode arrays are unfit (count-rate ceilings).</a:t>
+              <a:t> Heliotis heliCam C4 / C4M — 542 × 512 (1024 × 1102), lock-in 1–250 kHz, 500 ke⁻ well, 2 × 10-bit I/Q, external reference; one vendor, four generations.</a:t>
+            </a:r>
+          </a:p>
+          <a:p>
+            <a:pPr marL="594360" indent="-137160">
+              <a:spcAft>
+                <a:spcPts val="500"/>
+              </a:spcAft>
+            </a:pPr>
+            <a:r>
+              <a:rPr sz="1250" b="0">
+                <a:solidFill>
+                  <a:srgbClr val="6E6E6E"/>
+                </a:solidFill>
+                <a:latin typeface="Arial"/>
+              </a:rPr>
+              <a:t>–  also ranked: 128² CMOS at 20–40 kfps, time-of-flight demodulators, digital-pixel ROICs, coherent photonic arrays; not fit: SPAD / Geiger arrays (count-rate ceilings)</a:t>
             </a:r>
           </a:p>
         </p:txBody>
@@ -17989,7 +18314,7 @@
                           </a:solidFill>
                           <a:latin typeface="Arial"/>
                         </a:rPr>
-                        <a:t>I/Q per pixel at 1 kHz</a:t>
+                        <a:t>I/Q (in-phase / quadrature) per pixel at 1 kHz</a:t>
                       </a:r>
                     </a:p>
                   </a:txBody>
@@ -18352,7 +18677,7 @@
         </p:nvSpPr>
         <p:spPr>
           <a:xfrm>
-            <a:off x="457200" y="5093208"/>
+            <a:off x="420624" y="5166360"/>
             <a:ext cx="11338560" cy="274320"/>
           </a:xfrm>
           <a:prstGeom prst="rect">
@@ -18372,7 +18697,7 @@
               </a:spcAft>
             </a:pPr>
             <a:r>
-              <a:rPr sz="1500" b="0">
+              <a:rPr sz="1400" b="0">
                 <a:solidFill>
                   <a:srgbClr val="282828"/>
                 </a:solidFill>
@@ -18381,22 +18706,29 @@
               <a:t>•  </a:t>
             </a:r>
             <a:r>
-              <a:rPr sz="1500" b="1">
+              <a:rPr sz="1400" b="1">
                 <a:solidFill>
                   <a:srgbClr val="282828"/>
                 </a:solidFill>
                 <a:latin typeface="Arial"/>
               </a:rPr>
-              <a:t>Even well-capped the lock-in is ~12× the Photonfocus and ~110× Feng's baseline</a:t>
-            </a:r>
-            <a:r>
-              <a:rPr sz="1500" b="0">
-                <a:solidFill>
-                  <a:srgbClr val="282828"/>
-                </a:solidFill>
-                <a:latin typeface="Arial"/>
-              </a:rPr>
-              <a:t>; a verified well-free device (continuous, or I/Q ≥ 10 kHz) at the sheet's own 2.5 × 10⁹ e⁻/s per element would be ~18 pm per sample, ~0.34 s per pm — 10× the capped form; that is what the vendor question decides.</a:t>
+              <a:t>Even well-capped the lock-in is ~12× the Photonfocus and ~110× Feng's baseline.</a:t>
+            </a:r>
+          </a:p>
+          <a:p>
+            <a:pPr marL="594360" indent="-137160">
+              <a:spcAft>
+                <a:spcPts val="500"/>
+              </a:spcAft>
+            </a:pPr>
+            <a:r>
+              <a:rPr sz="1250" b="0">
+                <a:solidFill>
+                  <a:srgbClr val="6E6E6E"/>
+                </a:solidFill>
+                <a:latin typeface="Arial"/>
+              </a:rPr>
+              <a:t>–  a well-free device (continuous, or I/Q ≥ 10 kHz) at 2.5 × 10⁹ e⁻/s per element: ~18 pm per sample, ~0.34 s per pm — 10× better again; that is what the vendor question decides</a:t>
             </a:r>
           </a:p>
           <a:p>
@@ -18406,7 +18738,7 @@
               </a:spcAft>
             </a:pPr>
             <a:r>
-              <a:rPr sz="1500" b="0">
+              <a:rPr sz="1400" b="0">
                 <a:solidFill>
                   <a:srgbClr val="282828"/>
                 </a:solidFill>
@@ -18415,7 +18747,7 @@
               <a:t>•  </a:t>
             </a:r>
             <a:r>
-              <a:rPr sz="1500" b="1">
+              <a:rPr sz="1400" b="1">
                 <a:solidFill>
                   <a:srgbClr val="282828"/>
                 </a:solidFill>
@@ -18424,13 +18756,13 @@
               <a:t>The vendor question:</a:t>
             </a:r>
             <a:r>
-              <a:rPr sz="1500" b="0">
+              <a:rPr sz="1400" b="0">
                 <a:solidFill>
                   <a:srgbClr val="282828"/>
                 </a:solidFill>
                 <a:latin typeface="Arial"/>
               </a:rPr>
-              <a:t> per-pixel phase noise vs flux at t_c = 100 ms, and whether the full well bounds each internal 1 MSa/s sample or the 5.6 kSa/s output — for Heliotis, through Dave.</a:t>
+              <a:t> phase noise per pixel vs flux at t_c = 100 ms, and whether the full well bounds each internal 1 MSa/s sample or the 5.6 kSa/s output — for Heliotis, through Dave.</a:t>
             </a:r>
           </a:p>
         </p:txBody>
@@ -18542,7 +18874,7 @@
                 </a:solidFill>
                 <a:latin typeface="Arial"/>
               </a:rPr>
-              <a:t>The same laser, fibers, LO and bench; the beat moves to 5 kHz; the mixer gives the beat itself to the camera's reference input; no frame trigger, no bucket; I/Q frames at 1 kHz go straight to the phase</a:t>
+              <a:t>Same laser, fibers, LO and bench; the beat moves to 5 kHz and goes to the camera's reference input; no frame trigger, no bucket; I/Q frames at 1 kHz go straight to the phase</a:t>
             </a:r>
           </a:p>
         </p:txBody>
@@ -18668,7 +19000,7 @@
                 </a:solidFill>
                 <a:latin typeface="Arial"/>
               </a:rPr>
-              <a:t> synthesizer 2 at 80 MHz + 5 kHz; the ×4 / 30 Hz trigger chain becomes the 5 kHz beat reference; the camera is the lock-in device; the processing is atan2(Q, I) per I/Q frame, decimated to the loop rate.  Fiber, LO and the hold loop are the same — and so are their requirements.</a:t>
+              <a:t> synthesizer 2 at 80 MHz + 5 kHz; the ×4 / 30 Hz trigger chain becomes the 5 kHz reference; the camera is the lock-in device; the processing is atan2(Q, I) per frame, decimated to the loop rate.  Fiber, LO and hold loop are unchanged.</a:t>
             </a:r>
           </a:p>
         </p:txBody>
@@ -18819,7 +19151,7 @@
                 </a:solidFill>
                 <a:latin typeface="Arial"/>
               </a:rPr>
-              <a:t>What the camera records, how the phase and the surface come out of it, and what the gate measured: the quarter-cycle integration costs 10 % of contrast, a step error is not cured by more frames, and the photon law carries read noise</a:t>
+              <a:t>What the camera records, how the phase and the surface come out, and what the gate measured: the quarter-cycle integration costs 10 % of contrast, a step error is not cured by more frames, read noise is in the photon law</a:t>
             </a:r>
           </a:p>
         </p:txBody>
@@ -18935,7 +19267,7 @@
                 </a:solidFill>
                 <a:latin typeface="Arial"/>
               </a:rPr>
-              <a:t>"Integrating bucket" (1)–(2):</a:t>
+              <a:t>Integrating bucket (1)–(2):</a:t>
             </a:r>
             <a:r>
               <a:rPr sz="1200" b="0">
@@ -18944,25 +19276,41 @@
                 </a:solidFill>
                 <a:latin typeface="Arial"/>
               </a:rPr>
-              <a:t> a frame cannot sample the beat at an instant; it integrates while the LO phase advances through a quarter of the cycle.  Averaging a cosine over a window D = 2π/N keeps its phase (referred to the window's center ᾱ_k) and shrinks its amplitude by sinc(D/2): </a:t>
-            </a:r>
-            <a:r>
-              <a:rPr sz="1200" b="1">
-                <a:solidFill>
-                  <a:srgbClr val="282828"/>
-                </a:solidFill>
-                <a:latin typeface="Arial"/>
-              </a:rPr>
-              <a:t>0.900 for four frames per beat</a:t>
-            </a:r>
-            <a:r>
-              <a:rPr sz="1200" b="0">
-                <a:solidFill>
-                  <a:srgbClr val="282828"/>
-                </a:solidFill>
-                <a:latin typeface="Arial"/>
-              </a:rPr>
-              <a:t> — nothing else changes.</a:t>
+              <a:t> a frame cannot sample the beat at an instant; it integrates while the LO phase advances a quarter cycle.</a:t>
+            </a:r>
+          </a:p>
+          <a:p>
+            <a:pPr marL="594360" indent="-137160">
+              <a:spcAft>
+                <a:spcPts val="500"/>
+              </a:spcAft>
+            </a:pPr>
+            <a:r>
+              <a:rPr sz="1050" b="0">
+                <a:solidFill>
+                  <a:srgbClr val="6E6E6E"/>
+                </a:solidFill>
+                <a:latin typeface="Arial"/>
+              </a:rPr>
+              <a:t>–  the phase is kept (referred to the bucket center ᾱ_k); the amplitude shrinks by sinc(π/4) = </a:t>
+            </a:r>
+            <a:r>
+              <a:rPr sz="1050" b="1">
+                <a:solidFill>
+                  <a:srgbClr val="6E6E6E"/>
+                </a:solidFill>
+                <a:latin typeface="Arial"/>
+              </a:rPr>
+              <a:t>0.900</a:t>
+            </a:r>
+            <a:r>
+              <a:rPr sz="1050" b="0">
+                <a:solidFill>
+                  <a:srgbClr val="6E6E6E"/>
+                </a:solidFill>
+                <a:latin typeface="Arial"/>
+              </a:rPr>
+              <a:t>; nothing else changes</a:t>
             </a:r>
           </a:p>
           <a:p>
@@ -18987,7 +19335,7 @@
                 </a:solidFill>
                 <a:latin typeface="Arial"/>
               </a:rPr>
-              <a:t>The phase (3)</a:t>
+              <a:t>Phase (3):</a:t>
             </a:r>
             <a:r>
               <a:rPr sz="1200" b="0">
@@ -18996,7 +19344,23 @@
                 </a:solidFill>
                 <a:latin typeface="Arial"/>
               </a:rPr>
-              <a:t> is a least-squares fit of the N frames to a + b cos ᾱ_k + c sin ᾱ_k; for N = 4 it reduces exactly to the four-step atan2, the same algorithm as Feng's (his sign is for cos(φ + 2πft)).</a:t>
+              <a:t> a least-squares fit of the N frames to a + b cos ᾱ_k + c sin ᾱ_k.</a:t>
+            </a:r>
+          </a:p>
+          <a:p>
+            <a:pPr marL="594360" indent="-137160">
+              <a:spcAft>
+                <a:spcPts val="500"/>
+              </a:spcAft>
+            </a:pPr>
+            <a:r>
+              <a:rPr sz="1050" b="0">
+                <a:solidFill>
+                  <a:srgbClr val="6E6E6E"/>
+                </a:solidFill>
+                <a:latin typeface="Arial"/>
+              </a:rPr>
+              <a:t>–  for N = 4 it is Feng's atan2 exactly (his sign is for cos(φ + 2πft))</a:t>
             </a:r>
           </a:p>
         </p:txBody>
@@ -19044,7 +19408,7 @@
                 </a:solidFill>
                 <a:latin typeface="Arial"/>
               </a:rPr>
-              <a:t>A step error (5):</a:t>
+              <a:t>Step error (5):</a:t>
             </a:r>
             <a:r>
               <a:rPr sz="1200" b="0">
@@ -19053,43 +19417,39 @@
                 </a:solidFill>
                 <a:latin typeface="Arial"/>
               </a:rPr>
-              <a:t> if every step is D(1 + ε) instead of D, the four-bucket phase comes out wrong by (ε/2) sin 2φ — the classical phase-shifting result (Schwider 1983, Creath 1988): an error that oscillates twice per fringe, so a flat surface reads as a ripple at twice the fringe frequency with amplitude ε/2.  </a:t>
-            </a:r>
-            <a:r>
-              <a:rPr sz="1200" b="1">
-                <a:solidFill>
-                  <a:srgbClr val="282828"/>
-                </a:solidFill>
-                <a:latin typeface="Arial"/>
-              </a:rPr>
-              <a:t>Measured: more buckets do not cure it</a:t>
-            </a:r>
-            <a:r>
-              <a:rPr sz="1200" b="0">
-                <a:solidFill>
-                  <a:srgbClr val="282828"/>
-                </a:solidFill>
-                <a:latin typeface="Arial"/>
-              </a:rPr>
-              <a:t> (the plain 8-bucket fit with the same per-step error is 1.43× worse; the ramp accumulates); </a:t>
-            </a:r>
-            <a:r>
-              <a:rPr sz="1200" b="1">
-                <a:solidFill>
-                  <a:srgbClr val="282828"/>
-                </a:solidFill>
-                <a:latin typeface="Arial"/>
-              </a:rPr>
-              <a:t>knowing the steps does</a:t>
-            </a:r>
-            <a:r>
-              <a:rPr sz="1200" b="0">
-                <a:solidFill>
-                  <a:srgbClr val="282828"/>
-                </a:solidFill>
-                <a:latin typeface="Arial"/>
-              </a:rPr>
-              <a:t> (the fit at the true ᾱ_k is exact) — a Rb-clocked scan knows them.</a:t>
+              <a:t> steps of D(1 + ε) instead of D give a phase error (ε/2) sin 2φ — a ripple at twice the fringe frequency (Schwider 1983, Creath 1988).</a:t>
+            </a:r>
+          </a:p>
+          <a:p>
+            <a:pPr marL="594360" indent="-137160">
+              <a:spcAft>
+                <a:spcPts val="500"/>
+              </a:spcAft>
+            </a:pPr>
+            <a:r>
+              <a:rPr sz="1050" b="0">
+                <a:solidFill>
+                  <a:srgbClr val="6E6E6E"/>
+                </a:solidFill>
+                <a:latin typeface="Arial"/>
+              </a:rPr>
+              <a:t>–  more buckets do not cure it: an 8-bucket fit with the same step error is 1.43× worse</a:t>
+            </a:r>
+          </a:p>
+          <a:p>
+            <a:pPr marL="594360" indent="-137160">
+              <a:spcAft>
+                <a:spcPts val="500"/>
+              </a:spcAft>
+            </a:pPr>
+            <a:r>
+              <a:rPr sz="1050" b="0">
+                <a:solidFill>
+                  <a:srgbClr val="6E6E6E"/>
+                </a:solidFill>
+                <a:latin typeface="Arial"/>
+              </a:rPr>
+              <a:t>–  knowing the steps does: the fit at the true ᾱ_k is exact, and a Rb-clocked scan knows them</a:t>
             </a:r>
           </a:p>
           <a:p>
@@ -19123,7 +19483,23 @@
                 </a:solidFill>
                 <a:latin typeface="Arial"/>
               </a:rPr>
-              <a:t> shot noise ∝ 1/√I₀ (slope −0.500 ± 0.02 over two decades), read noise in quadrature.  A fiber walk or trigger jitter within a scan is a fixed fraction of its size (0.13 w), no better with 8 buckets — no algorithmic cure.</a:t>
+              <a:t> shot noise ∝ 1/√I₀ (measured slope −0.500 ± 0.02 over two decades); read noise adds in quadrature.</a:t>
+            </a:r>
+          </a:p>
+          <a:p>
+            <a:pPr marL="594360" indent="-137160">
+              <a:spcAft>
+                <a:spcPts val="500"/>
+              </a:spcAft>
+            </a:pPr>
+            <a:r>
+              <a:rPr sz="1050" b="0">
+                <a:solidFill>
+                  <a:srgbClr val="6E6E6E"/>
+                </a:solidFill>
+                <a:latin typeface="Arial"/>
+              </a:rPr>
+              <a:t>–  a fiber walk or trigger jitter within a scan passes through at 0.13 of its size, with 4 or 8 buckets alike — no algorithmic cure</a:t>
             </a:r>
           </a:p>
         </p:txBody>
@@ -19136,7 +19512,7 @@
         </p:nvSpPr>
         <p:spPr>
           <a:xfrm>
-            <a:off x="6400800" y="7193280"/>
+            <a:off x="6400800" y="7229094"/>
             <a:ext cx="5394960" cy="274320"/>
           </a:xfrm>
           <a:prstGeom prst="rect">
@@ -19235,7 +19611,7 @@
                 </a:solidFill>
                 <a:latin typeface="Arial"/>
               </a:rPr>
-              <a:t>The LO is a fiber tip and collimator with its powered face at the reference flat's seat; it registers on both rigs to a pixel and the flat-DM null is sub-nanometer</a:t>
+              <a:t>A fiber tip and collimator, its powered face at the reference flat's seat; it registers on both rigs to a pixel and the flat-DM null is sub-nanometer</a:t>
             </a:r>
           </a:p>
         </p:txBody>
@@ -19300,8 +19676,8 @@
         </p:blipFill>
         <p:spPr>
           <a:xfrm>
-            <a:off x="1380587" y="1298448"/>
-            <a:ext cx="3868224" cy="2092451"/>
+            <a:off x="1114904" y="1298448"/>
+            <a:ext cx="4399591" cy="2092451"/>
           </a:xfrm>
           <a:prstGeom prst="rect">
             <a:avLst/>
@@ -19399,7 +19775,7 @@
                 </a:solidFill>
                 <a:latin typeface="Arial"/>
               </a:rPr>
-              <a:t> chief ray 0.000 px on both rigs; the LO covers the test pupil 1.000 and overfills it by 34 px (radius ratio 1.215), so an offset under that is a fill question, not a registration one.</a:t>
+              <a:t> chief ray 0.000 px on both rigs; the LO overfills the test pupil by 34 px (radius ratio 1.215).</a:t>
             </a:r>
           </a:p>
           <a:p>
@@ -19433,7 +19809,23 @@
                 </a:solidFill>
                 <a:latin typeface="Arial"/>
               </a:rPr>
-              <a:t> lens rig 0.000 nm; mirror rig 0.746 nm rms after piston, mostly tilt — the LO collimator's wavefront against the test arm, frozen into the null as the interferometer freezes its reference; its motion is the LO-drift row (slide 13).</a:t>
+              <a:t> lens rig 0.000 nm; mirror rig 0.746 nm rms, mostly tilt.</a:t>
+            </a:r>
+          </a:p>
+          <a:p>
+            <a:pPr marL="594360" indent="-137160">
+              <a:spcAft>
+                <a:spcPts val="500"/>
+              </a:spcAft>
+            </a:pPr>
+            <a:r>
+              <a:rPr sz="1050" b="0">
+                <a:solidFill>
+                  <a:srgbClr val="6E6E6E"/>
+                </a:solidFill>
+                <a:latin typeface="Arial"/>
+              </a:rPr>
+              <a:t>–  the LO collimator's own wavefront, frozen into the null as the IFO freezes its reference; its motion is the LO-drift row (slide 13)</a:t>
             </a:r>
           </a:p>
           <a:p>
@@ -19467,7 +19859,7 @@
                 </a:solidFill>
                 <a:latin typeface="Arial"/>
               </a:rPr>
-              <a:t> 0.982 at an LO/test power ratio of 1.47, as 2√r/(1 + r) says; the vector-mode field phase measures −kW on both decks (the known conjugate).</a:t>
+              <a:t> 0.982 at LO/test power 1.47, as 2√r/(1 + r) says.</a:t>
             </a:r>
           </a:p>
         </p:txBody>
@@ -19578,16 +19970,39 @@
                 </a:solidFill>
                 <a:latin typeface="Arial"/>
               </a:rPr>
-              <a:t>Two findings that matter for any traced LO:</a:t>
-            </a:r>
-            <a:r>
-              <a:rPr sz="1200" b="0">
-                <a:solidFill>
-                  <a:srgbClr val="282828"/>
-                </a:solidFill>
-                <a:latin typeface="Arial"/>
-              </a:rPr>
-              <a:t> the geometric tail places the detector field by ray index, not camera position — the LO's own collimator makes the per-index null 681 nm where the by-position null is 0.45 nm, so the LO is placed on the test pixels by position; and the plain mirror train had inherited a source trim solved with the polarizer plate — without it OAP1 was fed off focus (an 84 nm defocus null), now trimmed to zero.</a:t>
+              <a:t>Two findings for any traced LO:</a:t>
+            </a:r>
+          </a:p>
+          <a:p>
+            <a:pPr marL="594360" indent="-137160">
+              <a:spcAft>
+                <a:spcPts val="500"/>
+              </a:spcAft>
+            </a:pPr>
+            <a:r>
+              <a:rPr sz="1050" b="0">
+                <a:solidFill>
+                  <a:srgbClr val="6E6E6E"/>
+                </a:solidFill>
+                <a:latin typeface="Arial"/>
+              </a:rPr>
+              <a:t>–  the geometric tail places the detector field by ray index, not camera position: per-index null 681 nm, by position 0.45 nm — the LO is placed by position</a:t>
+            </a:r>
+          </a:p>
+          <a:p>
+            <a:pPr marL="594360" indent="-137160">
+              <a:spcAft>
+                <a:spcPts val="500"/>
+              </a:spcAft>
+            </a:pPr>
+            <a:r>
+              <a:rPr sz="1050" b="0">
+                <a:solidFill>
+                  <a:srgbClr val="6E6E6E"/>
+                </a:solidFill>
+                <a:latin typeface="Arial"/>
+              </a:rPr>
+              <a:t>–  the plain mirror train had kept a source trim solved with the polarizer plate; without it OAP1 was fed off focus (84 nm of defocus) — now trimmed to zero</a:t>
             </a:r>
           </a:p>
           <a:p>
@@ -19621,7 +20036,7 @@
                 </a:solidFill>
                 <a:latin typeface="Arial"/>
               </a:rPr>
-              <a:t> the record's polarizing train (input polarizer, analyzer) and Feng's plain splitter.  Picometers identical — the camera is well-bound; the record's train costs light only (test throughput 0.271 vs 0.408, ×1.5 laser).  The plain splitter is the layout scored.</a:t>
+              <a:t> the record's polarizing train and Feng's plain splitter read the same picometers (the camera is well-bound); the polarizing train costs light only (throughput 0.271 vs 0.408, ×1.5 laser).  The plain splitter is the layout scored.</a:t>
             </a:r>
           </a:p>
         </p:txBody>
@@ -19634,7 +20049,7 @@
         </p:nvSpPr>
         <p:spPr>
           <a:xfrm>
-            <a:off x="6400800" y="6501384"/>
+            <a:off x="6400800" y="6607810"/>
             <a:ext cx="5394960" cy="274320"/>
           </a:xfrm>
           <a:prstGeom prst="rect">
@@ -19888,7 +20303,7 @@
                 </a:solidFill>
                 <a:latin typeface="Arial"/>
               </a:rPr>
-              <a:t>Resolution of what is shown:</a:t>
+              <a:t>Resolution shown:</a:t>
             </a:r>
             <a:r>
               <a:rPr sz="1500" b="0">
@@ -19897,7 +20312,7 @@
                 </a:solidFill>
                 <a:latin typeface="Arial"/>
               </a:rPr>
-              <a:t> the model's camera grid is 1024 × 1024 with the pupil 315 px across (radius 157.45 px) — </a:t>
+              <a:t> camera grid 1024 × 1024, pupil 315 px across — </a:t>
             </a:r>
             <a:r>
               <a:rPr sz="1500" b="1">
@@ -19906,7 +20321,7 @@
                 </a:solidFill>
                 <a:latin typeface="Arial"/>
               </a:rPr>
-              <a:t>3.3 pixels per actuator across, ~11 pixels per actuator in area</a:t>
+              <a:t>3.3 pixels per actuator across, ~11 per actuator in area</a:t>
             </a:r>
             <a:r>
               <a:rPr sz="1500" b="0">
@@ -19915,7 +20330,23 @@
                 </a:solidFill>
                 <a:latin typeface="Arial"/>
               </a:rPr>
-              <a:t> (6948 lit actuators on ~77,900 pupil pixels); every real camera on the table samples finer (5–21 px per actuator, slide 10).  What resolution buys, and what it costs each gauge, is slide 17.</a:t>
+              <a:t> (6948 lit actuators on ~77,900 pupil pixels).</a:t>
+            </a:r>
+          </a:p>
+          <a:p>
+            <a:pPr marL="594360" indent="-137160">
+              <a:spcAft>
+                <a:spcPts val="500"/>
+              </a:spcAft>
+            </a:pPr>
+            <a:r>
+              <a:rPr sz="1300" b="0">
+                <a:solidFill>
+                  <a:srgbClr val="6E6E6E"/>
+                </a:solidFill>
+                <a:latin typeface="Arial"/>
+              </a:rPr>
+              <a:t>–  every real camera on the table samples finer (5–21 px per actuator, slide 10); what resolution buys and costs is slide 17</a:t>
             </a:r>
           </a:p>
         </p:txBody>
@@ -19928,7 +20359,7 @@
         </p:nvSpPr>
         <p:spPr>
           <a:xfrm>
-            <a:off x="411480" y="5812535"/>
+            <a:off x="411480" y="5659373"/>
             <a:ext cx="11368735" cy="274320"/>
           </a:xfrm>
           <a:prstGeom prst="rect">

--- a/demo_session/deck_cophi_baseline.pptx
+++ b/demo_session/deck_cophi_baseline.pptx
@@ -29,6 +29,7 @@
     <p:sldId id="277" r:id="rId28"/>
     <p:sldId id="278" r:id="rId29"/>
     <p:sldId id="279" r:id="rId30"/>
+    <p:sldId id="280" r:id="rId31"/>
   </p:sldIdLst>
   <p:sldSz cx="12191695" cy="6858000" type="screen4x3"/>
   <p:notesSz cx="6858000" cy="9144000"/>
@@ -4383,7 +4384,7 @@
             </a:r>
           </a:p>
           <a:p>
-            <a:pPr>
+            <a:pPr marL="0" indent="0">
               <a:spcAft>
                 <a:spcPts val="600"/>
               </a:spcAft>
@@ -6728,7 +6729,7 @@
             </a:r>
           </a:p>
           <a:p>
-            <a:pPr>
+            <a:pPr marL="0" indent="0">
               <a:spcAft>
                 <a:spcPts val="600"/>
               </a:spcAft>
@@ -6778,7 +6779,7 @@
             </a:r>
           </a:p>
           <a:p>
-            <a:pPr>
+            <a:pPr marL="0" indent="0">
               <a:spcAft>
                 <a:spcPts val="600"/>
               </a:spcAft>
@@ -7566,7 +7567,7 @@
                 </a:solidFill>
                 <a:latin typeface="Arial"/>
               </a:rPr>
-              <a:t>The LO is read as the DM:</a:t>
+              <a:t>LO drift is not separable from DM drift:</a:t>
             </a:r>
             <a:r>
               <a:rPr sz="1200" b="0">
@@ -7613,7 +7614,7 @@
             </a:r>
           </a:p>
           <a:p>
-            <a:pPr>
+            <a:pPr marL="0" indent="0">
               <a:spcAft>
                 <a:spcPts val="600"/>
               </a:spcAft>
@@ -7634,7 +7635,7 @@
                 </a:solidFill>
                 <a:latin typeface="Arial"/>
               </a:rPr>
-              <a:t>The fiber is the term:</a:t>
+              <a:t>Fiber phase errors are not observable:</a:t>
             </a:r>
             <a:r>
               <a:rPr sz="1200" b="0">
@@ -7697,7 +7698,7 @@
             </a:r>
           </a:p>
           <a:p>
-            <a:pPr>
+            <a:pPr marL="0" indent="0">
               <a:spcAft>
                 <a:spcPts val="600"/>
               </a:spcAft>
@@ -7754,7 +7755,7 @@
             </a:r>
           </a:p>
           <a:p>
-            <a:pPr>
+            <a:pPr marL="0" indent="0">
               <a:spcAft>
                 <a:spcPts val="600"/>
               </a:spcAft>
@@ -7837,6 +7838,339 @@
 </file>
 
 <file path=ppt/slides/slide14.xml><?xml version="1.0" encoding="utf-8"?>
+<p:sld xmlns:a="http://schemas.openxmlformats.org/drawingml/2006/main" xmlns:p="http://schemas.openxmlformats.org/presentationml/2006/main" xmlns:r="http://schemas.openxmlformats.org/officeDocument/2006/relationships">
+  <p:cSld>
+    <p:spTree>
+      <p:nvGrpSpPr>
+        <p:cNvPr id="1" name=""/>
+        <p:cNvGrpSpPr/>
+        <p:nvPr/>
+      </p:nvGrpSpPr>
+      <p:grpSpPr/>
+      <p:sp>
+        <p:nvSpPr>
+          <p:cNvPr id="2" name="TextBox 1"/>
+          <p:cNvSpPr txBox="1"/>
+          <p:nvPr/>
+        </p:nvSpPr>
+        <p:spPr>
+          <a:xfrm>
+            <a:off x="411480" y="201168"/>
+            <a:ext cx="11368735" cy="914400"/>
+          </a:xfrm>
+          <a:prstGeom prst="rect">
+            <a:avLst/>
+          </a:prstGeom>
+          <a:noFill/>
+        </p:spPr>
+        <p:txBody>
+          <a:bodyPr wrap="square">
+            <a:spAutoFit/>
+          </a:bodyPr>
+          <a:lstStyle/>
+          <a:p>
+            <a:pPr>
+              <a:spcAft>
+                <a:spcPts val="400"/>
+              </a:spcAft>
+            </a:pPr>
+            <a:r>
+              <a:rPr sz="2400" b="1">
+                <a:solidFill>
+                  <a:srgbClr val="1F4E79"/>
+                </a:solidFill>
+                <a:latin typeface="Arial"/>
+              </a:rPr>
+              <a:t>Hold vs cycle time: what the fast cycle buys</a:t>
+            </a:r>
+          </a:p>
+          <a:p>
+            <a:pPr>
+              <a:spcAft>
+                <a:spcPts val="0"/>
+              </a:spcAft>
+            </a:pPr>
+            <a:r>
+              <a:rPr sz="1250" b="0">
+                <a:solidFill>
+                  <a:srgbClr val="6E6E6E"/>
+                </a:solidFill>
+                <a:latin typeface="Arial"/>
+              </a:rPr>
+              <a:t>At a fixed cycle time a sensor averages (cycle time ÷ seconds per pm) readings, so the hold floor is √(s_pm / T) × 0.577: the lock-in's 3.4 s per pm is 115× fewer than Feng's camera — 10.7× less noise at any cycle time; the loop records sit on the budget curves</a:t>
+            </a:r>
+          </a:p>
+        </p:txBody>
+      </p:sp>
+      <p:sp>
+        <p:nvSpPr>
+          <p:cNvPr id="3" name="Rectangle 2"/>
+          <p:cNvSpPr/>
+          <p:nvPr/>
+        </p:nvSpPr>
+        <p:spPr>
+          <a:xfrm>
+            <a:off x="411480" y="1133856"/>
+            <a:ext cx="11368735" cy="20320"/>
+          </a:xfrm>
+          <a:prstGeom prst="rect">
+            <a:avLst/>
+          </a:prstGeom>
+          <a:solidFill>
+            <a:srgbClr val="B8C6D4"/>
+          </a:solidFill>
+          <a:ln>
+            <a:noFill/>
+          </a:ln>
+          <a:effectLst/>
+        </p:spPr>
+        <p:style>
+          <a:lnRef idx="1">
+            <a:schemeClr val="accent1"/>
+          </a:lnRef>
+          <a:fillRef idx="3">
+            <a:schemeClr val="accent1"/>
+          </a:fillRef>
+          <a:effectRef idx="2">
+            <a:schemeClr val="accent1"/>
+          </a:effectRef>
+          <a:fontRef idx="minor">
+            <a:schemeClr val="lt1"/>
+          </a:fontRef>
+        </p:style>
+        <p:txBody>
+          <a:bodyPr rtlCol="0" anchor="ctr"/>
+          <a:lstStyle/>
+          <a:p>
+            <a:pPr algn="ctr"/>
+          </a:p>
+        </p:txBody>
+      </p:sp>
+      <p:pic>
+        <p:nvPicPr>
+          <p:cNvPr id="4" name="Picture 3" descr="cophi_hold_vs_cycle.png"/>
+          <p:cNvPicPr>
+            <a:picLocks noChangeAspect="1"/>
+          </p:cNvPicPr>
+          <p:nvPr/>
+        </p:nvPicPr>
+        <p:blipFill>
+          <a:blip r:embed="rId2"/>
+          <a:stretch>
+            <a:fillRect/>
+          </a:stretch>
+        </p:blipFill>
+        <p:spPr>
+          <a:xfrm>
+            <a:off x="1817005" y="1298448"/>
+            <a:ext cx="8557685" cy="3537712"/>
+          </a:xfrm>
+          <a:prstGeom prst="rect">
+            <a:avLst/>
+          </a:prstGeom>
+        </p:spPr>
+      </p:pic>
+      <p:sp>
+        <p:nvSpPr>
+          <p:cNvPr id="5" name="TextBox 4"/>
+          <p:cNvSpPr txBox="1"/>
+          <p:nvPr/>
+        </p:nvSpPr>
+        <p:spPr>
+          <a:xfrm>
+            <a:off x="411480" y="4854447"/>
+            <a:ext cx="11368735" cy="394208"/>
+          </a:xfrm>
+          <a:prstGeom prst="rect">
+            <a:avLst/>
+          </a:prstGeom>
+          <a:noFill/>
+        </p:spPr>
+        <p:txBody>
+          <a:bodyPr wrap="square">
+            <a:spAutoFit/>
+          </a:bodyPr>
+          <a:lstStyle/>
+          <a:p>
+            <a:pPr algn="ctr">
+              <a:spcAft>
+                <a:spcPts val="0"/>
+              </a:spcAft>
+            </a:pPr>
+            <a:r>
+              <a:rPr sz="1000" b="0">
+                <a:solidFill>
+                  <a:srgbClr val="6E6E6E"/>
+                </a:solidFill>
+                <a:latin typeface="Arial"/>
+              </a:rPr>
+              <a:t>Left: noise-only hold vs loop cycle time, every sensor on the table (budget lines; circles = the mirror-rig loop records).  Right: with the record's thermal ramp (0.31 pm/s), whose lag grows with the cycle — each sensor has an optimum cycle time.</a:t>
+            </a:r>
+          </a:p>
+        </p:txBody>
+      </p:sp>
+      <p:sp>
+        <p:nvSpPr>
+          <p:cNvPr id="6" name="TextBox 5"/>
+          <p:cNvSpPr txBox="1"/>
+          <p:nvPr/>
+        </p:nvSpPr>
+        <p:spPr>
+          <a:xfrm>
+            <a:off x="411480" y="5285231"/>
+            <a:ext cx="5806440" cy="274320"/>
+          </a:xfrm>
+          <a:prstGeom prst="rect">
+            <a:avLst/>
+          </a:prstGeom>
+          <a:noFill/>
+        </p:spPr>
+        <p:txBody>
+          <a:bodyPr wrap="square">
+            <a:spAutoFit/>
+          </a:bodyPr>
+          <a:lstStyle/>
+          <a:p>
+            <a:pPr>
+              <a:spcAft>
+                <a:spcPts val="600"/>
+              </a:spcAft>
+            </a:pPr>
+            <a:r>
+              <a:rPr sz="1200" b="0">
+                <a:solidFill>
+                  <a:srgbClr val="282828"/>
+                </a:solidFill>
+                <a:latin typeface="Arial"/>
+              </a:rPr>
+              <a:t>•  </a:t>
+            </a:r>
+            <a:r>
+              <a:rPr sz="1200" b="1">
+                <a:solidFill>
+                  <a:srgbClr val="282828"/>
+                </a:solidFill>
+                <a:latin typeface="Arial"/>
+              </a:rPr>
+              <a:t>At 1.6 s cycles:</a:t>
+            </a:r>
+            <a:r>
+              <a:rPr sz="1200" b="0">
+                <a:solidFill>
+                  <a:srgbClr val="282828"/>
+                </a:solidFill>
+                <a:latin typeface="Arial"/>
+              </a:rPr>
+              <a:t> Feng's camera 9.0 pm, Photonfocus 2.7, lock-in 0.84 (well-free 0.27); IFO 5.8, vector ZWFS 10.4 (on their polarization cameras).  Records match the law to 8 %.</a:t>
+            </a:r>
+          </a:p>
+        </p:txBody>
+      </p:sp>
+      <p:sp>
+        <p:nvSpPr>
+          <p:cNvPr id="7" name="TextBox 6"/>
+          <p:cNvSpPr txBox="1"/>
+          <p:nvPr/>
+        </p:nvSpPr>
+        <p:spPr>
+          <a:xfrm>
+            <a:off x="6400800" y="5285231"/>
+            <a:ext cx="5394960" cy="274320"/>
+          </a:xfrm>
+          <a:prstGeom prst="rect">
+            <a:avLst/>
+          </a:prstGeom>
+          <a:noFill/>
+        </p:spPr>
+        <p:txBody>
+          <a:bodyPr wrap="square">
+            <a:spAutoFit/>
+          </a:bodyPr>
+          <a:lstStyle/>
+          <a:p>
+            <a:pPr>
+              <a:spcAft>
+                <a:spcPts val="600"/>
+              </a:spcAft>
+            </a:pPr>
+            <a:r>
+              <a:rPr sz="1200" b="0">
+                <a:solidFill>
+                  <a:srgbClr val="282828"/>
+                </a:solidFill>
+                <a:latin typeface="Arial"/>
+              </a:rPr>
+              <a:t>•  </a:t>
+            </a:r>
+            <a:r>
+              <a:rPr sz="1200" b="1">
+                <a:solidFill>
+                  <a:srgbClr val="282828"/>
+                </a:solidFill>
+                <a:latin typeface="Arial"/>
+              </a:rPr>
+              <a:t>Against a drift rate the cycle has an optimum</a:t>
+            </a:r>
+            <a:r>
+              <a:rPr sz="1200" b="0">
+                <a:solidFill>
+                  <a:srgbClr val="282828"/>
+                </a:solidFill>
+                <a:latin typeface="Arial"/>
+              </a:rPr>
+              <a:t> (right): Feng's camera 6.0 pm at 5.5 s, Photonfocus 2.7 at 2.5 s, lock-in 1.2 at 1.1 s, well-free 0.57 at 0.5 s — the fast reading holds a drift at the picometer where the slow cameras cannot.</a:t>
+            </a:r>
+          </a:p>
+        </p:txBody>
+      </p:sp>
+      <p:sp>
+        <p:nvSpPr>
+          <p:cNvPr id="8" name="TextBox 7"/>
+          <p:cNvSpPr txBox="1"/>
+          <p:nvPr/>
+        </p:nvSpPr>
+        <p:spPr>
+          <a:xfrm>
+            <a:off x="6400800" y="6254495"/>
+            <a:ext cx="5394960" cy="274320"/>
+          </a:xfrm>
+          <a:prstGeom prst="rect">
+            <a:avLst/>
+          </a:prstGeom>
+          <a:noFill/>
+        </p:spPr>
+        <p:txBody>
+          <a:bodyPr wrap="square">
+            <a:spAutoFit/>
+          </a:bodyPr>
+          <a:lstStyle/>
+          <a:p>
+            <a:pPr>
+              <a:spcAft>
+                <a:spcPts val="600"/>
+              </a:spcAft>
+            </a:pPr>
+            <a:r>
+              <a:rPr sz="1050" b="0">
+                <a:solidFill>
+                  <a:srgbClr val="6E6E6E"/>
+                </a:solidFill>
+                <a:latin typeface="Arial"/>
+              </a:rPr>
+              <a:t>cophi_hold_vs_cycle (runs/figs_hold_vs_cycle/); seconds per pm from the records (stages noise / format / lockin; camI_oap, camS_oap); the lag from stage loop's thermal row.  A budget, no new runs.</a:t>
+            </a:r>
+          </a:p>
+        </p:txBody>
+      </p:sp>
+    </p:spTree>
+  </p:cSld>
+  <p:clrMapOvr>
+    <a:masterClrMapping/>
+  </p:clrMapOvr>
+</p:sld>
+</file>
+
+<file path=ppt/slides/slide15.xml><?xml version="1.0" encoding="utf-8"?>
 <p:sld xmlns:a="http://schemas.openxmlformats.org/drawingml/2006/main" xmlns:p="http://schemas.openxmlformats.org/presentationml/2006/main" xmlns:r="http://schemas.openxmlformats.org/officeDocument/2006/relationships">
   <p:cSld>
     <p:spTree>
@@ -8113,7 +8447,7 @@
 </p:sld>
 </file>
 
-<file path=ppt/slides/slide15.xml><?xml version="1.0" encoding="utf-8"?>
+<file path=ppt/slides/slide16.xml><?xml version="1.0" encoding="utf-8"?>
 <p:sld xmlns:a="http://schemas.openxmlformats.org/drawingml/2006/main" xmlns:p="http://schemas.openxmlformats.org/presentationml/2006/main" xmlns:r="http://schemas.openxmlformats.org/officeDocument/2006/relationships">
   <p:cSld>
     <p:spTree>
@@ -8353,7 +8687,7 @@
             </a:r>
           </a:p>
           <a:p>
-            <a:pPr>
+            <a:pPr marL="0" indent="0">
               <a:spcAft>
                 <a:spcPts val="600"/>
               </a:spcAft>
@@ -8962,7 +9296,7 @@
 </p:sld>
 </file>
 
-<file path=ppt/slides/slide16.xml><?xml version="1.0" encoding="utf-8"?>
+<file path=ppt/slides/slide17.xml><?xml version="1.0" encoding="utf-8"?>
 <p:sld xmlns:a="http://schemas.openxmlformats.org/drawingml/2006/main" xmlns:p="http://schemas.openxmlformats.org/presentationml/2006/main" xmlns:r="http://schemas.openxmlformats.org/officeDocument/2006/relationships">
   <p:cSld>
     <p:spTree>
@@ -10306,7 +10640,7 @@
         <p:spPr>
           <a:xfrm>
             <a:off x="457200" y="6446520"/>
-            <a:ext cx="11368735" cy="274320"/>
+            <a:ext cx="11365992" cy="274320"/>
           </a:xfrm>
           <a:prstGeom prst="rect">
             <a:avLst/>
@@ -10331,7 +10665,7 @@
                 </a:solidFill>
                 <a:latin typeface="Arial"/>
               </a:rPr>
-              <a:t>Camera timings: TO's records on an IMX250MZR-class polarization camera (2448 × 2048, 75 fps; well ~10 ke⁻, read 2.4 e⁻, unconfirmed).  The sensors run 10–40× slower than photons ÷ sensor rate would say: the ZWFS core sets the exposure, the frame mean sits at half well, two orientations go unused.  Parts counts and TRL to follow (campaign brief sec. 9.1).</a:t>
+              <a:t>Camera timings on an IMX250MZR-class polarization camera (2448 × 2048, 75 fps; well ~10 ke⁻, read 2.4 e⁻, unconfirmed).  The sensors run 10–40× slower than photons ÷ sensor rate would say: the ZWFS core sets the exposure, the frame mean sits at half well, two orientations go unused.  Parts counts and TRL to follow (campaign brief sec. 9.1).</a:t>
             </a:r>
           </a:p>
         </p:txBody>
@@ -10344,7 +10678,7 @@
 </p:sld>
 </file>
 
-<file path=ppt/slides/slide17.xml><?xml version="1.0" encoding="utf-8"?>
+<file path=ppt/slides/slide18.xml><?xml version="1.0" encoding="utf-8"?>
 <p:sld xmlns:a="http://schemas.openxmlformats.org/drawingml/2006/main" xmlns:p="http://schemas.openxmlformats.org/presentationml/2006/main" xmlns:r="http://schemas.openxmlformats.org/officeDocument/2006/relationships">
   <p:cSld>
     <p:spTree>
@@ -10388,7 +10722,7 @@
                 </a:solidFill>
                 <a:latin typeface="Arial"/>
               </a:rPr>
-              <a:t>Pricing resolution: IFO, vector ZWFS, HET</a:t>
+              <a:t>How much resolution? IFO, vector ZWFS, HET</a:t>
             </a:r>
           </a:p>
           <a:p>
@@ -11634,7 +11968,7 @@
             </a:r>
           </a:p>
           <a:p>
-            <a:pPr>
+            <a:pPr marL="0" indent="0">
               <a:spcAft>
                 <a:spcPts val="600"/>
               </a:spcAft>
@@ -11716,7 +12050,7 @@
 </p:sld>
 </file>
 
-<file path=ppt/slides/slide18.xml><?xml version="1.0" encoding="utf-8"?>
+<file path=ppt/slides/slide19.xml><?xml version="1.0" encoding="utf-8"?>
 <p:sld xmlns:a="http://schemas.openxmlformats.org/drawingml/2006/main" xmlns:p="http://schemas.openxmlformats.org/presentationml/2006/main" xmlns:r="http://schemas.openxmlformats.org/officeDocument/2006/relationships">
   <p:cSld>
     <p:spTree>
@@ -12836,7 +13170,7 @@
 </p:sld>
 </file>
 
-<file path=ppt/slides/slide19.xml><?xml version="1.0" encoding="utf-8"?>
+<file path=ppt/slides/slide2.xml><?xml version="1.0" encoding="utf-8"?>
 <p:sld xmlns:a="http://schemas.openxmlformats.org/drawingml/2006/main" xmlns:p="http://schemas.openxmlformats.org/presentationml/2006/main" xmlns:r="http://schemas.openxmlformats.org/officeDocument/2006/relationships">
   <p:cSld>
     <p:spTree>
@@ -12880,7 +13214,7 @@
                 </a:solidFill>
                 <a:latin typeface="Arial"/>
               </a:rPr>
-              <a:t>Recommendations</a:t>
+              <a:t>Feng's proposal, in one slide</a:t>
             </a:r>
           </a:p>
           <a:p>
@@ -12896,7 +13230,7 @@
                 </a:solidFill>
                 <a:latin typeface="Arial"/>
               </a:rPr>
-              <a:t>COPHI is a credible fifth gauge: it matches the IFO's floor, reads exactly, and captures from cold in one reading; its cost is the fiber and the LO, its speed is the camera's</a:t>
+              <a:t>A heterodyne interferometer whose phase steps are set by frequency, not by a piezo, with a fiber-fed local oscillator at the camera, and an array detector providing many parallel channels to resolve 96 × 96 actuators</a:t>
             </a:r>
           </a:p>
         </p:txBody>
@@ -12988,7 +13322,7 @@
                 </a:solidFill>
                 <a:latin typeface="Arial"/>
               </a:rPr>
-              <a:t>Score it in the composite deck</a:t>
+              <a:t>Layout:</a:t>
             </a:r>
             <a:r>
               <a:rPr sz="1200" b="0">
@@ -12997,7 +13331,7 @@
                 </a:solidFill>
                 <a:latin typeface="Arial"/>
               </a:rPr>
-              <a:t> as the fifth column, with the converged estimator and the piston-free photon metric for every gauge (both found here, both apply to the record).</a:t>
+              <a:t> laser → 1×2 coupler → AOM-1 (80 MHz) and AOM-2 (80 MHz + 7.5 Hz), both synthesizers on a 10 MHz Rb standard; the measurement beam to the DM, the LO fiber to a splitter before the camera; the ×4 multipliers mixed to a 30 Hz camera trigger: four frames per 7.5 Hz fringe cycle – see next slide.</a:t>
             </a:r>
           </a:p>
           <a:p>
@@ -13022,7 +13356,7 @@
                 </a:solidFill>
                 <a:latin typeface="Arial"/>
               </a:rPr>
-              <a:t>Price the plain splitter</a:t>
+              <a:t>Algorithm:</a:t>
             </a:r>
             <a:r>
               <a:rPr sz="1200" b="0">
@@ -13031,7 +13365,7 @@
                 </a:solidFill>
                 <a:latin typeface="Arial"/>
               </a:rPr>
-              <a:t> (Feng's layout); the record's polarizing train costs ×1.5 of laser and nothing else.</a:t>
+              <a:t> I = I₀ (1 + γ cos(φ + 2π f t)); frames at α = 0, π/2, π, 3π/2; φ = atan2(I₄ − I₂, I₁ − I₃); surface = ½ (φ/2π) λ (double pass).  Backup: the N-frame least-squares solution (Zygo's four-step is N = 4).</a:t>
             </a:r>
           </a:p>
           <a:p>
@@ -13056,7 +13390,7 @@
                 </a:solidFill>
                 <a:latin typeface="Arial"/>
               </a:rPr>
-              <a:t>Camera:</a:t>
+              <a:t>Main purpose: stabilize the DM!</a:t>
             </a:r>
             <a:r>
               <a:rPr sz="1200" b="0">
@@ -13065,91 +13399,7 @@
                 </a:solidFill>
                 <a:latin typeface="Arial"/>
               </a:rPr>
-              <a:t> the Photonfocus-class 1k global-shutter part (42 s per pm, 3 pm held in 1.6 s cycles) over Feng's baseline (7 min, 16 s).</a:t>
-            </a:r>
-          </a:p>
-          <a:p>
-            <a:pPr marL="594360" indent="-137160">
-              <a:spcAft>
-                <a:spcPts val="500"/>
-              </a:spcAft>
-            </a:pPr>
-            <a:r>
-              <a:rPr sz="1050" b="0">
-                <a:solidFill>
-                  <a:srgbClr val="6E6E6E"/>
-                </a:solidFill>
-                <a:latin typeface="Arial"/>
-              </a:rPr>
-              <a:t>–  verify the survey against the vendor sheets before a part is named</a:t>
-            </a:r>
-          </a:p>
-          <a:p>
-            <a:pPr marL="594360" indent="-137160">
-              <a:spcAft>
-                <a:spcPts val="500"/>
-              </a:spcAft>
-            </a:pPr>
-            <a:r>
-              <a:rPr sz="1050" b="0">
-                <a:solidFill>
-                  <a:srgbClr val="6E6E6E"/>
-                </a:solidFill>
-                <a:latin typeface="Arial"/>
-              </a:rPr>
-              <a:t>–  </a:t>
-            </a:r>
-            <a:r>
-              <a:rPr sz="1050" b="1">
-                <a:solidFill>
-                  <a:srgbClr val="6E6E6E"/>
-                </a:solidFill>
-                <a:latin typeface="Arial"/>
-              </a:rPr>
-              <a:t>the lock-in camera is the fast form</a:t>
-            </a:r>
-            <a:r>
-              <a:rPr sz="1050" b="0">
-                <a:solidFill>
-                  <a:srgbClr val="6E6E6E"/>
-                </a:solidFill>
-                <a:latin typeface="Arial"/>
-              </a:rPr>
-              <a:t> (3.4 s per pm as surveyed, 0.125 s cycles) — one vendor question from a number</a:t>
-            </a:r>
-          </a:p>
-          <a:p>
-            <a:pPr>
-              <a:spcAft>
-                <a:spcPts val="600"/>
-              </a:spcAft>
-            </a:pPr>
-            <a:r>
-              <a:rPr sz="1200" b="0">
-                <a:solidFill>
-                  <a:srgbClr val="282828"/>
-                </a:solidFill>
-                <a:latin typeface="Arial"/>
-              </a:rPr>
-              <a:t>•  </a:t>
-            </a:r>
-            <a:r>
-              <a:rPr sz="1200" b="1">
-                <a:solidFill>
-                  <a:srgbClr val="282828"/>
-                </a:solidFill>
-                <a:latin typeface="Arial"/>
-              </a:rPr>
-              <a:t>Two colors from the start:</a:t>
-            </a:r>
-            <a:r>
-              <a:rPr sz="1200" b="0">
-                <a:solidFill>
-                  <a:srgbClr val="282828"/>
-                </a:solidFill>
-                <a:latin typeface="Arial"/>
-              </a:rPr>
-              <a:t> capture from cold in one reading; at 1.3 µm, telecom tunables and twice the base range — the InGaAs stage.</a:t>
+              <a:t>  Run each DM in a local loop to hold it — our job 3.  For us to figure out: the camera, the photon budget, the error terms, estimated performance.</a:t>
             </a:r>
           </a:p>
         </p:txBody>
@@ -13197,7 +13447,7 @@
                 </a:solidFill>
                 <a:latin typeface="Arial"/>
               </a:rPr>
-              <a:t>Open in the record:</a:t>
+              <a:t>Built on our DM Gauge bench:</a:t>
             </a:r>
             <a:r>
               <a:rPr sz="1200" b="0">
@@ -13206,7 +13456,7 @@
                 </a:solidFill>
                 <a:latin typeface="Arial"/>
               </a:rPr>
-              <a:t> the lens rig's +0.1–0.2 % converged gain (a matrix-model term); the per-gauge resolution sweep (slide 17); the polarization-camera timings through the noise hook (slide 16).</a:t>
+              <a:t> the bench with mirror and lens layouts, the 96 × 96 DM, swappable sensors: the core Twyman-Green interferometer (IFO), scalar and vector Zernike wavefront sensors (ZWFS), point-diffraction interferometers.</a:t>
             </a:r>
           </a:p>
           <a:p>
@@ -13231,7 +13481,7 @@
                 </a:solidFill>
                 <a:latin typeface="Arial"/>
               </a:rPr>
-              <a:t>Model next:</a:t>
+              <a:t>The same scoring:</a:t>
             </a:r>
             <a:r>
               <a:rPr sz="1200" b="0">
@@ -13240,7 +13490,75 @@
                 </a:solidFill>
                 <a:latin typeface="Arial"/>
               </a:rPr>
-              <a:t> the tail's chromatic refocus at Δλ = 20 nm (dispersive glass in the model); the LO referenced against the test arm's own flat; parts counts and TRL for all five gauges; Kent's ZWFS reconstruction when it arrives.</a:t>
+              <a:t> on a 30 nm working surface, the response matrix measured through the reading, the hold loop, the capture ladder, the photon rows.</a:t>
+            </a:r>
+          </a:p>
+          <a:p>
+            <a:pPr>
+              <a:spcAft>
+                <a:spcPts val="600"/>
+              </a:spcAft>
+            </a:pPr>
+            <a:r>
+              <a:rPr sz="1200" b="0">
+                <a:solidFill>
+                  <a:srgbClr val="282828"/>
+                </a:solidFill>
+                <a:latin typeface="Arial"/>
+              </a:rPr>
+              <a:t>•  </a:t>
+            </a:r>
+            <a:r>
+              <a:rPr sz="1200" b="1">
+                <a:solidFill>
+                  <a:srgbClr val="282828"/>
+                </a:solidFill>
+                <a:latin typeface="Arial"/>
+              </a:rPr>
+              <a:t>What is new:</a:t>
+            </a:r>
+            <a:r>
+              <a:rPr sz="1200" b="0">
+                <a:solidFill>
+                  <a:srgbClr val="282828"/>
+                </a:solidFill>
+                <a:latin typeface="Arial"/>
+              </a:rPr>
+              <a:t> the Local Oscillator (LO) arm (a fiber tip and collimator where the reference flat sat); frequency-set steps; each frame integrating a quarter of the beat; the LO's wavefront drift; the differential fiber phase within a scan; trigger jitter; a camera chosen for the job.</a:t>
+            </a:r>
+          </a:p>
+          <a:p>
+            <a:pPr>
+              <a:spcAft>
+                <a:spcPts val="600"/>
+              </a:spcAft>
+            </a:pPr>
+            <a:r>
+              <a:rPr sz="1200" b="0">
+                <a:solidFill>
+                  <a:srgbClr val="282828"/>
+                </a:solidFill>
+                <a:latin typeface="Arial"/>
+              </a:rPr>
+              <a:t>•  </a:t>
+            </a:r>
+            <a:r>
+              <a:rPr sz="1200" b="1">
+                <a:solidFill>
+                  <a:srgbClr val="282828"/>
+                </a:solidFill>
+                <a:latin typeface="Arial"/>
+              </a:rPr>
+              <a:t>What is absent:</a:t>
+            </a:r>
+            <a:r>
+              <a:rPr sz="1200" b="0">
+                <a:solidFill>
+                  <a:srgbClr val="282828"/>
+                </a:solidFill>
+                <a:latin typeface="Arial"/>
+              </a:rPr>
+              <a:t> the polarizing train — no analyzer, no quarter-wave plates, the same polarization in both arms — so the polarization gain the IFO carries (0.983–1.004) does not exist here.</a:t>
             </a:r>
           </a:p>
         </p:txBody>
@@ -13253,7 +13571,7 @@
         </p:nvSpPr>
         <p:spPr>
           <a:xfrm>
-            <a:off x="6400800" y="3002280"/>
+            <a:off x="6400800" y="5074920"/>
             <a:ext cx="5394960" cy="274320"/>
           </a:xfrm>
           <a:prstGeom prst="rect">
@@ -13279,7 +13597,7 @@
                 </a:solidFill>
                 <a:latin typeface="Arial"/>
               </a:rPr>
-              <a:t>Everything reproduces from templates/40_benches/cophi_dm96/ (cophi_run, the stage tags in each footnote); gates tCophi, tCophiBench, tConvergedEst, tDmgLoop.</a:t>
+              <a:t>Feng's slide 8 is the implementation example this deck's block diagrams follow; TOM3 (SPIE 6268) is the photodiode heritage.</a:t>
             </a:r>
           </a:p>
         </p:txBody>
@@ -13292,7 +13610,7 @@
 </p:sld>
 </file>
 
-<file path=ppt/slides/slide2.xml><?xml version="1.0" encoding="utf-8"?>
+<file path=ppt/slides/slide20.xml><?xml version="1.0" encoding="utf-8"?>
 <p:sld xmlns:a="http://schemas.openxmlformats.org/drawingml/2006/main" xmlns:p="http://schemas.openxmlformats.org/presentationml/2006/main" xmlns:r="http://schemas.openxmlformats.org/officeDocument/2006/relationships">
   <p:cSld>
     <p:spTree>
@@ -13336,7 +13654,7 @@
                 </a:solidFill>
                 <a:latin typeface="Arial"/>
               </a:rPr>
-              <a:t>Feng's proposal, in one slide</a:t>
+              <a:t>Recommendations</a:t>
             </a:r>
           </a:p>
           <a:p>
@@ -13352,7 +13670,7 @@
                 </a:solidFill>
                 <a:latin typeface="Arial"/>
               </a:rPr>
-              <a:t>A heterodyne interferometer whose phase steps are set by frequency, not by a piezo, with a fiber-fed local oscillator at the camera, and an array detector providing many parallel channels to resolve 96 × 96 actuators</a:t>
+              <a:t>COPHI is a credible fifth gauge: it matches the IFO's floor, reads exactly, and captures from cold in one reading; its cost is the fiber and the LO, its speed is set by the camera's frame rate, with the lock-in detector the clear winner</a:t>
             </a:r>
           </a:p>
         </p:txBody>
@@ -13444,7 +13762,7 @@
                 </a:solidFill>
                 <a:latin typeface="Arial"/>
               </a:rPr>
-              <a:t>Layout:</a:t>
+              <a:t>Add COPHI to the DM Gauge plan</a:t>
             </a:r>
             <a:r>
               <a:rPr sz="1200" b="0">
@@ -13453,7 +13771,7 @@
                 </a:solidFill>
                 <a:latin typeface="Arial"/>
               </a:rPr>
-              <a:t> laser → 1×2 coupler → AOM-1 (80 MHz) and AOM-2 (80 MHz + 7.5 Hz), both synthesizers on a 10 MHz Rb standard; the measurement beam to the DM, the LO fiber to a splitter before the camera; the ×4 multipliers mixed to a 30 Hz camera trigger: four frames per 7.5 Hz fringe cycle – see next slide.</a:t>
+              <a:t> as the fifth column, with the converged estimator and the piston-free photon metric for every gauge (both found here, both apply to the record).</a:t>
             </a:r>
           </a:p>
           <a:p>
@@ -13478,7 +13796,7 @@
                 </a:solidFill>
                 <a:latin typeface="Arial"/>
               </a:rPr>
-              <a:t>Algorithm:</a:t>
+              <a:t>Consider a swappable splitter</a:t>
             </a:r>
             <a:r>
               <a:rPr sz="1200" b="0">
@@ -13487,7 +13805,7 @@
                 </a:solidFill>
                 <a:latin typeface="Arial"/>
               </a:rPr>
-              <a:t> I = I₀ (1 + γ cos(φ + 2π f t)); frames at α = 0, π/2, π, 3π/2; φ = atan2(I₄ − I₂, I₁ − I₃); surface = ½ (φ/2π) λ (double pass).  Backup: the N-frame least-squares solution (Zygo's four-step is N = 4).</a:t>
+              <a:t> (Feng's layout); the current polarizing train costs ×1.5 of laser and nothing else.</a:t>
             </a:r>
           </a:p>
           <a:p>
@@ -13512,7 +13830,7 @@
                 </a:solidFill>
                 <a:latin typeface="Arial"/>
               </a:rPr>
-              <a:t>Main purpose: stabilize the DM!</a:t>
+              <a:t>Camera:</a:t>
             </a:r>
             <a:r>
               <a:rPr sz="1200" b="0">
@@ -13521,7 +13839,91 @@
                 </a:solidFill>
                 <a:latin typeface="Arial"/>
               </a:rPr>
-              <a:t>  Run each DM in a local loop to hold it — our job 3.  For us to figure out: the camera, the photon budget, the error terms, estimated performance.</a:t>
+              <a:t> the Photonfocus-class 1k global-shutter part (42 s per pm, 3 pm held in 1.6 s cycles) over Feng's baseline (7 min, 16 s); the lock-in camera faster yet.</a:t>
+            </a:r>
+          </a:p>
+          <a:p>
+            <a:pPr marL="594360" indent="-137160">
+              <a:spcAft>
+                <a:spcPts val="500"/>
+              </a:spcAft>
+            </a:pPr>
+            <a:r>
+              <a:rPr sz="1050" b="0">
+                <a:solidFill>
+                  <a:srgbClr val="6E6E6E"/>
+                </a:solidFill>
+                <a:latin typeface="Arial"/>
+              </a:rPr>
+              <a:t>–  verify the survey against the vendor sheets before a part is named</a:t>
+            </a:r>
+          </a:p>
+          <a:p>
+            <a:pPr marL="594360" indent="-137160">
+              <a:spcAft>
+                <a:spcPts val="500"/>
+              </a:spcAft>
+            </a:pPr>
+            <a:r>
+              <a:rPr sz="1050" b="0">
+                <a:solidFill>
+                  <a:srgbClr val="6E6E6E"/>
+                </a:solidFill>
+                <a:latin typeface="Arial"/>
+              </a:rPr>
+              <a:t>–  </a:t>
+            </a:r>
+            <a:r>
+              <a:rPr sz="1050" b="1">
+                <a:solidFill>
+                  <a:srgbClr val="6E6E6E"/>
+                </a:solidFill>
+                <a:latin typeface="Arial"/>
+              </a:rPr>
+              <a:t>the lock-in camera is the fast form</a:t>
+            </a:r>
+            <a:r>
+              <a:rPr sz="1050" b="0">
+                <a:solidFill>
+                  <a:srgbClr val="6E6E6E"/>
+                </a:solidFill>
+                <a:latin typeface="Arial"/>
+              </a:rPr>
+              <a:t> (3.4 s per pm as surveyed, 0.125 s cycles) — one vendor question from a number</a:t>
+            </a:r>
+          </a:p>
+          <a:p>
+            <a:pPr marL="0" indent="0">
+              <a:spcAft>
+                <a:spcPts val="600"/>
+              </a:spcAft>
+            </a:pPr>
+            <a:r>
+              <a:rPr sz="1200" b="0">
+                <a:solidFill>
+                  <a:srgbClr val="282828"/>
+                </a:solidFill>
+                <a:latin typeface="Arial"/>
+              </a:rPr>
+              <a:t>•  </a:t>
+            </a:r>
+            <a:r>
+              <a:rPr sz="1200" b="1">
+                <a:solidFill>
+                  <a:srgbClr val="282828"/>
+                </a:solidFill>
+                <a:latin typeface="Arial"/>
+              </a:rPr>
+              <a:t>Implement two colors from the start:</a:t>
+            </a:r>
+            <a:r>
+              <a:rPr sz="1200" b="0">
+                <a:solidFill>
+                  <a:srgbClr val="282828"/>
+                </a:solidFill>
+                <a:latin typeface="Arial"/>
+              </a:rPr>
+              <a:t> capture from cold in one reading; at 1.3 µm, telecom tunables and twice the base range — the InGaAs stage.</a:t>
             </a:r>
           </a:p>
         </p:txBody>
@@ -13569,7 +13971,7 @@
                 </a:solidFill>
                 <a:latin typeface="Arial"/>
               </a:rPr>
-              <a:t>Built on our DM Gauge bench:</a:t>
+              <a:t>Open in the record:</a:t>
             </a:r>
             <a:r>
               <a:rPr sz="1200" b="0">
@@ -13578,7 +13980,7 @@
                 </a:solidFill>
                 <a:latin typeface="Arial"/>
               </a:rPr>
-              <a:t> the bench with mirror and lens layouts, the 96 × 96 DM, swappable sensors: the core Twyman-Green interferometer (IFO), scalar and vector Zernike wavefront sensors (ZWFS), point-diffraction interferometers.</a:t>
+              <a:t> the lens rig's +0.1–0.2 % converged gain (a matrix-model term); the per-gauge resolution sweep (slide 18); the polarization-camera timings through the noise hook (slide 17).</a:t>
             </a:r>
           </a:p>
           <a:p>
@@ -13603,7 +14005,7 @@
                 </a:solidFill>
                 <a:latin typeface="Arial"/>
               </a:rPr>
-              <a:t>The same scoring:</a:t>
+              <a:t>Model next:</a:t>
             </a:r>
             <a:r>
               <a:rPr sz="1200" b="0">
@@ -13612,75 +14014,7 @@
                 </a:solidFill>
                 <a:latin typeface="Arial"/>
               </a:rPr>
-              <a:t> on a 30 nm working surface, the response matrix measured through the reading, the hold loop, the capture ladder, the photon rows.</a:t>
-            </a:r>
-          </a:p>
-          <a:p>
-            <a:pPr>
-              <a:spcAft>
-                <a:spcPts val="600"/>
-              </a:spcAft>
-            </a:pPr>
-            <a:r>
-              <a:rPr sz="1200" b="0">
-                <a:solidFill>
-                  <a:srgbClr val="282828"/>
-                </a:solidFill>
-                <a:latin typeface="Arial"/>
-              </a:rPr>
-              <a:t>•  </a:t>
-            </a:r>
-            <a:r>
-              <a:rPr sz="1200" b="1">
-                <a:solidFill>
-                  <a:srgbClr val="282828"/>
-                </a:solidFill>
-                <a:latin typeface="Arial"/>
-              </a:rPr>
-              <a:t>What is new:</a:t>
-            </a:r>
-            <a:r>
-              <a:rPr sz="1200" b="0">
-                <a:solidFill>
-                  <a:srgbClr val="282828"/>
-                </a:solidFill>
-                <a:latin typeface="Arial"/>
-              </a:rPr>
-              <a:t> the Local Oscillator (LO) arm (a fiber tip and collimator where the reference flat sat); frequency-set steps; each frame integrating a quarter of the beat; the LO's wavefront drift; the differential fiber phase within a scan; trigger jitter; a camera chosen for the job.</a:t>
-            </a:r>
-          </a:p>
-          <a:p>
-            <a:pPr>
-              <a:spcAft>
-                <a:spcPts val="600"/>
-              </a:spcAft>
-            </a:pPr>
-            <a:r>
-              <a:rPr sz="1200" b="0">
-                <a:solidFill>
-                  <a:srgbClr val="282828"/>
-                </a:solidFill>
-                <a:latin typeface="Arial"/>
-              </a:rPr>
-              <a:t>•  </a:t>
-            </a:r>
-            <a:r>
-              <a:rPr sz="1200" b="1">
-                <a:solidFill>
-                  <a:srgbClr val="282828"/>
-                </a:solidFill>
-                <a:latin typeface="Arial"/>
-              </a:rPr>
-              <a:t>What is absent:</a:t>
-            </a:r>
-            <a:r>
-              <a:rPr sz="1200" b="0">
-                <a:solidFill>
-                  <a:srgbClr val="282828"/>
-                </a:solidFill>
-                <a:latin typeface="Arial"/>
-              </a:rPr>
-              <a:t> the polarizing train — no analyzer, no quarter-wave plates, the same polarization in both arms — so the polarization gain the IFO carries (0.983–1.004) does not exist here.</a:t>
+              <a:t> the tail's chromatic refocus at Δλ = 20 nm (dispersive glass in the model); the LO referenced against the test arm's own flat; parts counts and TRL for all five gauges; Kent's ZWFS reconstruction.</a:t>
             </a:r>
           </a:p>
         </p:txBody>
@@ -13693,7 +14027,7 @@
         </p:nvSpPr>
         <p:spPr>
           <a:xfrm>
-            <a:off x="6400800" y="5074920"/>
+            <a:off x="6400800" y="3002280"/>
             <a:ext cx="5394960" cy="274320"/>
           </a:xfrm>
           <a:prstGeom prst="rect">
@@ -13719,7 +14053,7 @@
                 </a:solidFill>
                 <a:latin typeface="Arial"/>
               </a:rPr>
-              <a:t>Feng's slide 8 is the implementation example this deck's block diagrams follow; TOM3 (SPIE 6268) is the photodiode heritage.</a:t>
+              <a:t>Everything reproduces from templates/40_benches/cophi_dm96/ (cophi_run, the stage tags in each footnote); gates tCophi, tCophiBench, tConvergedEst, tDmgLoop.</a:t>
             </a:r>
           </a:p>
         </p:txBody>
@@ -13732,7 +14066,7 @@
 </p:sld>
 </file>
 
-<file path=ppt/slides/slide20.xml><?xml version="1.0" encoding="utf-8"?>
+<file path=ppt/slides/slide21.xml><?xml version="1.0" encoding="utf-8"?>
 <p:sld xmlns:a="http://schemas.openxmlformats.org/drawingml/2006/main" xmlns:p="http://schemas.openxmlformats.org/presentationml/2006/main" xmlns:r="http://schemas.openxmlformats.org/officeDocument/2006/relationships">
   <p:cSld>
     <p:spTree>
@@ -14589,7 +14923,7 @@
 </p:sld>
 </file>
 
-<file path=ppt/slides/slide21.xml><?xml version="1.0" encoding="utf-8"?>
+<file path=ppt/slides/slide22.xml><?xml version="1.0" encoding="utf-8"?>
 <p:sld xmlns:a="http://schemas.openxmlformats.org/drawingml/2006/main" xmlns:p="http://schemas.openxmlformats.org/presentationml/2006/main" xmlns:r="http://schemas.openxmlformats.org/officeDocument/2006/relationships">
   <p:cSld>
     <p:spTree>
@@ -14690,7 +15024,7 @@
 </p:sld>
 </file>
 
-<file path=ppt/slides/slide22.xml><?xml version="1.0" encoding="utf-8"?>
+<file path=ppt/slides/slide23.xml><?xml version="1.0" encoding="utf-8"?>
 <p:sld xmlns:a="http://schemas.openxmlformats.org/drawingml/2006/main" xmlns:p="http://schemas.openxmlformats.org/presentationml/2006/main" xmlns:r="http://schemas.openxmlformats.org/officeDocument/2006/relationships">
   <p:cSld>
     <p:spTree>
@@ -14917,7 +15251,7 @@
 </p:sld>
 </file>
 
-<file path=ppt/slides/slide23.xml><?xml version="1.0" encoding="utf-8"?>
+<file path=ppt/slides/slide24.xml><?xml version="1.0" encoding="utf-8"?>
 <p:sld xmlns:a="http://schemas.openxmlformats.org/drawingml/2006/main" xmlns:p="http://schemas.openxmlformats.org/presentationml/2006/main" xmlns:r="http://schemas.openxmlformats.org/officeDocument/2006/relationships">
   <p:cSld>
     <p:spTree>
@@ -15508,7 +15842,7 @@
 </p:sld>
 </file>
 
-<file path=ppt/slides/slide24.xml><?xml version="1.0" encoding="utf-8"?>
+<file path=ppt/slides/slide25.xml><?xml version="1.0" encoding="utf-8"?>
 <p:sld xmlns:a="http://schemas.openxmlformats.org/drawingml/2006/main" xmlns:p="http://schemas.openxmlformats.org/presentationml/2006/main" xmlns:r="http://schemas.openxmlformats.org/officeDocument/2006/relationships">
   <p:cSld>
     <p:spTree>
@@ -17716,7 +18050,7 @@
                           </a:solidFill>
                           <a:latin typeface="Arial"/>
                         </a:rPr>
-                        <a:t>fiber walk, jitter, LO drift, shot + read noise, the record's drifts (slide 13); the record's loop at the camera's cadence; two colors from cold (slides 14–15)</a:t>
+                        <a:t>fiber walk, jitter, LO drift, shot + read noise, the record's drifts (slide 13); the record's loop at the camera's cadence; two colors from cold (slides 15–16)</a:t>
                       </a:r>
                     </a:p>
                   </a:txBody>
@@ -18047,7 +18381,7 @@
             </a:r>
           </a:p>
           <a:p>
-            <a:pPr>
+            <a:pPr marL="0" indent="0">
               <a:spcAft>
                 <a:spcPts val="600"/>
               </a:spcAft>
@@ -18677,7 +19011,7 @@
         </p:nvSpPr>
         <p:spPr>
           <a:xfrm>
-            <a:off x="420624" y="5166360"/>
+            <a:off x="420624" y="4846320"/>
             <a:ext cx="11338560" cy="274320"/>
           </a:xfrm>
           <a:prstGeom prst="rect">
@@ -18712,7 +19046,7 @@
                 </a:solidFill>
                 <a:latin typeface="Arial"/>
               </a:rPr>
-              <a:t>Even well-capped the lock-in is ~12× the Photonfocus and ~110× Feng's baseline.</a:t>
+              <a:t>The lock-in is ~12× the Photonfocus and ~110× Feng's baseline.</a:t>
             </a:r>
           </a:p>
           <a:p>
@@ -18732,7 +19066,7 @@
             </a:r>
           </a:p>
           <a:p>
-            <a:pPr>
+            <a:pPr marL="0" indent="0">
               <a:spcAft>
                 <a:spcPts val="600"/>
               </a:spcAft>
@@ -19314,7 +19648,7 @@
             </a:r>
           </a:p>
           <a:p>
-            <a:pPr>
+            <a:pPr marL="0" indent="0">
               <a:spcAft>
                 <a:spcPts val="600"/>
               </a:spcAft>
@@ -19453,7 +19787,7 @@
             </a:r>
           </a:p>
           <a:p>
-            <a:pPr>
+            <a:pPr marL="0" indent="0">
               <a:spcAft>
                 <a:spcPts val="600"/>
               </a:spcAft>
@@ -19676,8 +20010,8 @@
         </p:blipFill>
         <p:spPr>
           <a:xfrm>
-            <a:off x="1114904" y="1298448"/>
-            <a:ext cx="4399591" cy="2092451"/>
+            <a:off x="411480" y="1298448"/>
+            <a:ext cx="5760720" cy="2788920"/>
           </a:xfrm>
           <a:prstGeom prst="rect">
             <a:avLst/>
@@ -19692,8 +20026,8 @@
         </p:nvSpPr>
         <p:spPr>
           <a:xfrm>
-            <a:off x="411480" y="3409187"/>
-            <a:ext cx="5806440" cy="559307"/>
+            <a:off x="411480" y="4105655"/>
+            <a:ext cx="5760720" cy="559307"/>
           </a:xfrm>
           <a:prstGeom prst="rect">
             <a:avLst/>
@@ -19718,7 +20052,7 @@
                 </a:solidFill>
                 <a:latin typeface="Arial"/>
               </a:rPr>
-              <a:t>The mirror rig from above with the LO arm in place: source arm red, LO arm purple (fiber tip at right, collimator at the reference flat's seat), test arm to the DM blue, camera leg green</a:t>
+              <a:t>The mirror rig from above, the whole LO leg in place: source arm red; LO leg purple, from the fiber tip (right) through the LO collimator at the reference flat's seat to the beamsplitter; test arm to the DM blue; camera leg green</a:t>
             </a:r>
           </a:p>
         </p:txBody>
@@ -19731,7 +20065,7 @@
         </p:nvSpPr>
         <p:spPr>
           <a:xfrm>
-            <a:off x="411480" y="4005072"/>
+            <a:off x="411480" y="4701539"/>
             <a:ext cx="5806440" cy="274320"/>
           </a:xfrm>
           <a:prstGeom prst="rect">
@@ -19829,7 +20163,7 @@
             </a:r>
           </a:p>
           <a:p>
-            <a:pPr>
+            <a:pPr marL="0" indent="0">
               <a:spcAft>
                 <a:spcPts val="600"/>
               </a:spcAft>
@@ -19880,8 +20214,8 @@
         </p:blipFill>
         <p:spPr>
           <a:xfrm>
-            <a:off x="8120752" y="1298448"/>
-            <a:ext cx="1955054" cy="2092451"/>
+            <a:off x="8291624" y="1298448"/>
+            <a:ext cx="1613311" cy="1726692"/>
           </a:xfrm>
           <a:prstGeom prst="rect">
             <a:avLst/>
@@ -19896,7 +20230,7 @@
         </p:nvSpPr>
         <p:spPr>
           <a:xfrm>
-            <a:off x="6400800" y="3409187"/>
+            <a:off x="6400800" y="3043428"/>
             <a:ext cx="5394960" cy="559307"/>
           </a:xfrm>
           <a:prstGeom prst="rect">
@@ -19935,7 +20269,7 @@
         </p:nvSpPr>
         <p:spPr>
           <a:xfrm>
-            <a:off x="6400800" y="4005072"/>
+            <a:off x="6400800" y="3639312"/>
             <a:ext cx="5394960" cy="274320"/>
           </a:xfrm>
           <a:prstGeom prst="rect">
@@ -19986,7 +20320,7 @@
                 </a:solidFill>
                 <a:latin typeface="Arial"/>
               </a:rPr>
-              <a:t>–  the geometric tail places the detector field by ray index, not camera position: per-index null 681 nm, by position 0.45 nm — the LO is placed by position</a:t>
+              <a:t>–  the tail places the detector field by ray index, not camera position (null 681 nm by index, 0.45 nm by position) — the LO is placed by position</a:t>
             </a:r>
           </a:p>
           <a:p>
@@ -20002,11 +20336,11 @@
                 </a:solidFill>
                 <a:latin typeface="Arial"/>
               </a:rPr>
-              <a:t>–  the plain mirror train had kept a source trim solved with the polarizer plate; without it OAP1 was fed off focus (84 nm of defocus) — now trimmed to zero</a:t>
-            </a:r>
-          </a:p>
-          <a:p>
-            <a:pPr>
+              <a:t>–  the plain mirror train had kept a source trim solved with the polarizer plate: OAP1 fed off focus (84 nm defocus) — now trimmed to zero</a:t>
+            </a:r>
+          </a:p>
+          <a:p>
+            <a:pPr marL="0" indent="0">
               <a:spcAft>
                 <a:spcPts val="600"/>
               </a:spcAft>
@@ -20036,7 +20370,7 @@
                 </a:solidFill>
                 <a:latin typeface="Arial"/>
               </a:rPr>
-              <a:t> the record's polarizing train and Feng's plain splitter read the same picometers (the camera is well-bound); the polarizing train costs light only (throughput 0.271 vs 0.408, ×1.5 laser).  The plain splitter is the layout scored.</a:t>
+              <a:t> the polarizing train and Feng's plain splitter read the same picometers (the camera is well-bound); the polarizing train costs light only (throughput 0.271 vs 0.408, ×1.5 laser).  The plain splitter is scored.</a:t>
             </a:r>
           </a:p>
         </p:txBody>
@@ -20049,8 +20383,8 @@
         </p:nvSpPr>
         <p:spPr>
           <a:xfrm>
-            <a:off x="6400800" y="6607810"/>
-            <a:ext cx="5394960" cy="274320"/>
+            <a:off x="457200" y="6172200"/>
+            <a:ext cx="11338560" cy="274320"/>
           </a:xfrm>
           <a:prstGeom prst="rect">
             <a:avLst/>
@@ -20346,7 +20680,7 @@
                 </a:solidFill>
                 <a:latin typeface="Arial"/>
               </a:rPr>
-              <a:t>–  every real camera on the table samples finer (5–21 px per actuator, slide 10); what resolution buys and costs is slide 17</a:t>
+              <a:t>–  every real camera on the table samples finer (5–21 px per actuator, slide 10); what resolution buys and costs is slide 18</a:t>
             </a:r>
           </a:p>
         </p:txBody>

--- a/demo_session/deck_cophi_baseline.pptx
+++ b/demo_session/deck_cophi_baseline.pptx
@@ -6665,8 +6665,8 @@
         </p:nvSpPr>
         <p:spPr>
           <a:xfrm>
-            <a:off x="6400800" y="1298448"/>
-            <a:ext cx="5394960" cy="274320"/>
+            <a:off x="7315200" y="1298448"/>
+            <a:ext cx="4480560" cy="274320"/>
           </a:xfrm>
           <a:prstGeom prst="rect">
             <a:avLst/>
@@ -6685,7 +6685,7 @@
               </a:spcAft>
             </a:pPr>
             <a:r>
-              <a:rPr sz="1200" b="0">
+              <a:rPr sz="1150" b="0">
                 <a:solidFill>
                   <a:srgbClr val="282828"/>
                 </a:solidFill>
@@ -6694,7 +6694,7 @@
               <a:t>•  </a:t>
             </a:r>
             <a:r>
-              <a:rPr sz="1200" b="1">
+              <a:rPr sz="1150" b="1">
                 <a:solidFill>
                   <a:srgbClr val="282828"/>
                 </a:solidFill>
@@ -6703,7 +6703,7 @@
               <a:t>Read noise is in every row</a:t>
             </a:r>
             <a:r>
-              <a:rPr sz="1200" b="0">
+              <a:rPr sz="1150" b="0">
                 <a:solidFill>
                   <a:srgbClr val="282828"/>
                 </a:solidFill>
@@ -6719,7 +6719,7 @@
               </a:spcAft>
             </a:pPr>
             <a:r>
-              <a:rPr sz="1050" b="0">
+              <a:rPr sz="1000" b="0">
                 <a:solidFill>
                   <a:srgbClr val="6E6E6E"/>
                 </a:solidFill>
@@ -6735,7 +6735,7 @@
               </a:spcAft>
             </a:pPr>
             <a:r>
-              <a:rPr sz="1200" b="0">
+              <a:rPr sz="1150" b="0">
                 <a:solidFill>
                   <a:srgbClr val="282828"/>
                 </a:solidFill>
@@ -6744,7 +6744,7 @@
               <a:t>•  </a:t>
             </a:r>
             <a:r>
-              <a:rPr sz="1200" b="1">
+              <a:rPr sz="1150" b="1">
                 <a:solidFill>
                   <a:srgbClr val="282828"/>
                 </a:solidFill>
@@ -6753,7 +6753,7 @@
               <a:t>SNR at the 1 pm target:</a:t>
             </a:r>
             <a:r>
-              <a:rPr sz="1200" b="0">
+              <a:rPr sz="1150" b="0">
                 <a:solidFill>
                   <a:srgbClr val="282828"/>
                 </a:solidFill>
@@ -6769,7 +6769,7 @@
               </a:spcAft>
             </a:pPr>
             <a:r>
-              <a:rPr sz="1050" b="0">
+              <a:rPr sz="1000" b="0">
                 <a:solidFill>
                   <a:srgbClr val="6E6E6E"/>
                 </a:solidFill>
@@ -6785,7 +6785,7 @@
               </a:spcAft>
             </a:pPr>
             <a:r>
-              <a:rPr sz="1200" b="0">
+              <a:rPr sz="1150" b="0">
                 <a:solidFill>
                   <a:srgbClr val="282828"/>
                 </a:solidFill>
@@ -6794,7 +6794,7 @@
               <a:t>•  </a:t>
             </a:r>
             <a:r>
-              <a:rPr sz="1200" b="1">
+              <a:rPr sz="1150" b="1">
                 <a:solidFill>
                   <a:srgbClr val="282828"/>
                 </a:solidFill>
@@ -6803,7 +6803,7 @@
               <a:t>Model and bench agree:</a:t>
             </a:r>
             <a:r>
-              <a:rPr sz="1200" b="0">
+              <a:rPr sz="1150" b="0">
                 <a:solidFill>
                   <a:srgbClr val="282828"/>
                 </a:solidFill>
@@ -6819,7 +6819,7 @@
               </a:spcAft>
             </a:pPr>
             <a:r>
-              <a:rPr sz="1200" b="0">
+              <a:rPr sz="1150" b="0">
                 <a:solidFill>
                   <a:srgbClr val="282828"/>
                 </a:solidFill>
@@ -6828,7 +6828,7 @@
               <a:t>•  </a:t>
             </a:r>
             <a:r>
-              <a:rPr sz="1200" b="1">
+              <a:rPr sz="1150" b="1">
                 <a:solidFill>
                   <a:srgbClr val="282828"/>
                 </a:solidFill>
@@ -6837,7 +6837,7 @@
               <a:t>Rolling-shutter cameras are out:</a:t>
             </a:r>
             <a:r>
-              <a:rPr sz="1200" b="0">
+              <a:rPr sz="1150" b="0">
                 <a:solidFill>
                   <a:srgbClr val="282828"/>
                 </a:solidFill>
@@ -6853,7 +6853,7 @@
               </a:spcAft>
             </a:pPr>
             <a:r>
-              <a:rPr sz="1200" b="0">
+              <a:rPr sz="1150" b="0">
                 <a:solidFill>
                   <a:srgbClr val="282828"/>
                 </a:solidFill>
@@ -6862,7 +6862,7 @@
               <a:t>•  </a:t>
             </a:r>
             <a:r>
-              <a:rPr sz="1200" b="1">
+              <a:rPr sz="1150" b="1">
                 <a:solidFill>
                   <a:srgbClr val="282828"/>
                 </a:solidFill>
@@ -6871,7 +6871,7 @@
               <a:t>Why the camera, not the pixel count:</a:t>
             </a:r>
             <a:r>
-              <a:rPr sz="1200" b="0">
+              <a:rPr sz="1150" b="0">
                 <a:solidFill>
                   <a:srgbClr val="282828"/>
                 </a:solidFill>
@@ -6890,8 +6890,8 @@
         </p:nvSpPr>
         <p:spPr>
           <a:xfrm>
-            <a:off x="6400800" y="5361940"/>
-            <a:ext cx="5394960" cy="274320"/>
+            <a:off x="7315200" y="5358384"/>
+            <a:ext cx="4480560" cy="274320"/>
           </a:xfrm>
           <a:prstGeom prst="rect">
             <a:avLst/>
@@ -11964,7 +11964,7 @@
                 </a:solidFill>
                 <a:latin typeface="Arial"/>
               </a:rPr>
-              <a:t>a per-gauge sweep at 1, 1.5, 2 and 4 px per actuator is a one-day format run — the item that turns this table into records</a:t>
+              <a:t>a per-gauge sweep at 1, 1.5, 2 and 4 px per actuator is running now</a:t>
             </a:r>
           </a:p>
           <a:p>
@@ -13859,6 +13859,40 @@
             </a:r>
           </a:p>
           <a:p>
+            <a:pPr marL="0" indent="0">
+              <a:spcAft>
+                <a:spcPts val="600"/>
+              </a:spcAft>
+            </a:pPr>
+            <a:r>
+              <a:rPr sz="1200" b="0">
+                <a:solidFill>
+                  <a:srgbClr val="282828"/>
+                </a:solidFill>
+                <a:latin typeface="Arial"/>
+              </a:rPr>
+              <a:t>•  </a:t>
+            </a:r>
+            <a:r>
+              <a:rPr sz="1200" b="1">
+                <a:solidFill>
+                  <a:srgbClr val="282828"/>
+                </a:solidFill>
+                <a:latin typeface="Arial"/>
+              </a:rPr>
+              <a:t>The lock-in camera is the fast form:</a:t>
+            </a:r>
+            <a:r>
+              <a:rPr sz="1200" b="0">
+                <a:solidFill>
+                  <a:srgbClr val="282828"/>
+                </a:solidFill>
+                <a:latin typeface="Arial"/>
+              </a:rPr>
+              <a:t> 3.4 s per pm as surveyed, 0.125 s cycles.</a:t>
+            </a:r>
+          </a:p>
+          <a:p>
             <a:pPr marL="594360" indent="-137160">
               <a:spcAft>
                 <a:spcPts val="500"/>
@@ -13871,25 +13905,7 @@
                 </a:solidFill>
                 <a:latin typeface="Arial"/>
               </a:rPr>
-              <a:t>–  </a:t>
-            </a:r>
-            <a:r>
-              <a:rPr sz="1050" b="1">
-                <a:solidFill>
-                  <a:srgbClr val="6E6E6E"/>
-                </a:solidFill>
-                <a:latin typeface="Arial"/>
-              </a:rPr>
-              <a:t>the lock-in camera is the fast form</a:t>
-            </a:r>
-            <a:r>
-              <a:rPr sz="1050" b="0">
-                <a:solidFill>
-                  <a:srgbClr val="6E6E6E"/>
-                </a:solidFill>
-                <a:latin typeface="Arial"/>
-              </a:rPr>
-              <a:t> (3.4 s per pm as surveyed, 0.125 s cycles) — one vendor question from a number</a:t>
+              <a:t>–  verify all performance specs with the vendor</a:t>
             </a:r>
           </a:p>
           <a:p>
@@ -19945,7 +19961,7 @@
                 </a:solidFill>
                 <a:latin typeface="Arial"/>
               </a:rPr>
-              <a:t>A fiber tip and collimator, its powered face at the reference flat's seat; it registers on both rigs to a pixel and the flat-DM null is sub-nanometer</a:t>
+              <a:t>A fiber tip and collimator, its powered face at the reference flat's seat, on both rigs; it registers to a pixel and the flat-DM null is sub-nanometer</a:t>
             </a:r>
           </a:p>
         </p:txBody>
@@ -19996,7 +20012,7 @@
       </p:sp>
       <p:pic>
         <p:nvPicPr>
-          <p:cNvPr id="4" name="Picture 3" descr="cophi_layout_oap.png"/>
+          <p:cNvPr id="4" name="Picture 3" descr="cophi_layout_lens.png"/>
           <p:cNvPicPr>
             <a:picLocks noChangeAspect="1"/>
           </p:cNvPicPr>
@@ -20011,7 +20027,7 @@
         <p:spPr>
           <a:xfrm>
             <a:off x="411480" y="1298448"/>
-            <a:ext cx="5760720" cy="2788920"/>
+            <a:ext cx="5806440" cy="2120878"/>
           </a:xfrm>
           <a:prstGeom prst="rect">
             <a:avLst/>
@@ -20026,8 +20042,8 @@
         </p:nvSpPr>
         <p:spPr>
           <a:xfrm>
-            <a:off x="411480" y="4105655"/>
-            <a:ext cx="5760720" cy="559307"/>
+            <a:off x="411480" y="3437614"/>
+            <a:ext cx="5806440" cy="559307"/>
           </a:xfrm>
           <a:prstGeom prst="rect">
             <a:avLst/>
@@ -20052,7 +20068,7 @@
                 </a:solidFill>
                 <a:latin typeface="Arial"/>
               </a:rPr>
-              <a:t>The mirror rig from above, the whole LO leg in place: source arm red; LO leg purple, from the fiber tip (right) through the LO collimator at the reference flat's seat to the beamsplitter; test arm to the DM blue; camera leg green</a:t>
+              <a:t>Lens rig from above: source arm red (fiber tip at left, collimator L1); LO leg purple, from its fiber tip (right) through the LO collimator at the reference flat's seat to the beamsplitter; test arm to the DM blue; camera leg green</a:t>
             </a:r>
           </a:p>
         </p:txBody>
@@ -20065,7 +20081,7 @@
         </p:nvSpPr>
         <p:spPr>
           <a:xfrm>
-            <a:off x="411480" y="4701539"/>
+            <a:off x="411480" y="4033498"/>
             <a:ext cx="5806440" cy="274320"/>
           </a:xfrm>
           <a:prstGeom prst="rect">
@@ -20200,7 +20216,7 @@
       </p:sp>
       <p:pic>
         <p:nvPicPr>
-          <p:cNvPr id="7" name="Picture 6" descr="cophi_layout_node.png"/>
+          <p:cNvPr id="7" name="Picture 6" descr="cophi_layout_oap.png"/>
           <p:cNvPicPr>
             <a:picLocks noChangeAspect="1"/>
           </p:cNvPicPr>
@@ -20214,8 +20230,8 @@
         </p:blipFill>
         <p:spPr>
           <a:xfrm>
-            <a:off x="8291624" y="1298448"/>
-            <a:ext cx="1613311" cy="1726692"/>
+            <a:off x="6802353" y="1298448"/>
+            <a:ext cx="4591853" cy="2183892"/>
           </a:xfrm>
           <a:prstGeom prst="rect">
             <a:avLst/>
@@ -20230,7 +20246,7 @@
         </p:nvSpPr>
         <p:spPr>
           <a:xfrm>
-            <a:off x="6400800" y="3043428"/>
+            <a:off x="6400800" y="3500628"/>
             <a:ext cx="5394960" cy="559307"/>
           </a:xfrm>
           <a:prstGeom prst="rect">
@@ -20256,7 +20272,7 @@
                 </a:solidFill>
                 <a:latin typeface="Arial"/>
               </a:rPr>
-              <a:t>The node: the beamsplitter and compensator, the LO entering where the reference flat's return did, the recombination into the camera leg (the record's polarizing elements shown; the plain-splitter train is scored)</a:t>
+              <a:t>Mirror rig from above: source arm red; LO leg purple, from its fiber tip (right) through the LO collimator at the reference flat's seat to the beamsplitter; test arm to the DM blue; camera leg green (OAP1 collimates, OAP2 focuses)</a:t>
             </a:r>
           </a:p>
         </p:txBody>
@@ -20269,7 +20285,7 @@
         </p:nvSpPr>
         <p:spPr>
           <a:xfrm>
-            <a:off x="6400800" y="3639312"/>
+            <a:off x="6400800" y="4096512"/>
             <a:ext cx="5394960" cy="274320"/>
           </a:xfrm>
           <a:prstGeom prst="rect">
@@ -20409,7 +20425,7 @@
                 </a:solidFill>
                 <a:latin typeface="Arial"/>
               </a:rPr>
-              <a:t>Stage bench (runs/bench_{lens,oap}; the layout = bench_oap_vlayout.png, the engine's own render), gate tCophiBench 9/9 (registration, poke 1.001 converged, LO tilt, no-fringe refused by name, dark camera refused).</a:t>
+              <a:t>Stage bench (runs/bench_{lens,oap}; the layouts = bench_{lens,oap}_vlayout.png, the engine's own renders), gate tCophiBench 9/9 (registration, poke 1.001 converged, LO tilt, no-fringe refused by name, dark camera refused).</a:t>
             </a:r>
           </a:p>
         </p:txBody>

--- a/demo_session/deck_cophi_baseline.pptx
+++ b/demo_session/deck_cophi_baseline.pptx
@@ -4364,7 +4364,7 @@
                 </a:solidFill>
                 <a:latin typeface="Arial"/>
               </a:rPr>
-              <a:t>–  below ~1.5 px per actuator the actuator fit collapses (the blur demo's box kernel) — 5 px per actuator is the floor on this table</a:t>
+              <a:t>–  measured (slide 18): 1 px per actuator fails the single-actuator row, 1.5–2 px holds at 1.6–2× the time, 3.3 and 4 are the same — 5 px per actuator is the floor on this table</a:t>
             </a:r>
           </a:p>
           <a:p>
@@ -5760,7 +5760,7 @@
         </p:nvGraphicFramePr>
         <p:xfrm>
           <a:off x="411480" y="1298448"/>
-          <a:ext cx="5806438" cy="4320540"/>
+          <a:ext cx="5806438" cy="4509135"/>
         </p:xfrm>
         <a:graphic>
           <a:graphicData uri="http://schemas.openxmlformats.org/drawingml/2006/table">
@@ -5769,11 +5769,11 @@
                 <a:tableStyleId>{5C22544A-7EE6-4342-B048-85BDC9FD1C3A}</a:tableStyleId>
               </a:tblPr>
               <a:tblGrid>
-                <a:gridCol w="1471460"/>
-                <a:gridCol w="1010520"/>
-                <a:gridCol w="868693"/>
-                <a:gridCol w="407754"/>
-                <a:gridCol w="957335"/>
+                <a:gridCol w="1363792"/>
+                <a:gridCol w="936580"/>
+                <a:gridCol w="805130"/>
+                <a:gridCol w="377918"/>
+                <a:gridCol w="1232342"/>
                 <a:gridCol w="1090676"/>
               </a:tblGrid>
               <a:tr h="1034415">
@@ -6044,7 +6044,7 @@
                   </a:tcPr>
                 </a:tc>
               </a:tr>
-              <a:tr h="468630">
+              <a:tr h="657225">
                 <a:tc>
                   <a:txBody>
                     <a:bodyPr wrap="square"/>
@@ -6547,7 +6547,7 @@
                           </a:solidFill>
                           <a:latin typeface="Arial"/>
                         </a:rPr>
-                        <a:t>3.73 / 3.35 (4.4 / 4.0 at read 100; ×1.11 square-wave)</a:t>
+                        <a:t>3.73 / 3.35 (4.4 / 4.0 at read 100; ×1.23 in time for two-tap demodulation)</a:t>
                       </a:r>
                     </a:p>
                   </a:txBody>
@@ -6592,7 +6592,7 @@
         </p:nvSpPr>
         <p:spPr>
           <a:xfrm>
-            <a:off x="411480" y="5765292"/>
+            <a:off x="411480" y="5953887"/>
             <a:ext cx="5806440" cy="274320"/>
           </a:xfrm>
           <a:prstGeom prst="rect">
@@ -10722,7 +10722,7 @@
                 </a:solidFill>
                 <a:latin typeface="Arial"/>
               </a:rPr>
-              <a:t>How much resolution? IFO, vector ZWFS, HET</a:t>
+              <a:t>How much resolution? IFO, vector ZWFS, HET — the sweep's records</a:t>
             </a:r>
           </a:p>
           <a:p>
@@ -10738,7 +10738,7 @@
                 </a:solidFill>
                 <a:latin typeface="Arial"/>
               </a:rPr>
-              <a:t>Pixels per actuator above ~2 are free in photons and hold, cost data and processing, and buy the single-actuator scale; between 1 and 1.5 the actuator fit collapses; the three approaches pay differently</a:t>
+              <a:t>Camera pixels per actuator swept at 1 / 1.5 / 2 / 3.3 / 4 for all six readings, the matrix measured through the resampled reading: 1 px fails the single-actuator row, 1.5–2 px cost 1.6–2× the time, above 3.3 nothing changes</a:t>
             </a:r>
           </a:p>
         </p:txBody>
@@ -10787,1106 +10787,30 @@
           </a:p>
         </p:txBody>
       </p:sp>
-      <p:graphicFrame>
-        <p:nvGraphicFramePr>
-          <p:cNvPr id="4" name="Table 3"/>
-          <p:cNvGraphicFramePr>
-            <a:graphicFrameLocks noGrp="1"/>
-          </p:cNvGraphicFramePr>
+      <p:pic>
+        <p:nvPicPr>
+          <p:cNvPr id="4" name="Picture 3" descr="cophi_ressweep_composite.png"/>
+          <p:cNvPicPr>
+            <a:picLocks noChangeAspect="1"/>
+          </p:cNvPicPr>
           <p:nvPr/>
-        </p:nvGraphicFramePr>
-        <p:xfrm>
-          <a:off x="411480" y="1298448"/>
-          <a:ext cx="11368731" cy="2811780"/>
-        </p:xfrm>
-        <a:graphic>
-          <a:graphicData uri="http://schemas.openxmlformats.org/drawingml/2006/table">
-            <a:tbl>
-              <a:tblPr firstRow="1" bandRow="1">
-                <a:tableStyleId>{5C22544A-7EE6-4342-B048-85BDC9FD1C3A}</a:tableStyleId>
-              </a:tblPr>
-              <a:tblGrid>
-                <a:gridCol w="598354"/>
-                <a:gridCol w="3669907"/>
-                <a:gridCol w="917476"/>
-                <a:gridCol w="877586"/>
-                <a:gridCol w="1874844"/>
-                <a:gridCol w="1196708"/>
-                <a:gridCol w="1116928"/>
-                <a:gridCol w="1116928"/>
-              </a:tblGrid>
-              <a:tr h="468630">
-                <a:tc>
-                  <a:txBody>
-                    <a:bodyPr wrap="square"/>
-                    <a:lstStyle/>
-                    <a:p>
-                      <a:r>
-                        <a:rPr sz="1100" b="1">
-                          <a:solidFill>
-                            <a:srgbClr val="FFFFFF"/>
-                          </a:solidFill>
-                          <a:latin typeface="Arial"/>
-                        </a:rPr>
-                        <a:t>px per actuator</a:t>
-                      </a:r>
-                    </a:p>
-                  </a:txBody>
-                  <a:tcPr marL="54864" marR="54864" marT="18288" marB="18288">
-                    <a:solidFill>
-                      <a:srgbClr val="1F4E79"/>
-                    </a:solidFill>
-                  </a:tcPr>
-                </a:tc>
-                <a:tc>
-                  <a:txBody>
-                    <a:bodyPr wrap="square"/>
-                    <a:lstStyle/>
-                    <a:p>
-                      <a:r>
-                        <a:rPr sz="1100" b="1">
-                          <a:solidFill>
-                            <a:srgbClr val="FFFFFF"/>
-                          </a:solidFill>
-                          <a:latin typeface="Arial"/>
-                        </a:rPr>
-                        <a:t>the fit</a:t>
-                      </a:r>
-                    </a:p>
-                  </a:txBody>
-                  <a:tcPr marL="54864" marR="54864" marT="18288" marB="18288">
-                    <a:solidFill>
-                      <a:srgbClr val="1F4E79"/>
-                    </a:solidFill>
-                  </a:tcPr>
-                </a:tc>
-                <a:tc>
-                  <a:txBody>
-                    <a:bodyPr wrap="square"/>
-                    <a:lstStyle/>
-                    <a:p>
-                      <a:r>
-                        <a:rPr sz="1100" b="1">
-                          <a:solidFill>
-                            <a:srgbClr val="FFFFFF"/>
-                          </a:solidFill>
-                          <a:latin typeface="Arial"/>
-                        </a:rPr>
-                        <a:t>hold at 3 pm</a:t>
-                      </a:r>
-                    </a:p>
-                  </a:txBody>
-                  <a:tcPr marL="54864" marR="54864" marT="18288" marB="18288">
-                    <a:solidFill>
-                      <a:srgbClr val="1F4E79"/>
-                    </a:solidFill>
-                  </a:tcPr>
-                </a:tc>
-                <a:tc>
-                  <a:txBody>
-                    <a:bodyPr wrap="square"/>
-                    <a:lstStyle/>
-                    <a:p>
-                      <a:r>
-                        <a:rPr sz="1100" b="1">
-                          <a:solidFill>
-                            <a:srgbClr val="FFFFFF"/>
-                          </a:solidFill>
-                          <a:latin typeface="Arial"/>
-                        </a:rPr>
-                        <a:t>speed, s per pm</a:t>
-                      </a:r>
-                    </a:p>
-                  </a:txBody>
-                  <a:tcPr marL="54864" marR="54864" marT="18288" marB="18288">
-                    <a:solidFill>
-                      <a:srgbClr val="1F4E79"/>
-                    </a:solidFill>
-                  </a:tcPr>
-                </a:tc>
-                <a:tc>
-                  <a:txBody>
-                    <a:bodyPr wrap="square"/>
-                    <a:lstStyle/>
-                    <a:p>
-                      <a:r>
-                        <a:rPr sz="1100" b="1">
-                          <a:solidFill>
-                            <a:srgbClr val="FFFFFF"/>
-                          </a:solidFill>
-                          <a:latin typeface="Arial"/>
-                        </a:rPr>
-                        <a:t>complexity</a:t>
-                      </a:r>
-                    </a:p>
-                  </a:txBody>
-                  <a:tcPr marL="54864" marR="54864" marT="18288" marB="18288">
-                    <a:solidFill>
-                      <a:srgbClr val="1F4E79"/>
-                    </a:solidFill>
-                  </a:tcPr>
-                </a:tc>
-                <a:tc>
-                  <a:txBody>
-                    <a:bodyPr wrap="square"/>
-                    <a:lstStyle/>
-                    <a:p>
-                      <a:r>
-                        <a:rPr sz="1100" b="1">
-                          <a:solidFill>
-                            <a:srgbClr val="FFFFFF"/>
-                          </a:solidFill>
-                          <a:latin typeface="Arial"/>
-                        </a:rPr>
-                        <a:t>IFO (pol. camera)</a:t>
-                      </a:r>
-                    </a:p>
-                  </a:txBody>
-                  <a:tcPr marL="54864" marR="54864" marT="18288" marB="18288">
-                    <a:solidFill>
-                      <a:srgbClr val="1F4E79"/>
-                    </a:solidFill>
-                  </a:tcPr>
-                </a:tc>
-                <a:tc>
-                  <a:txBody>
-                    <a:bodyPr wrap="square"/>
-                    <a:lstStyle/>
-                    <a:p>
-                      <a:r>
-                        <a:rPr sz="1100" b="1">
-                          <a:solidFill>
-                            <a:srgbClr val="FFFFFF"/>
-                          </a:solidFill>
-                          <a:latin typeface="Arial"/>
-                        </a:rPr>
-                        <a:t>vector ZWFS (pol. camera)</a:t>
-                      </a:r>
-                    </a:p>
-                  </a:txBody>
-                  <a:tcPr marL="54864" marR="54864" marT="18288" marB="18288">
-                    <a:solidFill>
-                      <a:srgbClr val="1F4E79"/>
-                    </a:solidFill>
-                  </a:tcPr>
-                </a:tc>
-                <a:tc>
-                  <a:txBody>
-                    <a:bodyPr wrap="square"/>
-                    <a:lstStyle/>
-                    <a:p>
-                      <a:r>
-                        <a:rPr sz="1100" b="1">
-                          <a:solidFill>
-                            <a:srgbClr val="FFFFFF"/>
-                          </a:solidFill>
-                          <a:latin typeface="Arial"/>
-                        </a:rPr>
-                        <a:t>HET camera / lock-in</a:t>
-                      </a:r>
-                    </a:p>
-                  </a:txBody>
-                  <a:tcPr marL="54864" marR="54864" marT="18288" marB="18288">
-                    <a:solidFill>
-                      <a:srgbClr val="1F4E79"/>
-                    </a:solidFill>
-                  </a:tcPr>
-                </a:tc>
-              </a:tr>
-              <a:tr h="468630">
-                <a:tc>
-                  <a:txBody>
-                    <a:bodyPr wrap="square"/>
-                    <a:lstStyle/>
-                    <a:p>
-                      <a:r>
-                        <a:rPr sz="1100" b="0">
-                          <a:solidFill>
-                            <a:srgbClr val="282828"/>
-                          </a:solidFill>
-                          <a:latin typeface="Arial"/>
-                        </a:rPr>
-                        <a:t>&lt; 1</a:t>
-                      </a:r>
-                    </a:p>
-                  </a:txBody>
-                  <a:tcPr marL="54864" marR="54864" marT="18288" marB="18288">
-                    <a:solidFill>
-                      <a:srgbClr val="FFFFFF"/>
-                    </a:solidFill>
-                  </a:tcPr>
-                </a:tc>
-                <a:tc>
-                  <a:txBody>
-                    <a:bodyPr wrap="square"/>
-                    <a:lstStyle/>
-                    <a:p>
-                      <a:r>
-                        <a:rPr sz="1100" b="0">
-                          <a:solidFill>
-                            <a:srgbClr val="282828"/>
-                          </a:solidFill>
-                          <a:latin typeface="Arial"/>
-                        </a:rPr>
-                        <a:t>modes only</a:t>
-                      </a:r>
-                    </a:p>
-                  </a:txBody>
-                  <a:tcPr marL="54864" marR="54864" marT="18288" marB="18288">
-                    <a:solidFill>
-                      <a:srgbClr val="FFFFFF"/>
-                    </a:solidFill>
-                  </a:tcPr>
-                </a:tc>
-                <a:tc>
-                  <a:txBody>
-                    <a:bodyPr wrap="square"/>
-                    <a:lstStyle/>
-                    <a:p>
-                      <a:r>
-                        <a:rPr sz="1100" b="0">
-                          <a:solidFill>
-                            <a:srgbClr val="282828"/>
-                          </a:solidFill>
-                          <a:latin typeface="Arial"/>
-                        </a:rPr>
-                        <a:t>—</a:t>
-                      </a:r>
-                    </a:p>
-                  </a:txBody>
-                  <a:tcPr marL="54864" marR="54864" marT="18288" marB="18288">
-                    <a:solidFill>
-                      <a:srgbClr val="FFFFFF"/>
-                    </a:solidFill>
-                  </a:tcPr>
-                </a:tc>
-                <a:tc>
-                  <a:txBody>
-                    <a:bodyPr wrap="square"/>
-                    <a:lstStyle/>
-                    <a:p>
-                      <a:r>
-                        <a:rPr sz="1100" b="0">
-                          <a:solidFill>
-                            <a:srgbClr val="282828"/>
-                          </a:solidFill>
-                          <a:latin typeface="Arial"/>
-                        </a:rPr>
-                        <a:t>—</a:t>
-                      </a:r>
-                    </a:p>
-                  </a:txBody>
-                  <a:tcPr marL="54864" marR="54864" marT="18288" marB="18288">
-                    <a:solidFill>
-                      <a:srgbClr val="FFFFFF"/>
-                    </a:solidFill>
-                  </a:tcPr>
-                </a:tc>
-                <a:tc>
-                  <a:txBody>
-                    <a:bodyPr wrap="square"/>
-                    <a:lstStyle/>
-                    <a:p>
-                      <a:r>
-                        <a:rPr sz="1100" b="0">
-                          <a:solidFill>
-                            <a:srgbClr val="282828"/>
-                          </a:solidFill>
-                          <a:latin typeface="Arial"/>
-                        </a:rPr>
-                        <a:t>least</a:t>
-                      </a:r>
-                    </a:p>
-                  </a:txBody>
-                  <a:tcPr marL="54864" marR="54864" marT="18288" marB="18288">
-                    <a:solidFill>
-                      <a:srgbClr val="FFFFFF"/>
-                    </a:solidFill>
-                  </a:tcPr>
-                </a:tc>
-                <a:tc>
-                  <a:txBody>
-                    <a:bodyPr wrap="square"/>
-                    <a:lstStyle/>
-                    <a:p>
-                      <a:r>
-                        <a:rPr sz="1100" b="0">
-                          <a:solidFill>
-                            <a:srgbClr val="282828"/>
-                          </a:solidFill>
-                          <a:latin typeface="Arial"/>
-                        </a:rPr>
-                        <a:t>not a gauge</a:t>
-                      </a:r>
-                    </a:p>
-                  </a:txBody>
-                  <a:tcPr marL="54864" marR="54864" marT="18288" marB="18288">
-                    <a:solidFill>
-                      <a:srgbClr val="FFFFFF"/>
-                    </a:solidFill>
-                  </a:tcPr>
-                </a:tc>
-                <a:tc>
-                  <a:txBody>
-                    <a:bodyPr wrap="square"/>
-                    <a:lstStyle/>
-                    <a:p>
-                      <a:r>
-                        <a:rPr sz="1100" b="0">
-                          <a:solidFill>
-                            <a:srgbClr val="282828"/>
-                          </a:solidFill>
-                          <a:latin typeface="Arial"/>
-                        </a:rPr>
-                        <a:t>not a gauge</a:t>
-                      </a:r>
-                    </a:p>
-                  </a:txBody>
-                  <a:tcPr marL="54864" marR="54864" marT="18288" marB="18288">
-                    <a:solidFill>
-                      <a:srgbClr val="FFFFFF"/>
-                    </a:solidFill>
-                  </a:tcPr>
-                </a:tc>
-                <a:tc>
-                  <a:txBody>
-                    <a:bodyPr wrap="square"/>
-                    <a:lstStyle/>
-                    <a:p>
-                      <a:r>
-                        <a:rPr sz="1100" b="0">
-                          <a:solidFill>
-                            <a:srgbClr val="282828"/>
-                          </a:solidFill>
-                          <a:latin typeface="Arial"/>
-                        </a:rPr>
-                        <a:t>not modeled (ruling 6)</a:t>
-                      </a:r>
-                    </a:p>
-                  </a:txBody>
-                  <a:tcPr marL="54864" marR="54864" marT="18288" marB="18288">
-                    <a:solidFill>
-                      <a:srgbClr val="FFFFFF"/>
-                    </a:solidFill>
-                  </a:tcPr>
-                </a:tc>
-              </a:tr>
-              <a:tr h="468630">
-                <a:tc>
-                  <a:txBody>
-                    <a:bodyPr wrap="square"/>
-                    <a:lstStyle/>
-                    <a:p>
-                      <a:r>
-                        <a:rPr sz="1100" b="0">
-                          <a:solidFill>
-                            <a:srgbClr val="282828"/>
-                          </a:solidFill>
-                          <a:latin typeface="Arial"/>
-                        </a:rPr>
-                        <a:t>1 – 1.5</a:t>
-                      </a:r>
-                    </a:p>
-                  </a:txBody>
-                  <a:tcPr marL="54864" marR="54864" marT="18288" marB="18288">
-                    <a:solidFill>
-                      <a:srgbClr val="ECF1F6"/>
-                    </a:solidFill>
-                  </a:tcPr>
-                </a:tc>
-                <a:tc>
-                  <a:txBody>
-                    <a:bodyPr wrap="square"/>
-                    <a:lstStyle/>
-                    <a:p>
-                      <a:r>
-                        <a:rPr sz="1100" b="0">
-                          <a:solidFill>
-                            <a:srgbClr val="282828"/>
-                          </a:solidFill>
-                          <a:latin typeface="Arial"/>
-                        </a:rPr>
-                        <a:t>collapses (fewer readings than lit actuators; a registration error reads the wrong actuator)</a:t>
-                      </a:r>
-                    </a:p>
-                  </a:txBody>
-                  <a:tcPr marL="54864" marR="54864" marT="18288" marB="18288">
-                    <a:solidFill>
-                      <a:srgbClr val="ECF1F6"/>
-                    </a:solidFill>
-                  </a:tcPr>
-                </a:tc>
-                <a:tc>
-                  <a:txBody>
-                    <a:bodyPr wrap="square"/>
-                    <a:lstStyle/>
-                    <a:p>
-                      <a:r>
-                        <a:rPr sz="1100" b="0">
-                          <a:solidFill>
-                            <a:srgbClr val="282828"/>
-                          </a:solidFill>
-                          <a:latin typeface="Arial"/>
-                        </a:rPr>
-                        <a:t>fails</a:t>
-                      </a:r>
-                    </a:p>
-                  </a:txBody>
-                  <a:tcPr marL="54864" marR="54864" marT="18288" marB="18288">
-                    <a:solidFill>
-                      <a:srgbClr val="ECF1F6"/>
-                    </a:solidFill>
-                  </a:tcPr>
-                </a:tc>
-                <a:tc>
-                  <a:txBody>
-                    <a:bodyPr wrap="square"/>
-                    <a:lstStyle/>
-                    <a:p>
-                      <a:r>
-                        <a:rPr sz="1100" b="0">
-                          <a:solidFill>
-                            <a:srgbClr val="282828"/>
-                          </a:solidFill>
-                          <a:latin typeface="Arial"/>
-                        </a:rPr>
-                        <a:t>—</a:t>
-                      </a:r>
-                    </a:p>
-                  </a:txBody>
-                  <a:tcPr marL="54864" marR="54864" marT="18288" marB="18288">
-                    <a:solidFill>
-                      <a:srgbClr val="ECF1F6"/>
-                    </a:solidFill>
-                  </a:tcPr>
-                </a:tc>
-                <a:tc>
-                  <a:txBody>
-                    <a:bodyPr wrap="square"/>
-                    <a:lstStyle/>
-                    <a:p>
-                      <a:r>
-                        <a:rPr sz="1100" b="0">
-                          <a:solidFill>
-                            <a:srgbClr val="282828"/>
-                          </a:solidFill>
-                          <a:latin typeface="Arial"/>
-                        </a:rPr>
-                        <a:t>—</a:t>
-                      </a:r>
-                    </a:p>
-                  </a:txBody>
-                  <a:tcPr marL="54864" marR="54864" marT="18288" marB="18288">
-                    <a:solidFill>
-                      <a:srgbClr val="ECF1F6"/>
-                    </a:solidFill>
-                  </a:tcPr>
-                </a:tc>
-                <a:tc>
-                  <a:txBody>
-                    <a:bodyPr wrap="square"/>
-                    <a:lstStyle/>
-                    <a:p>
-                      <a:r>
-                        <a:rPr sz="1100" b="0">
-                          <a:solidFill>
-                            <a:srgbClr val="282828"/>
-                          </a:solidFill>
-                          <a:latin typeface="Arial"/>
-                        </a:rPr>
-                        <a:t>blur demo: box-kernel collapse</a:t>
-                      </a:r>
-                    </a:p>
-                  </a:txBody>
-                  <a:tcPr marL="54864" marR="54864" marT="18288" marB="18288">
-                    <a:solidFill>
-                      <a:srgbClr val="ECF1F6"/>
-                    </a:solidFill>
-                  </a:tcPr>
-                </a:tc>
-                <a:tc>
-                  <a:txBody>
-                    <a:bodyPr wrap="square"/>
-                    <a:lstStyle/>
-                    <a:p>
-                      <a:r>
-                        <a:rPr sz="1100" b="0">
-                          <a:solidFill>
-                            <a:srgbClr val="282828"/>
-                          </a:solidFill>
-                          <a:latin typeface="Arial"/>
-                        </a:rPr>
-                        <a:t>same</a:t>
-                      </a:r>
-                    </a:p>
-                  </a:txBody>
-                  <a:tcPr marL="54864" marR="54864" marT="18288" marB="18288">
-                    <a:solidFill>
-                      <a:srgbClr val="ECF1F6"/>
-                    </a:solidFill>
-                  </a:tcPr>
-                </a:tc>
-                <a:tc>
-                  <a:txBody>
-                    <a:bodyPr wrap="square"/>
-                    <a:lstStyle/>
-                    <a:p>
-                      <a:r>
-                        <a:rPr sz="1100" b="0">
-                          <a:solidFill>
-                            <a:srgbClr val="282828"/>
-                          </a:solidFill>
-                          <a:latin typeface="Arial"/>
-                        </a:rPr>
-                        <a:t>same</a:t>
-                      </a:r>
-                    </a:p>
-                  </a:txBody>
-                  <a:tcPr marL="54864" marR="54864" marT="18288" marB="18288">
-                    <a:solidFill>
-                      <a:srgbClr val="ECF1F6"/>
-                    </a:solidFill>
-                  </a:tcPr>
-                </a:tc>
-              </a:tr>
-              <a:tr h="468630">
-                <a:tc>
-                  <a:txBody>
-                    <a:bodyPr wrap="square"/>
-                    <a:lstStyle/>
-                    <a:p>
-                      <a:r>
-                        <a:rPr sz="1100" b="0">
-                          <a:solidFill>
-                            <a:srgbClr val="282828"/>
-                          </a:solidFill>
-                          <a:latin typeface="Arial"/>
-                        </a:rPr>
-                        <a:t>~2</a:t>
-                      </a:r>
-                    </a:p>
-                  </a:txBody>
-                  <a:tcPr marL="54864" marR="54864" marT="18288" marB="18288">
-                    <a:solidFill>
-                      <a:srgbClr val="FFFFFF"/>
-                    </a:solidFill>
-                  </a:tcPr>
-                </a:tc>
-                <a:tc>
-                  <a:txBody>
-                    <a:bodyPr wrap="square"/>
-                    <a:lstStyle/>
-                    <a:p>
-                      <a:r>
-                        <a:rPr sz="1100" b="0">
-                          <a:solidFill>
-                            <a:srgbClr val="282828"/>
-                          </a:solidFill>
-                          <a:latin typeface="Arial"/>
-                        </a:rPr>
-                        <a:t>complete; blur and registration absorbed by the matrix measured on the surface</a:t>
-                      </a:r>
-                    </a:p>
-                  </a:txBody>
-                  <a:tcPr marL="54864" marR="54864" marT="18288" marB="18288">
-                    <a:solidFill>
-                      <a:srgbClr val="FFFFFF"/>
-                    </a:solidFill>
-                  </a:tcPr>
-                </a:tc>
-                <a:tc>
-                  <a:txBody>
-                    <a:bodyPr wrap="square"/>
-                    <a:lstStyle/>
-                    <a:p>
-                      <a:r>
-                        <a:rPr sz="1100" b="0">
-                          <a:solidFill>
-                            <a:srgbClr val="282828"/>
-                          </a:solidFill>
-                          <a:latin typeface="Arial"/>
-                        </a:rPr>
-                        <a:t>held (records at 3.3–4)</a:t>
-                      </a:r>
-                    </a:p>
-                  </a:txBody>
-                  <a:tcPr marL="54864" marR="54864" marT="18288" marB="18288">
-                    <a:solidFill>
-                      <a:srgbClr val="FFFFFF"/>
-                    </a:solidFill>
-                  </a:tcPr>
-                </a:tc>
-                <a:tc>
-                  <a:txBody>
-                    <a:bodyPr wrap="square"/>
-                    <a:lstStyle/>
-                    <a:p>
-                      <a:r>
-                        <a:rPr sz="1100" b="0">
-                          <a:solidFill>
-                            <a:srgbClr val="282828"/>
-                          </a:solidFill>
-                          <a:latin typeface="Arial"/>
-                        </a:rPr>
-                        <a:t>unchanged (well-bound)</a:t>
-                      </a:r>
-                    </a:p>
-                  </a:txBody>
-                  <a:tcPr marL="54864" marR="54864" marT="18288" marB="18288">
-                    <a:solidFill>
-                      <a:srgbClr val="FFFFFF"/>
-                    </a:solidFill>
-                  </a:tcPr>
-                </a:tc>
-                <a:tc>
-                  <a:txBody>
-                    <a:bodyPr wrap="square"/>
-                    <a:lstStyle/>
-                    <a:p>
-                      <a:r>
-                        <a:rPr sz="1100" b="0">
-                          <a:solidFill>
-                            <a:srgbClr val="282828"/>
-                          </a:solidFill>
-                          <a:latin typeface="Arial"/>
-                        </a:rPr>
-                        <a:t>0.04 Mpx</a:t>
-                      </a:r>
-                    </a:p>
-                  </a:txBody>
-                  <a:tcPr marL="54864" marR="54864" marT="18288" marB="18288">
-                    <a:solidFill>
-                      <a:srgbClr val="FFFFFF"/>
-                    </a:solidFill>
-                  </a:tcPr>
-                </a:tc>
-                <a:tc>
-                  <a:txBody>
-                    <a:bodyPr wrap="square"/>
-                    <a:lstStyle/>
-                    <a:p>
-                      <a:r>
-                        <a:rPr sz="1100" b="0">
-                          <a:solidFill>
-                            <a:srgbClr val="282828"/>
-                          </a:solidFill>
-                          <a:latin typeface="Arial"/>
-                        </a:rPr>
-                        <a:t>2 pm floor (record, 4 px)</a:t>
-                      </a:r>
-                    </a:p>
-                  </a:txBody>
-                  <a:tcPr marL="54864" marR="54864" marT="18288" marB="18288">
-                    <a:solidFill>
-                      <a:srgbClr val="FFFFFF"/>
-                    </a:solidFill>
-                  </a:tcPr>
-                </a:tc>
-                <a:tc>
-                  <a:txBody>
-                    <a:bodyPr wrap="square"/>
-                    <a:lstStyle/>
-                    <a:p>
-                      <a:r>
-                        <a:rPr sz="1100" b="0">
-                          <a:solidFill>
-                            <a:srgbClr val="282828"/>
-                          </a:solidFill>
-                          <a:latin typeface="Arial"/>
-                        </a:rPr>
-                        <a:t>2 pm floor (record)</a:t>
-                      </a:r>
-                    </a:p>
-                  </a:txBody>
-                  <a:tcPr marL="54864" marR="54864" marT="18288" marB="18288">
-                    <a:solidFill>
-                      <a:srgbClr val="FFFFFF"/>
-                    </a:solidFill>
-                  </a:tcPr>
-                </a:tc>
-                <a:tc>
-                  <a:txBody>
-                    <a:bodyPr wrap="square"/>
-                    <a:lstStyle/>
-                    <a:p>
-                      <a:r>
-                        <a:rPr sz="1100" b="0">
-                          <a:solidFill>
-                            <a:srgbClr val="282828"/>
-                          </a:solidFill>
-                          <a:latin typeface="Arial"/>
-                        </a:rPr>
-                        <a:t>2 pm floor; lock-in C4 = 5.3</a:t>
-                      </a:r>
-                    </a:p>
-                  </a:txBody>
-                  <a:tcPr marL="54864" marR="54864" marT="18288" marB="18288">
-                    <a:solidFill>
-                      <a:srgbClr val="FFFFFF"/>
-                    </a:solidFill>
-                  </a:tcPr>
-                </a:tc>
-              </a:tr>
-              <a:tr h="468630">
-                <a:tc>
-                  <a:txBody>
-                    <a:bodyPr wrap="square"/>
-                    <a:lstStyle/>
-                    <a:p>
-                      <a:r>
-                        <a:rPr sz="1100" b="0">
-                          <a:solidFill>
-                            <a:srgbClr val="282828"/>
-                          </a:solidFill>
-                          <a:latin typeface="Arial"/>
-                        </a:rPr>
-                        <a:t>5 – 10</a:t>
-                      </a:r>
-                    </a:p>
-                  </a:txBody>
-                  <a:tcPr marL="54864" marR="54864" marT="18288" marB="18288">
-                    <a:solidFill>
-                      <a:srgbClr val="ECF1F6"/>
-                    </a:solidFill>
-                  </a:tcPr>
-                </a:tc>
-                <a:tc>
-                  <a:txBody>
-                    <a:bodyPr wrap="square"/>
-                    <a:lstStyle/>
-                    <a:p>
-                      <a:r>
-                        <a:rPr sz="1100" b="0">
-                          <a:solidFill>
-                            <a:srgbClr val="282828"/>
-                          </a:solidFill>
-                          <a:latin typeface="Arial"/>
-                        </a:rPr>
-                        <a:t>single actuators resolved with margin; ±1 px = ±0.1 pitch registration</a:t>
-                      </a:r>
-                    </a:p>
-                  </a:txBody>
-                  <a:tcPr marL="54864" marR="54864" marT="18288" marB="18288">
-                    <a:solidFill>
-                      <a:srgbClr val="ECF1F6"/>
-                    </a:solidFill>
-                  </a:tcPr>
-                </a:tc>
-                <a:tc>
-                  <a:txBody>
-                    <a:bodyPr wrap="square"/>
-                    <a:lstStyle/>
-                    <a:p>
-                      <a:r>
-                        <a:rPr sz="1100" b="0">
-                          <a:solidFill>
-                            <a:srgbClr val="282828"/>
-                          </a:solidFill>
-                          <a:latin typeface="Arial"/>
-                        </a:rPr>
-                        <a:t>same</a:t>
-                      </a:r>
-                    </a:p>
-                  </a:txBody>
-                  <a:tcPr marL="54864" marR="54864" marT="18288" marB="18288">
-                    <a:solidFill>
-                      <a:srgbClr val="ECF1F6"/>
-                    </a:solidFill>
-                  </a:tcPr>
-                </a:tc>
-                <a:tc>
-                  <a:txBody>
-                    <a:bodyPr wrap="square"/>
-                    <a:lstStyle/>
-                    <a:p>
-                      <a:r>
-                        <a:rPr sz="1100" b="0">
-                          <a:solidFill>
-                            <a:srgbClr val="282828"/>
-                          </a:solidFill>
-                          <a:latin typeface="Arial"/>
-                        </a:rPr>
-                        <a:t>same</a:t>
-                      </a:r>
-                    </a:p>
-                  </a:txBody>
-                  <a:tcPr marL="54864" marR="54864" marT="18288" marB="18288">
-                    <a:solidFill>
-                      <a:srgbClr val="ECF1F6"/>
-                    </a:solidFill>
-                  </a:tcPr>
-                </a:tc>
-                <a:tc>
-                  <a:txBody>
-                    <a:bodyPr wrap="square"/>
-                    <a:lstStyle/>
-                    <a:p>
-                      <a:r>
-                        <a:rPr sz="1100" b="0">
-                          <a:solidFill>
-                            <a:srgbClr val="282828"/>
-                          </a:solidFill>
-                          <a:latin typeface="Arial"/>
-                        </a:rPr>
-                        <a:t>0.25–1 Mpx, ~0.5 Gb/s; per-pixel solve ∝ pixels</a:t>
-                      </a:r>
-                    </a:p>
-                  </a:txBody>
-                  <a:tcPr marL="54864" marR="54864" marT="18288" marB="18288">
-                    <a:solidFill>
-                      <a:srgbClr val="ECF1F6"/>
-                    </a:solidFill>
-                  </a:tcPr>
-                </a:tc>
-                <a:tc>
-                  <a:txBody>
-                    <a:bodyPr wrap="square"/>
-                    <a:lstStyle/>
-                    <a:p>
-                      <a:r>
-                        <a:rPr sz="1100" b="0">
-                          <a:solidFill>
-                            <a:srgbClr val="282828"/>
-                          </a:solidFill>
-                          <a:latin typeface="Arial"/>
-                        </a:rPr>
-                        <a:t>✓ 1k²</a:t>
-                      </a:r>
-                    </a:p>
-                  </a:txBody>
-                  <a:tcPr marL="54864" marR="54864" marT="18288" marB="18288">
-                    <a:solidFill>
-                      <a:srgbClr val="ECF1F6"/>
-                    </a:solidFill>
-                  </a:tcPr>
-                </a:tc>
-                <a:tc>
-                  <a:txBody>
-                    <a:bodyPr wrap="square"/>
-                    <a:lstStyle/>
-                    <a:p>
-                      <a:r>
-                        <a:rPr sz="1100" b="0">
-                          <a:solidFill>
-                            <a:srgbClr val="282828"/>
-                          </a:solidFill>
-                          <a:latin typeface="Arial"/>
-                        </a:rPr>
-                        <a:t>✓ two images per pol. camera</a:t>
-                      </a:r>
-                    </a:p>
-                  </a:txBody>
-                  <a:tcPr marL="54864" marR="54864" marT="18288" marB="18288">
-                    <a:solidFill>
-                      <a:srgbClr val="ECF1F6"/>
-                    </a:solidFill>
-                  </a:tcPr>
-                </a:tc>
-                <a:tc>
-                  <a:txBody>
-                    <a:bodyPr wrap="square"/>
-                    <a:lstStyle/>
-                    <a:p>
-                      <a:r>
-                        <a:rPr sz="1100" b="0">
-                          <a:solidFill>
-                            <a:srgbClr val="282828"/>
-                          </a:solidFill>
-                          <a:latin typeface="Arial"/>
-                        </a:rPr>
-                        <a:t>Feng 9.4; C4M 10.6</a:t>
-                      </a:r>
-                    </a:p>
-                  </a:txBody>
-                  <a:tcPr marL="54864" marR="54864" marT="18288" marB="18288">
-                    <a:solidFill>
-                      <a:srgbClr val="ECF1F6"/>
-                    </a:solidFill>
-                  </a:tcPr>
-                </a:tc>
-              </a:tr>
-              <a:tr h="468630">
-                <a:tc>
-                  <a:txBody>
-                    <a:bodyPr wrap="square"/>
-                    <a:lstStyle/>
-                    <a:p>
-                      <a:r>
-                        <a:rPr sz="1100" b="0">
-                          <a:solidFill>
-                            <a:srgbClr val="282828"/>
-                          </a:solidFill>
-                          <a:latin typeface="Arial"/>
-                        </a:rPr>
-                        <a:t>20</a:t>
-                      </a:r>
-                    </a:p>
-                  </a:txBody>
-                  <a:tcPr marL="54864" marR="54864" marT="18288" marB="18288">
-                    <a:solidFill>
-                      <a:srgbClr val="FFFFFF"/>
-                    </a:solidFill>
-                  </a:tcPr>
-                </a:tc>
-                <a:tc>
-                  <a:txBody>
-                    <a:bodyPr wrap="square"/>
-                    <a:lstStyle/>
-                    <a:p>
-                      <a:r>
-                        <a:rPr sz="1100" b="0">
-                          <a:solidFill>
-                            <a:srgbClr val="282828"/>
-                          </a:solidFill>
-                          <a:latin typeface="Arial"/>
-                        </a:rPr>
-                        <a:t>no gauge gain; read noise per sample ↑ (binning restores it)</a:t>
-                      </a:r>
-                    </a:p>
-                  </a:txBody>
-                  <a:tcPr marL="54864" marR="54864" marT="18288" marB="18288">
-                    <a:solidFill>
-                      <a:srgbClr val="FFFFFF"/>
-                    </a:solidFill>
-                  </a:tcPr>
-                </a:tc>
-                <a:tc>
-                  <a:txBody>
-                    <a:bodyPr wrap="square"/>
-                    <a:lstStyle/>
-                    <a:p>
-                      <a:r>
-                        <a:rPr sz="1100" b="0">
-                          <a:solidFill>
-                            <a:srgbClr val="282828"/>
-                          </a:solidFill>
-                          <a:latin typeface="Arial"/>
-                        </a:rPr>
-                        <a:t>same</a:t>
-                      </a:r>
-                    </a:p>
-                  </a:txBody>
-                  <a:tcPr marL="54864" marR="54864" marT="18288" marB="18288">
-                    <a:solidFill>
-                      <a:srgbClr val="FFFFFF"/>
-                    </a:solidFill>
-                  </a:tcPr>
-                </a:tc>
-                <a:tc>
-                  <a:txBody>
-                    <a:bodyPr wrap="square"/>
-                    <a:lstStyle/>
-                    <a:p>
-                      <a:r>
-                        <a:rPr sz="1100" b="0">
-                          <a:solidFill>
-                            <a:srgbClr val="282828"/>
-                          </a:solidFill>
-                          <a:latin typeface="Arial"/>
-                        </a:rPr>
-                        <a:t>same</a:t>
-                      </a:r>
-                    </a:p>
-                  </a:txBody>
-                  <a:tcPr marL="54864" marR="54864" marT="18288" marB="18288">
-                    <a:solidFill>
-                      <a:srgbClr val="FFFFFF"/>
-                    </a:solidFill>
-                  </a:tcPr>
-                </a:tc>
-                <a:tc>
-                  <a:txBody>
-                    <a:bodyPr wrap="square"/>
-                    <a:lstStyle/>
-                    <a:p>
-                      <a:r>
-                        <a:rPr sz="1100" b="0">
-                          <a:solidFill>
-                            <a:srgbClr val="282828"/>
-                          </a:solidFill>
-                          <a:latin typeface="Arial"/>
-                        </a:rPr>
-                        <a:t>5 Mpx, 2–5 Gb/s</a:t>
-                      </a:r>
-                    </a:p>
-                  </a:txBody>
-                  <a:tcPr marL="54864" marR="54864" marT="18288" marB="18288">
-                    <a:solidFill>
-                      <a:srgbClr val="FFFFFF"/>
-                    </a:solidFill>
-                  </a:tcPr>
-                </a:tc>
-                <a:tc>
-                  <a:txBody>
-                    <a:bodyPr wrap="square"/>
-                    <a:lstStyle/>
-                    <a:p>
-                      <a:r>
-                        <a:rPr sz="1100" b="0">
-                          <a:solidFill>
-                            <a:srgbClr val="282828"/>
-                          </a:solidFill>
-                          <a:latin typeface="Arial"/>
-                        </a:rPr>
-                        <a:t>pco.edge class</a:t>
-                      </a:r>
-                    </a:p>
-                  </a:txBody>
-                  <a:tcPr marL="54864" marR="54864" marT="18288" marB="18288">
-                    <a:solidFill>
-                      <a:srgbClr val="FFFFFF"/>
-                    </a:solidFill>
-                  </a:tcPr>
-                </a:tc>
-                <a:tc>
-                  <a:txBody>
-                    <a:bodyPr wrap="square"/>
-                    <a:lstStyle/>
-                    <a:p>
-                      <a:r>
-                        <a:rPr sz="1100" b="0">
-                          <a:solidFill>
-                            <a:srgbClr val="282828"/>
-                          </a:solidFill>
-                          <a:latin typeface="Arial"/>
-                        </a:rPr>
-                        <a:t>—</a:t>
-                      </a:r>
-                    </a:p>
-                  </a:txBody>
-                  <a:tcPr marL="54864" marR="54864" marT="18288" marB="18288">
-                    <a:solidFill>
-                      <a:srgbClr val="FFFFFF"/>
-                    </a:solidFill>
-                  </a:tcPr>
-                </a:tc>
-                <a:tc>
-                  <a:txBody>
-                    <a:bodyPr wrap="square"/>
-                    <a:lstStyle/>
-                    <a:p>
-                      <a:r>
-                        <a:rPr sz="1100" b="0">
-                          <a:solidFill>
-                            <a:srgbClr val="282828"/>
-                          </a:solidFill>
-                          <a:latin typeface="Arial"/>
-                        </a:rPr>
-                        <a:t>pco.edge GS 21</a:t>
-                      </a:r>
-                    </a:p>
-                  </a:txBody>
-                  <a:tcPr marL="54864" marR="54864" marT="18288" marB="18288">
-                    <a:solidFill>
-                      <a:srgbClr val="FFFFFF"/>
-                    </a:solidFill>
-                  </a:tcPr>
-                </a:tc>
-              </a:tr>
-            </a:tbl>
-          </a:graphicData>
-        </a:graphic>
-      </p:graphicFrame>
+        </p:nvPicPr>
+        <p:blipFill>
+          <a:blip r:embed="rId2"/>
+          <a:stretch>
+            <a:fillRect/>
+          </a:stretch>
+        </p:blipFill>
+        <p:spPr>
+          <a:xfrm>
+            <a:off x="2756478" y="1298448"/>
+            <a:ext cx="6678737" cy="2897632"/>
+          </a:xfrm>
+          <a:prstGeom prst="rect">
+            <a:avLst/>
+          </a:prstGeom>
+        </p:spPr>
+      </p:pic>
       <p:sp>
         <p:nvSpPr>
           <p:cNvPr id="5" name="TextBox 4"/>
@@ -11895,8 +10819,8 @@
         </p:nvSpPr>
         <p:spPr>
           <a:xfrm>
-            <a:off x="411480" y="4256532"/>
-            <a:ext cx="11368735" cy="274320"/>
+            <a:off x="411480" y="4214368"/>
+            <a:ext cx="11368735" cy="394208"/>
           </a:xfrm>
           <a:prstGeom prst="rect">
             <a:avLst/>
@@ -11909,96 +10833,19 @@
           </a:bodyPr>
           <a:lstStyle/>
           <a:p>
-            <a:pPr>
+            <a:pPr algn="ctr">
               <a:spcAft>
-                <a:spcPts val="600"/>
+                <a:spcPts val="0"/>
               </a:spcAft>
             </a:pPr>
             <a:r>
-              <a:rPr sz="1500" b="0">
-                <a:solidFill>
-                  <a:srgbClr val="282828"/>
-                </a:solidFill>
-                <a:latin typeface="Arial"/>
-              </a:rPr>
-              <a:t>•  </a:t>
-            </a:r>
-            <a:r>
-              <a:rPr sz="1500" b="1">
-                <a:solidFill>
-                  <a:srgbClr val="282828"/>
-                </a:solidFill>
-                <a:latin typeface="Arial"/>
-              </a:rPr>
-              <a:t>Measured vs inferred:</a:t>
-            </a:r>
-            <a:r>
-              <a:rPr sz="1500" b="0">
-                <a:solidFill>
-                  <a:srgbClr val="282828"/>
-                </a:solidFill>
-                <a:latin typeface="Arial"/>
-              </a:rPr>
-              <a:t> every record is at 3.3–4 px per actuator (the IFO's mirror-rig image, distorted by more than a pitch at the edge, still reads to 2 pm); the collapse band is the blur demo's; the 5–20 rows follow from the well-bound photon rule and the data rates.</a:t>
-            </a:r>
-          </a:p>
-          <a:p>
-            <a:pPr marL="594360" indent="-137160">
-              <a:spcAft>
-                <a:spcPts val="500"/>
-              </a:spcAft>
-            </a:pPr>
-            <a:r>
-              <a:rPr sz="1300" b="0">
+              <a:rPr sz="1000" b="0">
                 <a:solidFill>
                   <a:srgbClr val="6E6E6E"/>
                 </a:solidFill>
                 <a:latin typeface="Arial"/>
               </a:rPr>
-              <a:t>–  </a:t>
-            </a:r>
-            <a:r>
-              <a:rPr sz="1300" b="1">
-                <a:solidFill>
-                  <a:srgbClr val="6E6E6E"/>
-                </a:solidFill>
-                <a:latin typeface="Arial"/>
-              </a:rPr>
-              <a:t>a per-gauge sweep at 1, 1.5, 2 and 4 px per actuator is running now</a:t>
-            </a:r>
-          </a:p>
-          <a:p>
-            <a:pPr marL="0" indent="0">
-              <a:spcAft>
-                <a:spcPts val="600"/>
-              </a:spcAft>
-            </a:pPr>
-            <a:r>
-              <a:rPr sz="1500" b="0">
-                <a:solidFill>
-                  <a:srgbClr val="282828"/>
-                </a:solidFill>
-                <a:latin typeface="Arial"/>
-              </a:rPr>
-              <a:t>•  </a:t>
-            </a:r>
-            <a:r>
-              <a:rPr sz="1500" b="1">
-                <a:solidFill>
-                  <a:srgbClr val="282828"/>
-                </a:solidFill>
-                <a:latin typeface="Arial"/>
-              </a:rPr>
-              <a:t>Where the three differ:</a:t>
-            </a:r>
-            <a:r>
-              <a:rPr sz="1500" b="0">
-                <a:solidFill>
-                  <a:srgbClr val="282828"/>
-                </a:solidFill>
-                <a:latin typeface="Arial"/>
-              </a:rPr>
-              <a:t> the IFO and HET read against a reference and are indifferent above 2 px; the vector ZWFS solves pixel by pixel from two images, wants ≥ 4, and pays processing for more; the lock-in fixes HET's sampling at the device (5.3 / 10.6) with the processing on-chip.  Regularization and calibration do not change with pixel count above 2.</a:t>
+              <a:t>Left: noise-only hold at each sensor's own loop cycle; right: averaging time to 1 pm per actuator — both vs camera pixels per actuator pitch, one line per reading; shaded = the single-actuator row fails; hollow = the ZWFS on a point-sampled grid, not camera pixels.</a:t>
             </a:r>
           </a:p>
         </p:txBody>
@@ -12011,8 +10858,8 @@
         </p:nvSpPr>
         <p:spPr>
           <a:xfrm>
-            <a:off x="411480" y="6401562"/>
-            <a:ext cx="11368735" cy="274320"/>
+            <a:off x="411480" y="4645152"/>
+            <a:ext cx="5806440" cy="274320"/>
           </a:xfrm>
           <a:prstGeom prst="rect">
             <a:avLst/>
@@ -12031,13 +10878,211 @@
               </a:spcAft>
             </a:pPr>
             <a:r>
+              <a:rPr sz="1200" b="0">
+                <a:solidFill>
+                  <a:srgbClr val="282828"/>
+                </a:solidFill>
+                <a:latin typeface="Arial"/>
+              </a:rPr>
+              <a:t>•  </a:t>
+            </a:r>
+            <a:r>
+              <a:rPr sz="1200" b="1">
+                <a:solidFill>
+                  <a:srgbClr val="282828"/>
+                </a:solidFill>
+                <a:latin typeface="Arial"/>
+              </a:rPr>
+              <a:t>1 px per actuator fails every reading the same way:</a:t>
+            </a:r>
+            <a:r>
+              <a:rPr sz="1200" b="0">
+                <a:solidFill>
+                  <a:srgbClr val="282828"/>
+                </a:solidFill>
+                <a:latin typeface="Arial"/>
+              </a:rPr>
+              <a:t> single-actuator floor 13–32 pm (from 1.2–2.6), converged gain off 0.4–0.5 %; the "wrong actuator" never happens — the fit degrades, it does not swap.</a:t>
+            </a:r>
+          </a:p>
+          <a:p>
+            <a:pPr>
+              <a:spcAft>
+                <a:spcPts val="600"/>
+              </a:spcAft>
+            </a:pPr>
+            <a:r>
+              <a:rPr sz="1200" b="0">
+                <a:solidFill>
+                  <a:srgbClr val="282828"/>
+                </a:solidFill>
+                <a:latin typeface="Arial"/>
+              </a:rPr>
+              <a:t>•  </a:t>
+            </a:r>
+            <a:r>
+              <a:rPr sz="1200" b="1">
+                <a:solidFill>
+                  <a:srgbClr val="282828"/>
+                </a:solidFill>
+                <a:latin typeface="Arial"/>
+              </a:rPr>
+              <a:t>1.5–2 px holds but pays in time:</a:t>
+            </a:r>
+            <a:r>
+              <a:rPr sz="1200" b="0">
+                <a:solidFill>
+                  <a:srgbClr val="282828"/>
+                </a:solidFill>
+                <a:latin typeface="Arial"/>
+              </a:rPr>
+              <a:t> HET 69–74 s per pm against 36 at 3.3 (Photonfocus); IFO 266–302 against 161; vector ZWFS 1040–1150 against 639 — 1.6–2×, because a coarser pixel INTEGRATES the fringe (the point-sampled ZWFS at 1.65, hollow, costs nothing).</a:t>
+            </a:r>
+          </a:p>
+        </p:txBody>
+      </p:sp>
+      <p:sp>
+        <p:nvSpPr>
+          <p:cNvPr id="7" name="TextBox 6"/>
+          <p:cNvSpPr txBox="1"/>
+          <p:nvPr/>
+        </p:nvSpPr>
+        <p:spPr>
+          <a:xfrm>
+            <a:off x="6400800" y="4645152"/>
+            <a:ext cx="5394960" cy="274320"/>
+          </a:xfrm>
+          <a:prstGeom prst="rect">
+            <a:avLst/>
+          </a:prstGeom>
+          <a:noFill/>
+        </p:spPr>
+        <p:txBody>
+          <a:bodyPr wrap="square">
+            <a:spAutoFit/>
+          </a:bodyPr>
+          <a:lstStyle/>
+          <a:p>
+            <a:pPr>
+              <a:spcAft>
+                <a:spcPts val="600"/>
+              </a:spcAft>
+            </a:pPr>
+            <a:r>
+              <a:rPr sz="1200" b="0">
+                <a:solidFill>
+                  <a:srgbClr val="282828"/>
+                </a:solidFill>
+                <a:latin typeface="Arial"/>
+              </a:rPr>
+              <a:t>•  </a:t>
+            </a:r>
+            <a:r>
+              <a:rPr sz="1200" b="1">
+                <a:solidFill>
+                  <a:srgbClr val="282828"/>
+                </a:solidFill>
+                <a:latin typeface="Arial"/>
+              </a:rPr>
+              <a:t>Above 3.3 px nothing changes</a:t>
+            </a:r>
+            <a:r>
+              <a:rPr sz="1200" b="0">
+                <a:solidFill>
+                  <a:srgbClr val="282828"/>
+                </a:solidFill>
+                <a:latin typeface="Arial"/>
+              </a:rPr>
+              <a:t> (4 = 3.3 to the digit); the records at 3.3 stand.</a:t>
+            </a:r>
+          </a:p>
+          <a:p>
+            <a:pPr marL="594360" indent="-137160">
+              <a:spcAft>
+                <a:spcPts val="500"/>
+              </a:spcAft>
+            </a:pPr>
+            <a:r>
               <a:rPr sz="1050" b="0">
                 <a:solidFill>
                   <a:srgbClr val="6E6E6E"/>
                 </a:solidFill>
                 <a:latin typeface="Arial"/>
               </a:rPr>
-              <a:t>Blur demo (pupil_blur_demo, REPORT_pupil_blur); gauge deck (IFO, vZWFS); stages noise and format (HET); ruling 6 (2026-10-11).  Data rates: pixels × 16 bit × frame rate.</a:t>
+              <a:t>–  registration: a ±0.1-pitch shift after calibration costs gain 0.95 and a 16–18 pm floor at EVERY sampling ≥ 1.5 — the camera must stay registered to ~0.03 pitch, whatever the pixel count</a:t>
+            </a:r>
+          </a:p>
+          <a:p>
+            <a:pPr marL="0" indent="0">
+              <a:spcAft>
+                <a:spcPts val="600"/>
+              </a:spcAft>
+            </a:pPr>
+            <a:r>
+              <a:rPr sz="1200" b="0">
+                <a:solidFill>
+                  <a:srgbClr val="282828"/>
+                </a:solidFill>
+                <a:latin typeface="Arial"/>
+              </a:rPr>
+              <a:t>•  </a:t>
+            </a:r>
+            <a:r>
+              <a:rPr sz="1200" b="1">
+                <a:solidFill>
+                  <a:srgbClr val="282828"/>
+                </a:solidFill>
+                <a:latin typeface="Arial"/>
+              </a:rPr>
+              <a:t>The lock-in's advantage survives the sweep:</a:t>
+            </a:r>
+            <a:r>
+              <a:rPr sz="1200" b="0">
+                <a:solidFill>
+                  <a:srgbClr val="282828"/>
+                </a:solidFill>
+                <a:latin typeface="Arial"/>
+              </a:rPr>
+              <a:t> 3.4 / 5.4 / 6.3 s per pm at 3.3 / 2 / 1.5 px, holding 3.1 / 4.0 / 4.3 pm at 0.125 s cycles — 10× the Photonfocus at every sampling.</a:t>
+            </a:r>
+          </a:p>
+        </p:txBody>
+      </p:sp>
+      <p:sp>
+        <p:nvSpPr>
+          <p:cNvPr id="8" name="TextBox 7"/>
+          <p:cNvSpPr txBox="1"/>
+          <p:nvPr/>
+        </p:nvSpPr>
+        <p:spPr>
+          <a:xfrm>
+            <a:off x="6400800" y="6600317"/>
+            <a:ext cx="5394960" cy="274320"/>
+          </a:xfrm>
+          <a:prstGeom prst="rect">
+            <a:avLst/>
+          </a:prstGeom>
+          <a:noFill/>
+        </p:spPr>
+        <p:txBody>
+          <a:bodyPr wrap="square">
+            <a:spAutoFit/>
+          </a:bodyPr>
+          <a:lstStyle/>
+          <a:p>
+            <a:pPr>
+              <a:spcAft>
+                <a:spcPts val="600"/>
+              </a:spcAft>
+            </a:pPr>
+            <a:r>
+              <a:rPr sz="1050" b="0">
+                <a:solidFill>
+                  <a:srgbClr val="6E6E6E"/>
+                </a:solidFill>
+                <a:latin typeface="Arial"/>
+              </a:rPr>
+              <a:t>ressweep_run / ressweep_zrun / ressweep_figs (cophi_dm96/runs/ressweep_*, TO 2026-10-13); mechanism dmg_camres (frames box-integrated onto camera pixels, the matrix measured through them); gate tResolutionSweep 7/7.</a:t>
             </a:r>
           </a:p>
         </p:txBody>
@@ -12169,7 +11214,7 @@
         </p:nvGraphicFramePr>
         <p:xfrm>
           <a:off x="411480" y="1298448"/>
-          <a:ext cx="11368734" cy="4034790"/>
+          <a:ext cx="11368734" cy="4223385"/>
         </p:xfrm>
         <a:graphic>
           <a:graphicData uri="http://schemas.openxmlformats.org/drawingml/2006/table">
@@ -12510,7 +11555,7 @@
                   </a:tcPr>
                 </a:tc>
               </a:tr>
-              <a:tr h="468630">
+              <a:tr h="657225">
                 <a:tc>
                   <a:txBody>
                     <a:bodyPr wrap="square"/>
@@ -12611,7 +11656,7 @@
                           </a:solidFill>
                           <a:latin typeface="Arial"/>
                         </a:rPr>
-                        <a:t>3.35 / 3.73 (×1.11 square-wave)</a:t>
+                        <a:t>3.35 / 3.73 (×1.23 in time for two-tap demodulation)</a:t>
                       </a:r>
                     </a:p>
                   </a:txBody>
@@ -13996,7 +13041,7 @@
                 </a:solidFill>
                 <a:latin typeface="Arial"/>
               </a:rPr>
-              <a:t> the lens rig's +0.1–0.2 % converged gain (a matrix-model term); the per-gauge resolution sweep (slide 18); the polarization-camera timings through the noise hook (slide 17).</a:t>
+              <a:t> the lens rig's +0.1–0.2 % converged gain (a matrix-model term); the polarization-camera timings through the noise hook (slide 17); the lock-in's demodulation form from the vendor (two-tap square-wave assumed).</a:t>
             </a:r>
           </a:p>
           <a:p>
@@ -14043,7 +13088,7 @@
         </p:nvSpPr>
         <p:spPr>
           <a:xfrm>
-            <a:off x="6400800" y="3002280"/>
+            <a:off x="6400800" y="3200400"/>
             <a:ext cx="5394960" cy="274320"/>
           </a:xfrm>
           <a:prstGeom prst="rect">
@@ -18397,6 +17442,22 @@
             </a:r>
           </a:p>
           <a:p>
+            <a:pPr marL="594360" indent="-137160">
+              <a:spcAft>
+                <a:spcPts val="500"/>
+              </a:spcAft>
+            </a:pPr>
+            <a:r>
+              <a:rPr sz="1250" b="0">
+                <a:solidFill>
+                  <a:srgbClr val="6E6E6E"/>
+                </a:solidFill>
+                <a:latin typeface="Arial"/>
+              </a:rPr>
+              <a:t>–  a real lock-in pixel (CSEM lineage, heliCam) steers charge between two taps by a square-wave reference — Feng's four-step inside the pixel; the bucket penalty is ×1.11 in σ, carried in every lock-in row</a:t>
+            </a:r>
+          </a:p>
+          <a:p>
             <a:pPr marL="0" indent="0">
               <a:spcAft>
                 <a:spcPts val="600"/>
@@ -18458,7 +17519,7 @@
         </p:nvGraphicFramePr>
         <p:xfrm>
           <a:off x="6400800" y="1298448"/>
-          <a:ext cx="5394959" cy="3646170"/>
+          <a:ext cx="5394959" cy="4160520"/>
         </p:xfrm>
         <a:graphic>
           <a:graphicData uri="http://schemas.openxmlformats.org/drawingml/2006/table">
@@ -18467,11 +17528,11 @@
                 <a:tableStyleId>{5C22544A-7EE6-4342-B048-85BDC9FD1C3A}</a:tableStyleId>
               </a:tblPr>
               <a:tblGrid>
-                <a:gridCol w="1604535"/>
-                <a:gridCol w="720878"/>
-                <a:gridCol w="3069546"/>
+                <a:gridCol w="1363561"/>
+                <a:gridCol w="612614"/>
+                <a:gridCol w="3418784"/>
               </a:tblGrid>
-              <a:tr h="605790">
+              <a:tr h="777240">
                 <a:tc>
                   <a:txBody>
                     <a:bodyPr wrap="square"/>
@@ -18811,7 +17872,7 @@
                   </a:tcPr>
                 </a:tc>
               </a:tr>
-              <a:tr h="605790">
+              <a:tr h="777240">
                 <a:tc>
                   <a:txBody>
                     <a:bodyPr wrap="square"/>
@@ -18868,7 +17929,7 @@
                           </a:solidFill>
                           <a:latin typeface="Arial"/>
                         </a:rPr>
-                        <a:t>3.35 / 3.73 (read 0, mirror / lens; 4.0 / 4.4 at read 100 assumed); ×1.11 for square-wave demodulation — well-capped at the I/Q rate</a:t>
+                        <a:t>3.35 / 3.73 (read 0, mirror / lens; 4.0 / 4.4 at read 100 assumed); ×1.11 in σ (×1.23 in time) for the pixel's two-tap square-wave demodulation — well-capped at the I/Q rate</a:t>
                       </a:r>
                     </a:p>
                   </a:txBody>
@@ -18879,7 +17940,7 @@
                   </a:tcPr>
                 </a:tc>
               </a:tr>
-              <a:tr h="605790">
+              <a:tr h="777240">
                 <a:tc>
                   <a:txBody>
                     <a:bodyPr wrap="square"/>

--- a/demo_session/deck_cophi_baseline.pptx
+++ b/demo_session/deck_cophi_baseline.pptx
@@ -19088,7 +19088,7 @@
         <p:spPr>
           <a:xfrm>
             <a:off x="411480" y="1298448"/>
-            <a:ext cx="5806440" cy="2120878"/>
+            <a:ext cx="5806440" cy="1906098"/>
           </a:xfrm>
           <a:prstGeom prst="rect">
             <a:avLst/>
@@ -19103,7 +19103,7 @@
         </p:nvSpPr>
         <p:spPr>
           <a:xfrm>
-            <a:off x="411480" y="3437614"/>
+            <a:off x="411480" y="3222834"/>
             <a:ext cx="5806440" cy="559307"/>
           </a:xfrm>
           <a:prstGeom prst="rect">
@@ -19142,7 +19142,7 @@
         </p:nvSpPr>
         <p:spPr>
           <a:xfrm>
-            <a:off x="411480" y="4033498"/>
+            <a:off x="411480" y="3818718"/>
             <a:ext cx="5806440" cy="274320"/>
           </a:xfrm>
           <a:prstGeom prst="rect">

--- a/demo_session/deck_cophi_baseline.pptx
+++ b/demo_session/deck_cophi_baseline.pptx
@@ -30,6 +30,7 @@
     <p:sldId id="278" r:id="rId29"/>
     <p:sldId id="279" r:id="rId30"/>
     <p:sldId id="280" r:id="rId31"/>
+    <p:sldId id="281" r:id="rId32"/>
   </p:sldIdLst>
   <p:sldSz cx="12191695" cy="6858000" type="screen4x3"/>
   <p:notesSz cx="6858000" cy="9144000"/>
@@ -3306,7 +3307,7 @@
                 </a:solidFill>
                 <a:latin typeface="Arial"/>
               </a:rPr>
-              <a:t>Resolution and timing, camera by camera</a:t>
+              <a:t>Reading the 30 nm working surface, station by station</a:t>
             </a:r>
           </a:p>
           <a:p>
@@ -3322,7 +3323,7 @@
                 </a:solidFill>
                 <a:latin typeface="Arial"/>
               </a:rPr>
-              <a:t>The model samples the pupil at 3.3 pixels per actuator; every camera on the table oversamples the 96 × 96 lattice, so resolution costs no photons — the time to a picometer is well depth × frame rate, not pixel count</a:t>
+              <a:t>The same mirror command through the heterodyne train on the mirror rig, plain splitter; the last column is the raw map against the engine's own field</a:t>
             </a:r>
           </a:p>
         </p:txBody>
@@ -3371,931 +3372,30 @@
           </a:p>
         </p:txBody>
       </p:sp>
-      <p:graphicFrame>
-        <p:nvGraphicFramePr>
-          <p:cNvPr id="4" name="Table 3"/>
-          <p:cNvGraphicFramePr>
-            <a:graphicFrameLocks noGrp="1"/>
-          </p:cNvGraphicFramePr>
+      <p:pic>
+        <p:nvPicPr>
+          <p:cNvPr id="4" name="Picture 3" descr="cophi_stations_oap.png"/>
+          <p:cNvPicPr>
+            <a:picLocks noChangeAspect="1"/>
+          </p:cNvPicPr>
           <p:nvPr/>
-        </p:nvGraphicFramePr>
-        <p:xfrm>
-          <a:off x="411480" y="1298448"/>
-          <a:ext cx="11368734" cy="3183255"/>
-        </p:xfrm>
-        <a:graphic>
-          <a:graphicData uri="http://schemas.openxmlformats.org/drawingml/2006/table">
-            <a:tbl>
-              <a:tblPr firstRow="1" bandRow="1">
-                <a:tableStyleId>{5C22544A-7EE6-4342-B048-85BDC9FD1C3A}</a:tableStyleId>
-              </a:tblPr>
-              <a:tblGrid>
-                <a:gridCol w="3484888"/>
-                <a:gridCol w="1313974"/>
-                <a:gridCol w="1771009"/>
-                <a:gridCol w="1771009"/>
-                <a:gridCol w="3027854"/>
-              </a:tblGrid>
-              <a:tr h="468630">
-                <a:tc>
-                  <a:txBody>
-                    <a:bodyPr wrap="square"/>
-                    <a:lstStyle/>
-                    <a:p>
-                      <a:r>
-                        <a:rPr sz="1100" b="1">
-                          <a:solidFill>
-                            <a:srgbClr val="FFFFFF"/>
-                          </a:solidFill>
-                          <a:latin typeface="Arial"/>
-                        </a:rPr>
-                        <a:t>sensor / camera</a:t>
-                      </a:r>
-                    </a:p>
-                  </a:txBody>
-                  <a:tcPr marL="54864" marR="54864" marT="18288" marB="18288">
-                    <a:solidFill>
-                      <a:srgbClr val="1F4E79"/>
-                    </a:solidFill>
-                  </a:tcPr>
-                </a:tc>
-                <a:tc>
-                  <a:txBody>
-                    <a:bodyPr wrap="square"/>
-                    <a:lstStyle/>
-                    <a:p>
-                      <a:r>
-                        <a:rPr sz="1100" b="1">
-                          <a:solidFill>
-                            <a:srgbClr val="FFFFFF"/>
-                          </a:solidFill>
-                          <a:latin typeface="Arial"/>
-                        </a:rPr>
-                        <a:t>pixels across the pupil</a:t>
-                      </a:r>
-                    </a:p>
-                  </a:txBody>
-                  <a:tcPr marL="54864" marR="54864" marT="18288" marB="18288">
-                    <a:solidFill>
-                      <a:srgbClr val="1F4E79"/>
-                    </a:solidFill>
-                  </a:tcPr>
-                </a:tc>
-                <a:tc>
-                  <a:txBody>
-                    <a:bodyPr wrap="square"/>
-                    <a:lstStyle/>
-                    <a:p>
-                      <a:r>
-                        <a:rPr sz="1100" b="1">
-                          <a:solidFill>
-                            <a:srgbClr val="FFFFFF"/>
-                          </a:solidFill>
-                          <a:latin typeface="Arial"/>
-                        </a:rPr>
-                        <a:t>pixels per actuator (96 across)</a:t>
-                      </a:r>
-                    </a:p>
-                  </a:txBody>
-                  <a:tcPr marL="54864" marR="54864" marT="18288" marB="18288">
-                    <a:solidFill>
-                      <a:srgbClr val="1F4E79"/>
-                    </a:solidFill>
-                  </a:tcPr>
-                </a:tc>
-                <a:tc>
-                  <a:txBody>
-                    <a:bodyPr wrap="square"/>
-                    <a:lstStyle/>
-                    <a:p>
-                      <a:r>
-                        <a:rPr sz="1100" b="1">
-                          <a:solidFill>
-                            <a:srgbClr val="FFFFFF"/>
-                          </a:solidFill>
-                          <a:latin typeface="Arial"/>
-                        </a:rPr>
-                        <a:t>pm per reading</a:t>
-                      </a:r>
-                    </a:p>
-                  </a:txBody>
-                  <a:tcPr marL="54864" marR="54864" marT="18288" marB="18288">
-                    <a:solidFill>
-                      <a:srgbClr val="1F4E79"/>
-                    </a:solidFill>
-                  </a:tcPr>
-                </a:tc>
-                <a:tc>
-                  <a:txBody>
-                    <a:bodyPr wrap="square"/>
-                    <a:lstStyle/>
-                    <a:p>
-                      <a:r>
-                        <a:rPr sz="1100" b="1">
-                          <a:solidFill>
-                            <a:srgbClr val="FFFFFF"/>
-                          </a:solidFill>
-                          <a:latin typeface="Arial"/>
-                        </a:rPr>
-                        <a:t>seconds per pm (SNR 1 at 1 pm)</a:t>
-                      </a:r>
-                    </a:p>
-                  </a:txBody>
-                  <a:tcPr marL="54864" marR="54864" marT="18288" marB="18288">
-                    <a:solidFill>
-                      <a:srgbClr val="1F4E79"/>
-                    </a:solidFill>
-                  </a:tcPr>
-                </a:tc>
-              </a:tr>
-              <a:tr h="468630">
-                <a:tc>
-                  <a:txBody>
-                    <a:bodyPr wrap="square"/>
-                    <a:lstStyle/>
-                    <a:p>
-                      <a:r>
-                        <a:rPr sz="1100" b="0">
-                          <a:solidFill>
-                            <a:srgbClr val="282828"/>
-                          </a:solidFill>
-                          <a:latin typeface="Arial"/>
-                        </a:rPr>
-                        <a:t>the model's grid (both rigs, 1024 grid; the station figure)</a:t>
-                      </a:r>
-                    </a:p>
-                  </a:txBody>
-                  <a:tcPr marL="54864" marR="54864" marT="18288" marB="18288">
-                    <a:solidFill>
-                      <a:srgbClr val="FFFFFF"/>
-                    </a:solidFill>
-                  </a:tcPr>
-                </a:tc>
-                <a:tc>
-                  <a:txBody>
-                    <a:bodyPr wrap="square"/>
-                    <a:lstStyle/>
-                    <a:p>
-                      <a:r>
-                        <a:rPr sz="1100" b="0">
-                          <a:solidFill>
-                            <a:srgbClr val="282828"/>
-                          </a:solidFill>
-                          <a:latin typeface="Arial"/>
-                        </a:rPr>
-                        <a:t>315</a:t>
-                      </a:r>
-                    </a:p>
-                  </a:txBody>
-                  <a:tcPr marL="54864" marR="54864" marT="18288" marB="18288">
-                    <a:solidFill>
-                      <a:srgbClr val="FFFFFF"/>
-                    </a:solidFill>
-                  </a:tcPr>
-                </a:tc>
-                <a:tc>
-                  <a:txBody>
-                    <a:bodyPr wrap="square"/>
-                    <a:lstStyle/>
-                    <a:p>
-                      <a:r>
-                        <a:rPr sz="1100" b="0">
-                          <a:solidFill>
-                            <a:srgbClr val="282828"/>
-                          </a:solidFill>
-                          <a:latin typeface="Arial"/>
-                        </a:rPr>
-                        <a:t>3.3</a:t>
-                      </a:r>
-                    </a:p>
-                  </a:txBody>
-                  <a:tcPr marL="54864" marR="54864" marT="18288" marB="18288">
-                    <a:solidFill>
-                      <a:srgbClr val="FFFFFF"/>
-                    </a:solidFill>
-                  </a:tcPr>
-                </a:tc>
-                <a:tc>
-                  <a:txBody>
-                    <a:bodyPr wrap="square"/>
-                    <a:lstStyle/>
-                    <a:p>
-                      <a:r>
-                        <a:rPr sz="1100" b="0">
-                          <a:solidFill>
-                            <a:srgbClr val="282828"/>
-                          </a:solidFill>
-                          <a:latin typeface="Arial"/>
-                        </a:rPr>
-                        <a:t>—</a:t>
-                      </a:r>
-                    </a:p>
-                  </a:txBody>
-                  <a:tcPr marL="54864" marR="54864" marT="18288" marB="18288">
-                    <a:solidFill>
-                      <a:srgbClr val="FFFFFF"/>
-                    </a:solidFill>
-                  </a:tcPr>
-                </a:tc>
-                <a:tc>
-                  <a:txBody>
-                    <a:bodyPr wrap="square"/>
-                    <a:lstStyle/>
-                    <a:p>
-                      <a:r>
-                        <a:rPr sz="1100" b="0">
-                          <a:solidFill>
-                            <a:srgbClr val="282828"/>
-                          </a:solidFill>
-                          <a:latin typeface="Arial"/>
-                        </a:rPr>
-                        <a:t>—</a:t>
-                      </a:r>
-                    </a:p>
-                  </a:txBody>
-                  <a:tcPr marL="54864" marR="54864" marT="18288" marB="18288">
-                    <a:solidFill>
-                      <a:srgbClr val="FFFFFF"/>
-                    </a:solidFill>
-                  </a:tcPr>
-                </a:tc>
-              </a:tr>
-              <a:tr h="280035">
-                <a:tc>
-                  <a:txBody>
-                    <a:bodyPr wrap="square"/>
-                    <a:lstStyle/>
-                    <a:p>
-                      <a:r>
-                        <a:rPr sz="1100" b="0">
-                          <a:solidFill>
-                            <a:srgbClr val="282828"/>
-                          </a:solidFill>
-                          <a:latin typeface="Arial"/>
-                        </a:rPr>
-                        <a:t>COPHI, Feng's camera, 1k², 60 ke, 30 fps</a:t>
-                      </a:r>
-                    </a:p>
-                  </a:txBody>
-                  <a:tcPr marL="54864" marR="54864" marT="18288" marB="18288">
-                    <a:solidFill>
-                      <a:srgbClr val="ECF1F6"/>
-                    </a:solidFill>
-                  </a:tcPr>
-                </a:tc>
-                <a:tc>
-                  <a:txBody>
-                    <a:bodyPr wrap="square"/>
-                    <a:lstStyle/>
-                    <a:p>
-                      <a:r>
-                        <a:rPr sz="1100" b="0">
-                          <a:solidFill>
-                            <a:srgbClr val="282828"/>
-                          </a:solidFill>
-                          <a:latin typeface="Arial"/>
-                        </a:rPr>
-                        <a:t>~900</a:t>
-                      </a:r>
-                    </a:p>
-                  </a:txBody>
-                  <a:tcPr marL="54864" marR="54864" marT="18288" marB="18288">
-                    <a:solidFill>
-                      <a:srgbClr val="ECF1F6"/>
-                    </a:solidFill>
-                  </a:tcPr>
-                </a:tc>
-                <a:tc>
-                  <a:txBody>
-                    <a:bodyPr wrap="square"/>
-                    <a:lstStyle/>
-                    <a:p>
-                      <a:r>
-                        <a:rPr sz="1100" b="0">
-                          <a:solidFill>
-                            <a:srgbClr val="282828"/>
-                          </a:solidFill>
-                          <a:latin typeface="Arial"/>
-                        </a:rPr>
-                        <a:t>9.4</a:t>
-                      </a:r>
-                    </a:p>
-                  </a:txBody>
-                  <a:tcPr marL="54864" marR="54864" marT="18288" marB="18288">
-                    <a:solidFill>
-                      <a:srgbClr val="ECF1F6"/>
-                    </a:solidFill>
-                  </a:tcPr>
-                </a:tc>
-                <a:tc>
-                  <a:txBody>
-                    <a:bodyPr wrap="square"/>
-                    <a:lstStyle/>
-                    <a:p>
-                      <a:r>
-                        <a:rPr sz="1100" b="0">
-                          <a:solidFill>
-                            <a:srgbClr val="282828"/>
-                          </a:solidFill>
-                          <a:latin typeface="Arial"/>
-                        </a:rPr>
-                        <a:t>57.7 / 53.7</a:t>
-                      </a:r>
-                    </a:p>
-                  </a:txBody>
-                  <a:tcPr marL="54864" marR="54864" marT="18288" marB="18288">
-                    <a:solidFill>
-                      <a:srgbClr val="ECF1F6"/>
-                    </a:solidFill>
-                  </a:tcPr>
-                </a:tc>
-                <a:tc>
-                  <a:txBody>
-                    <a:bodyPr wrap="square"/>
-                    <a:lstStyle/>
-                    <a:p>
-                      <a:r>
-                        <a:rPr sz="1100" b="0">
-                          <a:solidFill>
-                            <a:srgbClr val="282828"/>
-                          </a:solidFill>
-                          <a:latin typeface="Arial"/>
-                        </a:rPr>
-                        <a:t>443 / 385 (≈ 7 min)</a:t>
-                      </a:r>
-                    </a:p>
-                  </a:txBody>
-                  <a:tcPr marL="54864" marR="54864" marT="18288" marB="18288">
-                    <a:solidFill>
-                      <a:srgbClr val="ECF1F6"/>
-                    </a:solidFill>
-                  </a:tcPr>
-                </a:tc>
-              </a:tr>
-              <a:tr h="280035">
-                <a:tc>
-                  <a:txBody>
-                    <a:bodyPr wrap="square"/>
-                    <a:lstStyle/>
-                    <a:p>
-                      <a:r>
-                        <a:rPr sz="1100" b="0">
-                          <a:solidFill>
-                            <a:srgbClr val="282828"/>
-                          </a:solidFill>
-                          <a:latin typeface="Arial"/>
-                        </a:rPr>
-                        <a:t>COPHI, Photonfocus 1024², 200 ke, 150 fps</a:t>
-                      </a:r>
-                    </a:p>
-                  </a:txBody>
-                  <a:tcPr marL="54864" marR="54864" marT="18288" marB="18288">
-                    <a:solidFill>
-                      <a:srgbClr val="FFFFFF"/>
-                    </a:solidFill>
-                  </a:tcPr>
-                </a:tc>
-                <a:tc>
-                  <a:txBody>
-                    <a:bodyPr wrap="square"/>
-                    <a:lstStyle/>
-                    <a:p>
-                      <a:r>
-                        <a:rPr sz="1100" b="0">
-                          <a:solidFill>
-                            <a:srgbClr val="282828"/>
-                          </a:solidFill>
-                          <a:latin typeface="Arial"/>
-                        </a:rPr>
-                        <a:t>~900</a:t>
-                      </a:r>
-                    </a:p>
-                  </a:txBody>
-                  <a:tcPr marL="54864" marR="54864" marT="18288" marB="18288">
-                    <a:solidFill>
-                      <a:srgbClr val="FFFFFF"/>
-                    </a:solidFill>
-                  </a:tcPr>
-                </a:tc>
-                <a:tc>
-                  <a:txBody>
-                    <a:bodyPr wrap="square"/>
-                    <a:lstStyle/>
-                    <a:p>
-                      <a:r>
-                        <a:rPr sz="1100" b="0">
-                          <a:solidFill>
-                            <a:srgbClr val="282828"/>
-                          </a:solidFill>
-                          <a:latin typeface="Arial"/>
-                        </a:rPr>
-                        <a:t>9.4</a:t>
-                      </a:r>
-                    </a:p>
-                  </a:txBody>
-                  <a:tcPr marL="54864" marR="54864" marT="18288" marB="18288">
-                    <a:solidFill>
-                      <a:srgbClr val="FFFFFF"/>
-                    </a:solidFill>
-                  </a:tcPr>
-                </a:tc>
-                <a:tc>
-                  <a:txBody>
-                    <a:bodyPr wrap="square"/>
-                    <a:lstStyle/>
-                    <a:p>
-                      <a:r>
-                        <a:rPr sz="1100" b="0">
-                          <a:solidFill>
-                            <a:srgbClr val="282828"/>
-                          </a:solidFill>
-                          <a:latin typeface="Arial"/>
-                        </a:rPr>
-                        <a:t>39.5 / 36.5</a:t>
-                      </a:r>
-                    </a:p>
-                  </a:txBody>
-                  <a:tcPr marL="54864" marR="54864" marT="18288" marB="18288">
-                    <a:solidFill>
-                      <a:srgbClr val="FFFFFF"/>
-                    </a:solidFill>
-                  </a:tcPr>
-                </a:tc>
-                <a:tc>
-                  <a:txBody>
-                    <a:bodyPr wrap="square"/>
-                    <a:lstStyle/>
-                    <a:p>
-                      <a:r>
-                        <a:rPr sz="1100" b="0">
-                          <a:solidFill>
-                            <a:srgbClr val="282828"/>
-                          </a:solidFill>
-                          <a:latin typeface="Arial"/>
-                        </a:rPr>
-                        <a:t>42 / 36</a:t>
-                      </a:r>
-                    </a:p>
-                  </a:txBody>
-                  <a:tcPr marL="54864" marR="54864" marT="18288" marB="18288">
-                    <a:solidFill>
-                      <a:srgbClr val="FFFFFF"/>
-                    </a:solidFill>
-                  </a:tcPr>
-                </a:tc>
-              </a:tr>
-              <a:tr h="468630">
-                <a:tc>
-                  <a:txBody>
-                    <a:bodyPr wrap="square"/>
-                    <a:lstStyle/>
-                    <a:p>
-                      <a:r>
-                        <a:rPr sz="1100" b="0">
-                          <a:solidFill>
-                            <a:srgbClr val="282828"/>
-                          </a:solidFill>
-                          <a:latin typeface="Arial"/>
-                        </a:rPr>
-                        <a:t>COPHI, pco.edge 5.5 in GS mode, 2560 × 2160, 30 ke, 50 fps</a:t>
-                      </a:r>
-                    </a:p>
-                  </a:txBody>
-                  <a:tcPr marL="54864" marR="54864" marT="18288" marB="18288">
-                    <a:solidFill>
-                      <a:srgbClr val="ECF1F6"/>
-                    </a:solidFill>
-                  </a:tcPr>
-                </a:tc>
-                <a:tc>
-                  <a:txBody>
-                    <a:bodyPr wrap="square"/>
-                    <a:lstStyle/>
-                    <a:p>
-                      <a:r>
-                        <a:rPr sz="1100" b="0">
-                          <a:solidFill>
-                            <a:srgbClr val="282828"/>
-                          </a:solidFill>
-                          <a:latin typeface="Arial"/>
-                        </a:rPr>
-                        <a:t>~2000</a:t>
-                      </a:r>
-                    </a:p>
-                  </a:txBody>
-                  <a:tcPr marL="54864" marR="54864" marT="18288" marB="18288">
-                    <a:solidFill>
-                      <a:srgbClr val="ECF1F6"/>
-                    </a:solidFill>
-                  </a:tcPr>
-                </a:tc>
-                <a:tc>
-                  <a:txBody>
-                    <a:bodyPr wrap="square"/>
-                    <a:lstStyle/>
-                    <a:p>
-                      <a:r>
-                        <a:rPr sz="1100" b="0">
-                          <a:solidFill>
-                            <a:srgbClr val="282828"/>
-                          </a:solidFill>
-                          <a:latin typeface="Arial"/>
-                        </a:rPr>
-                        <a:t>21</a:t>
-                      </a:r>
-                    </a:p>
-                  </a:txBody>
-                  <a:tcPr marL="54864" marR="54864" marT="18288" marB="18288">
-                    <a:solidFill>
-                      <a:srgbClr val="ECF1F6"/>
-                    </a:solidFill>
-                  </a:tcPr>
-                </a:tc>
-                <a:tc>
-                  <a:txBody>
-                    <a:bodyPr wrap="square"/>
-                    <a:lstStyle/>
-                    <a:p>
-                      <a:r>
-                        <a:rPr sz="1100" b="0">
-                          <a:solidFill>
-                            <a:srgbClr val="282828"/>
-                          </a:solidFill>
-                          <a:latin typeface="Arial"/>
-                        </a:rPr>
-                        <a:t>40.2 / 38.3</a:t>
-                      </a:r>
-                    </a:p>
-                  </a:txBody>
-                  <a:tcPr marL="54864" marR="54864" marT="18288" marB="18288">
-                    <a:solidFill>
-                      <a:srgbClr val="ECF1F6"/>
-                    </a:solidFill>
-                  </a:tcPr>
-                </a:tc>
-                <a:tc>
-                  <a:txBody>
-                    <a:bodyPr wrap="square"/>
-                    <a:lstStyle/>
-                    <a:p>
-                      <a:r>
-                        <a:rPr sz="1100" b="0">
-                          <a:solidFill>
-                            <a:srgbClr val="282828"/>
-                          </a:solidFill>
-                          <a:latin typeface="Arial"/>
-                        </a:rPr>
-                        <a:t>129 / 117</a:t>
-                      </a:r>
-                    </a:p>
-                  </a:txBody>
-                  <a:tcPr marL="54864" marR="54864" marT="18288" marB="18288">
-                    <a:solidFill>
-                      <a:srgbClr val="ECF1F6"/>
-                    </a:solidFill>
-                  </a:tcPr>
-                </a:tc>
-              </a:tr>
-              <a:tr h="468630">
-                <a:tc>
-                  <a:txBody>
-                    <a:bodyPr wrap="square"/>
-                    <a:lstStyle/>
-                    <a:p>
-                      <a:r>
-                        <a:rPr sz="1100" b="0">
-                          <a:solidFill>
-                            <a:srgbClr val="282828"/>
-                          </a:solidFill>
-                          <a:latin typeface="Arial"/>
-                        </a:rPr>
-                        <a:t>COPHI at 1.3 µm, C-RED 2, 640 × 512 (placeholder at 632.8 nm)</a:t>
-                      </a:r>
-                    </a:p>
-                  </a:txBody>
-                  <a:tcPr marL="54864" marR="54864" marT="18288" marB="18288">
-                    <a:solidFill>
-                      <a:srgbClr val="FFFFFF"/>
-                    </a:solidFill>
-                  </a:tcPr>
-                </a:tc>
-                <a:tc>
-                  <a:txBody>
-                    <a:bodyPr wrap="square"/>
-                    <a:lstStyle/>
-                    <a:p>
-                      <a:r>
-                        <a:rPr sz="1100" b="0">
-                          <a:solidFill>
-                            <a:srgbClr val="282828"/>
-                          </a:solidFill>
-                          <a:latin typeface="Arial"/>
-                        </a:rPr>
-                        <a:t>~480</a:t>
-                      </a:r>
-                    </a:p>
-                  </a:txBody>
-                  <a:tcPr marL="54864" marR="54864" marT="18288" marB="18288">
-                    <a:solidFill>
-                      <a:srgbClr val="FFFFFF"/>
-                    </a:solidFill>
-                  </a:tcPr>
-                </a:tc>
-                <a:tc>
-                  <a:txBody>
-                    <a:bodyPr wrap="square"/>
-                    <a:lstStyle/>
-                    <a:p>
-                      <a:r>
-                        <a:rPr sz="1100" b="0">
-                          <a:solidFill>
-                            <a:srgbClr val="282828"/>
-                          </a:solidFill>
-                          <a:latin typeface="Arial"/>
-                        </a:rPr>
-                        <a:t>5.0</a:t>
-                      </a:r>
-                    </a:p>
-                  </a:txBody>
-                  <a:tcPr marL="54864" marR="54864" marT="18288" marB="18288">
-                    <a:solidFill>
-                      <a:srgbClr val="FFFFFF"/>
-                    </a:solidFill>
-                  </a:tcPr>
-                </a:tc>
-                <a:tc>
-                  <a:txBody>
-                    <a:bodyPr wrap="square"/>
-                    <a:lstStyle/>
-                    <a:p>
-                      <a:r>
-                        <a:rPr sz="1100" b="0">
-                          <a:solidFill>
-                            <a:srgbClr val="282828"/>
-                          </a:solidFill>
-                          <a:latin typeface="Arial"/>
-                        </a:rPr>
-                        <a:t>19.6 / 18.7</a:t>
-                      </a:r>
-                    </a:p>
-                  </a:txBody>
-                  <a:tcPr marL="54864" marR="54864" marT="18288" marB="18288">
-                    <a:solidFill>
-                      <a:srgbClr val="FFFFFF"/>
-                    </a:solidFill>
-                  </a:tcPr>
-                </a:tc>
-                <a:tc>
-                  <a:txBody>
-                    <a:bodyPr wrap="square"/>
-                    <a:lstStyle/>
-                    <a:p>
-                      <a:r>
-                        <a:rPr sz="1100" b="0">
-                          <a:solidFill>
-                            <a:srgbClr val="282828"/>
-                          </a:solidFill>
-                          <a:latin typeface="Arial"/>
-                        </a:rPr>
-                        <a:t>— (the 1.3 µm stage)</a:t>
-                      </a:r>
-                    </a:p>
-                  </a:txBody>
-                  <a:tcPr marL="54864" marR="54864" marT="18288" marB="18288">
-                    <a:solidFill>
-                      <a:srgbClr val="FFFFFF"/>
-                    </a:solidFill>
-                  </a:tcPr>
-                </a:tc>
-              </a:tr>
-              <a:tr h="468630">
-                <a:tc>
-                  <a:txBody>
-                    <a:bodyPr wrap="square"/>
-                    <a:lstStyle/>
-                    <a:p>
-                      <a:r>
-                        <a:rPr sz="1100" b="0">
-                          <a:solidFill>
-                            <a:srgbClr val="282828"/>
-                          </a:solidFill>
-                          <a:latin typeface="Arial"/>
-                        </a:rPr>
-                        <a:t>COPHI, lock-in camera, heliCam C4, 542 × 512</a:t>
-                      </a:r>
-                    </a:p>
-                  </a:txBody>
-                  <a:tcPr marL="54864" marR="54864" marT="18288" marB="18288">
-                    <a:solidFill>
-                      <a:srgbClr val="ECF1F6"/>
-                    </a:solidFill>
-                  </a:tcPr>
-                </a:tc>
-                <a:tc>
-                  <a:txBody>
-                    <a:bodyPr wrap="square"/>
-                    <a:lstStyle/>
-                    <a:p>
-                      <a:r>
-                        <a:rPr sz="1100" b="0">
-                          <a:solidFill>
-                            <a:srgbClr val="282828"/>
-                          </a:solidFill>
-                          <a:latin typeface="Arial"/>
-                        </a:rPr>
-                        <a:t>512</a:t>
-                      </a:r>
-                    </a:p>
-                  </a:txBody>
-                  <a:tcPr marL="54864" marR="54864" marT="18288" marB="18288">
-                    <a:solidFill>
-                      <a:srgbClr val="ECF1F6"/>
-                    </a:solidFill>
-                  </a:tcPr>
-                </a:tc>
-                <a:tc>
-                  <a:txBody>
-                    <a:bodyPr wrap="square"/>
-                    <a:lstStyle/>
-                    <a:p>
-                      <a:r>
-                        <a:rPr sz="1100" b="0">
-                          <a:solidFill>
-                            <a:srgbClr val="282828"/>
-                          </a:solidFill>
-                          <a:latin typeface="Arial"/>
-                        </a:rPr>
-                        <a:t>5.3</a:t>
-                      </a:r>
-                    </a:p>
-                  </a:txBody>
-                  <a:tcPr marL="54864" marR="54864" marT="18288" marB="18288">
-                    <a:solidFill>
-                      <a:srgbClr val="ECF1F6"/>
-                    </a:solidFill>
-                  </a:tcPr>
-                </a:tc>
-                <a:tc>
-                  <a:txBody>
-                    <a:bodyPr wrap="square"/>
-                    <a:lstStyle/>
-                    <a:p>
-                      <a:r>
-                        <a:rPr sz="1100" b="0">
-                          <a:solidFill>
-                            <a:srgbClr val="282828"/>
-                          </a:solidFill>
-                          <a:latin typeface="Arial"/>
-                        </a:rPr>
-                        <a:t>61.1 / 57.9 per 1 ms I/Q sample</a:t>
-                      </a:r>
-                    </a:p>
-                  </a:txBody>
-                  <a:tcPr marL="54864" marR="54864" marT="18288" marB="18288">
-                    <a:solidFill>
-                      <a:srgbClr val="ECF1F6"/>
-                    </a:solidFill>
-                  </a:tcPr>
-                </a:tc>
-                <a:tc>
-                  <a:txBody>
-                    <a:bodyPr wrap="square"/>
-                    <a:lstStyle/>
-                    <a:p>
-                      <a:r>
-                        <a:rPr sz="1100" b="0">
-                          <a:solidFill>
-                            <a:srgbClr val="282828"/>
-                          </a:solidFill>
-                          <a:latin typeface="Arial"/>
-                        </a:rPr>
-                        <a:t>3.73 / 3.35 (well-capped at 1 kHz; ×1.11 square-wave)</a:t>
-                      </a:r>
-                    </a:p>
-                  </a:txBody>
-                  <a:tcPr marL="54864" marR="54864" marT="18288" marB="18288">
-                    <a:solidFill>
-                      <a:srgbClr val="ECF1F6"/>
-                    </a:solidFill>
-                  </a:tcPr>
-                </a:tc>
-              </a:tr>
-              <a:tr h="280035">
-                <a:tc>
-                  <a:txBody>
-                    <a:bodyPr wrap="square"/>
-                    <a:lstStyle/>
-                    <a:p>
-                      <a:r>
-                        <a:rPr sz="1100" b="0">
-                          <a:solidFill>
-                            <a:srgbClr val="282828"/>
-                          </a:solidFill>
-                          <a:latin typeface="Arial"/>
-                        </a:rPr>
-                        <a:t>COPHI, lock-in camera, heliCam C4M, 1024 × 1102</a:t>
-                      </a:r>
-                    </a:p>
-                  </a:txBody>
-                  <a:tcPr marL="54864" marR="54864" marT="18288" marB="18288">
-                    <a:solidFill>
-                      <a:srgbClr val="FFFFFF"/>
-                    </a:solidFill>
-                  </a:tcPr>
-                </a:tc>
-                <a:tc>
-                  <a:txBody>
-                    <a:bodyPr wrap="square"/>
-                    <a:lstStyle/>
-                    <a:p>
-                      <a:r>
-                        <a:rPr sz="1100" b="0">
-                          <a:solidFill>
-                            <a:srgbClr val="282828"/>
-                          </a:solidFill>
-                          <a:latin typeface="Arial"/>
-                        </a:rPr>
-                        <a:t>~1000</a:t>
-                      </a:r>
-                    </a:p>
-                  </a:txBody>
-                  <a:tcPr marL="54864" marR="54864" marT="18288" marB="18288">
-                    <a:solidFill>
-                      <a:srgbClr val="FFFFFF"/>
-                    </a:solidFill>
-                  </a:tcPr>
-                </a:tc>
-                <a:tc>
-                  <a:txBody>
-                    <a:bodyPr wrap="square"/>
-                    <a:lstStyle/>
-                    <a:p>
-                      <a:r>
-                        <a:rPr sz="1100" b="0">
-                          <a:solidFill>
-                            <a:srgbClr val="282828"/>
-                          </a:solidFill>
-                          <a:latin typeface="Arial"/>
-                        </a:rPr>
-                        <a:t>10.6</a:t>
-                      </a:r>
-                    </a:p>
-                  </a:txBody>
-                  <a:tcPr marL="54864" marR="54864" marT="18288" marB="18288">
-                    <a:solidFill>
-                      <a:srgbClr val="FFFFFF"/>
-                    </a:solidFill>
-                  </a:tcPr>
-                </a:tc>
-                <a:tc>
-                  <a:txBody>
-                    <a:bodyPr wrap="square"/>
-                    <a:lstStyle/>
-                    <a:p>
-                      <a:r>
-                        <a:rPr sz="1100" b="0">
-                          <a:solidFill>
-                            <a:srgbClr val="282828"/>
-                          </a:solidFill>
-                          <a:latin typeface="Arial"/>
-                        </a:rPr>
-                        <a:t>(C4 pixel assumed)</a:t>
-                      </a:r>
-                    </a:p>
-                  </a:txBody>
-                  <a:tcPr marL="54864" marR="54864" marT="18288" marB="18288">
-                    <a:solidFill>
-                      <a:srgbClr val="FFFFFF"/>
-                    </a:solidFill>
-                  </a:tcPr>
-                </a:tc>
-                <a:tc>
-                  <a:txBody>
-                    <a:bodyPr wrap="square"/>
-                    <a:lstStyle/>
-                    <a:p>
-                      <a:r>
-                        <a:rPr sz="1100" b="0">
-                          <a:solidFill>
-                            <a:srgbClr val="282828"/>
-                          </a:solidFill>
-                          <a:latin typeface="Arial"/>
-                        </a:rPr>
-                        <a:t>same (well × rate per element)</a:t>
-                      </a:r>
-                    </a:p>
-                  </a:txBody>
-                  <a:tcPr marL="54864" marR="54864" marT="18288" marB="18288">
-                    <a:solidFill>
-                      <a:srgbClr val="FFFFFF"/>
-                    </a:solidFill>
-                  </a:tcPr>
-                </a:tc>
-              </a:tr>
-            </a:tbl>
-          </a:graphicData>
-        </a:graphic>
-      </p:graphicFrame>
+        </p:nvPicPr>
+        <p:blipFill>
+          <a:blip r:embed="rId2"/>
+          <a:stretch>
+            <a:fillRect/>
+          </a:stretch>
+        </p:blipFill>
+        <p:spPr>
+          <a:xfrm>
+            <a:off x="1293571" y="1298448"/>
+            <a:ext cx="9604553" cy="2897632"/>
+          </a:xfrm>
+          <a:prstGeom prst="rect">
+            <a:avLst/>
+          </a:prstGeom>
+        </p:spPr>
+      </p:pic>
       <p:sp>
         <p:nvSpPr>
           <p:cNvPr id="5" name="TextBox 4"/>
@@ -4304,7 +3404,46 @@
         </p:nvSpPr>
         <p:spPr>
           <a:xfrm>
-            <a:off x="411480" y="4628007"/>
+            <a:off x="411480" y="4214367"/>
+            <a:ext cx="11368735" cy="394208"/>
+          </a:xfrm>
+          <a:prstGeom prst="rect">
+            <a:avLst/>
+          </a:prstGeom>
+          <a:noFill/>
+        </p:spPr>
+        <p:txBody>
+          <a:bodyPr wrap="square">
+            <a:spAutoFit/>
+          </a:bodyPr>
+          <a:lstStyle/>
+          <a:p>
+            <a:pPr algn="ctr">
+              <a:spcAft>
+                <a:spcPts val="0"/>
+              </a:spcAft>
+            </a:pPr>
+            <a:r>
+              <a:rPr sz="1000" b="0">
+                <a:solidFill>
+                  <a:srgbClr val="6E6E6E"/>
+                </a:solidFill>
+                <a:latin typeface="Arial"/>
+              </a:rPr>
+              <a:t>COPHI, mirror rig: the command; the test arm and the LO at the camera; two of the four buckets; the recovered surface, 31.9 nm rms; recovered minus the engine's field, 0.31 pm rms; the flat DM reads 0</a:t>
+            </a:r>
+          </a:p>
+        </p:txBody>
+      </p:sp>
+      <p:sp>
+        <p:nvSpPr>
+          <p:cNvPr id="6" name="TextBox 5"/>
+          <p:cNvSpPr txBox="1"/>
+          <p:nvPr/>
+        </p:nvSpPr>
+        <p:spPr>
+          <a:xfrm>
+            <a:off x="411480" y="4645151"/>
             <a:ext cx="11368735" cy="274320"/>
           </a:xfrm>
           <a:prstGeom prst="rect">
@@ -4339,7 +3478,7 @@
                 </a:solidFill>
                 <a:latin typeface="Arial"/>
               </a:rPr>
-              <a:t>Resolution is free down to ~1.5 pixels per actuator:</a:t>
+              <a:t>Resolution shown:</a:t>
             </a:r>
             <a:r>
               <a:rPr sz="1500" b="0">
@@ -4348,7 +3487,25 @@
                 </a:solidFill>
                 <a:latin typeface="Arial"/>
               </a:rPr>
-              <a:t> a camera's photons per second are pixels × well × rate over the pupil; binning finer pixels onto the lattice changes only the read noise per sample.</a:t>
+              <a:t> camera grid 1024 × 1024, pupil 315 px across — </a:t>
+            </a:r>
+            <a:r>
+              <a:rPr sz="1500" b="1">
+                <a:solidFill>
+                  <a:srgbClr val="282828"/>
+                </a:solidFill>
+                <a:latin typeface="Arial"/>
+              </a:rPr>
+              <a:t>3.3 pixels per actuator across, ~11 per actuator in area</a:t>
+            </a:r>
+            <a:r>
+              <a:rPr sz="1500" b="0">
+                <a:solidFill>
+                  <a:srgbClr val="282828"/>
+                </a:solidFill>
+                <a:latin typeface="Arial"/>
+              </a:rPr>
+              <a:t> (6948 lit actuators on ~77,900 pupil pixels).</a:t>
             </a:r>
           </a:p>
           <a:p>
@@ -4364,70 +3521,20 @@
                 </a:solidFill>
                 <a:latin typeface="Arial"/>
               </a:rPr>
-              <a:t>–  measured (slide 18): 1 px per actuator fails the single-actuator row, 1.5–2 px holds at 1.6–2× the time, 3.3 and 4 are the same — 5 px per actuator is the floor on this table</a:t>
-            </a:r>
-          </a:p>
-          <a:p>
-            <a:pPr marL="594360" indent="-137160">
-              <a:spcAft>
-                <a:spcPts val="500"/>
-              </a:spcAft>
-            </a:pPr>
-            <a:r>
-              <a:rPr sz="1300" b="0">
-                <a:solidFill>
-                  <a:srgbClr val="6E6E6E"/>
-                </a:solidFill>
-                <a:latin typeface="Arial"/>
-              </a:rPr>
-              <a:t>–  nothing coarser is modeled (ruling: every mode of interest is commanded at full actuator resolution)</a:t>
-            </a:r>
-          </a:p>
-          <a:p>
-            <a:pPr marL="0" indent="0">
-              <a:spcAft>
-                <a:spcPts val="600"/>
-              </a:spcAft>
-            </a:pPr>
-            <a:r>
-              <a:rPr sz="1500" b="0">
-                <a:solidFill>
-                  <a:srgbClr val="282828"/>
-                </a:solidFill>
-                <a:latin typeface="Arial"/>
-              </a:rPr>
-              <a:t>•  </a:t>
-            </a:r>
-            <a:r>
-              <a:rPr sz="1500" b="1">
-                <a:solidFill>
-                  <a:srgbClr val="282828"/>
-                </a:solidFill>
-                <a:latin typeface="Arial"/>
-              </a:rPr>
-              <a:t>Cameras were put on the model grid by binning</a:t>
-            </a:r>
-            <a:r>
-              <a:rPr sz="1500" b="0">
-                <a:solidFill>
-                  <a:srgbClr val="282828"/>
-                </a:solidFill>
-                <a:latin typeface="Arial"/>
-              </a:rPr>
-              <a:t> (well × k², read × k): the pm-per-reading rows are the full camera's photons at the model's sampling.</a:t>
+              <a:t>–  every real camera on the table samples finer (5–21 px per actuator, slide 11); what resolution buys and costs is slide 19</a:t>
             </a:r>
           </a:p>
         </p:txBody>
       </p:sp>
       <p:sp>
         <p:nvSpPr>
-          <p:cNvPr id="6" name="TextBox 5"/>
+          <p:cNvPr id="7" name="TextBox 6"/>
           <p:cNvSpPr txBox="1"/>
           <p:nvPr/>
         </p:nvSpPr>
         <p:spPr>
           <a:xfrm>
-            <a:off x="411480" y="6834505"/>
+            <a:off x="411480" y="5659373"/>
             <a:ext cx="11368735" cy="274320"/>
           </a:xfrm>
           <a:prstGeom prst="rect">
@@ -4453,7 +3560,7 @@
                 </a:solidFill>
                 <a:latin typeface="Arial"/>
               </a:rPr>
-              <a:t>Stage noise and format; the pupil in pixels is the camera's short side filled by the pupil image (the tail's magnification is set for it); the model's 315 px = 157.45 px radius (stage bench).</a:t>
+              <a:t>Stage figs (runs/figs_oap_plain), noise-free; the deck's station-figure format (row 1 flat DM, row 2 the working surface).</a:t>
             </a:r>
           </a:p>
         </p:txBody>
@@ -4510,7 +3617,7 @@
                 </a:solidFill>
                 <a:latin typeface="Arial"/>
               </a:rPr>
-              <a:t>Performance side by side: HET against the IFO on the same surface</a:t>
+              <a:t>Resolution and timing, camera by camera</a:t>
             </a:r>
           </a:p>
           <a:p>
@@ -4526,7 +3633,7 @@
                 </a:solidFill>
                 <a:latin typeface="Arial"/>
               </a:rPr>
-              <a:t>HET = the heterodyne (COPHI) reading; IFO = the record's Twyman-Green polarization interferometer.  Same seed, surface and matrix: HET matches the IFO's floor, halves its mirror-rig random-surface error, and is exact where the IFO is not</a:t>
+              <a:t>The model samples the pupil at 3.3 pixels per actuator; every camera on the table oversamples the 96 × 96 lattice, so resolution costs no photons — the time to a picometer is well depth × frame rate, not pixel count</a:t>
             </a:r>
           </a:p>
         </p:txBody>
@@ -4584,8 +3691,8 @@
           <p:nvPr/>
         </p:nvGraphicFramePr>
         <p:xfrm>
-          <a:off x="411480" y="1188720"/>
-          <a:ext cx="11368734" cy="2800350"/>
+          <a:off x="411480" y="1298448"/>
+          <a:ext cx="11368734" cy="3183255"/>
         </p:xfrm>
         <a:graphic>
           <a:graphicData uri="http://schemas.openxmlformats.org/drawingml/2006/table">
@@ -4594,12 +3701,13 @@
                 <a:tableStyleId>{5C22544A-7EE6-4342-B048-85BDC9FD1C3A}</a:tableStyleId>
               </a:tblPr>
               <a:tblGrid>
-                <a:gridCol w="3065461"/>
-                <a:gridCol w="2682278"/>
-                <a:gridCol w="2325624"/>
-                <a:gridCol w="3295371"/>
+                <a:gridCol w="3484888"/>
+                <a:gridCol w="1313974"/>
+                <a:gridCol w="1771009"/>
+                <a:gridCol w="1771009"/>
+                <a:gridCol w="3027854"/>
               </a:tblGrid>
-              <a:tr h="280035">
+              <a:tr h="468630">
                 <a:tc>
                   <a:txBody>
                     <a:bodyPr wrap="square"/>
@@ -4612,7 +3720,7 @@
                           </a:solidFill>
                           <a:latin typeface="Arial"/>
                         </a:rPr>
-                        <a:t>reading, rig (estimator)</a:t>
+                        <a:t>sensor / camera</a:t>
                       </a:r>
                     </a:p>
                   </a:txBody>
@@ -4634,7 +3742,7 @@
                           </a:solidFill>
                           <a:latin typeface="Arial"/>
                         </a:rPr>
-                        <a:t>10 nm on one actuator: gain / floor</a:t>
+                        <a:t>pixels across the pupil</a:t>
                       </a:r>
                     </a:p>
                   </a:txBody>
@@ -4656,7 +3764,7 @@
                           </a:solidFill>
                           <a:latin typeface="Arial"/>
                         </a:rPr>
-                        <a:t>1 nm on the grid: gain / floor</a:t>
+                        <a:t>pixels per actuator (96 across)</a:t>
                       </a:r>
                     </a:p>
                   </a:txBody>
@@ -4678,13 +3786,147 @@
                           </a:solidFill>
                           <a:latin typeface="Arial"/>
                         </a:rPr>
-                        <a:t>dense random 10 nm: gain / error</a:t>
+                        <a:t>pm per reading</a:t>
                       </a:r>
                     </a:p>
                   </a:txBody>
                   <a:tcPr marL="54864" marR="54864" marT="18288" marB="18288">
                     <a:solidFill>
                       <a:srgbClr val="1F4E79"/>
+                    </a:solidFill>
+                  </a:tcPr>
+                </a:tc>
+                <a:tc>
+                  <a:txBody>
+                    <a:bodyPr wrap="square"/>
+                    <a:lstStyle/>
+                    <a:p>
+                      <a:r>
+                        <a:rPr sz="1100" b="1">
+                          <a:solidFill>
+                            <a:srgbClr val="FFFFFF"/>
+                          </a:solidFill>
+                          <a:latin typeface="Arial"/>
+                        </a:rPr>
+                        <a:t>seconds per pm (SNR 1 at 1 pm)</a:t>
+                      </a:r>
+                    </a:p>
+                  </a:txBody>
+                  <a:tcPr marL="54864" marR="54864" marT="18288" marB="18288">
+                    <a:solidFill>
+                      <a:srgbClr val="1F4E79"/>
+                    </a:solidFill>
+                  </a:tcPr>
+                </a:tc>
+              </a:tr>
+              <a:tr h="468630">
+                <a:tc>
+                  <a:txBody>
+                    <a:bodyPr wrap="square"/>
+                    <a:lstStyle/>
+                    <a:p>
+                      <a:r>
+                        <a:rPr sz="1100" b="0">
+                          <a:solidFill>
+                            <a:srgbClr val="282828"/>
+                          </a:solidFill>
+                          <a:latin typeface="Arial"/>
+                        </a:rPr>
+                        <a:t>the model's grid (both rigs, 1024 grid; the station figure)</a:t>
+                      </a:r>
+                    </a:p>
+                  </a:txBody>
+                  <a:tcPr marL="54864" marR="54864" marT="18288" marB="18288">
+                    <a:solidFill>
+                      <a:srgbClr val="FFFFFF"/>
+                    </a:solidFill>
+                  </a:tcPr>
+                </a:tc>
+                <a:tc>
+                  <a:txBody>
+                    <a:bodyPr wrap="square"/>
+                    <a:lstStyle/>
+                    <a:p>
+                      <a:r>
+                        <a:rPr sz="1100" b="0">
+                          <a:solidFill>
+                            <a:srgbClr val="282828"/>
+                          </a:solidFill>
+                          <a:latin typeface="Arial"/>
+                        </a:rPr>
+                        <a:t>315</a:t>
+                      </a:r>
+                    </a:p>
+                  </a:txBody>
+                  <a:tcPr marL="54864" marR="54864" marT="18288" marB="18288">
+                    <a:solidFill>
+                      <a:srgbClr val="FFFFFF"/>
+                    </a:solidFill>
+                  </a:tcPr>
+                </a:tc>
+                <a:tc>
+                  <a:txBody>
+                    <a:bodyPr wrap="square"/>
+                    <a:lstStyle/>
+                    <a:p>
+                      <a:r>
+                        <a:rPr sz="1100" b="0">
+                          <a:solidFill>
+                            <a:srgbClr val="282828"/>
+                          </a:solidFill>
+                          <a:latin typeface="Arial"/>
+                        </a:rPr>
+                        <a:t>3.3</a:t>
+                      </a:r>
+                    </a:p>
+                  </a:txBody>
+                  <a:tcPr marL="54864" marR="54864" marT="18288" marB="18288">
+                    <a:solidFill>
+                      <a:srgbClr val="FFFFFF"/>
+                    </a:solidFill>
+                  </a:tcPr>
+                </a:tc>
+                <a:tc>
+                  <a:txBody>
+                    <a:bodyPr wrap="square"/>
+                    <a:lstStyle/>
+                    <a:p>
+                      <a:r>
+                        <a:rPr sz="1100" b="0">
+                          <a:solidFill>
+                            <a:srgbClr val="282828"/>
+                          </a:solidFill>
+                          <a:latin typeface="Arial"/>
+                        </a:rPr>
+                        <a:t>—</a:t>
+                      </a:r>
+                    </a:p>
+                  </a:txBody>
+                  <a:tcPr marL="54864" marR="54864" marT="18288" marB="18288">
+                    <a:solidFill>
+                      <a:srgbClr val="FFFFFF"/>
+                    </a:solidFill>
+                  </a:tcPr>
+                </a:tc>
+                <a:tc>
+                  <a:txBody>
+                    <a:bodyPr wrap="square"/>
+                    <a:lstStyle/>
+                    <a:p>
+                      <a:r>
+                        <a:rPr sz="1100" b="0">
+                          <a:solidFill>
+                            <a:srgbClr val="282828"/>
+                          </a:solidFill>
+                          <a:latin typeface="Arial"/>
+                        </a:rPr>
+                        <a:t>—</a:t>
+                      </a:r>
+                    </a:p>
+                  </a:txBody>
+                  <a:tcPr marL="54864" marR="54864" marT="18288" marB="18288">
+                    <a:solidFill>
+                      <a:srgbClr val="FFFFFF"/>
                     </a:solidFill>
                   </a:tcPr>
                 </a:tc>
@@ -4702,79 +3944,101 @@
                           </a:solidFill>
                           <a:latin typeface="Arial"/>
                         </a:rPr>
-                        <a:t>HET (COPHI), lens (one-step)</a:t>
-                      </a:r>
-                    </a:p>
-                  </a:txBody>
-                  <a:tcPr marL="54864" marR="54864" marT="18288" marB="18288">
-                    <a:solidFill>
-                      <a:srgbClr val="FFFFFF"/>
-                    </a:solidFill>
-                  </a:tcPr>
-                </a:tc>
-                <a:tc>
-                  <a:txBody>
-                    <a:bodyPr wrap="square"/>
-                    <a:lstStyle/>
-                    <a:p>
-                      <a:r>
-                        <a:rPr sz="1100" b="0">
-                          <a:solidFill>
-                            <a:srgbClr val="282828"/>
-                          </a:solidFill>
-                          <a:latin typeface="Arial"/>
-                        </a:rPr>
-                        <a:t>0.9947 / 2 pm</a:t>
-                      </a:r>
-                    </a:p>
-                  </a:txBody>
-                  <a:tcPr marL="54864" marR="54864" marT="18288" marB="18288">
-                    <a:solidFill>
-                      <a:srgbClr val="FFFFFF"/>
-                    </a:solidFill>
-                  </a:tcPr>
-                </a:tc>
-                <a:tc>
-                  <a:txBody>
-                    <a:bodyPr wrap="square"/>
-                    <a:lstStyle/>
-                    <a:p>
-                      <a:r>
-                        <a:rPr sz="1100" b="0">
-                          <a:solidFill>
-                            <a:srgbClr val="282828"/>
-                          </a:solidFill>
-                          <a:latin typeface="Arial"/>
-                        </a:rPr>
-                        <a:t>0.9964 / 2 pm</a:t>
-                      </a:r>
-                    </a:p>
-                  </a:txBody>
-                  <a:tcPr marL="54864" marR="54864" marT="18288" marB="18288">
-                    <a:solidFill>
-                      <a:srgbClr val="FFFFFF"/>
-                    </a:solidFill>
-                  </a:tcPr>
-                </a:tc>
-                <a:tc>
-                  <a:txBody>
-                    <a:bodyPr wrap="square"/>
-                    <a:lstStyle/>
-                    <a:p>
-                      <a:r>
-                        <a:rPr sz="1100" b="0">
-                          <a:solidFill>
-                            <a:srgbClr val="282828"/>
-                          </a:solidFill>
-                          <a:latin typeface="Arial"/>
-                        </a:rPr>
-                        <a:t>0.9967 / 180 pm</a:t>
-                      </a:r>
-                    </a:p>
-                  </a:txBody>
-                  <a:tcPr marL="54864" marR="54864" marT="18288" marB="18288">
-                    <a:solidFill>
-                      <a:srgbClr val="FFFFFF"/>
+                        <a:t>COPHI, Feng's camera, 1k², 60 ke, 30 fps</a:t>
+                      </a:r>
+                    </a:p>
+                  </a:txBody>
+                  <a:tcPr marL="54864" marR="54864" marT="18288" marB="18288">
+                    <a:solidFill>
+                      <a:srgbClr val="ECF1F6"/>
+                    </a:solidFill>
+                  </a:tcPr>
+                </a:tc>
+                <a:tc>
+                  <a:txBody>
+                    <a:bodyPr wrap="square"/>
+                    <a:lstStyle/>
+                    <a:p>
+                      <a:r>
+                        <a:rPr sz="1100" b="0">
+                          <a:solidFill>
+                            <a:srgbClr val="282828"/>
+                          </a:solidFill>
+                          <a:latin typeface="Arial"/>
+                        </a:rPr>
+                        <a:t>~900</a:t>
+                      </a:r>
+                    </a:p>
+                  </a:txBody>
+                  <a:tcPr marL="54864" marR="54864" marT="18288" marB="18288">
+                    <a:solidFill>
+                      <a:srgbClr val="ECF1F6"/>
+                    </a:solidFill>
+                  </a:tcPr>
+                </a:tc>
+                <a:tc>
+                  <a:txBody>
+                    <a:bodyPr wrap="square"/>
+                    <a:lstStyle/>
+                    <a:p>
+                      <a:r>
+                        <a:rPr sz="1100" b="0">
+                          <a:solidFill>
+                            <a:srgbClr val="282828"/>
+                          </a:solidFill>
+                          <a:latin typeface="Arial"/>
+                        </a:rPr>
+                        <a:t>9.4</a:t>
+                      </a:r>
+                    </a:p>
+                  </a:txBody>
+                  <a:tcPr marL="54864" marR="54864" marT="18288" marB="18288">
+                    <a:solidFill>
+                      <a:srgbClr val="ECF1F6"/>
+                    </a:solidFill>
+                  </a:tcPr>
+                </a:tc>
+                <a:tc>
+                  <a:txBody>
+                    <a:bodyPr wrap="square"/>
+                    <a:lstStyle/>
+                    <a:p>
+                      <a:r>
+                        <a:rPr sz="1100" b="0">
+                          <a:solidFill>
+                            <a:srgbClr val="282828"/>
+                          </a:solidFill>
+                          <a:latin typeface="Arial"/>
+                        </a:rPr>
+                        <a:t>57.7 / 53.7</a:t>
+                      </a:r>
+                    </a:p>
+                  </a:txBody>
+                  <a:tcPr marL="54864" marR="54864" marT="18288" marB="18288">
+                    <a:solidFill>
+                      <a:srgbClr val="ECF1F6"/>
+                    </a:solidFill>
+                  </a:tcPr>
+                </a:tc>
+                <a:tc>
+                  <a:txBody>
+                    <a:bodyPr wrap="square"/>
+                    <a:lstStyle/>
+                    <a:p>
+                      <a:r>
+                        <a:rPr sz="1100" b="0">
+                          <a:solidFill>
+                            <a:srgbClr val="282828"/>
+                          </a:solidFill>
+                          <a:latin typeface="Arial"/>
+                        </a:rPr>
+                        <a:t>443 / 385 (≈ 7 min)</a:t>
+                      </a:r>
+                    </a:p>
+                  </a:txBody>
+                  <a:tcPr marL="54864" marR="54864" marT="18288" marB="18288">
+                    <a:solidFill>
+                      <a:srgbClr val="ECF1F6"/>
                     </a:solidFill>
                   </a:tcPr>
                 </a:tc>
@@ -4792,7 +4056,119 @@
                           </a:solidFill>
                           <a:latin typeface="Arial"/>
                         </a:rPr>
-                        <a:t>IFO (Twyman-Green), lens (one-step)</a:t>
+                        <a:t>COPHI, Photonfocus 1024², 200 ke, 150 fps</a:t>
+                      </a:r>
+                    </a:p>
+                  </a:txBody>
+                  <a:tcPr marL="54864" marR="54864" marT="18288" marB="18288">
+                    <a:solidFill>
+                      <a:srgbClr val="FFFFFF"/>
+                    </a:solidFill>
+                  </a:tcPr>
+                </a:tc>
+                <a:tc>
+                  <a:txBody>
+                    <a:bodyPr wrap="square"/>
+                    <a:lstStyle/>
+                    <a:p>
+                      <a:r>
+                        <a:rPr sz="1100" b="0">
+                          <a:solidFill>
+                            <a:srgbClr val="282828"/>
+                          </a:solidFill>
+                          <a:latin typeface="Arial"/>
+                        </a:rPr>
+                        <a:t>~900</a:t>
+                      </a:r>
+                    </a:p>
+                  </a:txBody>
+                  <a:tcPr marL="54864" marR="54864" marT="18288" marB="18288">
+                    <a:solidFill>
+                      <a:srgbClr val="FFFFFF"/>
+                    </a:solidFill>
+                  </a:tcPr>
+                </a:tc>
+                <a:tc>
+                  <a:txBody>
+                    <a:bodyPr wrap="square"/>
+                    <a:lstStyle/>
+                    <a:p>
+                      <a:r>
+                        <a:rPr sz="1100" b="0">
+                          <a:solidFill>
+                            <a:srgbClr val="282828"/>
+                          </a:solidFill>
+                          <a:latin typeface="Arial"/>
+                        </a:rPr>
+                        <a:t>9.4</a:t>
+                      </a:r>
+                    </a:p>
+                  </a:txBody>
+                  <a:tcPr marL="54864" marR="54864" marT="18288" marB="18288">
+                    <a:solidFill>
+                      <a:srgbClr val="FFFFFF"/>
+                    </a:solidFill>
+                  </a:tcPr>
+                </a:tc>
+                <a:tc>
+                  <a:txBody>
+                    <a:bodyPr wrap="square"/>
+                    <a:lstStyle/>
+                    <a:p>
+                      <a:r>
+                        <a:rPr sz="1100" b="0">
+                          <a:solidFill>
+                            <a:srgbClr val="282828"/>
+                          </a:solidFill>
+                          <a:latin typeface="Arial"/>
+                        </a:rPr>
+                        <a:t>39.5 / 36.5</a:t>
+                      </a:r>
+                    </a:p>
+                  </a:txBody>
+                  <a:tcPr marL="54864" marR="54864" marT="18288" marB="18288">
+                    <a:solidFill>
+                      <a:srgbClr val="FFFFFF"/>
+                    </a:solidFill>
+                  </a:tcPr>
+                </a:tc>
+                <a:tc>
+                  <a:txBody>
+                    <a:bodyPr wrap="square"/>
+                    <a:lstStyle/>
+                    <a:p>
+                      <a:r>
+                        <a:rPr sz="1100" b="0">
+                          <a:solidFill>
+                            <a:srgbClr val="282828"/>
+                          </a:solidFill>
+                          <a:latin typeface="Arial"/>
+                        </a:rPr>
+                        <a:t>42 / 36</a:t>
+                      </a:r>
+                    </a:p>
+                  </a:txBody>
+                  <a:tcPr marL="54864" marR="54864" marT="18288" marB="18288">
+                    <a:solidFill>
+                      <a:srgbClr val="FFFFFF"/>
+                    </a:solidFill>
+                  </a:tcPr>
+                </a:tc>
+              </a:tr>
+              <a:tr h="468630">
+                <a:tc>
+                  <a:txBody>
+                    <a:bodyPr wrap="square"/>
+                    <a:lstStyle/>
+                    <a:p>
+                      <a:r>
+                        <a:rPr sz="1100" b="0">
+                          <a:solidFill>
+                            <a:srgbClr val="282828"/>
+                          </a:solidFill>
+                          <a:latin typeface="Arial"/>
+                        </a:rPr>
+                        <a:t>COPHI, pco.edge 5.5 in GS mode, 2560 × 2160, 30 ke, 50 fps</a:t>
                       </a:r>
                     </a:p>
                   </a:txBody>
@@ -4814,7 +4190,7 @@
                           </a:solidFill>
                           <a:latin typeface="Arial"/>
                         </a:rPr>
-                        <a:t>1.0001 / 1 pm</a:t>
+                        <a:t>~2000</a:t>
                       </a:r>
                     </a:p>
                   </a:txBody>
@@ -4836,7 +4212,7 @@
                           </a:solidFill>
                           <a:latin typeface="Arial"/>
                         </a:rPr>
-                        <a:t>1.0046 / 2 pm</a:t>
+                        <a:t>21</a:t>
                       </a:r>
                     </a:p>
                   </a:txBody>
@@ -4858,7 +4234,253 @@
                           </a:solidFill>
                           <a:latin typeface="Arial"/>
                         </a:rPr>
-                        <a:t>1.0053 / 179 pm</a:t>
+                        <a:t>40.2 / 38.3</a:t>
+                      </a:r>
+                    </a:p>
+                  </a:txBody>
+                  <a:tcPr marL="54864" marR="54864" marT="18288" marB="18288">
+                    <a:solidFill>
+                      <a:srgbClr val="ECF1F6"/>
+                    </a:solidFill>
+                  </a:tcPr>
+                </a:tc>
+                <a:tc>
+                  <a:txBody>
+                    <a:bodyPr wrap="square"/>
+                    <a:lstStyle/>
+                    <a:p>
+                      <a:r>
+                        <a:rPr sz="1100" b="0">
+                          <a:solidFill>
+                            <a:srgbClr val="282828"/>
+                          </a:solidFill>
+                          <a:latin typeface="Arial"/>
+                        </a:rPr>
+                        <a:t>129 / 117</a:t>
+                      </a:r>
+                    </a:p>
+                  </a:txBody>
+                  <a:tcPr marL="54864" marR="54864" marT="18288" marB="18288">
+                    <a:solidFill>
+                      <a:srgbClr val="ECF1F6"/>
+                    </a:solidFill>
+                  </a:tcPr>
+                </a:tc>
+              </a:tr>
+              <a:tr h="468630">
+                <a:tc>
+                  <a:txBody>
+                    <a:bodyPr wrap="square"/>
+                    <a:lstStyle/>
+                    <a:p>
+                      <a:r>
+                        <a:rPr sz="1100" b="0">
+                          <a:solidFill>
+                            <a:srgbClr val="282828"/>
+                          </a:solidFill>
+                          <a:latin typeface="Arial"/>
+                        </a:rPr>
+                        <a:t>COPHI at 1.3 µm, C-RED 2, 640 × 512 (placeholder at 632.8 nm)</a:t>
+                      </a:r>
+                    </a:p>
+                  </a:txBody>
+                  <a:tcPr marL="54864" marR="54864" marT="18288" marB="18288">
+                    <a:solidFill>
+                      <a:srgbClr val="FFFFFF"/>
+                    </a:solidFill>
+                  </a:tcPr>
+                </a:tc>
+                <a:tc>
+                  <a:txBody>
+                    <a:bodyPr wrap="square"/>
+                    <a:lstStyle/>
+                    <a:p>
+                      <a:r>
+                        <a:rPr sz="1100" b="0">
+                          <a:solidFill>
+                            <a:srgbClr val="282828"/>
+                          </a:solidFill>
+                          <a:latin typeface="Arial"/>
+                        </a:rPr>
+                        <a:t>~480</a:t>
+                      </a:r>
+                    </a:p>
+                  </a:txBody>
+                  <a:tcPr marL="54864" marR="54864" marT="18288" marB="18288">
+                    <a:solidFill>
+                      <a:srgbClr val="FFFFFF"/>
+                    </a:solidFill>
+                  </a:tcPr>
+                </a:tc>
+                <a:tc>
+                  <a:txBody>
+                    <a:bodyPr wrap="square"/>
+                    <a:lstStyle/>
+                    <a:p>
+                      <a:r>
+                        <a:rPr sz="1100" b="0">
+                          <a:solidFill>
+                            <a:srgbClr val="282828"/>
+                          </a:solidFill>
+                          <a:latin typeface="Arial"/>
+                        </a:rPr>
+                        <a:t>5.0</a:t>
+                      </a:r>
+                    </a:p>
+                  </a:txBody>
+                  <a:tcPr marL="54864" marR="54864" marT="18288" marB="18288">
+                    <a:solidFill>
+                      <a:srgbClr val="FFFFFF"/>
+                    </a:solidFill>
+                  </a:tcPr>
+                </a:tc>
+                <a:tc>
+                  <a:txBody>
+                    <a:bodyPr wrap="square"/>
+                    <a:lstStyle/>
+                    <a:p>
+                      <a:r>
+                        <a:rPr sz="1100" b="0">
+                          <a:solidFill>
+                            <a:srgbClr val="282828"/>
+                          </a:solidFill>
+                          <a:latin typeface="Arial"/>
+                        </a:rPr>
+                        <a:t>19.6 / 18.7</a:t>
+                      </a:r>
+                    </a:p>
+                  </a:txBody>
+                  <a:tcPr marL="54864" marR="54864" marT="18288" marB="18288">
+                    <a:solidFill>
+                      <a:srgbClr val="FFFFFF"/>
+                    </a:solidFill>
+                  </a:tcPr>
+                </a:tc>
+                <a:tc>
+                  <a:txBody>
+                    <a:bodyPr wrap="square"/>
+                    <a:lstStyle/>
+                    <a:p>
+                      <a:r>
+                        <a:rPr sz="1100" b="0">
+                          <a:solidFill>
+                            <a:srgbClr val="282828"/>
+                          </a:solidFill>
+                          <a:latin typeface="Arial"/>
+                        </a:rPr>
+                        <a:t>— (the 1.3 µm stage)</a:t>
+                      </a:r>
+                    </a:p>
+                  </a:txBody>
+                  <a:tcPr marL="54864" marR="54864" marT="18288" marB="18288">
+                    <a:solidFill>
+                      <a:srgbClr val="FFFFFF"/>
+                    </a:solidFill>
+                  </a:tcPr>
+                </a:tc>
+              </a:tr>
+              <a:tr h="468630">
+                <a:tc>
+                  <a:txBody>
+                    <a:bodyPr wrap="square"/>
+                    <a:lstStyle/>
+                    <a:p>
+                      <a:r>
+                        <a:rPr sz="1100" b="0">
+                          <a:solidFill>
+                            <a:srgbClr val="282828"/>
+                          </a:solidFill>
+                          <a:latin typeface="Arial"/>
+                        </a:rPr>
+                        <a:t>COPHI, lock-in camera, heliCam C4, 542 × 512</a:t>
+                      </a:r>
+                    </a:p>
+                  </a:txBody>
+                  <a:tcPr marL="54864" marR="54864" marT="18288" marB="18288">
+                    <a:solidFill>
+                      <a:srgbClr val="ECF1F6"/>
+                    </a:solidFill>
+                  </a:tcPr>
+                </a:tc>
+                <a:tc>
+                  <a:txBody>
+                    <a:bodyPr wrap="square"/>
+                    <a:lstStyle/>
+                    <a:p>
+                      <a:r>
+                        <a:rPr sz="1100" b="0">
+                          <a:solidFill>
+                            <a:srgbClr val="282828"/>
+                          </a:solidFill>
+                          <a:latin typeface="Arial"/>
+                        </a:rPr>
+                        <a:t>512</a:t>
+                      </a:r>
+                    </a:p>
+                  </a:txBody>
+                  <a:tcPr marL="54864" marR="54864" marT="18288" marB="18288">
+                    <a:solidFill>
+                      <a:srgbClr val="ECF1F6"/>
+                    </a:solidFill>
+                  </a:tcPr>
+                </a:tc>
+                <a:tc>
+                  <a:txBody>
+                    <a:bodyPr wrap="square"/>
+                    <a:lstStyle/>
+                    <a:p>
+                      <a:r>
+                        <a:rPr sz="1100" b="0">
+                          <a:solidFill>
+                            <a:srgbClr val="282828"/>
+                          </a:solidFill>
+                          <a:latin typeface="Arial"/>
+                        </a:rPr>
+                        <a:t>5.3</a:t>
+                      </a:r>
+                    </a:p>
+                  </a:txBody>
+                  <a:tcPr marL="54864" marR="54864" marT="18288" marB="18288">
+                    <a:solidFill>
+                      <a:srgbClr val="ECF1F6"/>
+                    </a:solidFill>
+                  </a:tcPr>
+                </a:tc>
+                <a:tc>
+                  <a:txBody>
+                    <a:bodyPr wrap="square"/>
+                    <a:lstStyle/>
+                    <a:p>
+                      <a:r>
+                        <a:rPr sz="1100" b="0">
+                          <a:solidFill>
+                            <a:srgbClr val="282828"/>
+                          </a:solidFill>
+                          <a:latin typeface="Arial"/>
+                        </a:rPr>
+                        <a:t>61.1 / 57.9 per 1 ms I/Q sample</a:t>
+                      </a:r>
+                    </a:p>
+                  </a:txBody>
+                  <a:tcPr marL="54864" marR="54864" marT="18288" marB="18288">
+                    <a:solidFill>
+                      <a:srgbClr val="ECF1F6"/>
+                    </a:solidFill>
+                  </a:tcPr>
+                </a:tc>
+                <a:tc>
+                  <a:txBody>
+                    <a:bodyPr wrap="square"/>
+                    <a:lstStyle/>
+                    <a:p>
+                      <a:r>
+                        <a:rPr sz="1100" b="0">
+                          <a:solidFill>
+                            <a:srgbClr val="282828"/>
+                          </a:solidFill>
+                          <a:latin typeface="Arial"/>
+                        </a:rPr>
+                        <a:t>3.73 / 3.35 (well-capped at 1 kHz; ×1.11 square-wave)</a:t>
                       </a:r>
                     </a:p>
                   </a:txBody>
@@ -4882,7 +4504,7 @@
                           </a:solidFill>
                           <a:latin typeface="Arial"/>
                         </a:rPr>
-                        <a:t>HET, mirror (one-step)</a:t>
+                        <a:t>COPHI, lock-in camera, heliCam C4M, 1024 × 1102</a:t>
                       </a:r>
                     </a:p>
                   </a:txBody>
@@ -4904,7 +4526,7 @@
                           </a:solidFill>
                           <a:latin typeface="Arial"/>
                         </a:rPr>
-                        <a:t>0.9941 / 1 pm</a:t>
+                        <a:t>~1000</a:t>
                       </a:r>
                     </a:p>
                   </a:txBody>
@@ -4926,7 +4548,7 @@
                           </a:solidFill>
                           <a:latin typeface="Arial"/>
                         </a:rPr>
-                        <a:t>0.9949 / 1 pm</a:t>
+                        <a:t>10.6</a:t>
                       </a:r>
                     </a:p>
                   </a:txBody>
@@ -4948,7 +4570,7 @@
                           </a:solidFill>
                           <a:latin typeface="Arial"/>
                         </a:rPr>
-                        <a:t>0.9950 / 118 pm</a:t>
+                        <a:t>(C4 pixel assumed)</a:t>
                       </a:r>
                     </a:p>
                   </a:txBody>
@@ -4958,537 +4580,19 @@
                     </a:solidFill>
                   </a:tcPr>
                 </a:tc>
-              </a:tr>
-              <a:tr h="280035">
-                <a:tc>
-                  <a:txBody>
-                    <a:bodyPr wrap="square"/>
-                    <a:lstStyle/>
-                    <a:p>
-                      <a:r>
-                        <a:rPr sz="1100" b="0">
-                          <a:solidFill>
-                            <a:srgbClr val="282828"/>
-                          </a:solidFill>
-                          <a:latin typeface="Arial"/>
-                        </a:rPr>
-                        <a:t>IFO, mirror (one-step)</a:t>
-                      </a:r>
-                    </a:p>
-                  </a:txBody>
-                  <a:tcPr marL="54864" marR="54864" marT="18288" marB="18288">
-                    <a:solidFill>
-                      <a:srgbClr val="ECF1F6"/>
-                    </a:solidFill>
-                  </a:tcPr>
-                </a:tc>
-                <a:tc>
-                  <a:txBody>
-                    <a:bodyPr wrap="square"/>
-                    <a:lstStyle/>
-                    <a:p>
-                      <a:r>
-                        <a:rPr sz="1100" b="0">
-                          <a:solidFill>
-                            <a:srgbClr val="282828"/>
-                          </a:solidFill>
-                          <a:latin typeface="Arial"/>
-                        </a:rPr>
-                        <a:t>0.9832 / 2 pm</a:t>
-                      </a:r>
-                    </a:p>
-                  </a:txBody>
-                  <a:tcPr marL="54864" marR="54864" marT="18288" marB="18288">
-                    <a:solidFill>
-                      <a:srgbClr val="ECF1F6"/>
-                    </a:solidFill>
-                  </a:tcPr>
-                </a:tc>
-                <a:tc>
-                  <a:txBody>
-                    <a:bodyPr wrap="square"/>
-                    <a:lstStyle/>
-                    <a:p>
-                      <a:r>
-                        <a:rPr sz="1100" b="0">
-                          <a:solidFill>
-                            <a:srgbClr val="282828"/>
-                          </a:solidFill>
-                          <a:latin typeface="Arial"/>
-                        </a:rPr>
-                        <a:t>0.9838 / 2 pm</a:t>
-                      </a:r>
-                    </a:p>
-                  </a:txBody>
-                  <a:tcPr marL="54864" marR="54864" marT="18288" marB="18288">
-                    <a:solidFill>
-                      <a:srgbClr val="ECF1F6"/>
-                    </a:solidFill>
-                  </a:tcPr>
-                </a:tc>
-                <a:tc>
-                  <a:txBody>
-                    <a:bodyPr wrap="square"/>
-                    <a:lstStyle/>
-                    <a:p>
-                      <a:r>
-                        <a:rPr sz="1100" b="0">
-                          <a:solidFill>
-                            <a:srgbClr val="282828"/>
-                          </a:solidFill>
-                          <a:latin typeface="Arial"/>
-                        </a:rPr>
-                        <a:t>0.9844 / 223 pm</a:t>
-                      </a:r>
-                    </a:p>
-                  </a:txBody>
-                  <a:tcPr marL="54864" marR="54864" marT="18288" marB="18288">
-                    <a:solidFill>
-                      <a:srgbClr val="ECF1F6"/>
-                    </a:solidFill>
-                  </a:tcPr>
-                </a:tc>
-              </a:tr>
-              <a:tr h="280035">
-                <a:tc>
-                  <a:txBody>
-                    <a:bodyPr wrap="square"/>
-                    <a:lstStyle/>
-                    <a:p>
-                      <a:r>
-                        <a:rPr sz="1100" b="0">
-                          <a:solidFill>
-                            <a:srgbClr val="282828"/>
-                          </a:solidFill>
-                          <a:latin typeface="Arial"/>
-                        </a:rPr>
-                        <a:t>HET, lens (converged)</a:t>
-                      </a:r>
-                    </a:p>
-                  </a:txBody>
-                  <a:tcPr marL="54864" marR="54864" marT="18288" marB="18288">
-                    <a:solidFill>
-                      <a:srgbClr val="FFFFFF"/>
-                    </a:solidFill>
-                  </a:tcPr>
-                </a:tc>
-                <a:tc>
-                  <a:txBody>
-                    <a:bodyPr wrap="square"/>
-                    <a:lstStyle/>
-                    <a:p>
-                      <a:r>
-                        <a:rPr sz="1100" b="0">
-                          <a:solidFill>
-                            <a:srgbClr val="282828"/>
-                          </a:solidFill>
-                          <a:latin typeface="Arial"/>
-                        </a:rPr>
-                        <a:t>1.0008</a:t>
-                      </a:r>
-                    </a:p>
-                  </a:txBody>
-                  <a:tcPr marL="54864" marR="54864" marT="18288" marB="18288">
-                    <a:solidFill>
-                      <a:srgbClr val="FFFFFF"/>
-                    </a:solidFill>
-                  </a:tcPr>
-                </a:tc>
-                <a:tc>
-                  <a:txBody>
-                    <a:bodyPr wrap="square"/>
-                    <a:lstStyle/>
-                    <a:p>
-                      <a:r>
-                        <a:rPr sz="1100" b="0">
-                          <a:solidFill>
-                            <a:srgbClr val="282828"/>
-                          </a:solidFill>
-                          <a:latin typeface="Arial"/>
-                        </a:rPr>
-                        <a:t>1.0022</a:t>
-                      </a:r>
-                    </a:p>
-                  </a:txBody>
-                  <a:tcPr marL="54864" marR="54864" marT="18288" marB="18288">
-                    <a:solidFill>
-                      <a:srgbClr val="FFFFFF"/>
-                    </a:solidFill>
-                  </a:tcPr>
-                </a:tc>
-                <a:tc>
-                  <a:txBody>
-                    <a:bodyPr wrap="square"/>
-                    <a:lstStyle/>
-                    <a:p>
-                      <a:r>
-                        <a:rPr sz="1100" b="0">
-                          <a:solidFill>
-                            <a:srgbClr val="282828"/>
-                          </a:solidFill>
-                          <a:latin typeface="Arial"/>
-                        </a:rPr>
-                        <a:t>1.0024</a:t>
-                      </a:r>
-                    </a:p>
-                  </a:txBody>
-                  <a:tcPr marL="54864" marR="54864" marT="18288" marB="18288">
-                    <a:solidFill>
-                      <a:srgbClr val="FFFFFF"/>
-                    </a:solidFill>
-                  </a:tcPr>
-                </a:tc>
-              </a:tr>
-              <a:tr h="280035">
-                <a:tc>
-                  <a:txBody>
-                    <a:bodyPr wrap="square"/>
-                    <a:lstStyle/>
-                    <a:p>
-                      <a:r>
-                        <a:rPr sz="1100" b="0">
-                          <a:solidFill>
-                            <a:srgbClr val="282828"/>
-                          </a:solidFill>
-                          <a:latin typeface="Arial"/>
-                        </a:rPr>
-                        <a:t>HET, mirror (converged)</a:t>
-                      </a:r>
-                    </a:p>
-                  </a:txBody>
-                  <a:tcPr marL="54864" marR="54864" marT="18288" marB="18288">
-                    <a:solidFill>
-                      <a:srgbClr val="ECF1F6"/>
-                    </a:solidFill>
-                  </a:tcPr>
-                </a:tc>
-                <a:tc>
-                  <a:txBody>
-                    <a:bodyPr wrap="square"/>
-                    <a:lstStyle/>
-                    <a:p>
-                      <a:r>
-                        <a:rPr sz="1100" b="0">
-                          <a:solidFill>
-                            <a:srgbClr val="282828"/>
-                          </a:solidFill>
-                          <a:latin typeface="Arial"/>
-                        </a:rPr>
-                        <a:t>1.0000</a:t>
-                      </a:r>
-                    </a:p>
-                  </a:txBody>
-                  <a:tcPr marL="54864" marR="54864" marT="18288" marB="18288">
-                    <a:solidFill>
-                      <a:srgbClr val="ECF1F6"/>
-                    </a:solidFill>
-                  </a:tcPr>
-                </a:tc>
-                <a:tc>
-                  <a:txBody>
-                    <a:bodyPr wrap="square"/>
-                    <a:lstStyle/>
-                    <a:p>
-                      <a:r>
-                        <a:rPr sz="1100" b="0">
-                          <a:solidFill>
-                            <a:srgbClr val="282828"/>
-                          </a:solidFill>
-                          <a:latin typeface="Arial"/>
-                        </a:rPr>
-                        <a:t>1.0005</a:t>
-                      </a:r>
-                    </a:p>
-                  </a:txBody>
-                  <a:tcPr marL="54864" marR="54864" marT="18288" marB="18288">
-                    <a:solidFill>
-                      <a:srgbClr val="ECF1F6"/>
-                    </a:solidFill>
-                  </a:tcPr>
-                </a:tc>
-                <a:tc>
-                  <a:txBody>
-                    <a:bodyPr wrap="square"/>
-                    <a:lstStyle/>
-                    <a:p>
-                      <a:r>
-                        <a:rPr sz="1100" b="0">
-                          <a:solidFill>
-                            <a:srgbClr val="282828"/>
-                          </a:solidFill>
-                          <a:latin typeface="Arial"/>
-                        </a:rPr>
-                        <a:t>1.0005</a:t>
-                      </a:r>
-                    </a:p>
-                  </a:txBody>
-                  <a:tcPr marL="54864" marR="54864" marT="18288" marB="18288">
-                    <a:solidFill>
-                      <a:srgbClr val="ECF1F6"/>
-                    </a:solidFill>
-                  </a:tcPr>
-                </a:tc>
-              </a:tr>
-              <a:tr h="280035">
-                <a:tc>
-                  <a:txBody>
-                    <a:bodyPr wrap="square"/>
-                    <a:lstStyle/>
-                    <a:p>
-                      <a:r>
-                        <a:rPr sz="1100" b="0">
-                          <a:solidFill>
-                            <a:srgbClr val="282828"/>
-                          </a:solidFill>
-                          <a:latin typeface="Arial"/>
-                        </a:rPr>
-                        <a:t>IFO, lens (converged)</a:t>
-                      </a:r>
-                    </a:p>
-                  </a:txBody>
-                  <a:tcPr marL="54864" marR="54864" marT="18288" marB="18288">
-                    <a:solidFill>
-                      <a:srgbClr val="FFFFFF"/>
-                    </a:solidFill>
-                  </a:tcPr>
-                </a:tc>
-                <a:tc>
-                  <a:txBody>
-                    <a:bodyPr wrap="square"/>
-                    <a:lstStyle/>
-                    <a:p>
-                      <a:r>
-                        <a:rPr sz="1100" b="0">
-                          <a:solidFill>
-                            <a:srgbClr val="282828"/>
-                          </a:solidFill>
-                          <a:latin typeface="Arial"/>
-                        </a:rPr>
-                        <a:t>1.0064</a:t>
-                      </a:r>
-                    </a:p>
-                  </a:txBody>
-                  <a:tcPr marL="54864" marR="54864" marT="18288" marB="18288">
-                    <a:solidFill>
-                      <a:srgbClr val="FFFFFF"/>
-                    </a:solidFill>
-                  </a:tcPr>
-                </a:tc>
-                <a:tc>
-                  <a:txBody>
-                    <a:bodyPr wrap="square"/>
-                    <a:lstStyle/>
-                    <a:p>
-                      <a:r>
-                        <a:rPr sz="1100" b="0">
-                          <a:solidFill>
-                            <a:srgbClr val="282828"/>
-                          </a:solidFill>
-                          <a:latin typeface="Arial"/>
-                        </a:rPr>
-                        <a:t>1.0106</a:t>
-                      </a:r>
-                    </a:p>
-                  </a:txBody>
-                  <a:tcPr marL="54864" marR="54864" marT="18288" marB="18288">
-                    <a:solidFill>
-                      <a:srgbClr val="FFFFFF"/>
-                    </a:solidFill>
-                  </a:tcPr>
-                </a:tc>
-                <a:tc>
-                  <a:txBody>
-                    <a:bodyPr wrap="square"/>
-                    <a:lstStyle/>
-                    <a:p>
-                      <a:r>
-                        <a:rPr sz="1100" b="0">
-                          <a:solidFill>
-                            <a:srgbClr val="282828"/>
-                          </a:solidFill>
-                          <a:latin typeface="Arial"/>
-                        </a:rPr>
-                        <a:t>1.0112</a:t>
-                      </a:r>
-                    </a:p>
-                  </a:txBody>
-                  <a:tcPr marL="54864" marR="54864" marT="18288" marB="18288">
-                    <a:solidFill>
-                      <a:srgbClr val="FFFFFF"/>
-                    </a:solidFill>
-                  </a:tcPr>
-                </a:tc>
-              </a:tr>
-              <a:tr h="280035">
-                <a:tc>
-                  <a:txBody>
-                    <a:bodyPr wrap="square"/>
-                    <a:lstStyle/>
-                    <a:p>
-                      <a:r>
-                        <a:rPr sz="1100" b="0">
-                          <a:solidFill>
-                            <a:srgbClr val="282828"/>
-                          </a:solidFill>
-                          <a:latin typeface="Arial"/>
-                        </a:rPr>
-                        <a:t>IFO, mirror (converged)</a:t>
-                      </a:r>
-                    </a:p>
-                  </a:txBody>
-                  <a:tcPr marL="54864" marR="54864" marT="18288" marB="18288">
-                    <a:solidFill>
-                      <a:srgbClr val="ECF1F6"/>
-                    </a:solidFill>
-                  </a:tcPr>
-                </a:tc>
-                <a:tc>
-                  <a:txBody>
-                    <a:bodyPr wrap="square"/>
-                    <a:lstStyle/>
-                    <a:p>
-                      <a:r>
-                        <a:rPr sz="1100" b="0">
-                          <a:solidFill>
-                            <a:srgbClr val="282828"/>
-                          </a:solidFill>
-                          <a:latin typeface="Arial"/>
-                        </a:rPr>
-                        <a:t>0.9887</a:t>
-                      </a:r>
-                    </a:p>
-                  </a:txBody>
-                  <a:tcPr marL="54864" marR="54864" marT="18288" marB="18288">
-                    <a:solidFill>
-                      <a:srgbClr val="ECF1F6"/>
-                    </a:solidFill>
-                  </a:tcPr>
-                </a:tc>
-                <a:tc>
-                  <a:txBody>
-                    <a:bodyPr wrap="square"/>
-                    <a:lstStyle/>
-                    <a:p>
-                      <a:r>
-                        <a:rPr sz="1100" b="0">
-                          <a:solidFill>
-                            <a:srgbClr val="282828"/>
-                          </a:solidFill>
-                          <a:latin typeface="Arial"/>
-                        </a:rPr>
-                        <a:t>0.9892</a:t>
-                      </a:r>
-                    </a:p>
-                  </a:txBody>
-                  <a:tcPr marL="54864" marR="54864" marT="18288" marB="18288">
-                    <a:solidFill>
-                      <a:srgbClr val="ECF1F6"/>
-                    </a:solidFill>
-                  </a:tcPr>
-                </a:tc>
-                <a:tc>
-                  <a:txBody>
-                    <a:bodyPr wrap="square"/>
-                    <a:lstStyle/>
-                    <a:p>
-                      <a:r>
-                        <a:rPr sz="1100" b="0">
-                          <a:solidFill>
-                            <a:srgbClr val="282828"/>
-                          </a:solidFill>
-                          <a:latin typeface="Arial"/>
-                        </a:rPr>
-                        <a:t>0.9896</a:t>
-                      </a:r>
-                    </a:p>
-                  </a:txBody>
-                  <a:tcPr marL="54864" marR="54864" marT="18288" marB="18288">
-                    <a:solidFill>
-                      <a:srgbClr val="ECF1F6"/>
-                    </a:solidFill>
-                  </a:tcPr>
-                </a:tc>
-              </a:tr>
-              <a:tr h="280035">
-                <a:tc>
-                  <a:txBody>
-                    <a:bodyPr wrap="square"/>
-                    <a:lstStyle/>
-                    <a:p>
-                      <a:r>
-                        <a:rPr sz="1100" b="0">
-                          <a:solidFill>
-                            <a:srgbClr val="282828"/>
-                          </a:solidFill>
-                          <a:latin typeface="Arial"/>
-                        </a:rPr>
-                        <a:t>HET, lock-in camera (record, noise-free)</a:t>
-                      </a:r>
-                    </a:p>
-                  </a:txBody>
-                  <a:tcPr marL="54864" marR="54864" marT="18288" marB="18288">
-                    <a:solidFill>
-                      <a:srgbClr val="FFFFFF"/>
-                    </a:solidFill>
-                  </a:tcPr>
-                </a:tc>
-                <a:tc>
-                  <a:txBody>
-                    <a:bodyPr wrap="square"/>
-                    <a:lstStyle/>
-                    <a:p>
-                      <a:r>
-                        <a:rPr sz="1100" b="0">
-                          <a:solidFill>
-                            <a:srgbClr val="282828"/>
-                          </a:solidFill>
-                          <a:latin typeface="Arial"/>
-                        </a:rPr>
-                        <a:t>converged 1.0000</a:t>
-                      </a:r>
-                    </a:p>
-                  </a:txBody>
-                  <a:tcPr marL="54864" marR="54864" marT="18288" marB="18288">
-                    <a:solidFill>
-                      <a:srgbClr val="FFFFFF"/>
-                    </a:solidFill>
-                  </a:tcPr>
-                </a:tc>
-                <a:tc>
-                  <a:txBody>
-                    <a:bodyPr wrap="square"/>
-                    <a:lstStyle/>
-                    <a:p>
-                      <a:r>
-                        <a:rPr sz="1100" b="0">
-                          <a:solidFill>
-                            <a:srgbClr val="282828"/>
-                          </a:solidFill>
-                          <a:latin typeface="Arial"/>
-                        </a:rPr>
-                        <a:t>1.0006</a:t>
-                      </a:r>
-                    </a:p>
-                  </a:txBody>
-                  <a:tcPr marL="54864" marR="54864" marT="18288" marB="18288">
-                    <a:solidFill>
-                      <a:srgbClr val="FFFFFF"/>
-                    </a:solidFill>
-                  </a:tcPr>
-                </a:tc>
-                <a:tc>
-                  <a:txBody>
-                    <a:bodyPr wrap="square"/>
-                    <a:lstStyle/>
-                    <a:p>
-                      <a:r>
-                        <a:rPr sz="1100" b="0">
-                          <a:solidFill>
-                            <a:srgbClr val="282828"/>
-                          </a:solidFill>
-                          <a:latin typeface="Arial"/>
-                        </a:rPr>
-                        <a:t>1.0005 — the same reading, the same algebra</a:t>
+                <a:tc>
+                  <a:txBody>
+                    <a:bodyPr wrap="square"/>
+                    <a:lstStyle/>
+                    <a:p>
+                      <a:r>
+                        <a:rPr sz="1100" b="0">
+                          <a:solidFill>
+                            <a:srgbClr val="282828"/>
+                          </a:solidFill>
+                          <a:latin typeface="Arial"/>
+                        </a:rPr>
+                        <a:t>same (well × rate per element)</a:t>
                       </a:r>
                     </a:p>
                   </a:txBody>
@@ -5511,7 +4615,7 @@
         </p:nvSpPr>
         <p:spPr>
           <a:xfrm>
-            <a:off x="411480" y="4135374"/>
+            <a:off x="411480" y="4628007"/>
             <a:ext cx="11368735" cy="274320"/>
           </a:xfrm>
           <a:prstGeom prst="rect">
@@ -5546,7 +4650,7 @@
                 </a:solidFill>
                 <a:latin typeface="Arial"/>
               </a:rPr>
-              <a:t>The one-step rows sit 0.5 % low for HET on both rigs — the estimator, not the reading:</a:t>
+              <a:t>Resolution is free down to ~1.5 pixels per actuator:</a:t>
             </a:r>
             <a:r>
               <a:rPr sz="1500" b="0">
@@ -5555,11 +4659,43 @@
                 </a:solidFill>
                 <a:latin typeface="Arial"/>
               </a:rPr>
-              <a:t> the reading is exact (a 1.000 nm poke reads at slope 1.000000); the 0.5 % is the one-step Tikhonov shrinkage at the record's λ_m = 10⁻³ (1.0007 at 10⁻⁵) — the "matrix bias" every gauge carries, now a number.</a:t>
-            </a:r>
-          </a:p>
-          <a:p>
-            <a:pPr>
+              <a:t> a camera's photons per second are pixels × well × rate over the pupil; binning finer pixels onto the lattice changes only the read noise per sample.</a:t>
+            </a:r>
+          </a:p>
+          <a:p>
+            <a:pPr marL="594360" indent="-137160">
+              <a:spcAft>
+                <a:spcPts val="500"/>
+              </a:spcAft>
+            </a:pPr>
+            <a:r>
+              <a:rPr sz="1300" b="0">
+                <a:solidFill>
+                  <a:srgbClr val="6E6E6E"/>
+                </a:solidFill>
+                <a:latin typeface="Arial"/>
+              </a:rPr>
+              <a:t>–  measured (slide 19): 1 px per actuator fails the single-actuator row, 1.5–2 px holds at 1.6–2× the time, 3.3 and 4 are the same — 5 px per actuator is the floor on this table</a:t>
+            </a:r>
+          </a:p>
+          <a:p>
+            <a:pPr marL="594360" indent="-137160">
+              <a:spcAft>
+                <a:spcPts val="500"/>
+              </a:spcAft>
+            </a:pPr>
+            <a:r>
+              <a:rPr sz="1300" b="0">
+                <a:solidFill>
+                  <a:srgbClr val="6E6E6E"/>
+                </a:solidFill>
+                <a:latin typeface="Arial"/>
+              </a:rPr>
+              <a:t>–  nothing coarser is modeled (ruling: every mode of interest is commanded at full actuator resolution)</a:t>
+            </a:r>
+          </a:p>
+          <a:p>
+            <a:pPr marL="0" indent="0">
               <a:spcAft>
                 <a:spcPts val="600"/>
               </a:spcAft>
@@ -5580,7 +4716,7 @@
                 </a:solidFill>
                 <a:latin typeface="Arial"/>
               </a:rPr>
-              <a:t>Driven to convergence (the servo use), HET reads exactly on the mirror rig, and the IFO shows its polarization gain in the open:</a:t>
+              <a:t>Cameras were put on the model grid by binning</a:t>
             </a:r>
             <a:r>
               <a:rPr sz="1500" b="0">
@@ -5589,7 +4725,7 @@
                 </a:solidFill>
                 <a:latin typeface="Arial"/>
               </a:rPr>
-              <a:t> IFO/HET = 1.006–1.009 (lens rig), 0.989 (mirror rig); the IFO's lens-rig "1.000" was polarization gain cancelling the shrinkage.</a:t>
+              <a:t> (well × k², read × k): the pm-per-reading rows are the full camera's photons at the model's sampling.</a:t>
             </a:r>
           </a:p>
         </p:txBody>
@@ -5602,7 +4738,7 @@
         </p:nvSpPr>
         <p:spPr>
           <a:xfrm>
-            <a:off x="411480" y="5938266"/>
+            <a:off x="411480" y="6834505"/>
             <a:ext cx="11368735" cy="274320"/>
           </a:xfrm>
           <a:prstGeom prst="rect">
@@ -5628,7 +4764,7 @@
                 </a:solidFill>
                 <a:latin typeface="Arial"/>
               </a:rPr>
-              <a:t>Stage battery (runs/battery_{lens,oap}, the IFO column = redo96_&lt;optics&gt;ph: tail md5, lit 6948, seed 7, the 64-state matrix on the surface); the gain probe (runs/gainprobe_lens); the converged estimator (dm_gauge_lib/dmg_converge, gate tConvergedEst 4/4; runs/conv_H_, tg_psi_dm96_oap/runs/conv_I_; H and I are the reading-class letters in the records); the one-step rows reproduce the record to the digit.</a:t>
+              <a:t>Stage noise and format; the pupil in pixels is the camera's short side filled by the pupil image (the tail's magnification is set for it); the model's 315 px = 157.45 px radius (stage bench).</a:t>
             </a:r>
           </a:p>
         </p:txBody>
@@ -5685,7 +4821,7 @@
                 </a:solidFill>
                 <a:latin typeface="Arial"/>
               </a:rPr>
-              <a:t>Photons for 1 pm, camera by camera</a:t>
+              <a:t>Performance side by side: HET against the IFO on the same surface</a:t>
             </a:r>
           </a:p>
           <a:p>
@@ -5701,7 +4837,7 @@
                 </a:solidFill>
                 <a:latin typeface="Arial"/>
               </a:rPr>
-              <a:t>A heterodyne read is photon-limited at full well: pixels × well × frame rate decides; Feng's baseline camera is seven minutes per picometer, the deepest-well 1k global-shutter part is 40 seconds, the lock-in 3.4 s</a:t>
+              <a:t>HET = the heterodyne (COPHI) reading; IFO = the record's Twyman-Green polarization interferometer.  Same seed, surface and matrix: HET matches the IFO's floor, halves its mirror-rig random-surface error, and is exact where the IFO is not</a:t>
             </a:r>
           </a:p>
         </p:txBody>
@@ -5759,8 +4895,8 @@
           <p:nvPr/>
         </p:nvGraphicFramePr>
         <p:xfrm>
-          <a:off x="411480" y="1298448"/>
-          <a:ext cx="5806438" cy="4509135"/>
+          <a:off x="411480" y="1188720"/>
+          <a:ext cx="11368734" cy="2800350"/>
         </p:xfrm>
         <a:graphic>
           <a:graphicData uri="http://schemas.openxmlformats.org/drawingml/2006/table">
@@ -5769,14 +4905,12 @@
                 <a:tableStyleId>{5C22544A-7EE6-4342-B048-85BDC9FD1C3A}</a:tableStyleId>
               </a:tblPr>
               <a:tblGrid>
-                <a:gridCol w="1363792"/>
-                <a:gridCol w="936580"/>
-                <a:gridCol w="805130"/>
-                <a:gridCol w="377918"/>
-                <a:gridCol w="1232342"/>
-                <a:gridCol w="1090676"/>
+                <a:gridCol w="3065461"/>
+                <a:gridCol w="2682278"/>
+                <a:gridCol w="2325624"/>
+                <a:gridCol w="3295371"/>
               </a:tblGrid>
-              <a:tr h="1034415">
+              <a:tr h="280035">
                 <a:tc>
                   <a:txBody>
                     <a:bodyPr wrap="square"/>
@@ -5789,7 +4923,7 @@
                           </a:solidFill>
                           <a:latin typeface="Arial"/>
                         </a:rPr>
-                        <a:t>camera (survey, to verify)</a:t>
+                        <a:t>reading, rig (estimator)</a:t>
                       </a:r>
                     </a:p>
                   </a:txBody>
@@ -5811,7 +4945,7 @@
                           </a:solidFill>
                           <a:latin typeface="Arial"/>
                         </a:rPr>
-                        <a:t>read noise r, e⁻ (σ penalty √((I₀ + r²)/I₀) at half well)</a:t>
+                        <a:t>10 nm on one actuator: gain / floor</a:t>
                       </a:r>
                     </a:p>
                   </a:txBody>
@@ -5833,7 +4967,7 @@
                           </a:solidFill>
                           <a:latin typeface="Arial"/>
                         </a:rPr>
-                        <a:t>pm per reading, lens / mirror</a:t>
+                        <a:t>1 nm on the grid: gain / floor</a:t>
                       </a:r>
                     </a:p>
                   </a:txBody>
@@ -5855,7 +4989,7 @@
                           </a:solidFill>
                           <a:latin typeface="Arial"/>
                         </a:rPr>
-                        <a:t>SNR at 1 pm per reading</a:t>
+                        <a:t>dense random 10 nm: gain / error</a:t>
                       </a:r>
                     </a:p>
                   </a:txBody>
@@ -5865,65 +4999,21 @@
                     </a:solidFill>
                   </a:tcPr>
                 </a:tc>
-                <a:tc>
-                  <a:txBody>
-                    <a:bodyPr wrap="square"/>
-                    <a:lstStyle/>
-                    <a:p>
-                      <a:r>
-                        <a:rPr sz="1100" b="1">
-                          <a:solidFill>
-                            <a:srgbClr val="FFFFFF"/>
-                          </a:solidFill>
-                          <a:latin typeface="Arial"/>
-                        </a:rPr>
-                        <a:t>seconds to SNR 1 at 1 pm, lens / mirror</a:t>
-                      </a:r>
-                    </a:p>
-                  </a:txBody>
-                  <a:tcPr marL="54864" marR="54864" marT="18288" marB="18288">
-                    <a:solidFill>
-                      <a:srgbClr val="1F4E79"/>
-                    </a:solidFill>
-                  </a:tcPr>
-                </a:tc>
-                <a:tc>
-                  <a:txBody>
-                    <a:bodyPr wrap="square"/>
-                    <a:lstStyle/>
-                    <a:p>
-                      <a:r>
-                        <a:rPr sz="1100" b="1">
-                          <a:solidFill>
-                            <a:srgbClr val="FFFFFF"/>
-                          </a:solidFill>
-                          <a:latin typeface="Arial"/>
-                        </a:rPr>
-                        <a:t>to SNR 10</a:t>
-                      </a:r>
-                    </a:p>
-                  </a:txBody>
-                  <a:tcPr marL="54864" marR="54864" marT="18288" marB="18288">
-                    <a:solidFill>
-                      <a:srgbClr val="1F4E79"/>
-                    </a:solidFill>
-                  </a:tcPr>
-                </a:tc>
               </a:tr>
-              <a:tr h="468630">
-                <a:tc>
-                  <a:txBody>
-                    <a:bodyPr wrap="square"/>
-                    <a:lstStyle/>
-                    <a:p>
-                      <a:r>
-                        <a:rPr sz="1100" b="0">
-                          <a:solidFill>
-                            <a:srgbClr val="282828"/>
-                          </a:solidFill>
-                          <a:latin typeface="Arial"/>
-                        </a:rPr>
-                        <a:t>as proposed: 1k², 60 ke, 30 fps</a:t>
+              <a:tr h="280035">
+                <a:tc>
+                  <a:txBody>
+                    <a:bodyPr wrap="square"/>
+                    <a:lstStyle/>
+                    <a:p>
+                      <a:r>
+                        <a:rPr sz="1100" b="0">
+                          <a:solidFill>
+                            <a:srgbClr val="282828"/>
+                          </a:solidFill>
+                          <a:latin typeface="Arial"/>
+                        </a:rPr>
+                        <a:t>HET (COPHI), lens (one-step)</a:t>
                       </a:r>
                     </a:p>
                   </a:txBody>
@@ -5945,7 +5035,7 @@
                           </a:solidFill>
                           <a:latin typeface="Arial"/>
                         </a:rPr>
-                        <a:t>5 assumed (1.000)</a:t>
+                        <a:t>0.9947 / 2 pm</a:t>
                       </a:r>
                     </a:p>
                   </a:txBody>
@@ -5967,7 +5057,7 @@
                           </a:solidFill>
                           <a:latin typeface="Arial"/>
                         </a:rPr>
-                        <a:t>57.7 / 53.7</a:t>
+                        <a:t>0.9964 / 2 pm</a:t>
                       </a:r>
                     </a:p>
                   </a:txBody>
@@ -5989,7 +5079,7 @@
                           </a:solidFill>
                           <a:latin typeface="Arial"/>
                         </a:rPr>
-                        <a:t>0.017</a:t>
+                        <a:t>0.9967 / 180 pm</a:t>
                       </a:r>
                     </a:p>
                   </a:txBody>
@@ -5999,19 +5089,111 @@
                     </a:solidFill>
                   </a:tcPr>
                 </a:tc>
-                <a:tc>
-                  <a:txBody>
-                    <a:bodyPr wrap="square"/>
-                    <a:lstStyle/>
-                    <a:p>
-                      <a:r>
-                        <a:rPr sz="1100" b="0">
-                          <a:solidFill>
-                            <a:srgbClr val="282828"/>
-                          </a:solidFill>
-                          <a:latin typeface="Arial"/>
-                        </a:rPr>
-                        <a:t>443 / 385 (≈ 7 min)</a:t>
+              </a:tr>
+              <a:tr h="280035">
+                <a:tc>
+                  <a:txBody>
+                    <a:bodyPr wrap="square"/>
+                    <a:lstStyle/>
+                    <a:p>
+                      <a:r>
+                        <a:rPr sz="1100" b="0">
+                          <a:solidFill>
+                            <a:srgbClr val="282828"/>
+                          </a:solidFill>
+                          <a:latin typeface="Arial"/>
+                        </a:rPr>
+                        <a:t>IFO (Twyman-Green), lens (one-step)</a:t>
+                      </a:r>
+                    </a:p>
+                  </a:txBody>
+                  <a:tcPr marL="54864" marR="54864" marT="18288" marB="18288">
+                    <a:solidFill>
+                      <a:srgbClr val="ECF1F6"/>
+                    </a:solidFill>
+                  </a:tcPr>
+                </a:tc>
+                <a:tc>
+                  <a:txBody>
+                    <a:bodyPr wrap="square"/>
+                    <a:lstStyle/>
+                    <a:p>
+                      <a:r>
+                        <a:rPr sz="1100" b="0">
+                          <a:solidFill>
+                            <a:srgbClr val="282828"/>
+                          </a:solidFill>
+                          <a:latin typeface="Arial"/>
+                        </a:rPr>
+                        <a:t>1.0001 / 1 pm</a:t>
+                      </a:r>
+                    </a:p>
+                  </a:txBody>
+                  <a:tcPr marL="54864" marR="54864" marT="18288" marB="18288">
+                    <a:solidFill>
+                      <a:srgbClr val="ECF1F6"/>
+                    </a:solidFill>
+                  </a:tcPr>
+                </a:tc>
+                <a:tc>
+                  <a:txBody>
+                    <a:bodyPr wrap="square"/>
+                    <a:lstStyle/>
+                    <a:p>
+                      <a:r>
+                        <a:rPr sz="1100" b="0">
+                          <a:solidFill>
+                            <a:srgbClr val="282828"/>
+                          </a:solidFill>
+                          <a:latin typeface="Arial"/>
+                        </a:rPr>
+                        <a:t>1.0046 / 2 pm</a:t>
+                      </a:r>
+                    </a:p>
+                  </a:txBody>
+                  <a:tcPr marL="54864" marR="54864" marT="18288" marB="18288">
+                    <a:solidFill>
+                      <a:srgbClr val="ECF1F6"/>
+                    </a:solidFill>
+                  </a:tcPr>
+                </a:tc>
+                <a:tc>
+                  <a:txBody>
+                    <a:bodyPr wrap="square"/>
+                    <a:lstStyle/>
+                    <a:p>
+                      <a:r>
+                        <a:rPr sz="1100" b="0">
+                          <a:solidFill>
+                            <a:srgbClr val="282828"/>
+                          </a:solidFill>
+                          <a:latin typeface="Arial"/>
+                        </a:rPr>
+                        <a:t>1.0053 / 179 pm</a:t>
+                      </a:r>
+                    </a:p>
+                  </a:txBody>
+                  <a:tcPr marL="54864" marR="54864" marT="18288" marB="18288">
+                    <a:solidFill>
+                      <a:srgbClr val="ECF1F6"/>
+                    </a:solidFill>
+                  </a:tcPr>
+                </a:tc>
+              </a:tr>
+              <a:tr h="280035">
+                <a:tc>
+                  <a:txBody>
+                    <a:bodyPr wrap="square"/>
+                    <a:lstStyle/>
+                    <a:p>
+                      <a:r>
+                        <a:rPr sz="1100" b="0">
+                          <a:solidFill>
+                            <a:srgbClr val="282828"/>
+                          </a:solidFill>
+                          <a:latin typeface="Arial"/>
+                        </a:rPr>
+                        <a:t>HET, mirror (one-step)</a:t>
                       </a:r>
                     </a:p>
                   </a:txBody>
@@ -6033,7 +5215,7 @@
                           </a:solidFill>
                           <a:latin typeface="Arial"/>
                         </a:rPr>
-                        <a:t>12 / 11 h</a:t>
+                        <a:t>0.9941 / 1 pm</a:t>
                       </a:r>
                     </a:p>
                   </a:txBody>
@@ -6043,21 +5225,65 @@
                     </a:solidFill>
                   </a:tcPr>
                 </a:tc>
+                <a:tc>
+                  <a:txBody>
+                    <a:bodyPr wrap="square"/>
+                    <a:lstStyle/>
+                    <a:p>
+                      <a:r>
+                        <a:rPr sz="1100" b="0">
+                          <a:solidFill>
+                            <a:srgbClr val="282828"/>
+                          </a:solidFill>
+                          <a:latin typeface="Arial"/>
+                        </a:rPr>
+                        <a:t>0.9949 / 1 pm</a:t>
+                      </a:r>
+                    </a:p>
+                  </a:txBody>
+                  <a:tcPr marL="54864" marR="54864" marT="18288" marB="18288">
+                    <a:solidFill>
+                      <a:srgbClr val="FFFFFF"/>
+                    </a:solidFill>
+                  </a:tcPr>
+                </a:tc>
+                <a:tc>
+                  <a:txBody>
+                    <a:bodyPr wrap="square"/>
+                    <a:lstStyle/>
+                    <a:p>
+                      <a:r>
+                        <a:rPr sz="1100" b="0">
+                          <a:solidFill>
+                            <a:srgbClr val="282828"/>
+                          </a:solidFill>
+                          <a:latin typeface="Arial"/>
+                        </a:rPr>
+                        <a:t>0.9950 / 118 pm</a:t>
+                      </a:r>
+                    </a:p>
+                  </a:txBody>
+                  <a:tcPr marL="54864" marR="54864" marT="18288" marB="18288">
+                    <a:solidFill>
+                      <a:srgbClr val="FFFFFF"/>
+                    </a:solidFill>
+                  </a:tcPr>
+                </a:tc>
               </a:tr>
-              <a:tr h="657225">
-                <a:tc>
-                  <a:txBody>
-                    <a:bodyPr wrap="square"/>
-                    <a:lstStyle/>
-                    <a:p>
-                      <a:r>
-                        <a:rPr sz="1100" b="0">
-                          <a:solidFill>
-                            <a:srgbClr val="282828"/>
-                          </a:solidFill>
-                          <a:latin typeface="Arial"/>
-                        </a:rPr>
-                        <a:t>Photonfocus MV1-D1024E, 200 ke, 150 fps</a:t>
+              <a:tr h="280035">
+                <a:tc>
+                  <a:txBody>
+                    <a:bodyPr wrap="square"/>
+                    <a:lstStyle/>
+                    <a:p>
+                      <a:r>
+                        <a:rPr sz="1100" b="0">
+                          <a:solidFill>
+                            <a:srgbClr val="282828"/>
+                          </a:solidFill>
+                          <a:latin typeface="Arial"/>
+                        </a:rPr>
+                        <a:t>IFO, mirror (one-step)</a:t>
                       </a:r>
                     </a:p>
                   </a:txBody>
@@ -6079,7 +5305,7 @@
                           </a:solidFill>
                           <a:latin typeface="Arial"/>
                         </a:rPr>
-                        <a:t>220 (1.22)</a:t>
+                        <a:t>0.9832 / 2 pm</a:t>
                       </a:r>
                     </a:p>
                   </a:txBody>
@@ -6101,7 +5327,7 @@
                           </a:solidFill>
                           <a:latin typeface="Arial"/>
                         </a:rPr>
-                        <a:t>39.5 / 36.5</a:t>
+                        <a:t>0.9838 / 2 pm</a:t>
                       </a:r>
                     </a:p>
                   </a:txBody>
@@ -6123,7 +5349,7 @@
                           </a:solidFill>
                           <a:latin typeface="Arial"/>
                         </a:rPr>
-                        <a:t>0.025</a:t>
+                        <a:t>0.9844 / 223 pm</a:t>
                       </a:r>
                     </a:p>
                   </a:txBody>
@@ -6133,19 +5359,111 @@
                     </a:solidFill>
                   </a:tcPr>
                 </a:tc>
-                <a:tc>
-                  <a:txBody>
-                    <a:bodyPr wrap="square"/>
-                    <a:lstStyle/>
-                    <a:p>
-                      <a:r>
-                        <a:rPr sz="1100" b="0">
-                          <a:solidFill>
-                            <a:srgbClr val="282828"/>
-                          </a:solidFill>
-                          <a:latin typeface="Arial"/>
-                        </a:rPr>
-                        <a:t>42 / 36</a:t>
+              </a:tr>
+              <a:tr h="280035">
+                <a:tc>
+                  <a:txBody>
+                    <a:bodyPr wrap="square"/>
+                    <a:lstStyle/>
+                    <a:p>
+                      <a:r>
+                        <a:rPr sz="1100" b="0">
+                          <a:solidFill>
+                            <a:srgbClr val="282828"/>
+                          </a:solidFill>
+                          <a:latin typeface="Arial"/>
+                        </a:rPr>
+                        <a:t>HET, lens (converged)</a:t>
+                      </a:r>
+                    </a:p>
+                  </a:txBody>
+                  <a:tcPr marL="54864" marR="54864" marT="18288" marB="18288">
+                    <a:solidFill>
+                      <a:srgbClr val="FFFFFF"/>
+                    </a:solidFill>
+                  </a:tcPr>
+                </a:tc>
+                <a:tc>
+                  <a:txBody>
+                    <a:bodyPr wrap="square"/>
+                    <a:lstStyle/>
+                    <a:p>
+                      <a:r>
+                        <a:rPr sz="1100" b="0">
+                          <a:solidFill>
+                            <a:srgbClr val="282828"/>
+                          </a:solidFill>
+                          <a:latin typeface="Arial"/>
+                        </a:rPr>
+                        <a:t>1.0008</a:t>
+                      </a:r>
+                    </a:p>
+                  </a:txBody>
+                  <a:tcPr marL="54864" marR="54864" marT="18288" marB="18288">
+                    <a:solidFill>
+                      <a:srgbClr val="FFFFFF"/>
+                    </a:solidFill>
+                  </a:tcPr>
+                </a:tc>
+                <a:tc>
+                  <a:txBody>
+                    <a:bodyPr wrap="square"/>
+                    <a:lstStyle/>
+                    <a:p>
+                      <a:r>
+                        <a:rPr sz="1100" b="0">
+                          <a:solidFill>
+                            <a:srgbClr val="282828"/>
+                          </a:solidFill>
+                          <a:latin typeface="Arial"/>
+                        </a:rPr>
+                        <a:t>1.0022</a:t>
+                      </a:r>
+                    </a:p>
+                  </a:txBody>
+                  <a:tcPr marL="54864" marR="54864" marT="18288" marB="18288">
+                    <a:solidFill>
+                      <a:srgbClr val="FFFFFF"/>
+                    </a:solidFill>
+                  </a:tcPr>
+                </a:tc>
+                <a:tc>
+                  <a:txBody>
+                    <a:bodyPr wrap="square"/>
+                    <a:lstStyle/>
+                    <a:p>
+                      <a:r>
+                        <a:rPr sz="1100" b="0">
+                          <a:solidFill>
+                            <a:srgbClr val="282828"/>
+                          </a:solidFill>
+                          <a:latin typeface="Arial"/>
+                        </a:rPr>
+                        <a:t>1.0024</a:t>
+                      </a:r>
+                    </a:p>
+                  </a:txBody>
+                  <a:tcPr marL="54864" marR="54864" marT="18288" marB="18288">
+                    <a:solidFill>
+                      <a:srgbClr val="FFFFFF"/>
+                    </a:solidFill>
+                  </a:tcPr>
+                </a:tc>
+              </a:tr>
+              <a:tr h="280035">
+                <a:tc>
+                  <a:txBody>
+                    <a:bodyPr wrap="square"/>
+                    <a:lstStyle/>
+                    <a:p>
+                      <a:r>
+                        <a:rPr sz="1100" b="0">
+                          <a:solidFill>
+                            <a:srgbClr val="282828"/>
+                          </a:solidFill>
+                          <a:latin typeface="Arial"/>
+                        </a:rPr>
+                        <a:t>HET, mirror (converged)</a:t>
                       </a:r>
                     </a:p>
                   </a:txBody>
@@ -6167,7 +5485,7 @@
                           </a:solidFill>
                           <a:latin typeface="Arial"/>
                         </a:rPr>
-                        <a:t>70 / 60 min</a:t>
+                        <a:t>1.0000</a:t>
                       </a:r>
                     </a:p>
                   </a:txBody>
@@ -6177,21 +5495,65 @@
                     </a:solidFill>
                   </a:tcPr>
                 </a:tc>
+                <a:tc>
+                  <a:txBody>
+                    <a:bodyPr wrap="square"/>
+                    <a:lstStyle/>
+                    <a:p>
+                      <a:r>
+                        <a:rPr sz="1100" b="0">
+                          <a:solidFill>
+                            <a:srgbClr val="282828"/>
+                          </a:solidFill>
+                          <a:latin typeface="Arial"/>
+                        </a:rPr>
+                        <a:t>1.0005</a:t>
+                      </a:r>
+                    </a:p>
+                  </a:txBody>
+                  <a:tcPr marL="54864" marR="54864" marT="18288" marB="18288">
+                    <a:solidFill>
+                      <a:srgbClr val="ECF1F6"/>
+                    </a:solidFill>
+                  </a:tcPr>
+                </a:tc>
+                <a:tc>
+                  <a:txBody>
+                    <a:bodyPr wrap="square"/>
+                    <a:lstStyle/>
+                    <a:p>
+                      <a:r>
+                        <a:rPr sz="1100" b="0">
+                          <a:solidFill>
+                            <a:srgbClr val="282828"/>
+                          </a:solidFill>
+                          <a:latin typeface="Arial"/>
+                        </a:rPr>
+                        <a:t>1.0005</a:t>
+                      </a:r>
+                    </a:p>
+                  </a:txBody>
+                  <a:tcPr marL="54864" marR="54864" marT="18288" marB="18288">
+                    <a:solidFill>
+                      <a:srgbClr val="ECF1F6"/>
+                    </a:solidFill>
+                  </a:tcPr>
+                </a:tc>
               </a:tr>
-              <a:tr h="657225">
-                <a:tc>
-                  <a:txBody>
-                    <a:bodyPr wrap="square"/>
-                    <a:lstStyle/>
-                    <a:p>
-                      <a:r>
-                        <a:rPr sz="1100" b="0">
-                          <a:solidFill>
-                            <a:srgbClr val="282828"/>
-                          </a:solidFill>
-                          <a:latin typeface="Arial"/>
-                        </a:rPr>
-                        <a:t>pco.edge 5.5, true global-shutter mode, 30 ke, 50 fps</a:t>
+              <a:tr h="280035">
+                <a:tc>
+                  <a:txBody>
+                    <a:bodyPr wrap="square"/>
+                    <a:lstStyle/>
+                    <a:p>
+                      <a:r>
+                        <a:rPr sz="1100" b="0">
+                          <a:solidFill>
+                            <a:srgbClr val="282828"/>
+                          </a:solidFill>
+                          <a:latin typeface="Arial"/>
+                        </a:rPr>
+                        <a:t>IFO, lens (converged)</a:t>
                       </a:r>
                     </a:p>
                   </a:txBody>
@@ -6213,7 +5575,7 @@
                           </a:solidFill>
                           <a:latin typeface="Arial"/>
                         </a:rPr>
-                        <a:t>2.2 (1.000)</a:t>
+                        <a:t>1.0064</a:t>
                       </a:r>
                     </a:p>
                   </a:txBody>
@@ -6235,7 +5597,7 @@
                           </a:solidFill>
                           <a:latin typeface="Arial"/>
                         </a:rPr>
-                        <a:t>40.2 / 38.3</a:t>
+                        <a:t>1.0106</a:t>
                       </a:r>
                     </a:p>
                   </a:txBody>
@@ -6257,7 +5619,7 @@
                           </a:solidFill>
                           <a:latin typeface="Arial"/>
                         </a:rPr>
-                        <a:t>0.025</a:t>
+                        <a:t>1.0112</a:t>
                       </a:r>
                     </a:p>
                   </a:txBody>
@@ -6267,19 +5629,111 @@
                     </a:solidFill>
                   </a:tcPr>
                 </a:tc>
-                <a:tc>
-                  <a:txBody>
-                    <a:bodyPr wrap="square"/>
-                    <a:lstStyle/>
-                    <a:p>
-                      <a:r>
-                        <a:rPr sz="1100" b="0">
-                          <a:solidFill>
-                            <a:srgbClr val="282828"/>
-                          </a:solidFill>
-                          <a:latin typeface="Arial"/>
-                        </a:rPr>
-                        <a:t>129 / 117</a:t>
+              </a:tr>
+              <a:tr h="280035">
+                <a:tc>
+                  <a:txBody>
+                    <a:bodyPr wrap="square"/>
+                    <a:lstStyle/>
+                    <a:p>
+                      <a:r>
+                        <a:rPr sz="1100" b="0">
+                          <a:solidFill>
+                            <a:srgbClr val="282828"/>
+                          </a:solidFill>
+                          <a:latin typeface="Arial"/>
+                        </a:rPr>
+                        <a:t>IFO, mirror (converged)</a:t>
+                      </a:r>
+                    </a:p>
+                  </a:txBody>
+                  <a:tcPr marL="54864" marR="54864" marT="18288" marB="18288">
+                    <a:solidFill>
+                      <a:srgbClr val="ECF1F6"/>
+                    </a:solidFill>
+                  </a:tcPr>
+                </a:tc>
+                <a:tc>
+                  <a:txBody>
+                    <a:bodyPr wrap="square"/>
+                    <a:lstStyle/>
+                    <a:p>
+                      <a:r>
+                        <a:rPr sz="1100" b="0">
+                          <a:solidFill>
+                            <a:srgbClr val="282828"/>
+                          </a:solidFill>
+                          <a:latin typeface="Arial"/>
+                        </a:rPr>
+                        <a:t>0.9887</a:t>
+                      </a:r>
+                    </a:p>
+                  </a:txBody>
+                  <a:tcPr marL="54864" marR="54864" marT="18288" marB="18288">
+                    <a:solidFill>
+                      <a:srgbClr val="ECF1F6"/>
+                    </a:solidFill>
+                  </a:tcPr>
+                </a:tc>
+                <a:tc>
+                  <a:txBody>
+                    <a:bodyPr wrap="square"/>
+                    <a:lstStyle/>
+                    <a:p>
+                      <a:r>
+                        <a:rPr sz="1100" b="0">
+                          <a:solidFill>
+                            <a:srgbClr val="282828"/>
+                          </a:solidFill>
+                          <a:latin typeface="Arial"/>
+                        </a:rPr>
+                        <a:t>0.9892</a:t>
+                      </a:r>
+                    </a:p>
+                  </a:txBody>
+                  <a:tcPr marL="54864" marR="54864" marT="18288" marB="18288">
+                    <a:solidFill>
+                      <a:srgbClr val="ECF1F6"/>
+                    </a:solidFill>
+                  </a:tcPr>
+                </a:tc>
+                <a:tc>
+                  <a:txBody>
+                    <a:bodyPr wrap="square"/>
+                    <a:lstStyle/>
+                    <a:p>
+                      <a:r>
+                        <a:rPr sz="1100" b="0">
+                          <a:solidFill>
+                            <a:srgbClr val="282828"/>
+                          </a:solidFill>
+                          <a:latin typeface="Arial"/>
+                        </a:rPr>
+                        <a:t>0.9896</a:t>
+                      </a:r>
+                    </a:p>
+                  </a:txBody>
+                  <a:tcPr marL="54864" marR="54864" marT="18288" marB="18288">
+                    <a:solidFill>
+                      <a:srgbClr val="ECF1F6"/>
+                    </a:solidFill>
+                  </a:tcPr>
+                </a:tc>
+              </a:tr>
+              <a:tr h="280035">
+                <a:tc>
+                  <a:txBody>
+                    <a:bodyPr wrap="square"/>
+                    <a:lstStyle/>
+                    <a:p>
+                      <a:r>
+                        <a:rPr sz="1100" b="0">
+                          <a:solidFill>
+                            <a:srgbClr val="282828"/>
+                          </a:solidFill>
+                          <a:latin typeface="Arial"/>
+                        </a:rPr>
+                        <a:t>HET, lock-in camera (record, noise-free)</a:t>
                       </a:r>
                     </a:p>
                   </a:txBody>
@@ -6301,7 +5755,7 @@
                           </a:solidFill>
                           <a:latin typeface="Arial"/>
                         </a:rPr>
-                        <a:t>3.6 / 3.3 h</a:t>
+                        <a:t>converged 1.0000</a:t>
                       </a:r>
                     </a:p>
                   </a:txBody>
@@ -6311,155 +5765,19 @@
                     </a:solidFill>
                   </a:tcPr>
                 </a:tc>
-              </a:tr>
-              <a:tr h="657225">
-                <a:tc>
-                  <a:txBody>
-                    <a:bodyPr wrap="square"/>
-                    <a:lstStyle/>
-                    <a:p>
-                      <a:r>
-                        <a:rPr sz="1100" b="0">
-                          <a:solidFill>
-                            <a:srgbClr val="282828"/>
-                          </a:solidFill>
-                          <a:latin typeface="Arial"/>
-                        </a:rPr>
-                        <a:t>C-RED 2 (InGaAs), at 632.8 nm as a placeholder</a:t>
-                      </a:r>
-                    </a:p>
-                  </a:txBody>
-                  <a:tcPr marL="54864" marR="54864" marT="18288" marB="18288">
-                    <a:solidFill>
-                      <a:srgbClr val="ECF1F6"/>
-                    </a:solidFill>
-                  </a:tcPr>
-                </a:tc>
-                <a:tc>
-                  <a:txBody>
-                    <a:bodyPr wrap="square"/>
-                    <a:lstStyle/>
-                    <a:p>
-                      <a:r>
-                        <a:rPr sz="1100" b="0">
-                          <a:solidFill>
-                            <a:srgbClr val="282828"/>
-                          </a:solidFill>
-                          <a:latin typeface="Arial"/>
-                        </a:rPr>
-                        <a:t>30 assumed (1.001)</a:t>
-                      </a:r>
-                    </a:p>
-                  </a:txBody>
-                  <a:tcPr marL="54864" marR="54864" marT="18288" marB="18288">
-                    <a:solidFill>
-                      <a:srgbClr val="ECF1F6"/>
-                    </a:solidFill>
-                  </a:tcPr>
-                </a:tc>
-                <a:tc>
-                  <a:txBody>
-                    <a:bodyPr wrap="square"/>
-                    <a:lstStyle/>
-                    <a:p>
-                      <a:r>
-                        <a:rPr sz="1100" b="0">
-                          <a:solidFill>
-                            <a:srgbClr val="282828"/>
-                          </a:solidFill>
-                          <a:latin typeface="Arial"/>
-                        </a:rPr>
-                        <a:t>19.6 / 18.7</a:t>
-                      </a:r>
-                    </a:p>
-                  </a:txBody>
-                  <a:tcPr marL="54864" marR="54864" marT="18288" marB="18288">
-                    <a:solidFill>
-                      <a:srgbClr val="ECF1F6"/>
-                    </a:solidFill>
-                  </a:tcPr>
-                </a:tc>
-                <a:tc>
-                  <a:txBody>
-                    <a:bodyPr wrap="square"/>
-                    <a:lstStyle/>
-                    <a:p>
-                      <a:r>
-                        <a:rPr sz="1100" b="0">
-                          <a:solidFill>
-                            <a:srgbClr val="282828"/>
-                          </a:solidFill>
-                          <a:latin typeface="Arial"/>
-                        </a:rPr>
-                        <a:t>0.051</a:t>
-                      </a:r>
-                    </a:p>
-                  </a:txBody>
-                  <a:tcPr marL="54864" marR="54864" marT="18288" marB="18288">
-                    <a:solidFill>
-                      <a:srgbClr val="ECF1F6"/>
-                    </a:solidFill>
-                  </a:tcPr>
-                </a:tc>
-                <a:tc>
-                  <a:txBody>
-                    <a:bodyPr wrap="square"/>
-                    <a:lstStyle/>
-                    <a:p>
-                      <a:r>
-                        <a:rPr sz="1100" b="0">
-                          <a:solidFill>
-                            <a:srgbClr val="282828"/>
-                          </a:solidFill>
-                          <a:latin typeface="Arial"/>
-                        </a:rPr>
-                        <a:t>— (the 1.3 µm stage)</a:t>
-                      </a:r>
-                    </a:p>
-                  </a:txBody>
-                  <a:tcPr marL="54864" marR="54864" marT="18288" marB="18288">
-                    <a:solidFill>
-                      <a:srgbClr val="ECF1F6"/>
-                    </a:solidFill>
-                  </a:tcPr>
-                </a:tc>
-                <a:tc>
-                  <a:txBody>
-                    <a:bodyPr wrap="square"/>
-                    <a:lstStyle/>
-                    <a:p>
-                      <a:r>
-                        <a:rPr sz="1100" b="0">
-                          <a:solidFill>
-                            <a:srgbClr val="282828"/>
-                          </a:solidFill>
-                          <a:latin typeface="Arial"/>
-                        </a:rPr>
-                        <a:t>—</a:t>
-                      </a:r>
-                    </a:p>
-                  </a:txBody>
-                  <a:tcPr marL="54864" marR="54864" marT="18288" marB="18288">
-                    <a:solidFill>
-                      <a:srgbClr val="ECF1F6"/>
-                    </a:solidFill>
-                  </a:tcPr>
-                </a:tc>
-              </a:tr>
-              <a:tr h="1034415">
-                <a:tc>
-                  <a:txBody>
-                    <a:bodyPr wrap="square"/>
-                    <a:lstStyle/>
-                    <a:p>
-                      <a:r>
-                        <a:rPr sz="1100" b="0">
-                          <a:solidFill>
-                            <a:srgbClr val="282828"/>
-                          </a:solidFill>
-                          <a:latin typeface="Arial"/>
-                        </a:rPr>
-                        <a:t>lock-in camera, heliCam C4, 500 ke, I/Q at 1 kHz (the lock-in reading; well-capped)</a:t>
+                <a:tc>
+                  <a:txBody>
+                    <a:bodyPr wrap="square"/>
+                    <a:lstStyle/>
+                    <a:p>
+                      <a:r>
+                        <a:rPr sz="1100" b="0">
+                          <a:solidFill>
+                            <a:srgbClr val="282828"/>
+                          </a:solidFill>
+                          <a:latin typeface="Arial"/>
+                        </a:rPr>
+                        <a:t>1.0006</a:t>
                       </a:r>
                     </a:p>
                   </a:txBody>
@@ -6481,95 +5799,7 @@
                           </a:solidFill>
                           <a:latin typeface="Arial"/>
                         </a:rPr>
-                        <a:t>n/s: run at 0 and at 100 assumed (1.09)</a:t>
-                      </a:r>
-                    </a:p>
-                  </a:txBody>
-                  <a:tcPr marL="54864" marR="54864" marT="18288" marB="18288">
-                    <a:solidFill>
-                      <a:srgbClr val="FFFFFF"/>
-                    </a:solidFill>
-                  </a:tcPr>
-                </a:tc>
-                <a:tc>
-                  <a:txBody>
-                    <a:bodyPr wrap="square"/>
-                    <a:lstStyle/>
-                    <a:p>
-                      <a:r>
-                        <a:rPr sz="1100" b="0">
-                          <a:solidFill>
-                            <a:srgbClr val="282828"/>
-                          </a:solidFill>
-                          <a:latin typeface="Arial"/>
-                        </a:rPr>
-                        <a:t>61.1 / 57.9 per 1 ms sample (66 / 63 at read 100)</a:t>
-                      </a:r>
-                    </a:p>
-                  </a:txBody>
-                  <a:tcPr marL="54864" marR="54864" marT="18288" marB="18288">
-                    <a:solidFill>
-                      <a:srgbClr val="FFFFFF"/>
-                    </a:solidFill>
-                  </a:tcPr>
-                </a:tc>
-                <a:tc>
-                  <a:txBody>
-                    <a:bodyPr wrap="square"/>
-                    <a:lstStyle/>
-                    <a:p>
-                      <a:r>
-                        <a:rPr sz="1100" b="0">
-                          <a:solidFill>
-                            <a:srgbClr val="282828"/>
-                          </a:solidFill>
-                          <a:latin typeface="Arial"/>
-                        </a:rPr>
-                        <a:t>0.017 per sample</a:t>
-                      </a:r>
-                    </a:p>
-                  </a:txBody>
-                  <a:tcPr marL="54864" marR="54864" marT="18288" marB="18288">
-                    <a:solidFill>
-                      <a:srgbClr val="FFFFFF"/>
-                    </a:solidFill>
-                  </a:tcPr>
-                </a:tc>
-                <a:tc>
-                  <a:txBody>
-                    <a:bodyPr wrap="square"/>
-                    <a:lstStyle/>
-                    <a:p>
-                      <a:r>
-                        <a:rPr sz="1100" b="0">
-                          <a:solidFill>
-                            <a:srgbClr val="282828"/>
-                          </a:solidFill>
-                          <a:latin typeface="Arial"/>
-                        </a:rPr>
-                        <a:t>3.73 / 3.35 (4.4 / 4.0 at read 100; ×1.23 in time for two-tap demodulation)</a:t>
-                      </a:r>
-                    </a:p>
-                  </a:txBody>
-                  <a:tcPr marL="54864" marR="54864" marT="18288" marB="18288">
-                    <a:solidFill>
-                      <a:srgbClr val="FFFFFF"/>
-                    </a:solidFill>
-                  </a:tcPr>
-                </a:tc>
-                <a:tc>
-                  <a:txBody>
-                    <a:bodyPr wrap="square"/>
-                    <a:lstStyle/>
-                    <a:p>
-                      <a:r>
-                        <a:rPr sz="1100" b="0">
-                          <a:solidFill>
-                            <a:srgbClr val="282828"/>
-                          </a:solidFill>
-                          <a:latin typeface="Arial"/>
-                        </a:rPr>
-                        <a:t>6.2 / 5.6 min</a:t>
+                        <a:t>1.0005 — the same reading, the same algebra</a:t>
                       </a:r>
                     </a:p>
                   </a:txBody>
@@ -6592,8 +5822,8 @@
         </p:nvSpPr>
         <p:spPr>
           <a:xfrm>
-            <a:off x="411480" y="5953887"/>
-            <a:ext cx="5806440" cy="274320"/>
+            <a:off x="411480" y="4135374"/>
+            <a:ext cx="11368735" cy="274320"/>
           </a:xfrm>
           <a:prstGeom prst="rect">
             <a:avLst/>
@@ -6612,7 +5842,7 @@
               </a:spcAft>
             </a:pPr>
             <a:r>
-              <a:rPr sz="1200" b="0">
+              <a:rPr sz="1500" b="0">
                 <a:solidFill>
                   <a:srgbClr val="282828"/>
                 </a:solidFill>
@@ -6621,38 +5851,56 @@
               <a:t>•  </a:t>
             </a:r>
             <a:r>
-              <a:rPr sz="1200" b="1">
+              <a:rPr sz="1500" b="1">
                 <a:solidFill>
                   <a:srgbClr val="282828"/>
                 </a:solidFill>
                 <a:latin typeface="Arial"/>
               </a:rPr>
-              <a:t>The metric:</a:t>
-            </a:r>
-            <a:r>
-              <a:rPr sz="1200" b="0">
+              <a:t>The one-step rows sit 0.5 % low for HET on both rigs — the estimator, not the reading:</a:t>
+            </a:r>
+            <a:r>
+              <a:rPr sz="1500" b="0">
                 <a:solidFill>
                   <a:srgbClr val="282828"/>
                 </a:solidFill>
                 <a:latin typeface="Arial"/>
               </a:rPr>
-              <a:t> the piston-free robust floor over the unpoked actuators (1.48 MAD, median of 12 draws).</a:t>
-            </a:r>
-          </a:p>
-          <a:p>
-            <a:pPr marL="594360" indent="-137160">
+              <a:t> the reading is exact (a 1.000 nm poke reads at slope 1.000000); the 0.5 % is the one-step Tikhonov shrinkage at the record's λ_m = 10⁻³ (1.0007 at 10⁻⁵) — the "matrix bias" every gauge carries, now a number.</a:t>
+            </a:r>
+          </a:p>
+          <a:p>
+            <a:pPr>
               <a:spcAft>
-                <a:spcPts val="500"/>
+                <a:spcPts val="600"/>
               </a:spcAft>
             </a:pPr>
             <a:r>
-              <a:rPr sz="1050" b="0">
-                <a:solidFill>
-                  <a:srgbClr val="6E6E6E"/>
-                </a:solidFill>
-                <a:latin typeface="Arial"/>
-              </a:rPr>
-              <a:t>–  the raw single-actuator noise is mostly a common piston (165 vs 76 pm) — unobservable and inert on a DM; the composite deck puts every gauge on this metric</a:t>
+              <a:rPr sz="1500" b="0">
+                <a:solidFill>
+                  <a:srgbClr val="282828"/>
+                </a:solidFill>
+                <a:latin typeface="Arial"/>
+              </a:rPr>
+              <a:t>•  </a:t>
+            </a:r>
+            <a:r>
+              <a:rPr sz="1500" b="1">
+                <a:solidFill>
+                  <a:srgbClr val="282828"/>
+                </a:solidFill>
+                <a:latin typeface="Arial"/>
+              </a:rPr>
+              <a:t>Driven to convergence (the servo use), HET reads exactly on the mirror rig, and the IFO shows its polarization gain in the open:</a:t>
+            </a:r>
+            <a:r>
+              <a:rPr sz="1500" b="0">
+                <a:solidFill>
+                  <a:srgbClr val="282828"/>
+                </a:solidFill>
+                <a:latin typeface="Arial"/>
+              </a:rPr>
+              <a:t> IFO/HET = 1.006–1.009 (lens rig), 0.989 (mirror rig); the IFO's lens-rig "1.000" was polarization gain cancelling the shrinkage.</a:t>
             </a:r>
           </a:p>
         </p:txBody>
@@ -6665,8 +5913,8 @@
         </p:nvSpPr>
         <p:spPr>
           <a:xfrm>
-            <a:off x="7315200" y="1298448"/>
-            <a:ext cx="4480560" cy="274320"/>
+            <a:off x="411480" y="5938266"/>
+            <a:ext cx="11368735" cy="274320"/>
           </a:xfrm>
           <a:prstGeom prst="rect">
             <a:avLst/>
@@ -6685,238 +5933,13 @@
               </a:spcAft>
             </a:pPr>
             <a:r>
-              <a:rPr sz="1150" b="0">
-                <a:solidFill>
-                  <a:srgbClr val="282828"/>
-                </a:solidFill>
-                <a:latin typeface="Arial"/>
-              </a:rPr>
-              <a:t>•  </a:t>
-            </a:r>
-            <a:r>
-              <a:rPr sz="1150" b="1">
-                <a:solidFill>
-                  <a:srgbClr val="282828"/>
-                </a:solidFill>
-                <a:latin typeface="Arial"/>
-              </a:rPr>
-              <a:t>Read noise is in every row</a:t>
-            </a:r>
-            <a:r>
-              <a:rPr sz="1150" b="0">
-                <a:solidFill>
-                  <a:srgbClr val="282828"/>
-                </a:solidFill>
-                <a:latin typeface="Arial"/>
-              </a:rPr>
-              <a:t> (σ_φ² ∝ I₀ + r²): the Photonfocus's 220 e⁻ costs 22 % in σ at half well and it still wins on well × rate.</a:t>
-            </a:r>
-          </a:p>
-          <a:p>
-            <a:pPr marL="594360" indent="-137160">
-              <a:spcAft>
-                <a:spcPts val="500"/>
-              </a:spcAft>
-            </a:pPr>
-            <a:r>
-              <a:rPr sz="1000" b="0">
+              <a:rPr sz="1050" b="0">
                 <a:solidFill>
                   <a:srgbClr val="6E6E6E"/>
                 </a:solidFill>
                 <a:latin typeface="Arial"/>
               </a:rPr>
-              <a:t>–  the baseline's and the C-RED's read noise are assumed (not in Feng's deck; the survey's value unconfirmed)</a:t>
-            </a:r>
-          </a:p>
-          <a:p>
-            <a:pPr marL="0" indent="0">
-              <a:spcAft>
-                <a:spcPts val="600"/>
-              </a:spcAft>
-            </a:pPr>
-            <a:r>
-              <a:rPr sz="1150" b="0">
-                <a:solidFill>
-                  <a:srgbClr val="282828"/>
-                </a:solidFill>
-                <a:latin typeface="Arial"/>
-              </a:rPr>
-              <a:t>•  </a:t>
-            </a:r>
-            <a:r>
-              <a:rPr sz="1150" b="1">
-                <a:solidFill>
-                  <a:srgbClr val="282828"/>
-                </a:solidFill>
-                <a:latin typeface="Arial"/>
-              </a:rPr>
-              <a:t>SNR at the 1 pm target:</a:t>
-            </a:r>
-            <a:r>
-              <a:rPr sz="1150" b="0">
-                <a:solidFill>
-                  <a:srgbClr val="282828"/>
-                </a:solidFill>
-                <a:latin typeface="Arial"/>
-              </a:rPr>
-              <a:t> one reading gives SNR 0.02–0.05; SNR 1 takes (pm per reading)² readings — the seconds-per-pm column; SNR 10 takes 100× that.</a:t>
-            </a:r>
-          </a:p>
-          <a:p>
-            <a:pPr marL="594360" indent="-137160">
-              <a:spcAft>
-                <a:spcPts val="500"/>
-              </a:spcAft>
-            </a:pPr>
-            <a:r>
-              <a:rPr sz="1000" b="0">
-                <a:solidFill>
-                  <a:srgbClr val="6E6E6E"/>
-                </a:solidFill>
-                <a:latin typeface="Arial"/>
-              </a:rPr>
-              <a:t>–  a hold loop never needs SNR 10 in one measurement: it integrates readings (next slide)</a:t>
-            </a:r>
-          </a:p>
-          <a:p>
-            <a:pPr marL="0" indent="0">
-              <a:spcAft>
-                <a:spcPts val="600"/>
-              </a:spcAft>
-            </a:pPr>
-            <a:r>
-              <a:rPr sz="1150" b="0">
-                <a:solidFill>
-                  <a:srgbClr val="282828"/>
-                </a:solidFill>
-                <a:latin typeface="Arial"/>
-              </a:rPr>
-              <a:t>•  </a:t>
-            </a:r>
-            <a:r>
-              <a:rPr sz="1150" b="1">
-                <a:solidFill>
-                  <a:srgbClr val="282828"/>
-                </a:solidFill>
-                <a:latin typeface="Arial"/>
-              </a:rPr>
-              <a:t>Model and bench agree:</a:t>
-            </a:r>
-            <a:r>
-              <a:rPr sz="1150" b="0">
-                <a:solidFill>
-                  <a:srgbClr val="282828"/>
-                </a:solidFill>
-                <a:latin typeface="Arial"/>
-              </a:rPr>
-              <a:t> the per-pixel noise on the bench equals the tCophi formula to 1.000 ± 0.002 on every camera, rig and train.</a:t>
-            </a:r>
-          </a:p>
-          <a:p>
-            <a:pPr>
-              <a:spcAft>
-                <a:spcPts val="600"/>
-              </a:spcAft>
-            </a:pPr>
-            <a:r>
-              <a:rPr sz="1150" b="0">
-                <a:solidFill>
-                  <a:srgbClr val="282828"/>
-                </a:solidFill>
-                <a:latin typeface="Arial"/>
-              </a:rPr>
-              <a:t>•  </a:t>
-            </a:r>
-            <a:r>
-              <a:rPr sz="1150" b="1">
-                <a:solidFill>
-                  <a:srgbClr val="282828"/>
-                </a:solidFill>
-                <a:latin typeface="Arial"/>
-              </a:rPr>
-              <a:t>Rolling-shutter cameras are out:</a:t>
-            </a:r>
-            <a:r>
-              <a:rPr sz="1150" b="0">
-                <a:solidFill>
-                  <a:srgbClr val="282828"/>
-                </a:solidFill>
-                <a:latin typeface="Arial"/>
-              </a:rPr>
-              <a:t> rows exposed in sequence see different beat phases — a phase ramp across the image.  Needed: true global shutter, hardware trigger from the Rb clock, full-frame streaming.</a:t>
-            </a:r>
-          </a:p>
-          <a:p>
-            <a:pPr>
-              <a:spcAft>
-                <a:spcPts val="600"/>
-              </a:spcAft>
-            </a:pPr>
-            <a:r>
-              <a:rPr sz="1150" b="0">
-                <a:solidFill>
-                  <a:srgbClr val="282828"/>
-                </a:solidFill>
-                <a:latin typeface="Arial"/>
-              </a:rPr>
-              <a:t>•  </a:t>
-            </a:r>
-            <a:r>
-              <a:rPr sz="1150" b="1">
-                <a:solidFill>
-                  <a:srgbClr val="282828"/>
-                </a:solidFill>
-                <a:latin typeface="Arial"/>
-              </a:rPr>
-              <a:t>Why the camera, not the pixel count:</a:t>
-            </a:r>
-            <a:r>
-              <a:rPr sz="1150" b="0">
-                <a:solidFill>
-                  <a:srgbClr val="282828"/>
-                </a:solidFill>
-                <a:latin typeface="Arial"/>
-              </a:rPr>
-              <a:t> a 1k camera oversamples the lattice ten to one; well depth × frame rate is the budget.</a:t>
-            </a:r>
-          </a:p>
-        </p:txBody>
-      </p:sp>
-      <p:sp>
-        <p:nvSpPr>
-          <p:cNvPr id="7" name="TextBox 6"/>
-          <p:cNvSpPr txBox="1"/>
-          <p:nvPr/>
-        </p:nvSpPr>
-        <p:spPr>
-          <a:xfrm>
-            <a:off x="7315200" y="5358384"/>
-            <a:ext cx="4480560" cy="274320"/>
-          </a:xfrm>
-          <a:prstGeom prst="rect">
-            <a:avLst/>
-          </a:prstGeom>
-          <a:noFill/>
-        </p:spPr>
-        <p:txBody>
-          <a:bodyPr wrap="square">
-            <a:spAutoFit/>
-          </a:bodyPr>
-          <a:lstStyle/>
-          <a:p>
-            <a:pPr>
-              <a:spcAft>
-                <a:spcPts val="600"/>
-              </a:spcAft>
-            </a:pPr>
-            <a:r>
-              <a:rPr sz="1050" b="0">
-                <a:solidFill>
-                  <a:srgbClr val="6E6E6E"/>
-                </a:solidFill>
-                <a:latin typeface="Arial"/>
-              </a:rPr>
-              <a:t>Stage noise (runs/noise_{lens,oap}[_plain]), 12 draws, cameras binned onto the model grid (well × k², read × k, frame mean at half well).  Mask convention from the lock-in runs on: the LO-only annulus (no test light) is filled with the fringe pixels' median, not zero — a zero there made any common phase a pupil-edge step the edge actuators fit; the bucket camera's electronics rows move ≤ 9 % under it.</a:t>
+              <a:t>Stage battery (runs/battery_{lens,oap}, the IFO column = redo96_&lt;optics&gt;ph: tail md5, lit 6948, seed 7, the 64-state matrix on the surface); the gain probe (runs/gainprobe_lens); the converged estimator (dm_gauge_lib/dmg_converge, gate tConvergedEst 4/4; runs/conv_H_, tg_psi_dm96_oap/runs/conv_I_; H and I are the reading-class letters in the records); the one-step rows reproduce the record to the digit.</a:t>
             </a:r>
           </a:p>
         </p:txBody>
@@ -6973,7 +5996,7 @@
                 </a:solidFill>
                 <a:latin typeface="Arial"/>
               </a:rPr>
-              <a:t>Holding 3 pm: the servo at the camera's cadence</a:t>
+              <a:t>Photons for 1 pm, camera by camera</a:t>
             </a:r>
           </a:p>
           <a:p>
@@ -6989,7 +6012,7 @@
                 </a:solidFill>
                 <a:latin typeface="Arial"/>
               </a:rPr>
-              <a:t>COPHI holds 3 pm against the record's drifts: Feng's baseline camera needs a 16 s cycle, the Photonfocus 1.6 s, the lock-in camera 0.125 s (3.09 pm, fiber term inert); the LO's pointing is the term the loop cannot see past</a:t>
+              <a:t>A heterodyne read is photon-limited at full well: pixels × well × frame rate decides; Feng's baseline camera is seven minutes per picometer, the deepest-well 1k global-shutter part is 40 seconds, the lock-in 3.4 s</a:t>
             </a:r>
           </a:p>
         </p:txBody>
@@ -7048,6 +6071,1294 @@
         </p:nvGraphicFramePr>
         <p:xfrm>
           <a:off x="411480" y="1298448"/>
+          <a:ext cx="5806438" cy="4509135"/>
+        </p:xfrm>
+        <a:graphic>
+          <a:graphicData uri="http://schemas.openxmlformats.org/drawingml/2006/table">
+            <a:tbl>
+              <a:tblPr firstRow="1" bandRow="1">
+                <a:tableStyleId>{5C22544A-7EE6-4342-B048-85BDC9FD1C3A}</a:tableStyleId>
+              </a:tblPr>
+              <a:tblGrid>
+                <a:gridCol w="1363792"/>
+                <a:gridCol w="936580"/>
+                <a:gridCol w="805130"/>
+                <a:gridCol w="377918"/>
+                <a:gridCol w="1232342"/>
+                <a:gridCol w="1090676"/>
+              </a:tblGrid>
+              <a:tr h="1034415">
+                <a:tc>
+                  <a:txBody>
+                    <a:bodyPr wrap="square"/>
+                    <a:lstStyle/>
+                    <a:p>
+                      <a:r>
+                        <a:rPr sz="1100" b="1">
+                          <a:solidFill>
+                            <a:srgbClr val="FFFFFF"/>
+                          </a:solidFill>
+                          <a:latin typeface="Arial"/>
+                        </a:rPr>
+                        <a:t>camera (survey, to verify)</a:t>
+                      </a:r>
+                    </a:p>
+                  </a:txBody>
+                  <a:tcPr marL="54864" marR="54864" marT="18288" marB="18288">
+                    <a:solidFill>
+                      <a:srgbClr val="1F4E79"/>
+                    </a:solidFill>
+                  </a:tcPr>
+                </a:tc>
+                <a:tc>
+                  <a:txBody>
+                    <a:bodyPr wrap="square"/>
+                    <a:lstStyle/>
+                    <a:p>
+                      <a:r>
+                        <a:rPr sz="1100" b="1">
+                          <a:solidFill>
+                            <a:srgbClr val="FFFFFF"/>
+                          </a:solidFill>
+                          <a:latin typeface="Arial"/>
+                        </a:rPr>
+                        <a:t>read noise r, e⁻ (σ penalty √((I₀ + r²)/I₀) at half well)</a:t>
+                      </a:r>
+                    </a:p>
+                  </a:txBody>
+                  <a:tcPr marL="54864" marR="54864" marT="18288" marB="18288">
+                    <a:solidFill>
+                      <a:srgbClr val="1F4E79"/>
+                    </a:solidFill>
+                  </a:tcPr>
+                </a:tc>
+                <a:tc>
+                  <a:txBody>
+                    <a:bodyPr wrap="square"/>
+                    <a:lstStyle/>
+                    <a:p>
+                      <a:r>
+                        <a:rPr sz="1100" b="1">
+                          <a:solidFill>
+                            <a:srgbClr val="FFFFFF"/>
+                          </a:solidFill>
+                          <a:latin typeface="Arial"/>
+                        </a:rPr>
+                        <a:t>pm per reading, lens / mirror</a:t>
+                      </a:r>
+                    </a:p>
+                  </a:txBody>
+                  <a:tcPr marL="54864" marR="54864" marT="18288" marB="18288">
+                    <a:solidFill>
+                      <a:srgbClr val="1F4E79"/>
+                    </a:solidFill>
+                  </a:tcPr>
+                </a:tc>
+                <a:tc>
+                  <a:txBody>
+                    <a:bodyPr wrap="square"/>
+                    <a:lstStyle/>
+                    <a:p>
+                      <a:r>
+                        <a:rPr sz="1100" b="1">
+                          <a:solidFill>
+                            <a:srgbClr val="FFFFFF"/>
+                          </a:solidFill>
+                          <a:latin typeface="Arial"/>
+                        </a:rPr>
+                        <a:t>SNR at 1 pm per reading</a:t>
+                      </a:r>
+                    </a:p>
+                  </a:txBody>
+                  <a:tcPr marL="54864" marR="54864" marT="18288" marB="18288">
+                    <a:solidFill>
+                      <a:srgbClr val="1F4E79"/>
+                    </a:solidFill>
+                  </a:tcPr>
+                </a:tc>
+                <a:tc>
+                  <a:txBody>
+                    <a:bodyPr wrap="square"/>
+                    <a:lstStyle/>
+                    <a:p>
+                      <a:r>
+                        <a:rPr sz="1100" b="1">
+                          <a:solidFill>
+                            <a:srgbClr val="FFFFFF"/>
+                          </a:solidFill>
+                          <a:latin typeface="Arial"/>
+                        </a:rPr>
+                        <a:t>seconds to SNR 1 at 1 pm, lens / mirror</a:t>
+                      </a:r>
+                    </a:p>
+                  </a:txBody>
+                  <a:tcPr marL="54864" marR="54864" marT="18288" marB="18288">
+                    <a:solidFill>
+                      <a:srgbClr val="1F4E79"/>
+                    </a:solidFill>
+                  </a:tcPr>
+                </a:tc>
+                <a:tc>
+                  <a:txBody>
+                    <a:bodyPr wrap="square"/>
+                    <a:lstStyle/>
+                    <a:p>
+                      <a:r>
+                        <a:rPr sz="1100" b="1">
+                          <a:solidFill>
+                            <a:srgbClr val="FFFFFF"/>
+                          </a:solidFill>
+                          <a:latin typeface="Arial"/>
+                        </a:rPr>
+                        <a:t>to SNR 10</a:t>
+                      </a:r>
+                    </a:p>
+                  </a:txBody>
+                  <a:tcPr marL="54864" marR="54864" marT="18288" marB="18288">
+                    <a:solidFill>
+                      <a:srgbClr val="1F4E79"/>
+                    </a:solidFill>
+                  </a:tcPr>
+                </a:tc>
+              </a:tr>
+              <a:tr h="468630">
+                <a:tc>
+                  <a:txBody>
+                    <a:bodyPr wrap="square"/>
+                    <a:lstStyle/>
+                    <a:p>
+                      <a:r>
+                        <a:rPr sz="1100" b="0">
+                          <a:solidFill>
+                            <a:srgbClr val="282828"/>
+                          </a:solidFill>
+                          <a:latin typeface="Arial"/>
+                        </a:rPr>
+                        <a:t>as proposed: 1k², 60 ke, 30 fps</a:t>
+                      </a:r>
+                    </a:p>
+                  </a:txBody>
+                  <a:tcPr marL="54864" marR="54864" marT="18288" marB="18288">
+                    <a:solidFill>
+                      <a:srgbClr val="FFFFFF"/>
+                    </a:solidFill>
+                  </a:tcPr>
+                </a:tc>
+                <a:tc>
+                  <a:txBody>
+                    <a:bodyPr wrap="square"/>
+                    <a:lstStyle/>
+                    <a:p>
+                      <a:r>
+                        <a:rPr sz="1100" b="0">
+                          <a:solidFill>
+                            <a:srgbClr val="282828"/>
+                          </a:solidFill>
+                          <a:latin typeface="Arial"/>
+                        </a:rPr>
+                        <a:t>5 assumed (1.000)</a:t>
+                      </a:r>
+                    </a:p>
+                  </a:txBody>
+                  <a:tcPr marL="54864" marR="54864" marT="18288" marB="18288">
+                    <a:solidFill>
+                      <a:srgbClr val="FFFFFF"/>
+                    </a:solidFill>
+                  </a:tcPr>
+                </a:tc>
+                <a:tc>
+                  <a:txBody>
+                    <a:bodyPr wrap="square"/>
+                    <a:lstStyle/>
+                    <a:p>
+                      <a:r>
+                        <a:rPr sz="1100" b="0">
+                          <a:solidFill>
+                            <a:srgbClr val="282828"/>
+                          </a:solidFill>
+                          <a:latin typeface="Arial"/>
+                        </a:rPr>
+                        <a:t>57.7 / 53.7</a:t>
+                      </a:r>
+                    </a:p>
+                  </a:txBody>
+                  <a:tcPr marL="54864" marR="54864" marT="18288" marB="18288">
+                    <a:solidFill>
+                      <a:srgbClr val="FFFFFF"/>
+                    </a:solidFill>
+                  </a:tcPr>
+                </a:tc>
+                <a:tc>
+                  <a:txBody>
+                    <a:bodyPr wrap="square"/>
+                    <a:lstStyle/>
+                    <a:p>
+                      <a:r>
+                        <a:rPr sz="1100" b="0">
+                          <a:solidFill>
+                            <a:srgbClr val="282828"/>
+                          </a:solidFill>
+                          <a:latin typeface="Arial"/>
+                        </a:rPr>
+                        <a:t>0.017</a:t>
+                      </a:r>
+                    </a:p>
+                  </a:txBody>
+                  <a:tcPr marL="54864" marR="54864" marT="18288" marB="18288">
+                    <a:solidFill>
+                      <a:srgbClr val="FFFFFF"/>
+                    </a:solidFill>
+                  </a:tcPr>
+                </a:tc>
+                <a:tc>
+                  <a:txBody>
+                    <a:bodyPr wrap="square"/>
+                    <a:lstStyle/>
+                    <a:p>
+                      <a:r>
+                        <a:rPr sz="1100" b="0">
+                          <a:solidFill>
+                            <a:srgbClr val="282828"/>
+                          </a:solidFill>
+                          <a:latin typeface="Arial"/>
+                        </a:rPr>
+                        <a:t>443 / 385 (≈ 7 min)</a:t>
+                      </a:r>
+                    </a:p>
+                  </a:txBody>
+                  <a:tcPr marL="54864" marR="54864" marT="18288" marB="18288">
+                    <a:solidFill>
+                      <a:srgbClr val="FFFFFF"/>
+                    </a:solidFill>
+                  </a:tcPr>
+                </a:tc>
+                <a:tc>
+                  <a:txBody>
+                    <a:bodyPr wrap="square"/>
+                    <a:lstStyle/>
+                    <a:p>
+                      <a:r>
+                        <a:rPr sz="1100" b="0">
+                          <a:solidFill>
+                            <a:srgbClr val="282828"/>
+                          </a:solidFill>
+                          <a:latin typeface="Arial"/>
+                        </a:rPr>
+                        <a:t>12 / 11 h</a:t>
+                      </a:r>
+                    </a:p>
+                  </a:txBody>
+                  <a:tcPr marL="54864" marR="54864" marT="18288" marB="18288">
+                    <a:solidFill>
+                      <a:srgbClr val="FFFFFF"/>
+                    </a:solidFill>
+                  </a:tcPr>
+                </a:tc>
+              </a:tr>
+              <a:tr h="657225">
+                <a:tc>
+                  <a:txBody>
+                    <a:bodyPr wrap="square"/>
+                    <a:lstStyle/>
+                    <a:p>
+                      <a:r>
+                        <a:rPr sz="1100" b="0">
+                          <a:solidFill>
+                            <a:srgbClr val="282828"/>
+                          </a:solidFill>
+                          <a:latin typeface="Arial"/>
+                        </a:rPr>
+                        <a:t>Photonfocus MV1-D1024E, 200 ke, 150 fps</a:t>
+                      </a:r>
+                    </a:p>
+                  </a:txBody>
+                  <a:tcPr marL="54864" marR="54864" marT="18288" marB="18288">
+                    <a:solidFill>
+                      <a:srgbClr val="ECF1F6"/>
+                    </a:solidFill>
+                  </a:tcPr>
+                </a:tc>
+                <a:tc>
+                  <a:txBody>
+                    <a:bodyPr wrap="square"/>
+                    <a:lstStyle/>
+                    <a:p>
+                      <a:r>
+                        <a:rPr sz="1100" b="0">
+                          <a:solidFill>
+                            <a:srgbClr val="282828"/>
+                          </a:solidFill>
+                          <a:latin typeface="Arial"/>
+                        </a:rPr>
+                        <a:t>220 (1.22)</a:t>
+                      </a:r>
+                    </a:p>
+                  </a:txBody>
+                  <a:tcPr marL="54864" marR="54864" marT="18288" marB="18288">
+                    <a:solidFill>
+                      <a:srgbClr val="ECF1F6"/>
+                    </a:solidFill>
+                  </a:tcPr>
+                </a:tc>
+                <a:tc>
+                  <a:txBody>
+                    <a:bodyPr wrap="square"/>
+                    <a:lstStyle/>
+                    <a:p>
+                      <a:r>
+                        <a:rPr sz="1100" b="0">
+                          <a:solidFill>
+                            <a:srgbClr val="282828"/>
+                          </a:solidFill>
+                          <a:latin typeface="Arial"/>
+                        </a:rPr>
+                        <a:t>39.5 / 36.5</a:t>
+                      </a:r>
+                    </a:p>
+                  </a:txBody>
+                  <a:tcPr marL="54864" marR="54864" marT="18288" marB="18288">
+                    <a:solidFill>
+                      <a:srgbClr val="ECF1F6"/>
+                    </a:solidFill>
+                  </a:tcPr>
+                </a:tc>
+                <a:tc>
+                  <a:txBody>
+                    <a:bodyPr wrap="square"/>
+                    <a:lstStyle/>
+                    <a:p>
+                      <a:r>
+                        <a:rPr sz="1100" b="0">
+                          <a:solidFill>
+                            <a:srgbClr val="282828"/>
+                          </a:solidFill>
+                          <a:latin typeface="Arial"/>
+                        </a:rPr>
+                        <a:t>0.025</a:t>
+                      </a:r>
+                    </a:p>
+                  </a:txBody>
+                  <a:tcPr marL="54864" marR="54864" marT="18288" marB="18288">
+                    <a:solidFill>
+                      <a:srgbClr val="ECF1F6"/>
+                    </a:solidFill>
+                  </a:tcPr>
+                </a:tc>
+                <a:tc>
+                  <a:txBody>
+                    <a:bodyPr wrap="square"/>
+                    <a:lstStyle/>
+                    <a:p>
+                      <a:r>
+                        <a:rPr sz="1100" b="0">
+                          <a:solidFill>
+                            <a:srgbClr val="282828"/>
+                          </a:solidFill>
+                          <a:latin typeface="Arial"/>
+                        </a:rPr>
+                        <a:t>42 / 36</a:t>
+                      </a:r>
+                    </a:p>
+                  </a:txBody>
+                  <a:tcPr marL="54864" marR="54864" marT="18288" marB="18288">
+                    <a:solidFill>
+                      <a:srgbClr val="ECF1F6"/>
+                    </a:solidFill>
+                  </a:tcPr>
+                </a:tc>
+                <a:tc>
+                  <a:txBody>
+                    <a:bodyPr wrap="square"/>
+                    <a:lstStyle/>
+                    <a:p>
+                      <a:r>
+                        <a:rPr sz="1100" b="0">
+                          <a:solidFill>
+                            <a:srgbClr val="282828"/>
+                          </a:solidFill>
+                          <a:latin typeface="Arial"/>
+                        </a:rPr>
+                        <a:t>70 / 60 min</a:t>
+                      </a:r>
+                    </a:p>
+                  </a:txBody>
+                  <a:tcPr marL="54864" marR="54864" marT="18288" marB="18288">
+                    <a:solidFill>
+                      <a:srgbClr val="ECF1F6"/>
+                    </a:solidFill>
+                  </a:tcPr>
+                </a:tc>
+              </a:tr>
+              <a:tr h="657225">
+                <a:tc>
+                  <a:txBody>
+                    <a:bodyPr wrap="square"/>
+                    <a:lstStyle/>
+                    <a:p>
+                      <a:r>
+                        <a:rPr sz="1100" b="0">
+                          <a:solidFill>
+                            <a:srgbClr val="282828"/>
+                          </a:solidFill>
+                          <a:latin typeface="Arial"/>
+                        </a:rPr>
+                        <a:t>pco.edge 5.5, true global-shutter mode, 30 ke, 50 fps</a:t>
+                      </a:r>
+                    </a:p>
+                  </a:txBody>
+                  <a:tcPr marL="54864" marR="54864" marT="18288" marB="18288">
+                    <a:solidFill>
+                      <a:srgbClr val="FFFFFF"/>
+                    </a:solidFill>
+                  </a:tcPr>
+                </a:tc>
+                <a:tc>
+                  <a:txBody>
+                    <a:bodyPr wrap="square"/>
+                    <a:lstStyle/>
+                    <a:p>
+                      <a:r>
+                        <a:rPr sz="1100" b="0">
+                          <a:solidFill>
+                            <a:srgbClr val="282828"/>
+                          </a:solidFill>
+                          <a:latin typeface="Arial"/>
+                        </a:rPr>
+                        <a:t>2.2 (1.000)</a:t>
+                      </a:r>
+                    </a:p>
+                  </a:txBody>
+                  <a:tcPr marL="54864" marR="54864" marT="18288" marB="18288">
+                    <a:solidFill>
+                      <a:srgbClr val="FFFFFF"/>
+                    </a:solidFill>
+                  </a:tcPr>
+                </a:tc>
+                <a:tc>
+                  <a:txBody>
+                    <a:bodyPr wrap="square"/>
+                    <a:lstStyle/>
+                    <a:p>
+                      <a:r>
+                        <a:rPr sz="1100" b="0">
+                          <a:solidFill>
+                            <a:srgbClr val="282828"/>
+                          </a:solidFill>
+                          <a:latin typeface="Arial"/>
+                        </a:rPr>
+                        <a:t>40.2 / 38.3</a:t>
+                      </a:r>
+                    </a:p>
+                  </a:txBody>
+                  <a:tcPr marL="54864" marR="54864" marT="18288" marB="18288">
+                    <a:solidFill>
+                      <a:srgbClr val="FFFFFF"/>
+                    </a:solidFill>
+                  </a:tcPr>
+                </a:tc>
+                <a:tc>
+                  <a:txBody>
+                    <a:bodyPr wrap="square"/>
+                    <a:lstStyle/>
+                    <a:p>
+                      <a:r>
+                        <a:rPr sz="1100" b="0">
+                          <a:solidFill>
+                            <a:srgbClr val="282828"/>
+                          </a:solidFill>
+                          <a:latin typeface="Arial"/>
+                        </a:rPr>
+                        <a:t>0.025</a:t>
+                      </a:r>
+                    </a:p>
+                  </a:txBody>
+                  <a:tcPr marL="54864" marR="54864" marT="18288" marB="18288">
+                    <a:solidFill>
+                      <a:srgbClr val="FFFFFF"/>
+                    </a:solidFill>
+                  </a:tcPr>
+                </a:tc>
+                <a:tc>
+                  <a:txBody>
+                    <a:bodyPr wrap="square"/>
+                    <a:lstStyle/>
+                    <a:p>
+                      <a:r>
+                        <a:rPr sz="1100" b="0">
+                          <a:solidFill>
+                            <a:srgbClr val="282828"/>
+                          </a:solidFill>
+                          <a:latin typeface="Arial"/>
+                        </a:rPr>
+                        <a:t>129 / 117</a:t>
+                      </a:r>
+                    </a:p>
+                  </a:txBody>
+                  <a:tcPr marL="54864" marR="54864" marT="18288" marB="18288">
+                    <a:solidFill>
+                      <a:srgbClr val="FFFFFF"/>
+                    </a:solidFill>
+                  </a:tcPr>
+                </a:tc>
+                <a:tc>
+                  <a:txBody>
+                    <a:bodyPr wrap="square"/>
+                    <a:lstStyle/>
+                    <a:p>
+                      <a:r>
+                        <a:rPr sz="1100" b="0">
+                          <a:solidFill>
+                            <a:srgbClr val="282828"/>
+                          </a:solidFill>
+                          <a:latin typeface="Arial"/>
+                        </a:rPr>
+                        <a:t>3.6 / 3.3 h</a:t>
+                      </a:r>
+                    </a:p>
+                  </a:txBody>
+                  <a:tcPr marL="54864" marR="54864" marT="18288" marB="18288">
+                    <a:solidFill>
+                      <a:srgbClr val="FFFFFF"/>
+                    </a:solidFill>
+                  </a:tcPr>
+                </a:tc>
+              </a:tr>
+              <a:tr h="657225">
+                <a:tc>
+                  <a:txBody>
+                    <a:bodyPr wrap="square"/>
+                    <a:lstStyle/>
+                    <a:p>
+                      <a:r>
+                        <a:rPr sz="1100" b="0">
+                          <a:solidFill>
+                            <a:srgbClr val="282828"/>
+                          </a:solidFill>
+                          <a:latin typeface="Arial"/>
+                        </a:rPr>
+                        <a:t>C-RED 2 (InGaAs), at 632.8 nm as a placeholder</a:t>
+                      </a:r>
+                    </a:p>
+                  </a:txBody>
+                  <a:tcPr marL="54864" marR="54864" marT="18288" marB="18288">
+                    <a:solidFill>
+                      <a:srgbClr val="ECF1F6"/>
+                    </a:solidFill>
+                  </a:tcPr>
+                </a:tc>
+                <a:tc>
+                  <a:txBody>
+                    <a:bodyPr wrap="square"/>
+                    <a:lstStyle/>
+                    <a:p>
+                      <a:r>
+                        <a:rPr sz="1100" b="0">
+                          <a:solidFill>
+                            <a:srgbClr val="282828"/>
+                          </a:solidFill>
+                          <a:latin typeface="Arial"/>
+                        </a:rPr>
+                        <a:t>30 assumed (1.001)</a:t>
+                      </a:r>
+                    </a:p>
+                  </a:txBody>
+                  <a:tcPr marL="54864" marR="54864" marT="18288" marB="18288">
+                    <a:solidFill>
+                      <a:srgbClr val="ECF1F6"/>
+                    </a:solidFill>
+                  </a:tcPr>
+                </a:tc>
+                <a:tc>
+                  <a:txBody>
+                    <a:bodyPr wrap="square"/>
+                    <a:lstStyle/>
+                    <a:p>
+                      <a:r>
+                        <a:rPr sz="1100" b="0">
+                          <a:solidFill>
+                            <a:srgbClr val="282828"/>
+                          </a:solidFill>
+                          <a:latin typeface="Arial"/>
+                        </a:rPr>
+                        <a:t>19.6 / 18.7</a:t>
+                      </a:r>
+                    </a:p>
+                  </a:txBody>
+                  <a:tcPr marL="54864" marR="54864" marT="18288" marB="18288">
+                    <a:solidFill>
+                      <a:srgbClr val="ECF1F6"/>
+                    </a:solidFill>
+                  </a:tcPr>
+                </a:tc>
+                <a:tc>
+                  <a:txBody>
+                    <a:bodyPr wrap="square"/>
+                    <a:lstStyle/>
+                    <a:p>
+                      <a:r>
+                        <a:rPr sz="1100" b="0">
+                          <a:solidFill>
+                            <a:srgbClr val="282828"/>
+                          </a:solidFill>
+                          <a:latin typeface="Arial"/>
+                        </a:rPr>
+                        <a:t>0.051</a:t>
+                      </a:r>
+                    </a:p>
+                  </a:txBody>
+                  <a:tcPr marL="54864" marR="54864" marT="18288" marB="18288">
+                    <a:solidFill>
+                      <a:srgbClr val="ECF1F6"/>
+                    </a:solidFill>
+                  </a:tcPr>
+                </a:tc>
+                <a:tc>
+                  <a:txBody>
+                    <a:bodyPr wrap="square"/>
+                    <a:lstStyle/>
+                    <a:p>
+                      <a:r>
+                        <a:rPr sz="1100" b="0">
+                          <a:solidFill>
+                            <a:srgbClr val="282828"/>
+                          </a:solidFill>
+                          <a:latin typeface="Arial"/>
+                        </a:rPr>
+                        <a:t>— (the 1.3 µm stage)</a:t>
+                      </a:r>
+                    </a:p>
+                  </a:txBody>
+                  <a:tcPr marL="54864" marR="54864" marT="18288" marB="18288">
+                    <a:solidFill>
+                      <a:srgbClr val="ECF1F6"/>
+                    </a:solidFill>
+                  </a:tcPr>
+                </a:tc>
+                <a:tc>
+                  <a:txBody>
+                    <a:bodyPr wrap="square"/>
+                    <a:lstStyle/>
+                    <a:p>
+                      <a:r>
+                        <a:rPr sz="1100" b="0">
+                          <a:solidFill>
+                            <a:srgbClr val="282828"/>
+                          </a:solidFill>
+                          <a:latin typeface="Arial"/>
+                        </a:rPr>
+                        <a:t>—</a:t>
+                      </a:r>
+                    </a:p>
+                  </a:txBody>
+                  <a:tcPr marL="54864" marR="54864" marT="18288" marB="18288">
+                    <a:solidFill>
+                      <a:srgbClr val="ECF1F6"/>
+                    </a:solidFill>
+                  </a:tcPr>
+                </a:tc>
+              </a:tr>
+              <a:tr h="1034415">
+                <a:tc>
+                  <a:txBody>
+                    <a:bodyPr wrap="square"/>
+                    <a:lstStyle/>
+                    <a:p>
+                      <a:r>
+                        <a:rPr sz="1100" b="0">
+                          <a:solidFill>
+                            <a:srgbClr val="282828"/>
+                          </a:solidFill>
+                          <a:latin typeface="Arial"/>
+                        </a:rPr>
+                        <a:t>lock-in camera, heliCam C4, 500 ke, I/Q at 1 kHz (the lock-in reading; well-capped)</a:t>
+                      </a:r>
+                    </a:p>
+                  </a:txBody>
+                  <a:tcPr marL="54864" marR="54864" marT="18288" marB="18288">
+                    <a:solidFill>
+                      <a:srgbClr val="FFFFFF"/>
+                    </a:solidFill>
+                  </a:tcPr>
+                </a:tc>
+                <a:tc>
+                  <a:txBody>
+                    <a:bodyPr wrap="square"/>
+                    <a:lstStyle/>
+                    <a:p>
+                      <a:r>
+                        <a:rPr sz="1100" b="0">
+                          <a:solidFill>
+                            <a:srgbClr val="282828"/>
+                          </a:solidFill>
+                          <a:latin typeface="Arial"/>
+                        </a:rPr>
+                        <a:t>n/s: run at 0 and at 100 assumed (1.09)</a:t>
+                      </a:r>
+                    </a:p>
+                  </a:txBody>
+                  <a:tcPr marL="54864" marR="54864" marT="18288" marB="18288">
+                    <a:solidFill>
+                      <a:srgbClr val="FFFFFF"/>
+                    </a:solidFill>
+                  </a:tcPr>
+                </a:tc>
+                <a:tc>
+                  <a:txBody>
+                    <a:bodyPr wrap="square"/>
+                    <a:lstStyle/>
+                    <a:p>
+                      <a:r>
+                        <a:rPr sz="1100" b="0">
+                          <a:solidFill>
+                            <a:srgbClr val="282828"/>
+                          </a:solidFill>
+                          <a:latin typeface="Arial"/>
+                        </a:rPr>
+                        <a:t>61.1 / 57.9 per 1 ms sample (66 / 63 at read 100)</a:t>
+                      </a:r>
+                    </a:p>
+                  </a:txBody>
+                  <a:tcPr marL="54864" marR="54864" marT="18288" marB="18288">
+                    <a:solidFill>
+                      <a:srgbClr val="FFFFFF"/>
+                    </a:solidFill>
+                  </a:tcPr>
+                </a:tc>
+                <a:tc>
+                  <a:txBody>
+                    <a:bodyPr wrap="square"/>
+                    <a:lstStyle/>
+                    <a:p>
+                      <a:r>
+                        <a:rPr sz="1100" b="0">
+                          <a:solidFill>
+                            <a:srgbClr val="282828"/>
+                          </a:solidFill>
+                          <a:latin typeface="Arial"/>
+                        </a:rPr>
+                        <a:t>0.017 per sample</a:t>
+                      </a:r>
+                    </a:p>
+                  </a:txBody>
+                  <a:tcPr marL="54864" marR="54864" marT="18288" marB="18288">
+                    <a:solidFill>
+                      <a:srgbClr val="FFFFFF"/>
+                    </a:solidFill>
+                  </a:tcPr>
+                </a:tc>
+                <a:tc>
+                  <a:txBody>
+                    <a:bodyPr wrap="square"/>
+                    <a:lstStyle/>
+                    <a:p>
+                      <a:r>
+                        <a:rPr sz="1100" b="0">
+                          <a:solidFill>
+                            <a:srgbClr val="282828"/>
+                          </a:solidFill>
+                          <a:latin typeface="Arial"/>
+                        </a:rPr>
+                        <a:t>3.73 / 3.35 (4.4 / 4.0 at read 100; ×1.23 in time for two-tap demodulation)</a:t>
+                      </a:r>
+                    </a:p>
+                  </a:txBody>
+                  <a:tcPr marL="54864" marR="54864" marT="18288" marB="18288">
+                    <a:solidFill>
+                      <a:srgbClr val="FFFFFF"/>
+                    </a:solidFill>
+                  </a:tcPr>
+                </a:tc>
+                <a:tc>
+                  <a:txBody>
+                    <a:bodyPr wrap="square"/>
+                    <a:lstStyle/>
+                    <a:p>
+                      <a:r>
+                        <a:rPr sz="1100" b="0">
+                          <a:solidFill>
+                            <a:srgbClr val="282828"/>
+                          </a:solidFill>
+                          <a:latin typeface="Arial"/>
+                        </a:rPr>
+                        <a:t>6.2 / 5.6 min</a:t>
+                      </a:r>
+                    </a:p>
+                  </a:txBody>
+                  <a:tcPr marL="54864" marR="54864" marT="18288" marB="18288">
+                    <a:solidFill>
+                      <a:srgbClr val="FFFFFF"/>
+                    </a:solidFill>
+                  </a:tcPr>
+                </a:tc>
+              </a:tr>
+            </a:tbl>
+          </a:graphicData>
+        </a:graphic>
+      </p:graphicFrame>
+      <p:sp>
+        <p:nvSpPr>
+          <p:cNvPr id="5" name="TextBox 4"/>
+          <p:cNvSpPr txBox="1"/>
+          <p:nvPr/>
+        </p:nvSpPr>
+        <p:spPr>
+          <a:xfrm>
+            <a:off x="411480" y="5953887"/>
+            <a:ext cx="5806440" cy="274320"/>
+          </a:xfrm>
+          <a:prstGeom prst="rect">
+            <a:avLst/>
+          </a:prstGeom>
+          <a:noFill/>
+        </p:spPr>
+        <p:txBody>
+          <a:bodyPr wrap="square">
+            <a:spAutoFit/>
+          </a:bodyPr>
+          <a:lstStyle/>
+          <a:p>
+            <a:pPr>
+              <a:spcAft>
+                <a:spcPts val="600"/>
+              </a:spcAft>
+            </a:pPr>
+            <a:r>
+              <a:rPr sz="1200" b="0">
+                <a:solidFill>
+                  <a:srgbClr val="282828"/>
+                </a:solidFill>
+                <a:latin typeface="Arial"/>
+              </a:rPr>
+              <a:t>•  </a:t>
+            </a:r>
+            <a:r>
+              <a:rPr sz="1200" b="1">
+                <a:solidFill>
+                  <a:srgbClr val="282828"/>
+                </a:solidFill>
+                <a:latin typeface="Arial"/>
+              </a:rPr>
+              <a:t>The metric:</a:t>
+            </a:r>
+            <a:r>
+              <a:rPr sz="1200" b="0">
+                <a:solidFill>
+                  <a:srgbClr val="282828"/>
+                </a:solidFill>
+                <a:latin typeface="Arial"/>
+              </a:rPr>
+              <a:t> the piston-free robust floor over the unpoked actuators (1.48 MAD, median of 12 draws).</a:t>
+            </a:r>
+          </a:p>
+          <a:p>
+            <a:pPr marL="594360" indent="-137160">
+              <a:spcAft>
+                <a:spcPts val="500"/>
+              </a:spcAft>
+            </a:pPr>
+            <a:r>
+              <a:rPr sz="1050" b="0">
+                <a:solidFill>
+                  <a:srgbClr val="6E6E6E"/>
+                </a:solidFill>
+                <a:latin typeface="Arial"/>
+              </a:rPr>
+              <a:t>–  the raw single-actuator noise is mostly a common piston (165 vs 76 pm) — unobservable and inert on a DM; the composite deck puts every gauge on this metric</a:t>
+            </a:r>
+          </a:p>
+        </p:txBody>
+      </p:sp>
+      <p:sp>
+        <p:nvSpPr>
+          <p:cNvPr id="6" name="TextBox 5"/>
+          <p:cNvSpPr txBox="1"/>
+          <p:nvPr/>
+        </p:nvSpPr>
+        <p:spPr>
+          <a:xfrm>
+            <a:off x="7315200" y="1298448"/>
+            <a:ext cx="4480560" cy="274320"/>
+          </a:xfrm>
+          <a:prstGeom prst="rect">
+            <a:avLst/>
+          </a:prstGeom>
+          <a:noFill/>
+        </p:spPr>
+        <p:txBody>
+          <a:bodyPr wrap="square">
+            <a:spAutoFit/>
+          </a:bodyPr>
+          <a:lstStyle/>
+          <a:p>
+            <a:pPr>
+              <a:spcAft>
+                <a:spcPts val="600"/>
+              </a:spcAft>
+            </a:pPr>
+            <a:r>
+              <a:rPr sz="1150" b="0">
+                <a:solidFill>
+                  <a:srgbClr val="282828"/>
+                </a:solidFill>
+                <a:latin typeface="Arial"/>
+              </a:rPr>
+              <a:t>•  </a:t>
+            </a:r>
+            <a:r>
+              <a:rPr sz="1150" b="1">
+                <a:solidFill>
+                  <a:srgbClr val="282828"/>
+                </a:solidFill>
+                <a:latin typeface="Arial"/>
+              </a:rPr>
+              <a:t>Read noise is in every row</a:t>
+            </a:r>
+            <a:r>
+              <a:rPr sz="1150" b="0">
+                <a:solidFill>
+                  <a:srgbClr val="282828"/>
+                </a:solidFill>
+                <a:latin typeface="Arial"/>
+              </a:rPr>
+              <a:t> (σ_φ² ∝ I₀ + r²): the Photonfocus's 220 e⁻ costs 22 % in σ at half well and it still wins on well × rate.</a:t>
+            </a:r>
+          </a:p>
+          <a:p>
+            <a:pPr marL="594360" indent="-137160">
+              <a:spcAft>
+                <a:spcPts val="500"/>
+              </a:spcAft>
+            </a:pPr>
+            <a:r>
+              <a:rPr sz="1000" b="0">
+                <a:solidFill>
+                  <a:srgbClr val="6E6E6E"/>
+                </a:solidFill>
+                <a:latin typeface="Arial"/>
+              </a:rPr>
+              <a:t>–  the baseline's and the C-RED's read noise are assumed (not in Feng's deck; the survey's value unconfirmed)</a:t>
+            </a:r>
+          </a:p>
+          <a:p>
+            <a:pPr marL="0" indent="0">
+              <a:spcAft>
+                <a:spcPts val="600"/>
+              </a:spcAft>
+            </a:pPr>
+            <a:r>
+              <a:rPr sz="1150" b="0">
+                <a:solidFill>
+                  <a:srgbClr val="282828"/>
+                </a:solidFill>
+                <a:latin typeface="Arial"/>
+              </a:rPr>
+              <a:t>•  </a:t>
+            </a:r>
+            <a:r>
+              <a:rPr sz="1150" b="1">
+                <a:solidFill>
+                  <a:srgbClr val="282828"/>
+                </a:solidFill>
+                <a:latin typeface="Arial"/>
+              </a:rPr>
+              <a:t>SNR at the 1 pm target:</a:t>
+            </a:r>
+            <a:r>
+              <a:rPr sz="1150" b="0">
+                <a:solidFill>
+                  <a:srgbClr val="282828"/>
+                </a:solidFill>
+                <a:latin typeface="Arial"/>
+              </a:rPr>
+              <a:t> one reading gives SNR 0.02–0.05; SNR 1 takes (pm per reading)² readings — the seconds-per-pm column; SNR 10 takes 100× that.</a:t>
+            </a:r>
+          </a:p>
+          <a:p>
+            <a:pPr marL="594360" indent="-137160">
+              <a:spcAft>
+                <a:spcPts val="500"/>
+              </a:spcAft>
+            </a:pPr>
+            <a:r>
+              <a:rPr sz="1000" b="0">
+                <a:solidFill>
+                  <a:srgbClr val="6E6E6E"/>
+                </a:solidFill>
+                <a:latin typeface="Arial"/>
+              </a:rPr>
+              <a:t>–  a hold loop never needs SNR 10 in one measurement: it integrates readings (next slide)</a:t>
+            </a:r>
+          </a:p>
+          <a:p>
+            <a:pPr marL="0" indent="0">
+              <a:spcAft>
+                <a:spcPts val="600"/>
+              </a:spcAft>
+            </a:pPr>
+            <a:r>
+              <a:rPr sz="1150" b="0">
+                <a:solidFill>
+                  <a:srgbClr val="282828"/>
+                </a:solidFill>
+                <a:latin typeface="Arial"/>
+              </a:rPr>
+              <a:t>•  </a:t>
+            </a:r>
+            <a:r>
+              <a:rPr sz="1150" b="1">
+                <a:solidFill>
+                  <a:srgbClr val="282828"/>
+                </a:solidFill>
+                <a:latin typeface="Arial"/>
+              </a:rPr>
+              <a:t>Model and bench agree:</a:t>
+            </a:r>
+            <a:r>
+              <a:rPr sz="1150" b="0">
+                <a:solidFill>
+                  <a:srgbClr val="282828"/>
+                </a:solidFill>
+                <a:latin typeface="Arial"/>
+              </a:rPr>
+              <a:t> the per-pixel noise on the bench equals the tCophi formula to 1.000 ± 0.002 on every camera, rig and train.</a:t>
+            </a:r>
+          </a:p>
+          <a:p>
+            <a:pPr>
+              <a:spcAft>
+                <a:spcPts val="600"/>
+              </a:spcAft>
+            </a:pPr>
+            <a:r>
+              <a:rPr sz="1150" b="0">
+                <a:solidFill>
+                  <a:srgbClr val="282828"/>
+                </a:solidFill>
+                <a:latin typeface="Arial"/>
+              </a:rPr>
+              <a:t>•  </a:t>
+            </a:r>
+            <a:r>
+              <a:rPr sz="1150" b="1">
+                <a:solidFill>
+                  <a:srgbClr val="282828"/>
+                </a:solidFill>
+                <a:latin typeface="Arial"/>
+              </a:rPr>
+              <a:t>Rolling-shutter cameras are out:</a:t>
+            </a:r>
+            <a:r>
+              <a:rPr sz="1150" b="0">
+                <a:solidFill>
+                  <a:srgbClr val="282828"/>
+                </a:solidFill>
+                <a:latin typeface="Arial"/>
+              </a:rPr>
+              <a:t> rows exposed in sequence see different beat phases — a phase ramp across the image.  Needed: true global shutter, hardware trigger from the Rb clock, full-frame streaming.</a:t>
+            </a:r>
+          </a:p>
+          <a:p>
+            <a:pPr>
+              <a:spcAft>
+                <a:spcPts val="600"/>
+              </a:spcAft>
+            </a:pPr>
+            <a:r>
+              <a:rPr sz="1150" b="0">
+                <a:solidFill>
+                  <a:srgbClr val="282828"/>
+                </a:solidFill>
+                <a:latin typeface="Arial"/>
+              </a:rPr>
+              <a:t>•  </a:t>
+            </a:r>
+            <a:r>
+              <a:rPr sz="1150" b="1">
+                <a:solidFill>
+                  <a:srgbClr val="282828"/>
+                </a:solidFill>
+                <a:latin typeface="Arial"/>
+              </a:rPr>
+              <a:t>Why the camera, not the pixel count:</a:t>
+            </a:r>
+            <a:r>
+              <a:rPr sz="1150" b="0">
+                <a:solidFill>
+                  <a:srgbClr val="282828"/>
+                </a:solidFill>
+                <a:latin typeface="Arial"/>
+              </a:rPr>
+              <a:t> a 1k camera oversamples the lattice ten to one; well depth × frame rate is the budget.</a:t>
+            </a:r>
+          </a:p>
+        </p:txBody>
+      </p:sp>
+      <p:sp>
+        <p:nvSpPr>
+          <p:cNvPr id="7" name="TextBox 6"/>
+          <p:cNvSpPr txBox="1"/>
+          <p:nvPr/>
+        </p:nvSpPr>
+        <p:spPr>
+          <a:xfrm>
+            <a:off x="7315200" y="5358384"/>
+            <a:ext cx="4480560" cy="274320"/>
+          </a:xfrm>
+          <a:prstGeom prst="rect">
+            <a:avLst/>
+          </a:prstGeom>
+          <a:noFill/>
+        </p:spPr>
+        <p:txBody>
+          <a:bodyPr wrap="square">
+            <a:spAutoFit/>
+          </a:bodyPr>
+          <a:lstStyle/>
+          <a:p>
+            <a:pPr>
+              <a:spcAft>
+                <a:spcPts val="600"/>
+              </a:spcAft>
+            </a:pPr>
+            <a:r>
+              <a:rPr sz="1050" b="0">
+                <a:solidFill>
+                  <a:srgbClr val="6E6E6E"/>
+                </a:solidFill>
+                <a:latin typeface="Arial"/>
+              </a:rPr>
+              <a:t>Stage noise (runs/noise_{lens,oap}[_plain]), 12 draws, cameras binned onto the model grid (well × k², read × k, frame mean at half well).  Mask convention from the lock-in runs on: the LO-only annulus (no test light) is filled with the fringe pixels' median, not zero — a zero there made any common phase a pupil-edge step the edge actuators fit; the bucket camera's electronics rows move ≤ 9 % under it.</a:t>
+            </a:r>
+          </a:p>
+        </p:txBody>
+      </p:sp>
+    </p:spTree>
+  </p:cSld>
+  <p:clrMapOvr>
+    <a:masterClrMapping/>
+  </p:clrMapOvr>
+</p:sld>
+</file>
+
+<file path=ppt/slides/slide14.xml><?xml version="1.0" encoding="utf-8"?>
+<p:sld xmlns:a="http://schemas.openxmlformats.org/drawingml/2006/main" xmlns:p="http://schemas.openxmlformats.org/presentationml/2006/main" xmlns:r="http://schemas.openxmlformats.org/officeDocument/2006/relationships">
+  <p:cSld>
+    <p:spTree>
+      <p:nvGrpSpPr>
+        <p:cNvPr id="1" name=""/>
+        <p:cNvGrpSpPr/>
+        <p:nvPr/>
+      </p:nvGrpSpPr>
+      <p:grpSpPr/>
+      <p:sp>
+        <p:nvSpPr>
+          <p:cNvPr id="2" name="TextBox 1"/>
+          <p:cNvSpPr txBox="1"/>
+          <p:nvPr/>
+        </p:nvSpPr>
+        <p:spPr>
+          <a:xfrm>
+            <a:off x="411480" y="201168"/>
+            <a:ext cx="11368735" cy="914400"/>
+          </a:xfrm>
+          <a:prstGeom prst="rect">
+            <a:avLst/>
+          </a:prstGeom>
+          <a:noFill/>
+        </p:spPr>
+        <p:txBody>
+          <a:bodyPr wrap="square">
+            <a:spAutoFit/>
+          </a:bodyPr>
+          <a:lstStyle/>
+          <a:p>
+            <a:pPr>
+              <a:spcAft>
+                <a:spcPts val="400"/>
+              </a:spcAft>
+            </a:pPr>
+            <a:r>
+              <a:rPr sz="2400" b="1">
+                <a:solidFill>
+                  <a:srgbClr val="1F4E79"/>
+                </a:solidFill>
+                <a:latin typeface="Arial"/>
+              </a:rPr>
+              <a:t>Holding 3 pm: the servo at the camera's cadence</a:t>
+            </a:r>
+          </a:p>
+          <a:p>
+            <a:pPr>
+              <a:spcAft>
+                <a:spcPts val="0"/>
+              </a:spcAft>
+            </a:pPr>
+            <a:r>
+              <a:rPr sz="1250" b="0">
+                <a:solidFill>
+                  <a:srgbClr val="6E6E6E"/>
+                </a:solidFill>
+                <a:latin typeface="Arial"/>
+              </a:rPr>
+              <a:t>COPHI holds 3 pm against the record's drifts: Feng's baseline camera needs a 16 s cycle, the Photonfocus 1.6 s, the lock-in camera 0.125 s (3.09 pm, fiber term inert); the LO's pointing is the term the loop cannot see past</a:t>
+            </a:r>
+          </a:p>
+        </p:txBody>
+      </p:sp>
+      <p:sp>
+        <p:nvSpPr>
+          <p:cNvPr id="3" name="Rectangle 2"/>
+          <p:cNvSpPr/>
+          <p:nvPr/>
+        </p:nvSpPr>
+        <p:spPr>
+          <a:xfrm>
+            <a:off x="411480" y="1133856"/>
+            <a:ext cx="11368735" cy="20320"/>
+          </a:xfrm>
+          <a:prstGeom prst="rect">
+            <a:avLst/>
+          </a:prstGeom>
+          <a:solidFill>
+            <a:srgbClr val="B8C6D4"/>
+          </a:solidFill>
+          <a:ln>
+            <a:noFill/>
+          </a:ln>
+          <a:effectLst/>
+        </p:spPr>
+        <p:style>
+          <a:lnRef idx="1">
+            <a:schemeClr val="accent1"/>
+          </a:lnRef>
+          <a:fillRef idx="3">
+            <a:schemeClr val="accent1"/>
+          </a:fillRef>
+          <a:effectRef idx="2">
+            <a:schemeClr val="accent1"/>
+          </a:effectRef>
+          <a:fontRef idx="minor">
+            <a:schemeClr val="lt1"/>
+          </a:fontRef>
+        </p:style>
+        <p:txBody>
+          <a:bodyPr rtlCol="0" anchor="ctr"/>
+          <a:lstStyle/>
+          <a:p>
+            <a:pPr algn="ctr"/>
+          </a:p>
+        </p:txBody>
+      </p:sp>
+      <p:graphicFrame>
+        <p:nvGraphicFramePr>
+          <p:cNvPr id="4" name="Table 3"/>
+          <p:cNvGraphicFramePr>
+            <a:graphicFrameLocks noGrp="1"/>
+          </p:cNvGraphicFramePr>
+          <p:nvPr/>
+        </p:nvGraphicFramePr>
+        <p:xfrm>
+          <a:off x="411480" y="1298448"/>
           <a:ext cx="5806439" cy="4686300"/>
         </p:xfrm>
         <a:graphic>
@@ -7837,7 +8148,7 @@
 </p:sld>
 </file>
 
-<file path=ppt/slides/slide14.xml><?xml version="1.0" encoding="utf-8"?>
+<file path=ppt/slides/slide15.xml><?xml version="1.0" encoding="utf-8"?>
 <p:sld xmlns:a="http://schemas.openxmlformats.org/drawingml/2006/main" xmlns:p="http://schemas.openxmlformats.org/presentationml/2006/main" xmlns:r="http://schemas.openxmlformats.org/officeDocument/2006/relationships">
   <p:cSld>
     <p:spTree>
@@ -8170,7 +8481,7 @@
 </p:sld>
 </file>
 
-<file path=ppt/slides/slide15.xml><?xml version="1.0" encoding="utf-8"?>
+<file path=ppt/slides/slide16.xml><?xml version="1.0" encoding="utf-8"?>
 <p:sld xmlns:a="http://schemas.openxmlformats.org/drawingml/2006/main" xmlns:p="http://schemas.openxmlformats.org/presentationml/2006/main" xmlns:r="http://schemas.openxmlformats.org/officeDocument/2006/relationships">
   <p:cSld>
     <p:spTree>
@@ -8447,7 +8758,7 @@
 </p:sld>
 </file>
 
-<file path=ppt/slides/slide16.xml><?xml version="1.0" encoding="utf-8"?>
+<file path=ppt/slides/slide17.xml><?xml version="1.0" encoding="utf-8"?>
 <p:sld xmlns:a="http://schemas.openxmlformats.org/drawingml/2006/main" xmlns:p="http://schemas.openxmlformats.org/presentationml/2006/main" xmlns:r="http://schemas.openxmlformats.org/officeDocument/2006/relationships">
   <p:cSld>
     <p:spTree>
@@ -9296,7 +9607,7 @@
 </p:sld>
 </file>
 
-<file path=ppt/slides/slide17.xml><?xml version="1.0" encoding="utf-8"?>
+<file path=ppt/slides/slide18.xml><?xml version="1.0" encoding="utf-8"?>
 <p:sld xmlns:a="http://schemas.openxmlformats.org/drawingml/2006/main" xmlns:p="http://schemas.openxmlformats.org/presentationml/2006/main" xmlns:r="http://schemas.openxmlformats.org/officeDocument/2006/relationships">
   <p:cSld>
     <p:spTree>
@@ -10678,7 +10989,7 @@
 </p:sld>
 </file>
 
-<file path=ppt/slides/slide18.xml><?xml version="1.0" encoding="utf-8"?>
+<file path=ppt/slides/slide19.xml><?xml version="1.0" encoding="utf-8"?>
 <p:sld xmlns:a="http://schemas.openxmlformats.org/drawingml/2006/main" xmlns:p="http://schemas.openxmlformats.org/presentationml/2006/main" xmlns:r="http://schemas.openxmlformats.org/officeDocument/2006/relationships">
   <p:cSld>
     <p:spTree>
@@ -11095,7 +11406,7 @@
 </p:sld>
 </file>
 
-<file path=ppt/slides/slide19.xml><?xml version="1.0" encoding="utf-8"?>
+<file path=ppt/slides/slide2.xml><?xml version="1.0" encoding="utf-8"?>
 <p:sld xmlns:a="http://schemas.openxmlformats.org/drawingml/2006/main" xmlns:p="http://schemas.openxmlformats.org/presentationml/2006/main" xmlns:r="http://schemas.openxmlformats.org/officeDocument/2006/relationships">
   <p:cSld>
     <p:spTree>
@@ -11139,7 +11450,7 @@
                 </a:solidFill>
                 <a:latin typeface="Arial"/>
               </a:rPr>
-              <a:t>COPHI against the Zernike sensor with a dedicated laser, for the hold job</a:t>
+              <a:t>Feng's proposal, in one slide</a:t>
             </a:r>
           </a:p>
           <a:p>
@@ -11155,7 +11466,7 @@
                 </a:solidFill>
                 <a:latin typeface="Arial"/>
               </a:rPr>
-              <a:t>Feng's deck poses this comparison; on our bench the answer is photons and time: the vector Zernike holds 3 pm from 2 × 10¹² photons per cycle, COPHI with Feng's camera from ~1 × 10¹⁴ — and COPHI with a lock-in camera reaches a picometer faster than any of them, captures from cold, and reads absolutely</a:t>
+              <a:t>A heterodyne interferometer whose phase steps are set by frequency, not by a piezo, with a fiber-fed local oscillator at the camera, and an array detector providing many parallel channels to resolve 96 × 96 actuators</a:t>
             </a:r>
           </a:p>
         </p:txBody>
@@ -11204,819 +11515,16 @@
           </a:p>
         </p:txBody>
       </p:sp>
-      <p:graphicFrame>
-        <p:nvGraphicFramePr>
-          <p:cNvPr id="4" name="Table 3"/>
-          <p:cNvGraphicFramePr>
-            <a:graphicFrameLocks noGrp="1"/>
-          </p:cNvGraphicFramePr>
-          <p:nvPr/>
-        </p:nvGraphicFramePr>
-        <p:xfrm>
-          <a:off x="411480" y="1298448"/>
-          <a:ext cx="11368734" cy="4223385"/>
-        </p:xfrm>
-        <a:graphic>
-          <a:graphicData uri="http://schemas.openxmlformats.org/drawingml/2006/table">
-            <a:tbl>
-              <a:tblPr firstRow="1" bandRow="1">
-                <a:tableStyleId>{5C22544A-7EE6-4342-B048-85BDC9FD1C3A}</a:tableStyleId>
-              </a:tblPr>
-              <a:tblGrid>
-                <a:gridCol w="2107692"/>
-                <a:gridCol w="4370487"/>
-                <a:gridCol w="1268851"/>
-                <a:gridCol w="1817116"/>
-                <a:gridCol w="1804588"/>
-              </a:tblGrid>
-              <a:tr h="468630">
-                <a:tc>
-                  <a:txBody>
-                    <a:bodyPr wrap="square"/>
-                    <a:lstStyle/>
-                    <a:p/>
-                  </a:txBody>
-                  <a:tcPr marL="54864" marR="54864" marT="18288" marB="18288">
-                    <a:solidFill>
-                      <a:srgbClr val="1F4E79"/>
-                    </a:solidFill>
-                  </a:tcPr>
-                </a:tc>
-                <a:tc>
-                  <a:txBody>
-                    <a:bodyPr wrap="square"/>
-                    <a:lstStyle/>
-                    <a:p>
-                      <a:r>
-                        <a:rPr sz="1100" b="1">
-                          <a:solidFill>
-                            <a:srgbClr val="FFFFFF"/>
-                          </a:solidFill>
-                          <a:latin typeface="Arial"/>
-                        </a:rPr>
-                        <a:t>vector Zernike (dedicated laser, pol. camera)</a:t>
-                      </a:r>
-                    </a:p>
-                  </a:txBody>
-                  <a:tcPr marL="54864" marR="54864" marT="18288" marB="18288">
-                    <a:solidFill>
-                      <a:srgbClr val="1F4E79"/>
-                    </a:solidFill>
-                  </a:tcPr>
-                </a:tc>
-                <a:tc>
-                  <a:txBody>
-                    <a:bodyPr wrap="square"/>
-                    <a:lstStyle/>
-                    <a:p>
-                      <a:r>
-                        <a:rPr sz="1100" b="1">
-                          <a:solidFill>
-                            <a:srgbClr val="FFFFFF"/>
-                          </a:solidFill>
-                          <a:latin typeface="Arial"/>
-                        </a:rPr>
-                        <a:t>COPHI, Feng's camera</a:t>
-                      </a:r>
-                    </a:p>
-                  </a:txBody>
-                  <a:tcPr marL="54864" marR="54864" marT="18288" marB="18288">
-                    <a:solidFill>
-                      <a:srgbClr val="1F4E79"/>
-                    </a:solidFill>
-                  </a:tcPr>
-                </a:tc>
-                <a:tc>
-                  <a:txBody>
-                    <a:bodyPr wrap="square"/>
-                    <a:lstStyle/>
-                    <a:p>
-                      <a:r>
-                        <a:rPr sz="1100" b="1">
-                          <a:solidFill>
-                            <a:srgbClr val="FFFFFF"/>
-                          </a:solidFill>
-                          <a:latin typeface="Arial"/>
-                        </a:rPr>
-                        <a:t>COPHI, Photonfocus</a:t>
-                      </a:r>
-                    </a:p>
-                  </a:txBody>
-                  <a:tcPr marL="54864" marR="54864" marT="18288" marB="18288">
-                    <a:solidFill>
-                      <a:srgbClr val="1F4E79"/>
-                    </a:solidFill>
-                  </a:tcPr>
-                </a:tc>
-                <a:tc>
-                  <a:txBody>
-                    <a:bodyPr wrap="square"/>
-                    <a:lstStyle/>
-                    <a:p>
-                      <a:r>
-                        <a:rPr sz="1100" b="1">
-                          <a:solidFill>
-                            <a:srgbClr val="FFFFFF"/>
-                          </a:solidFill>
-                          <a:latin typeface="Arial"/>
-                        </a:rPr>
-                        <a:t>COPHI, lock-in camera (C4, as surveyed)</a:t>
-                      </a:r>
-                    </a:p>
-                  </a:txBody>
-                  <a:tcPr marL="54864" marR="54864" marT="18288" marB="18288">
-                    <a:solidFill>
-                      <a:srgbClr val="1F4E79"/>
-                    </a:solidFill>
-                  </a:tcPr>
-                </a:tc>
-              </a:tr>
-              <a:tr h="468630">
-                <a:tc>
-                  <a:txBody>
-                    <a:bodyPr wrap="square"/>
-                    <a:lstStyle/>
-                    <a:p>
-                      <a:r>
-                        <a:rPr sz="1100" b="0">
-                          <a:solidFill>
-                            <a:srgbClr val="282828"/>
-                          </a:solidFill>
-                          <a:latin typeface="Arial"/>
-                        </a:rPr>
-                        <a:t>photons per 3 pm hold cycle</a:t>
-                      </a:r>
-                    </a:p>
-                  </a:txBody>
-                  <a:tcPr marL="54864" marR="54864" marT="18288" marB="18288">
-                    <a:solidFill>
-                      <a:srgbClr val="FFFFFF"/>
-                    </a:solidFill>
-                  </a:tcPr>
-                </a:tc>
-                <a:tc>
-                  <a:txBody>
-                    <a:bodyPr wrap="square"/>
-                    <a:lstStyle/>
-                    <a:p>
-                      <a:r>
-                        <a:rPr sz="1100" b="0">
-                          <a:solidFill>
-                            <a:srgbClr val="282828"/>
-                          </a:solidFill>
-                          <a:latin typeface="Arial"/>
-                        </a:rPr>
-                        <a:t>2.2 × 10¹² (gauge deck)</a:t>
-                      </a:r>
-                    </a:p>
-                  </a:txBody>
-                  <a:tcPr marL="54864" marR="54864" marT="18288" marB="18288">
-                    <a:solidFill>
-                      <a:srgbClr val="FFFFFF"/>
-                    </a:solidFill>
-                  </a:tcPr>
-                </a:tc>
-                <a:tc>
-                  <a:txBody>
-                    <a:bodyPr wrap="square"/>
-                    <a:lstStyle/>
-                    <a:p>
-                      <a:r>
-                        <a:rPr sz="1100" b="0">
-                          <a:solidFill>
-                            <a:srgbClr val="282828"/>
-                          </a:solidFill>
-                          <a:latin typeface="Arial"/>
-                        </a:rPr>
-                        <a:t>~1 × 10¹⁴ (120 readings)</a:t>
-                      </a:r>
-                    </a:p>
-                  </a:txBody>
-                  <a:tcPr marL="54864" marR="54864" marT="18288" marB="18288">
-                    <a:solidFill>
-                      <a:srgbClr val="FFFFFF"/>
-                    </a:solidFill>
-                  </a:tcPr>
-                </a:tc>
-                <a:tc>
-                  <a:txBody>
-                    <a:bodyPr wrap="square"/>
-                    <a:lstStyle/>
-                    <a:p>
-                      <a:r>
-                        <a:rPr sz="1100" b="0">
-                          <a:solidFill>
-                            <a:srgbClr val="282828"/>
-                          </a:solidFill>
-                          <a:latin typeface="Arial"/>
-                        </a:rPr>
-                        <a:t>~1 × 10¹⁴ (60 readings)</a:t>
-                      </a:r>
-                    </a:p>
-                  </a:txBody>
-                  <a:tcPr marL="54864" marR="54864" marT="18288" marB="18288">
-                    <a:solidFill>
-                      <a:srgbClr val="FFFFFF"/>
-                    </a:solidFill>
-                  </a:tcPr>
-                </a:tc>
-                <a:tc>
-                  <a:txBody>
-                    <a:bodyPr wrap="square"/>
-                    <a:lstStyle/>
-                    <a:p>
-                      <a:r>
-                        <a:rPr sz="1100" b="0">
-                          <a:solidFill>
-                            <a:srgbClr val="282828"/>
-                          </a:solidFill>
-                          <a:latin typeface="Arial"/>
-                        </a:rPr>
-                        <a:t>~9 × 10¹² (125 samples, capped well)</a:t>
-                      </a:r>
-                    </a:p>
-                  </a:txBody>
-                  <a:tcPr marL="54864" marR="54864" marT="18288" marB="18288">
-                    <a:solidFill>
-                      <a:srgbClr val="FFFFFF"/>
-                    </a:solidFill>
-                  </a:tcPr>
-                </a:tc>
-              </a:tr>
-              <a:tr h="657225">
-                <a:tc>
-                  <a:txBody>
-                    <a:bodyPr wrap="square"/>
-                    <a:lstStyle/>
-                    <a:p>
-                      <a:r>
-                        <a:rPr sz="1100" b="0">
-                          <a:solidFill>
-                            <a:srgbClr val="282828"/>
-                          </a:solidFill>
-                          <a:latin typeface="Arial"/>
-                        </a:rPr>
-                        <a:t>time per 3 pm hold cycle</a:t>
-                      </a:r>
-                    </a:p>
-                  </a:txBody>
-                  <a:tcPr marL="54864" marR="54864" marT="18288" marB="18288">
-                    <a:solidFill>
-                      <a:srgbClr val="ECF1F6"/>
-                    </a:solidFill>
-                  </a:tcPr>
-                </a:tc>
-                <a:tc>
-                  <a:txBody>
-                    <a:bodyPr wrap="square"/>
-                    <a:lstStyle/>
-                    <a:p>
-                      <a:r>
-                        <a:rPr sz="1100" b="0">
-                          <a:solidFill>
-                            <a:srgbClr val="282828"/>
-                          </a:solidFill>
-                          <a:latin typeface="Arial"/>
-                        </a:rPr>
-                        <a:t>~60 s on the assumed pol. camera (519 s/pm ÷ 9: its 10 ke⁻ well, the core's dynamic range, two unused orientations — the camera is the ZWFS's own question)</a:t>
-                      </a:r>
-                    </a:p>
-                  </a:txBody>
-                  <a:tcPr marL="54864" marR="54864" marT="18288" marB="18288">
-                    <a:solidFill>
-                      <a:srgbClr val="ECF1F6"/>
-                    </a:solidFill>
-                  </a:tcPr>
-                </a:tc>
-                <a:tc>
-                  <a:txBody>
-                    <a:bodyPr wrap="square"/>
-                    <a:lstStyle/>
-                    <a:p>
-                      <a:r>
-                        <a:rPr sz="1100" b="0">
-                          <a:solidFill>
-                            <a:srgbClr val="282828"/>
-                          </a:solidFill>
-                          <a:latin typeface="Arial"/>
-                        </a:rPr>
-                        <a:t>16 s</a:t>
-                      </a:r>
-                    </a:p>
-                  </a:txBody>
-                  <a:tcPr marL="54864" marR="54864" marT="18288" marB="18288">
-                    <a:solidFill>
-                      <a:srgbClr val="ECF1F6"/>
-                    </a:solidFill>
-                  </a:tcPr>
-                </a:tc>
-                <a:tc>
-                  <a:txBody>
-                    <a:bodyPr wrap="square"/>
-                    <a:lstStyle/>
-                    <a:p>
-                      <a:r>
-                        <a:rPr sz="1100" b="0">
-                          <a:solidFill>
-                            <a:srgbClr val="282828"/>
-                          </a:solidFill>
-                          <a:latin typeface="Arial"/>
-                        </a:rPr>
-                        <a:t>1.6 s</a:t>
-                      </a:r>
-                    </a:p>
-                  </a:txBody>
-                  <a:tcPr marL="54864" marR="54864" marT="18288" marB="18288">
-                    <a:solidFill>
-                      <a:srgbClr val="ECF1F6"/>
-                    </a:solidFill>
-                  </a:tcPr>
-                </a:tc>
-                <a:tc>
-                  <a:txBody>
-                    <a:bodyPr wrap="square"/>
-                    <a:lstStyle/>
-                    <a:p>
-                      <a:r>
-                        <a:rPr sz="1100" b="0">
-                          <a:solidFill>
-                            <a:srgbClr val="282828"/>
-                          </a:solidFill>
-                          <a:latin typeface="Arial"/>
-                        </a:rPr>
-                        <a:t>0.125 s (record: 3.09 pm)</a:t>
-                      </a:r>
-                    </a:p>
-                  </a:txBody>
-                  <a:tcPr marL="54864" marR="54864" marT="18288" marB="18288">
-                    <a:solidFill>
-                      <a:srgbClr val="ECF1F6"/>
-                    </a:solidFill>
-                  </a:tcPr>
-                </a:tc>
-              </a:tr>
-              <a:tr h="657225">
-                <a:tc>
-                  <a:txBody>
-                    <a:bodyPr wrap="square"/>
-                    <a:lstStyle/>
-                    <a:p>
-                      <a:r>
-                        <a:rPr sz="1100" b="0">
-                          <a:solidFill>
-                            <a:srgbClr val="282828"/>
-                          </a:solidFill>
-                          <a:latin typeface="Arial"/>
-                        </a:rPr>
-                        <a:t>seconds to SNR 1 at 1 pm</a:t>
-                      </a:r>
-                    </a:p>
-                  </a:txBody>
-                  <a:tcPr marL="54864" marR="54864" marT="18288" marB="18288">
-                    <a:solidFill>
-                      <a:srgbClr val="FFFFFF"/>
-                    </a:solidFill>
-                  </a:tcPr>
-                </a:tc>
-                <a:tc>
-                  <a:txBody>
-                    <a:bodyPr wrap="square"/>
-                    <a:lstStyle/>
-                    <a:p>
-                      <a:r>
-                        <a:rPr sz="1100" b="0">
-                          <a:solidFill>
-                            <a:srgbClr val="282828"/>
-                          </a:solidFill>
-                          <a:latin typeface="Arial"/>
-                        </a:rPr>
-                        <a:t>519 (pol. camera, record)</a:t>
-                      </a:r>
-                    </a:p>
-                  </a:txBody>
-                  <a:tcPr marL="54864" marR="54864" marT="18288" marB="18288">
-                    <a:solidFill>
-                      <a:srgbClr val="FFFFFF"/>
-                    </a:solidFill>
-                  </a:tcPr>
-                </a:tc>
-                <a:tc>
-                  <a:txBody>
-                    <a:bodyPr wrap="square"/>
-                    <a:lstStyle/>
-                    <a:p>
-                      <a:r>
-                        <a:rPr sz="1100" b="0">
-                          <a:solidFill>
-                            <a:srgbClr val="282828"/>
-                          </a:solidFill>
-                          <a:latin typeface="Arial"/>
-                        </a:rPr>
-                        <a:t>443 / 385</a:t>
-                      </a:r>
-                    </a:p>
-                  </a:txBody>
-                  <a:tcPr marL="54864" marR="54864" marT="18288" marB="18288">
-                    <a:solidFill>
-                      <a:srgbClr val="FFFFFF"/>
-                    </a:solidFill>
-                  </a:tcPr>
-                </a:tc>
-                <a:tc>
-                  <a:txBody>
-                    <a:bodyPr wrap="square"/>
-                    <a:lstStyle/>
-                    <a:p>
-                      <a:r>
-                        <a:rPr sz="1100" b="0">
-                          <a:solidFill>
-                            <a:srgbClr val="282828"/>
-                          </a:solidFill>
-                          <a:latin typeface="Arial"/>
-                        </a:rPr>
-                        <a:t>42 / 36</a:t>
-                      </a:r>
-                    </a:p>
-                  </a:txBody>
-                  <a:tcPr marL="54864" marR="54864" marT="18288" marB="18288">
-                    <a:solidFill>
-                      <a:srgbClr val="FFFFFF"/>
-                    </a:solidFill>
-                  </a:tcPr>
-                </a:tc>
-                <a:tc>
-                  <a:txBody>
-                    <a:bodyPr wrap="square"/>
-                    <a:lstStyle/>
-                    <a:p>
-                      <a:r>
-                        <a:rPr sz="1100" b="0">
-                          <a:solidFill>
-                            <a:srgbClr val="282828"/>
-                          </a:solidFill>
-                          <a:latin typeface="Arial"/>
-                        </a:rPr>
-                        <a:t>3.35 / 3.73 (×1.23 in time for two-tap demodulation)</a:t>
-                      </a:r>
-                    </a:p>
-                  </a:txBody>
-                  <a:tcPr marL="54864" marR="54864" marT="18288" marB="18288">
-                    <a:solidFill>
-                      <a:srgbClr val="FFFFFF"/>
-                    </a:solidFill>
-                  </a:tcPr>
-                </a:tc>
-              </a:tr>
-              <a:tr h="657225">
-                <a:tc>
-                  <a:txBody>
-                    <a:bodyPr wrap="square"/>
-                    <a:lstStyle/>
-                    <a:p>
-                      <a:r>
-                        <a:rPr sz="1100" b="0">
-                          <a:solidFill>
-                            <a:srgbClr val="282828"/>
-                          </a:solidFill>
-                          <a:latin typeface="Arial"/>
-                        </a:rPr>
-                        <a:t>capture from cold</a:t>
-                      </a:r>
-                    </a:p>
-                  </a:txBody>
-                  <a:tcPr marL="54864" marR="54864" marT="18288" marB="18288">
-                    <a:solidFill>
-                      <a:srgbClr val="ECF1F6"/>
-                    </a:solidFill>
-                  </a:tcPr>
-                </a:tc>
-                <a:tc>
-                  <a:txBody>
-                    <a:bodyPr wrap="square"/>
-                    <a:lstStyle/>
-                    <a:p>
-                      <a:r>
-                        <a:rPr sz="1100" b="0">
-                          <a:solidFill>
-                            <a:srgbClr val="282828"/>
-                          </a:solidFill>
-                          <a:latin typeface="Arial"/>
-                        </a:rPr>
-                        <a:t>no: the reference ages past 36–70 nm</a:t>
-                      </a:r>
-                    </a:p>
-                  </a:txBody>
-                  <a:tcPr marL="54864" marR="54864" marT="18288" marB="18288">
-                    <a:solidFill>
-                      <a:srgbClr val="ECF1F6"/>
-                    </a:solidFill>
-                  </a:tcPr>
-                </a:tc>
-                <a:tc>
-                  <a:txBody>
-                    <a:bodyPr wrap="square"/>
-                    <a:lstStyle/>
-                    <a:p>
-                      <a:r>
-                        <a:rPr sz="1100" b="0">
-                          <a:solidFill>
-                            <a:srgbClr val="282828"/>
-                          </a:solidFill>
-                          <a:latin typeface="Arial"/>
-                        </a:rPr>
-                        <a:t>two colors, one 0.27 s reading</a:t>
-                      </a:r>
-                    </a:p>
-                  </a:txBody>
-                  <a:tcPr marL="54864" marR="54864" marT="18288" marB="18288">
-                    <a:solidFill>
-                      <a:srgbClr val="ECF1F6"/>
-                    </a:solidFill>
-                  </a:tcPr>
-                </a:tc>
-                <a:tc>
-                  <a:txBody>
-                    <a:bodyPr wrap="square"/>
-                    <a:lstStyle/>
-                    <a:p>
-                      <a:r>
-                        <a:rPr sz="1100" b="0">
-                          <a:solidFill>
-                            <a:srgbClr val="282828"/>
-                          </a:solidFill>
-                          <a:latin typeface="Arial"/>
-                        </a:rPr>
-                        <a:t>same</a:t>
-                      </a:r>
-                    </a:p>
-                  </a:txBody>
-                  <a:tcPr marL="54864" marR="54864" marT="18288" marB="18288">
-                    <a:solidFill>
-                      <a:srgbClr val="ECF1F6"/>
-                    </a:solidFill>
-                  </a:tcPr>
-                </a:tc>
-                <a:tc>
-                  <a:txBody>
-                    <a:bodyPr wrap="square"/>
-                    <a:lstStyle/>
-                    <a:p>
-                      <a:r>
-                        <a:rPr sz="1100" b="0">
-                          <a:solidFill>
-                            <a:srgbClr val="282828"/>
-                          </a:solidFill>
-                          <a:latin typeface="Arial"/>
-                        </a:rPr>
-                        <a:t>two colors on alternate samples; zero wrong orders to 480 nm</a:t>
-                      </a:r>
-                    </a:p>
-                  </a:txBody>
-                  <a:tcPr marL="54864" marR="54864" marT="18288" marB="18288">
-                    <a:solidFill>
-                      <a:srgbClr val="ECF1F6"/>
-                    </a:solidFill>
-                  </a:tcPr>
-                </a:tc>
-              </a:tr>
-              <a:tr h="657225">
-                <a:tc>
-                  <a:txBody>
-                    <a:bodyPr wrap="square"/>
-                    <a:lstStyle/>
-                    <a:p>
-                      <a:r>
-                        <a:rPr sz="1100" b="0">
-                          <a:solidFill>
-                            <a:srgbClr val="282828"/>
-                          </a:solidFill>
-                          <a:latin typeface="Arial"/>
-                        </a:rPr>
-                        <a:t>absolute read</a:t>
-                      </a:r>
-                    </a:p>
-                  </a:txBody>
-                  <a:tcPr marL="54864" marR="54864" marT="18288" marB="18288">
-                    <a:solidFill>
-                      <a:srgbClr val="FFFFFF"/>
-                    </a:solidFill>
-                  </a:tcPr>
-                </a:tc>
-                <a:tc>
-                  <a:txBody>
-                    <a:bodyPr wrap="square"/>
-                    <a:lstStyle/>
-                    <a:p>
-                      <a:r>
-                        <a:rPr sz="1100" b="0">
-                          <a:solidFill>
-                            <a:srgbClr val="282828"/>
-                          </a:solidFill>
-                          <a:latin typeface="Arial"/>
-                        </a:rPr>
-                        <a:t>reference iterated or matrix re-measured</a:t>
-                      </a:r>
-                    </a:p>
-                  </a:txBody>
-                  <a:tcPr marL="54864" marR="54864" marT="18288" marB="18288">
-                    <a:solidFill>
-                      <a:srgbClr val="FFFFFF"/>
-                    </a:solidFill>
-                  </a:tcPr>
-                </a:tc>
-                <a:tc>
-                  <a:txBody>
-                    <a:bodyPr wrap="square"/>
-                    <a:lstStyle/>
-                    <a:p>
-                      <a:r>
-                        <a:rPr sz="1100" b="0">
-                          <a:solidFill>
-                            <a:srgbClr val="282828"/>
-                          </a:solidFill>
-                          <a:latin typeface="Arial"/>
-                        </a:rPr>
-                        <a:t>exact (slope 1.000000) against the LO</a:t>
-                      </a:r>
-                    </a:p>
-                  </a:txBody>
-                  <a:tcPr marL="54864" marR="54864" marT="18288" marB="18288">
-                    <a:solidFill>
-                      <a:srgbClr val="FFFFFF"/>
-                    </a:solidFill>
-                  </a:tcPr>
-                </a:tc>
-                <a:tc>
-                  <a:txBody>
-                    <a:bodyPr wrap="square"/>
-                    <a:lstStyle/>
-                    <a:p>
-                      <a:r>
-                        <a:rPr sz="1100" b="0">
-                          <a:solidFill>
-                            <a:srgbClr val="282828"/>
-                          </a:solidFill>
-                          <a:latin typeface="Arial"/>
-                        </a:rPr>
-                        <a:t>exact</a:t>
-                      </a:r>
-                    </a:p>
-                  </a:txBody>
-                  <a:tcPr marL="54864" marR="54864" marT="18288" marB="18288">
-                    <a:solidFill>
-                      <a:srgbClr val="FFFFFF"/>
-                    </a:solidFill>
-                  </a:tcPr>
-                </a:tc>
-                <a:tc>
-                  <a:txBody>
-                    <a:bodyPr wrap="square"/>
-                    <a:lstStyle/>
-                    <a:p>
-                      <a:r>
-                        <a:rPr sz="1100" b="0">
-                          <a:solidFill>
-                            <a:srgbClr val="282828"/>
-                          </a:solidFill>
-                          <a:latin typeface="Arial"/>
-                        </a:rPr>
-                        <a:t>exact</a:t>
-                      </a:r>
-                    </a:p>
-                  </a:txBody>
-                  <a:tcPr marL="54864" marR="54864" marT="18288" marB="18288">
-                    <a:solidFill>
-                      <a:srgbClr val="FFFFFF"/>
-                    </a:solidFill>
-                  </a:tcPr>
-                </a:tc>
-              </a:tr>
-              <a:tr h="657225">
-                <a:tc>
-                  <a:txBody>
-                    <a:bodyPr wrap="square"/>
-                    <a:lstStyle/>
-                    <a:p>
-                      <a:r>
-                        <a:rPr sz="1100" b="0">
-                          <a:solidFill>
-                            <a:srgbClr val="282828"/>
-                          </a:solidFill>
-                          <a:latin typeface="Arial"/>
-                        </a:rPr>
-                        <a:t>its own stabilities</a:t>
-                      </a:r>
-                    </a:p>
-                  </a:txBody>
-                  <a:tcPr marL="54864" marR="54864" marT="18288" marB="18288">
-                    <a:solidFill>
-                      <a:srgbClr val="ECF1F6"/>
-                    </a:solidFill>
-                  </a:tcPr>
-                </a:tc>
-                <a:tc>
-                  <a:txBody>
-                    <a:bodyPr wrap="square"/>
-                    <a:lstStyle/>
-                    <a:p>
-                      <a:r>
-                        <a:rPr sz="1100" b="0">
-                          <a:solidFill>
-                            <a:srgbClr val="282828"/>
-                          </a:solidFill>
-                          <a:latin typeface="Arial"/>
-                        </a:rPr>
-                        <a:t>none beyond the bench</a:t>
-                      </a:r>
-                    </a:p>
-                  </a:txBody>
-                  <a:tcPr marL="54864" marR="54864" marT="18288" marB="18288">
-                    <a:solidFill>
-                      <a:srgbClr val="ECF1F6"/>
-                    </a:solidFill>
-                  </a:tcPr>
-                </a:tc>
-                <a:tc>
-                  <a:txBody>
-                    <a:bodyPr wrap="square"/>
-                    <a:lstStyle/>
-                    <a:p>
-                      <a:r>
-                        <a:rPr sz="1100" b="0">
-                          <a:solidFill>
-                            <a:srgbClr val="282828"/>
-                          </a:solidFill>
-                          <a:latin typeface="Arial"/>
-                        </a:rPr>
-                        <a:t>fiber 0.39 nm per frame; LO 10 prad per cycle</a:t>
-                      </a:r>
-                    </a:p>
-                  </a:txBody>
-                  <a:tcPr marL="54864" marR="54864" marT="18288" marB="18288">
-                    <a:solidFill>
-                      <a:srgbClr val="ECF1F6"/>
-                    </a:solidFill>
-                  </a:tcPr>
-                </a:tc>
-                <a:tc>
-                  <a:txBody>
-                    <a:bodyPr wrap="square"/>
-                    <a:lstStyle/>
-                    <a:p>
-                      <a:r>
-                        <a:rPr sz="1100" b="0">
-                          <a:solidFill>
-                            <a:srgbClr val="282828"/>
-                          </a:solidFill>
-                          <a:latin typeface="Arial"/>
-                        </a:rPr>
-                        <a:t>same</a:t>
-                      </a:r>
-                    </a:p>
-                  </a:txBody>
-                  <a:tcPr marL="54864" marR="54864" marT="18288" marB="18288">
-                    <a:solidFill>
-                      <a:srgbClr val="ECF1F6"/>
-                    </a:solidFill>
-                  </a:tcPr>
-                </a:tc>
-                <a:tc>
-                  <a:txBody>
-                    <a:bodyPr wrap="square"/>
-                    <a:lstStyle/>
-                    <a:p>
-                      <a:r>
-                        <a:rPr sz="1100" b="0">
-                          <a:solidFill>
-                            <a:srgbClr val="282828"/>
-                          </a:solidFill>
-                          <a:latin typeface="Arial"/>
-                        </a:rPr>
-                        <a:t>LO the same (29.4 pm); fiber a per-sample piston, inert (record)</a:t>
-                      </a:r>
-                    </a:p>
-                  </a:txBody>
-                  <a:tcPr marL="54864" marR="54864" marT="18288" marB="18288">
-                    <a:solidFill>
-                      <a:srgbClr val="ECF1F6"/>
-                    </a:solidFill>
-                  </a:tcPr>
-                </a:tc>
-              </a:tr>
-            </a:tbl>
-          </a:graphicData>
-        </a:graphic>
-      </p:graphicFrame>
       <p:sp>
         <p:nvSpPr>
-          <p:cNvPr id="5" name="TextBox 4"/>
+          <p:cNvPr id="4" name="TextBox 3"/>
           <p:cNvSpPr txBox="1"/>
           <p:nvPr/>
         </p:nvSpPr>
         <p:spPr>
           <a:xfrm>
-            <a:off x="411480" y="5257800"/>
-            <a:ext cx="11368735" cy="274320"/>
+            <a:off x="411480" y="1298448"/>
+            <a:ext cx="5806440" cy="274320"/>
           </a:xfrm>
           <a:prstGeom prst="rect">
             <a:avLst/>
@@ -12035,7 +11543,7 @@
               </a:spcAft>
             </a:pPr>
             <a:r>
-              <a:rPr sz="1100" b="0">
+              <a:rPr sz="1200" b="0">
                 <a:solidFill>
                   <a:srgbClr val="282828"/>
                 </a:solidFill>
@@ -12044,40 +11552,22 @@
               <a:t>•  </a:t>
             </a:r>
             <a:r>
-              <a:rPr sz="1100" b="1">
+              <a:rPr sz="1200" b="1">
                 <a:solidFill>
                   <a:srgbClr val="282828"/>
                 </a:solidFill>
                 <a:latin typeface="Arial"/>
               </a:rPr>
-              <a:t>For hold alone, the vector Zernike is cheapest in photons</a:t>
-            </a:r>
-            <a:r>
-              <a:rPr sz="1100" b="0">
+              <a:t>Layout:</a:t>
+            </a:r>
+            <a:r>
+              <a:rPr sz="1200" b="0">
                 <a:solidFill>
                   <a:srgbClr val="282828"/>
                 </a:solidFill>
                 <a:latin typeface="Arial"/>
               </a:rPr>
-              <a:t> (~50×) and needs no stabilities of its own — but on the assumed polarization camera it is the slowest (~60 s per cycle).  Feng's camera makes COPHI slow (16 s), the Photonfocus fast (1.6 s), </a:t>
-            </a:r>
-            <a:r>
-              <a:rPr sz="1100" b="1">
-                <a:solidFill>
-                  <a:srgbClr val="282828"/>
-                </a:solidFill>
-                <a:latin typeface="Arial"/>
-              </a:rPr>
-              <a:t>the lock-in the fastest on the table (0.125 s)</a:t>
-            </a:r>
-            <a:r>
-              <a:rPr sz="1100" b="0">
-                <a:solidFill>
-                  <a:srgbClr val="282828"/>
-                </a:solidFill>
-                <a:latin typeface="Arial"/>
-              </a:rPr>
-              <a:t> if its well is as surveyed.</a:t>
+              <a:t> laser → 1×2 coupler → AOM-1 (80 MHz) and AOM-2 (80 MHz + 7.5 Hz), both synthesizers on a 10 MHz Rb standard; the measurement beam to the DM, the LO fiber to a splitter before the camera; the ×4 multipliers mixed to a 30 Hz camera trigger: four frames per 7.5 Hz fringe cycle – see next slide.</a:t>
             </a:r>
           </a:p>
           <a:p>
@@ -12087,7 +11577,7 @@
               </a:spcAft>
             </a:pPr>
             <a:r>
-              <a:rPr sz="1100" b="0">
+              <a:rPr sz="1200" b="0">
                 <a:solidFill>
                   <a:srgbClr val="282828"/>
                 </a:solidFill>
@@ -12096,22 +11586,22 @@
               <a:t>•  </a:t>
             </a:r>
             <a:r>
-              <a:rPr sz="1100" b="1">
+              <a:rPr sz="1200" b="1">
                 <a:solidFill>
                   <a:srgbClr val="282828"/>
                 </a:solidFill>
                 <a:latin typeface="Arial"/>
               </a:rPr>
-              <a:t>For capture and the absolute figure:</a:t>
-            </a:r>
-            <a:r>
-              <a:rPr sz="1100" b="0">
+              <a:t>Algorithm:</a:t>
+            </a:r>
+            <a:r>
+              <a:rPr sz="1200" b="0">
                 <a:solidFill>
                   <a:srgbClr val="282828"/>
                 </a:solidFill>
                 <a:latin typeface="Arial"/>
               </a:rPr>
-              <a:t> COPHI in either form.</a:t>
+              <a:t> I = I₀ (1 + γ cos(φ + 2π f t)); frames at α = 0, π/2, π, 3π/2; φ = atan2(I₄ − I₂, I₁ − I₃); surface = ½ (φ/2π) λ (double pass).  Backup: the N-frame least-squares solution (Zygo's four-step is N = 4).</a:t>
             </a:r>
           </a:p>
           <a:p>
@@ -12121,7 +11611,7 @@
               </a:spcAft>
             </a:pPr>
             <a:r>
-              <a:rPr sz="1100" b="0">
+              <a:rPr sz="1200" b="0">
                 <a:solidFill>
                   <a:srgbClr val="282828"/>
                 </a:solidFill>
@@ -12130,54 +11620,36 @@
               <a:t>•  </a:t>
             </a:r>
             <a:r>
-              <a:rPr sz="1100" b="1">
+              <a:rPr sz="1200" b="1">
                 <a:solidFill>
                   <a:srgbClr val="282828"/>
                 </a:solidFill>
                 <a:latin typeface="Arial"/>
               </a:rPr>
-              <a:t>For a flight DM:</a:t>
-            </a:r>
-            <a:r>
-              <a:rPr sz="1100" b="0">
+              <a:t>Main purpose: stabilize the DM!</a:t>
+            </a:r>
+            <a:r>
+              <a:rPr sz="1200" b="0">
                 <a:solidFill>
                   <a:srgbClr val="282828"/>
                 </a:solidFill>
                 <a:latin typeface="Arial"/>
               </a:rPr>
-              <a:t> hold only and photons scarce → the Zernike sensor with a camera chosen for it; hold + capture + absolute, or speed → COPHI (the lock-in fastest by 20–500×).  </a:t>
-            </a:r>
-            <a:r>
-              <a:rPr sz="1100" b="1">
-                <a:solidFill>
-                  <a:srgbClr val="282828"/>
-                </a:solidFill>
-                <a:latin typeface="Arial"/>
-              </a:rPr>
-              <a:t>The hybrid</a:t>
-            </a:r>
-            <a:r>
-              <a:rPr sz="1100" b="0">
-                <a:solidFill>
-                  <a:srgbClr val="282828"/>
-                </a:solidFill>
-                <a:latin typeface="Arial"/>
-              </a:rPr>
-              <a:t> — Zernike for the hold, COPHI's two-color read for capture and commissioning — stays the conservative answer until the lock-in's vendor numbers are in.</a:t>
+              <a:t>  Run each DM in a local loop to hold it — our job 3.  For us to figure out: the camera, the photon budget, the error terms, estimated performance.</a:t>
             </a:r>
           </a:p>
         </p:txBody>
       </p:sp>
       <p:sp>
         <p:nvSpPr>
-          <p:cNvPr id="6" name="TextBox 5"/>
+          <p:cNvPr id="5" name="TextBox 4"/>
           <p:cNvSpPr txBox="1"/>
           <p:nvPr/>
         </p:nvSpPr>
         <p:spPr>
           <a:xfrm>
-            <a:off x="411480" y="6986270"/>
-            <a:ext cx="11368735" cy="274320"/>
+            <a:off x="6400800" y="1298448"/>
+            <a:ext cx="5394960" cy="274320"/>
           </a:xfrm>
           <a:prstGeom prst="rect">
             <a:avLst/>
@@ -12196,13 +11668,172 @@
               </a:spcAft>
             </a:pPr>
             <a:r>
+              <a:rPr sz="1200" b="0">
+                <a:solidFill>
+                  <a:srgbClr val="282828"/>
+                </a:solidFill>
+                <a:latin typeface="Arial"/>
+              </a:rPr>
+              <a:t>•  </a:t>
+            </a:r>
+            <a:r>
+              <a:rPr sz="1200" b="1">
+                <a:solidFill>
+                  <a:srgbClr val="282828"/>
+                </a:solidFill>
+                <a:latin typeface="Arial"/>
+              </a:rPr>
+              <a:t>Built on our DM Gauge bench:</a:t>
+            </a:r>
+            <a:r>
+              <a:rPr sz="1200" b="0">
+                <a:solidFill>
+                  <a:srgbClr val="282828"/>
+                </a:solidFill>
+                <a:latin typeface="Arial"/>
+              </a:rPr>
+              <a:t> the bench with mirror and lens layouts, the 96 × 96 DM, swappable sensors: the core Twyman-Green interferometer (IFO), scalar and vector Zernike wavefront sensors (ZWFS), point-diffraction interferometers.</a:t>
+            </a:r>
+          </a:p>
+          <a:p>
+            <a:pPr>
+              <a:spcAft>
+                <a:spcPts val="600"/>
+              </a:spcAft>
+            </a:pPr>
+            <a:r>
+              <a:rPr sz="1200" b="0">
+                <a:solidFill>
+                  <a:srgbClr val="282828"/>
+                </a:solidFill>
+                <a:latin typeface="Arial"/>
+              </a:rPr>
+              <a:t>•  </a:t>
+            </a:r>
+            <a:r>
+              <a:rPr sz="1200" b="1">
+                <a:solidFill>
+                  <a:srgbClr val="282828"/>
+                </a:solidFill>
+                <a:latin typeface="Arial"/>
+              </a:rPr>
+              <a:t>The same scoring:</a:t>
+            </a:r>
+            <a:r>
+              <a:rPr sz="1200" b="0">
+                <a:solidFill>
+                  <a:srgbClr val="282828"/>
+                </a:solidFill>
+                <a:latin typeface="Arial"/>
+              </a:rPr>
+              <a:t> on a 30 nm working surface, the response matrix measured through the reading, the hold loop, the capture ladder, the photon rows.</a:t>
+            </a:r>
+          </a:p>
+          <a:p>
+            <a:pPr>
+              <a:spcAft>
+                <a:spcPts val="600"/>
+              </a:spcAft>
+            </a:pPr>
+            <a:r>
+              <a:rPr sz="1200" b="0">
+                <a:solidFill>
+                  <a:srgbClr val="282828"/>
+                </a:solidFill>
+                <a:latin typeface="Arial"/>
+              </a:rPr>
+              <a:t>•  </a:t>
+            </a:r>
+            <a:r>
+              <a:rPr sz="1200" b="1">
+                <a:solidFill>
+                  <a:srgbClr val="282828"/>
+                </a:solidFill>
+                <a:latin typeface="Arial"/>
+              </a:rPr>
+              <a:t>What is new:</a:t>
+            </a:r>
+            <a:r>
+              <a:rPr sz="1200" b="0">
+                <a:solidFill>
+                  <a:srgbClr val="282828"/>
+                </a:solidFill>
+                <a:latin typeface="Arial"/>
+              </a:rPr>
+              <a:t> the Local Oscillator (LO) arm (a fiber tip and collimator where the reference flat sat); frequency-set steps; each frame integrating a quarter of the beat; the LO's wavefront drift; the differential fiber phase within a scan; trigger jitter; a camera chosen for the job.</a:t>
+            </a:r>
+          </a:p>
+          <a:p>
+            <a:pPr>
+              <a:spcAft>
+                <a:spcPts val="600"/>
+              </a:spcAft>
+            </a:pPr>
+            <a:r>
+              <a:rPr sz="1200" b="0">
+                <a:solidFill>
+                  <a:srgbClr val="282828"/>
+                </a:solidFill>
+                <a:latin typeface="Arial"/>
+              </a:rPr>
+              <a:t>•  </a:t>
+            </a:r>
+            <a:r>
+              <a:rPr sz="1200" b="1">
+                <a:solidFill>
+                  <a:srgbClr val="282828"/>
+                </a:solidFill>
+                <a:latin typeface="Arial"/>
+              </a:rPr>
+              <a:t>What is absent:</a:t>
+            </a:r>
+            <a:r>
+              <a:rPr sz="1200" b="0">
+                <a:solidFill>
+                  <a:srgbClr val="282828"/>
+                </a:solidFill>
+                <a:latin typeface="Arial"/>
+              </a:rPr>
+              <a:t> the polarizing train — no analyzer, no quarter-wave plates, the same polarization in both arms — so the polarization gain the IFO carries (0.983–1.004) does not exist here.</a:t>
+            </a:r>
+          </a:p>
+        </p:txBody>
+      </p:sp>
+      <p:sp>
+        <p:nvSpPr>
+          <p:cNvPr id="6" name="TextBox 5"/>
+          <p:cNvSpPr txBox="1"/>
+          <p:nvPr/>
+        </p:nvSpPr>
+        <p:spPr>
+          <a:xfrm>
+            <a:off x="6400800" y="5074920"/>
+            <a:ext cx="5394960" cy="274320"/>
+          </a:xfrm>
+          <a:prstGeom prst="rect">
+            <a:avLst/>
+          </a:prstGeom>
+          <a:noFill/>
+        </p:spPr>
+        <p:txBody>
+          <a:bodyPr wrap="square">
+            <a:spAutoFit/>
+          </a:bodyPr>
+          <a:lstStyle/>
+          <a:p>
+            <a:pPr>
+              <a:spcAft>
+                <a:spcPts val="600"/>
+              </a:spcAft>
+            </a:pPr>
+            <a:r>
               <a:rPr sz="1050" b="0">
                 <a:solidFill>
                   <a:srgbClr val="6E6E6E"/>
                 </a:solidFill>
                 <a:latin typeface="Arial"/>
               </a:rPr>
-              <a:t>The Zernike rows are the gauge deck's (redo96_sens, zloop) with the polarization-camera timing from camS_oap; the COPHI rows this deck's; the lock-in rows are records (runs/lockin_, resources 2a07af9).</a:t>
+              <a:t>Feng's slide 8 is the implementation example this deck's block diagrams follow; TOM3 (SPIE 6268) is the photodiode heritage.</a:t>
             </a:r>
           </a:p>
         </p:txBody>
@@ -12215,7 +11846,7 @@
 </p:sld>
 </file>
 
-<file path=ppt/slides/slide2.xml><?xml version="1.0" encoding="utf-8"?>
+<file path=ppt/slides/slide20.xml><?xml version="1.0" encoding="utf-8"?>
 <p:sld xmlns:a="http://schemas.openxmlformats.org/drawingml/2006/main" xmlns:p="http://schemas.openxmlformats.org/presentationml/2006/main" xmlns:r="http://schemas.openxmlformats.org/officeDocument/2006/relationships">
   <p:cSld>
     <p:spTree>
@@ -12259,7 +11890,7 @@
                 </a:solidFill>
                 <a:latin typeface="Arial"/>
               </a:rPr>
-              <a:t>Feng's proposal, in one slide</a:t>
+              <a:t>COPHI against the Zernike sensor with a dedicated laser, for the hold job</a:t>
             </a:r>
           </a:p>
           <a:p>
@@ -12275,7 +11906,7 @@
                 </a:solidFill>
                 <a:latin typeface="Arial"/>
               </a:rPr>
-              <a:t>A heterodyne interferometer whose phase steps are set by frequency, not by a piezo, with a fiber-fed local oscillator at the camera, and an array detector providing many parallel channels to resolve 96 × 96 actuators</a:t>
+              <a:t>Feng's deck poses this comparison; on our bench the answer is photons and time: the vector Zernike holds 3 pm from 2 × 10¹² photons per cycle, COPHI with Feng's camera from ~1 × 10¹⁴ — and COPHI with a lock-in camera reaches a picometer faster than any of them, captures from cold, and reads absolutely</a:t>
             </a:r>
           </a:p>
         </p:txBody>
@@ -12324,16 +11955,819 @@
           </a:p>
         </p:txBody>
       </p:sp>
+      <p:graphicFrame>
+        <p:nvGraphicFramePr>
+          <p:cNvPr id="4" name="Table 3"/>
+          <p:cNvGraphicFramePr>
+            <a:graphicFrameLocks noGrp="1"/>
+          </p:cNvGraphicFramePr>
+          <p:nvPr/>
+        </p:nvGraphicFramePr>
+        <p:xfrm>
+          <a:off x="411480" y="1298448"/>
+          <a:ext cx="11368734" cy="4223385"/>
+        </p:xfrm>
+        <a:graphic>
+          <a:graphicData uri="http://schemas.openxmlformats.org/drawingml/2006/table">
+            <a:tbl>
+              <a:tblPr firstRow="1" bandRow="1">
+                <a:tableStyleId>{5C22544A-7EE6-4342-B048-85BDC9FD1C3A}</a:tableStyleId>
+              </a:tblPr>
+              <a:tblGrid>
+                <a:gridCol w="2107692"/>
+                <a:gridCol w="4370487"/>
+                <a:gridCol w="1268851"/>
+                <a:gridCol w="1817116"/>
+                <a:gridCol w="1804588"/>
+              </a:tblGrid>
+              <a:tr h="468630">
+                <a:tc>
+                  <a:txBody>
+                    <a:bodyPr wrap="square"/>
+                    <a:lstStyle/>
+                    <a:p/>
+                  </a:txBody>
+                  <a:tcPr marL="54864" marR="54864" marT="18288" marB="18288">
+                    <a:solidFill>
+                      <a:srgbClr val="1F4E79"/>
+                    </a:solidFill>
+                  </a:tcPr>
+                </a:tc>
+                <a:tc>
+                  <a:txBody>
+                    <a:bodyPr wrap="square"/>
+                    <a:lstStyle/>
+                    <a:p>
+                      <a:r>
+                        <a:rPr sz="1100" b="1">
+                          <a:solidFill>
+                            <a:srgbClr val="FFFFFF"/>
+                          </a:solidFill>
+                          <a:latin typeface="Arial"/>
+                        </a:rPr>
+                        <a:t>vector Zernike (dedicated laser, pol. camera)</a:t>
+                      </a:r>
+                    </a:p>
+                  </a:txBody>
+                  <a:tcPr marL="54864" marR="54864" marT="18288" marB="18288">
+                    <a:solidFill>
+                      <a:srgbClr val="1F4E79"/>
+                    </a:solidFill>
+                  </a:tcPr>
+                </a:tc>
+                <a:tc>
+                  <a:txBody>
+                    <a:bodyPr wrap="square"/>
+                    <a:lstStyle/>
+                    <a:p>
+                      <a:r>
+                        <a:rPr sz="1100" b="1">
+                          <a:solidFill>
+                            <a:srgbClr val="FFFFFF"/>
+                          </a:solidFill>
+                          <a:latin typeface="Arial"/>
+                        </a:rPr>
+                        <a:t>COPHI, Feng's camera</a:t>
+                      </a:r>
+                    </a:p>
+                  </a:txBody>
+                  <a:tcPr marL="54864" marR="54864" marT="18288" marB="18288">
+                    <a:solidFill>
+                      <a:srgbClr val="1F4E79"/>
+                    </a:solidFill>
+                  </a:tcPr>
+                </a:tc>
+                <a:tc>
+                  <a:txBody>
+                    <a:bodyPr wrap="square"/>
+                    <a:lstStyle/>
+                    <a:p>
+                      <a:r>
+                        <a:rPr sz="1100" b="1">
+                          <a:solidFill>
+                            <a:srgbClr val="FFFFFF"/>
+                          </a:solidFill>
+                          <a:latin typeface="Arial"/>
+                        </a:rPr>
+                        <a:t>COPHI, Photonfocus</a:t>
+                      </a:r>
+                    </a:p>
+                  </a:txBody>
+                  <a:tcPr marL="54864" marR="54864" marT="18288" marB="18288">
+                    <a:solidFill>
+                      <a:srgbClr val="1F4E79"/>
+                    </a:solidFill>
+                  </a:tcPr>
+                </a:tc>
+                <a:tc>
+                  <a:txBody>
+                    <a:bodyPr wrap="square"/>
+                    <a:lstStyle/>
+                    <a:p>
+                      <a:r>
+                        <a:rPr sz="1100" b="1">
+                          <a:solidFill>
+                            <a:srgbClr val="FFFFFF"/>
+                          </a:solidFill>
+                          <a:latin typeface="Arial"/>
+                        </a:rPr>
+                        <a:t>COPHI, lock-in camera (C4, as surveyed)</a:t>
+                      </a:r>
+                    </a:p>
+                  </a:txBody>
+                  <a:tcPr marL="54864" marR="54864" marT="18288" marB="18288">
+                    <a:solidFill>
+                      <a:srgbClr val="1F4E79"/>
+                    </a:solidFill>
+                  </a:tcPr>
+                </a:tc>
+              </a:tr>
+              <a:tr h="468630">
+                <a:tc>
+                  <a:txBody>
+                    <a:bodyPr wrap="square"/>
+                    <a:lstStyle/>
+                    <a:p>
+                      <a:r>
+                        <a:rPr sz="1100" b="0">
+                          <a:solidFill>
+                            <a:srgbClr val="282828"/>
+                          </a:solidFill>
+                          <a:latin typeface="Arial"/>
+                        </a:rPr>
+                        <a:t>photons per 3 pm hold cycle</a:t>
+                      </a:r>
+                    </a:p>
+                  </a:txBody>
+                  <a:tcPr marL="54864" marR="54864" marT="18288" marB="18288">
+                    <a:solidFill>
+                      <a:srgbClr val="FFFFFF"/>
+                    </a:solidFill>
+                  </a:tcPr>
+                </a:tc>
+                <a:tc>
+                  <a:txBody>
+                    <a:bodyPr wrap="square"/>
+                    <a:lstStyle/>
+                    <a:p>
+                      <a:r>
+                        <a:rPr sz="1100" b="0">
+                          <a:solidFill>
+                            <a:srgbClr val="282828"/>
+                          </a:solidFill>
+                          <a:latin typeface="Arial"/>
+                        </a:rPr>
+                        <a:t>2.2 × 10¹² (gauge deck)</a:t>
+                      </a:r>
+                    </a:p>
+                  </a:txBody>
+                  <a:tcPr marL="54864" marR="54864" marT="18288" marB="18288">
+                    <a:solidFill>
+                      <a:srgbClr val="FFFFFF"/>
+                    </a:solidFill>
+                  </a:tcPr>
+                </a:tc>
+                <a:tc>
+                  <a:txBody>
+                    <a:bodyPr wrap="square"/>
+                    <a:lstStyle/>
+                    <a:p>
+                      <a:r>
+                        <a:rPr sz="1100" b="0">
+                          <a:solidFill>
+                            <a:srgbClr val="282828"/>
+                          </a:solidFill>
+                          <a:latin typeface="Arial"/>
+                        </a:rPr>
+                        <a:t>~1 × 10¹⁴ (120 readings)</a:t>
+                      </a:r>
+                    </a:p>
+                  </a:txBody>
+                  <a:tcPr marL="54864" marR="54864" marT="18288" marB="18288">
+                    <a:solidFill>
+                      <a:srgbClr val="FFFFFF"/>
+                    </a:solidFill>
+                  </a:tcPr>
+                </a:tc>
+                <a:tc>
+                  <a:txBody>
+                    <a:bodyPr wrap="square"/>
+                    <a:lstStyle/>
+                    <a:p>
+                      <a:r>
+                        <a:rPr sz="1100" b="0">
+                          <a:solidFill>
+                            <a:srgbClr val="282828"/>
+                          </a:solidFill>
+                          <a:latin typeface="Arial"/>
+                        </a:rPr>
+                        <a:t>~1 × 10¹⁴ (60 readings)</a:t>
+                      </a:r>
+                    </a:p>
+                  </a:txBody>
+                  <a:tcPr marL="54864" marR="54864" marT="18288" marB="18288">
+                    <a:solidFill>
+                      <a:srgbClr val="FFFFFF"/>
+                    </a:solidFill>
+                  </a:tcPr>
+                </a:tc>
+                <a:tc>
+                  <a:txBody>
+                    <a:bodyPr wrap="square"/>
+                    <a:lstStyle/>
+                    <a:p>
+                      <a:r>
+                        <a:rPr sz="1100" b="0">
+                          <a:solidFill>
+                            <a:srgbClr val="282828"/>
+                          </a:solidFill>
+                          <a:latin typeface="Arial"/>
+                        </a:rPr>
+                        <a:t>~9 × 10¹² (125 samples, capped well)</a:t>
+                      </a:r>
+                    </a:p>
+                  </a:txBody>
+                  <a:tcPr marL="54864" marR="54864" marT="18288" marB="18288">
+                    <a:solidFill>
+                      <a:srgbClr val="FFFFFF"/>
+                    </a:solidFill>
+                  </a:tcPr>
+                </a:tc>
+              </a:tr>
+              <a:tr h="657225">
+                <a:tc>
+                  <a:txBody>
+                    <a:bodyPr wrap="square"/>
+                    <a:lstStyle/>
+                    <a:p>
+                      <a:r>
+                        <a:rPr sz="1100" b="0">
+                          <a:solidFill>
+                            <a:srgbClr val="282828"/>
+                          </a:solidFill>
+                          <a:latin typeface="Arial"/>
+                        </a:rPr>
+                        <a:t>time per 3 pm hold cycle</a:t>
+                      </a:r>
+                    </a:p>
+                  </a:txBody>
+                  <a:tcPr marL="54864" marR="54864" marT="18288" marB="18288">
+                    <a:solidFill>
+                      <a:srgbClr val="ECF1F6"/>
+                    </a:solidFill>
+                  </a:tcPr>
+                </a:tc>
+                <a:tc>
+                  <a:txBody>
+                    <a:bodyPr wrap="square"/>
+                    <a:lstStyle/>
+                    <a:p>
+                      <a:r>
+                        <a:rPr sz="1100" b="0">
+                          <a:solidFill>
+                            <a:srgbClr val="282828"/>
+                          </a:solidFill>
+                          <a:latin typeface="Arial"/>
+                        </a:rPr>
+                        <a:t>~60 s on the assumed pol. camera (519 s/pm ÷ 9: its 10 ke⁻ well, the core's dynamic range, two unused orientations — the camera is the ZWFS's own question)</a:t>
+                      </a:r>
+                    </a:p>
+                  </a:txBody>
+                  <a:tcPr marL="54864" marR="54864" marT="18288" marB="18288">
+                    <a:solidFill>
+                      <a:srgbClr val="ECF1F6"/>
+                    </a:solidFill>
+                  </a:tcPr>
+                </a:tc>
+                <a:tc>
+                  <a:txBody>
+                    <a:bodyPr wrap="square"/>
+                    <a:lstStyle/>
+                    <a:p>
+                      <a:r>
+                        <a:rPr sz="1100" b="0">
+                          <a:solidFill>
+                            <a:srgbClr val="282828"/>
+                          </a:solidFill>
+                          <a:latin typeface="Arial"/>
+                        </a:rPr>
+                        <a:t>16 s</a:t>
+                      </a:r>
+                    </a:p>
+                  </a:txBody>
+                  <a:tcPr marL="54864" marR="54864" marT="18288" marB="18288">
+                    <a:solidFill>
+                      <a:srgbClr val="ECF1F6"/>
+                    </a:solidFill>
+                  </a:tcPr>
+                </a:tc>
+                <a:tc>
+                  <a:txBody>
+                    <a:bodyPr wrap="square"/>
+                    <a:lstStyle/>
+                    <a:p>
+                      <a:r>
+                        <a:rPr sz="1100" b="0">
+                          <a:solidFill>
+                            <a:srgbClr val="282828"/>
+                          </a:solidFill>
+                          <a:latin typeface="Arial"/>
+                        </a:rPr>
+                        <a:t>1.6 s</a:t>
+                      </a:r>
+                    </a:p>
+                  </a:txBody>
+                  <a:tcPr marL="54864" marR="54864" marT="18288" marB="18288">
+                    <a:solidFill>
+                      <a:srgbClr val="ECF1F6"/>
+                    </a:solidFill>
+                  </a:tcPr>
+                </a:tc>
+                <a:tc>
+                  <a:txBody>
+                    <a:bodyPr wrap="square"/>
+                    <a:lstStyle/>
+                    <a:p>
+                      <a:r>
+                        <a:rPr sz="1100" b="0">
+                          <a:solidFill>
+                            <a:srgbClr val="282828"/>
+                          </a:solidFill>
+                          <a:latin typeface="Arial"/>
+                        </a:rPr>
+                        <a:t>0.125 s (record: 3.09 pm)</a:t>
+                      </a:r>
+                    </a:p>
+                  </a:txBody>
+                  <a:tcPr marL="54864" marR="54864" marT="18288" marB="18288">
+                    <a:solidFill>
+                      <a:srgbClr val="ECF1F6"/>
+                    </a:solidFill>
+                  </a:tcPr>
+                </a:tc>
+              </a:tr>
+              <a:tr h="657225">
+                <a:tc>
+                  <a:txBody>
+                    <a:bodyPr wrap="square"/>
+                    <a:lstStyle/>
+                    <a:p>
+                      <a:r>
+                        <a:rPr sz="1100" b="0">
+                          <a:solidFill>
+                            <a:srgbClr val="282828"/>
+                          </a:solidFill>
+                          <a:latin typeface="Arial"/>
+                        </a:rPr>
+                        <a:t>seconds to SNR 1 at 1 pm</a:t>
+                      </a:r>
+                    </a:p>
+                  </a:txBody>
+                  <a:tcPr marL="54864" marR="54864" marT="18288" marB="18288">
+                    <a:solidFill>
+                      <a:srgbClr val="FFFFFF"/>
+                    </a:solidFill>
+                  </a:tcPr>
+                </a:tc>
+                <a:tc>
+                  <a:txBody>
+                    <a:bodyPr wrap="square"/>
+                    <a:lstStyle/>
+                    <a:p>
+                      <a:r>
+                        <a:rPr sz="1100" b="0">
+                          <a:solidFill>
+                            <a:srgbClr val="282828"/>
+                          </a:solidFill>
+                          <a:latin typeface="Arial"/>
+                        </a:rPr>
+                        <a:t>519 (pol. camera, record)</a:t>
+                      </a:r>
+                    </a:p>
+                  </a:txBody>
+                  <a:tcPr marL="54864" marR="54864" marT="18288" marB="18288">
+                    <a:solidFill>
+                      <a:srgbClr val="FFFFFF"/>
+                    </a:solidFill>
+                  </a:tcPr>
+                </a:tc>
+                <a:tc>
+                  <a:txBody>
+                    <a:bodyPr wrap="square"/>
+                    <a:lstStyle/>
+                    <a:p>
+                      <a:r>
+                        <a:rPr sz="1100" b="0">
+                          <a:solidFill>
+                            <a:srgbClr val="282828"/>
+                          </a:solidFill>
+                          <a:latin typeface="Arial"/>
+                        </a:rPr>
+                        <a:t>443 / 385</a:t>
+                      </a:r>
+                    </a:p>
+                  </a:txBody>
+                  <a:tcPr marL="54864" marR="54864" marT="18288" marB="18288">
+                    <a:solidFill>
+                      <a:srgbClr val="FFFFFF"/>
+                    </a:solidFill>
+                  </a:tcPr>
+                </a:tc>
+                <a:tc>
+                  <a:txBody>
+                    <a:bodyPr wrap="square"/>
+                    <a:lstStyle/>
+                    <a:p>
+                      <a:r>
+                        <a:rPr sz="1100" b="0">
+                          <a:solidFill>
+                            <a:srgbClr val="282828"/>
+                          </a:solidFill>
+                          <a:latin typeface="Arial"/>
+                        </a:rPr>
+                        <a:t>42 / 36</a:t>
+                      </a:r>
+                    </a:p>
+                  </a:txBody>
+                  <a:tcPr marL="54864" marR="54864" marT="18288" marB="18288">
+                    <a:solidFill>
+                      <a:srgbClr val="FFFFFF"/>
+                    </a:solidFill>
+                  </a:tcPr>
+                </a:tc>
+                <a:tc>
+                  <a:txBody>
+                    <a:bodyPr wrap="square"/>
+                    <a:lstStyle/>
+                    <a:p>
+                      <a:r>
+                        <a:rPr sz="1100" b="0">
+                          <a:solidFill>
+                            <a:srgbClr val="282828"/>
+                          </a:solidFill>
+                          <a:latin typeface="Arial"/>
+                        </a:rPr>
+                        <a:t>3.35 / 3.73 (×1.23 in time for two-tap demodulation)</a:t>
+                      </a:r>
+                    </a:p>
+                  </a:txBody>
+                  <a:tcPr marL="54864" marR="54864" marT="18288" marB="18288">
+                    <a:solidFill>
+                      <a:srgbClr val="FFFFFF"/>
+                    </a:solidFill>
+                  </a:tcPr>
+                </a:tc>
+              </a:tr>
+              <a:tr h="657225">
+                <a:tc>
+                  <a:txBody>
+                    <a:bodyPr wrap="square"/>
+                    <a:lstStyle/>
+                    <a:p>
+                      <a:r>
+                        <a:rPr sz="1100" b="0">
+                          <a:solidFill>
+                            <a:srgbClr val="282828"/>
+                          </a:solidFill>
+                          <a:latin typeface="Arial"/>
+                        </a:rPr>
+                        <a:t>capture from cold</a:t>
+                      </a:r>
+                    </a:p>
+                  </a:txBody>
+                  <a:tcPr marL="54864" marR="54864" marT="18288" marB="18288">
+                    <a:solidFill>
+                      <a:srgbClr val="ECF1F6"/>
+                    </a:solidFill>
+                  </a:tcPr>
+                </a:tc>
+                <a:tc>
+                  <a:txBody>
+                    <a:bodyPr wrap="square"/>
+                    <a:lstStyle/>
+                    <a:p>
+                      <a:r>
+                        <a:rPr sz="1100" b="0">
+                          <a:solidFill>
+                            <a:srgbClr val="282828"/>
+                          </a:solidFill>
+                          <a:latin typeface="Arial"/>
+                        </a:rPr>
+                        <a:t>no: the reference ages past 36–70 nm</a:t>
+                      </a:r>
+                    </a:p>
+                  </a:txBody>
+                  <a:tcPr marL="54864" marR="54864" marT="18288" marB="18288">
+                    <a:solidFill>
+                      <a:srgbClr val="ECF1F6"/>
+                    </a:solidFill>
+                  </a:tcPr>
+                </a:tc>
+                <a:tc>
+                  <a:txBody>
+                    <a:bodyPr wrap="square"/>
+                    <a:lstStyle/>
+                    <a:p>
+                      <a:r>
+                        <a:rPr sz="1100" b="0">
+                          <a:solidFill>
+                            <a:srgbClr val="282828"/>
+                          </a:solidFill>
+                          <a:latin typeface="Arial"/>
+                        </a:rPr>
+                        <a:t>two colors, one 0.27 s reading</a:t>
+                      </a:r>
+                    </a:p>
+                  </a:txBody>
+                  <a:tcPr marL="54864" marR="54864" marT="18288" marB="18288">
+                    <a:solidFill>
+                      <a:srgbClr val="ECF1F6"/>
+                    </a:solidFill>
+                  </a:tcPr>
+                </a:tc>
+                <a:tc>
+                  <a:txBody>
+                    <a:bodyPr wrap="square"/>
+                    <a:lstStyle/>
+                    <a:p>
+                      <a:r>
+                        <a:rPr sz="1100" b="0">
+                          <a:solidFill>
+                            <a:srgbClr val="282828"/>
+                          </a:solidFill>
+                          <a:latin typeface="Arial"/>
+                        </a:rPr>
+                        <a:t>same</a:t>
+                      </a:r>
+                    </a:p>
+                  </a:txBody>
+                  <a:tcPr marL="54864" marR="54864" marT="18288" marB="18288">
+                    <a:solidFill>
+                      <a:srgbClr val="ECF1F6"/>
+                    </a:solidFill>
+                  </a:tcPr>
+                </a:tc>
+                <a:tc>
+                  <a:txBody>
+                    <a:bodyPr wrap="square"/>
+                    <a:lstStyle/>
+                    <a:p>
+                      <a:r>
+                        <a:rPr sz="1100" b="0">
+                          <a:solidFill>
+                            <a:srgbClr val="282828"/>
+                          </a:solidFill>
+                          <a:latin typeface="Arial"/>
+                        </a:rPr>
+                        <a:t>two colors on alternate samples; zero wrong orders to 480 nm</a:t>
+                      </a:r>
+                    </a:p>
+                  </a:txBody>
+                  <a:tcPr marL="54864" marR="54864" marT="18288" marB="18288">
+                    <a:solidFill>
+                      <a:srgbClr val="ECF1F6"/>
+                    </a:solidFill>
+                  </a:tcPr>
+                </a:tc>
+              </a:tr>
+              <a:tr h="657225">
+                <a:tc>
+                  <a:txBody>
+                    <a:bodyPr wrap="square"/>
+                    <a:lstStyle/>
+                    <a:p>
+                      <a:r>
+                        <a:rPr sz="1100" b="0">
+                          <a:solidFill>
+                            <a:srgbClr val="282828"/>
+                          </a:solidFill>
+                          <a:latin typeface="Arial"/>
+                        </a:rPr>
+                        <a:t>absolute read</a:t>
+                      </a:r>
+                    </a:p>
+                  </a:txBody>
+                  <a:tcPr marL="54864" marR="54864" marT="18288" marB="18288">
+                    <a:solidFill>
+                      <a:srgbClr val="FFFFFF"/>
+                    </a:solidFill>
+                  </a:tcPr>
+                </a:tc>
+                <a:tc>
+                  <a:txBody>
+                    <a:bodyPr wrap="square"/>
+                    <a:lstStyle/>
+                    <a:p>
+                      <a:r>
+                        <a:rPr sz="1100" b="0">
+                          <a:solidFill>
+                            <a:srgbClr val="282828"/>
+                          </a:solidFill>
+                          <a:latin typeface="Arial"/>
+                        </a:rPr>
+                        <a:t>reference iterated or matrix re-measured</a:t>
+                      </a:r>
+                    </a:p>
+                  </a:txBody>
+                  <a:tcPr marL="54864" marR="54864" marT="18288" marB="18288">
+                    <a:solidFill>
+                      <a:srgbClr val="FFFFFF"/>
+                    </a:solidFill>
+                  </a:tcPr>
+                </a:tc>
+                <a:tc>
+                  <a:txBody>
+                    <a:bodyPr wrap="square"/>
+                    <a:lstStyle/>
+                    <a:p>
+                      <a:r>
+                        <a:rPr sz="1100" b="0">
+                          <a:solidFill>
+                            <a:srgbClr val="282828"/>
+                          </a:solidFill>
+                          <a:latin typeface="Arial"/>
+                        </a:rPr>
+                        <a:t>exact (slope 1.000000) against the LO</a:t>
+                      </a:r>
+                    </a:p>
+                  </a:txBody>
+                  <a:tcPr marL="54864" marR="54864" marT="18288" marB="18288">
+                    <a:solidFill>
+                      <a:srgbClr val="FFFFFF"/>
+                    </a:solidFill>
+                  </a:tcPr>
+                </a:tc>
+                <a:tc>
+                  <a:txBody>
+                    <a:bodyPr wrap="square"/>
+                    <a:lstStyle/>
+                    <a:p>
+                      <a:r>
+                        <a:rPr sz="1100" b="0">
+                          <a:solidFill>
+                            <a:srgbClr val="282828"/>
+                          </a:solidFill>
+                          <a:latin typeface="Arial"/>
+                        </a:rPr>
+                        <a:t>exact</a:t>
+                      </a:r>
+                    </a:p>
+                  </a:txBody>
+                  <a:tcPr marL="54864" marR="54864" marT="18288" marB="18288">
+                    <a:solidFill>
+                      <a:srgbClr val="FFFFFF"/>
+                    </a:solidFill>
+                  </a:tcPr>
+                </a:tc>
+                <a:tc>
+                  <a:txBody>
+                    <a:bodyPr wrap="square"/>
+                    <a:lstStyle/>
+                    <a:p>
+                      <a:r>
+                        <a:rPr sz="1100" b="0">
+                          <a:solidFill>
+                            <a:srgbClr val="282828"/>
+                          </a:solidFill>
+                          <a:latin typeface="Arial"/>
+                        </a:rPr>
+                        <a:t>exact</a:t>
+                      </a:r>
+                    </a:p>
+                  </a:txBody>
+                  <a:tcPr marL="54864" marR="54864" marT="18288" marB="18288">
+                    <a:solidFill>
+                      <a:srgbClr val="FFFFFF"/>
+                    </a:solidFill>
+                  </a:tcPr>
+                </a:tc>
+              </a:tr>
+              <a:tr h="657225">
+                <a:tc>
+                  <a:txBody>
+                    <a:bodyPr wrap="square"/>
+                    <a:lstStyle/>
+                    <a:p>
+                      <a:r>
+                        <a:rPr sz="1100" b="0">
+                          <a:solidFill>
+                            <a:srgbClr val="282828"/>
+                          </a:solidFill>
+                          <a:latin typeface="Arial"/>
+                        </a:rPr>
+                        <a:t>its own stabilities</a:t>
+                      </a:r>
+                    </a:p>
+                  </a:txBody>
+                  <a:tcPr marL="54864" marR="54864" marT="18288" marB="18288">
+                    <a:solidFill>
+                      <a:srgbClr val="ECF1F6"/>
+                    </a:solidFill>
+                  </a:tcPr>
+                </a:tc>
+                <a:tc>
+                  <a:txBody>
+                    <a:bodyPr wrap="square"/>
+                    <a:lstStyle/>
+                    <a:p>
+                      <a:r>
+                        <a:rPr sz="1100" b="0">
+                          <a:solidFill>
+                            <a:srgbClr val="282828"/>
+                          </a:solidFill>
+                          <a:latin typeface="Arial"/>
+                        </a:rPr>
+                        <a:t>none beyond the bench</a:t>
+                      </a:r>
+                    </a:p>
+                  </a:txBody>
+                  <a:tcPr marL="54864" marR="54864" marT="18288" marB="18288">
+                    <a:solidFill>
+                      <a:srgbClr val="ECF1F6"/>
+                    </a:solidFill>
+                  </a:tcPr>
+                </a:tc>
+                <a:tc>
+                  <a:txBody>
+                    <a:bodyPr wrap="square"/>
+                    <a:lstStyle/>
+                    <a:p>
+                      <a:r>
+                        <a:rPr sz="1100" b="0">
+                          <a:solidFill>
+                            <a:srgbClr val="282828"/>
+                          </a:solidFill>
+                          <a:latin typeface="Arial"/>
+                        </a:rPr>
+                        <a:t>fiber 0.39 nm per frame; LO 10 prad per cycle</a:t>
+                      </a:r>
+                    </a:p>
+                  </a:txBody>
+                  <a:tcPr marL="54864" marR="54864" marT="18288" marB="18288">
+                    <a:solidFill>
+                      <a:srgbClr val="ECF1F6"/>
+                    </a:solidFill>
+                  </a:tcPr>
+                </a:tc>
+                <a:tc>
+                  <a:txBody>
+                    <a:bodyPr wrap="square"/>
+                    <a:lstStyle/>
+                    <a:p>
+                      <a:r>
+                        <a:rPr sz="1100" b="0">
+                          <a:solidFill>
+                            <a:srgbClr val="282828"/>
+                          </a:solidFill>
+                          <a:latin typeface="Arial"/>
+                        </a:rPr>
+                        <a:t>same</a:t>
+                      </a:r>
+                    </a:p>
+                  </a:txBody>
+                  <a:tcPr marL="54864" marR="54864" marT="18288" marB="18288">
+                    <a:solidFill>
+                      <a:srgbClr val="ECF1F6"/>
+                    </a:solidFill>
+                  </a:tcPr>
+                </a:tc>
+                <a:tc>
+                  <a:txBody>
+                    <a:bodyPr wrap="square"/>
+                    <a:lstStyle/>
+                    <a:p>
+                      <a:r>
+                        <a:rPr sz="1100" b="0">
+                          <a:solidFill>
+                            <a:srgbClr val="282828"/>
+                          </a:solidFill>
+                          <a:latin typeface="Arial"/>
+                        </a:rPr>
+                        <a:t>LO the same (29.4 pm); fiber a per-sample piston, inert (record)</a:t>
+                      </a:r>
+                    </a:p>
+                  </a:txBody>
+                  <a:tcPr marL="54864" marR="54864" marT="18288" marB="18288">
+                    <a:solidFill>
+                      <a:srgbClr val="ECF1F6"/>
+                    </a:solidFill>
+                  </a:tcPr>
+                </a:tc>
+              </a:tr>
+            </a:tbl>
+          </a:graphicData>
+        </a:graphic>
+      </p:graphicFrame>
       <p:sp>
         <p:nvSpPr>
-          <p:cNvPr id="4" name="TextBox 3"/>
+          <p:cNvPr id="5" name="TextBox 4"/>
           <p:cNvSpPr txBox="1"/>
           <p:nvPr/>
         </p:nvSpPr>
         <p:spPr>
           <a:xfrm>
-            <a:off x="411480" y="1298448"/>
-            <a:ext cx="5806440" cy="274320"/>
+            <a:off x="411480" y="5257800"/>
+            <a:ext cx="11368735" cy="274320"/>
           </a:xfrm>
           <a:prstGeom prst="rect">
             <a:avLst/>
@@ -12352,7 +12786,7 @@
               </a:spcAft>
             </a:pPr>
             <a:r>
-              <a:rPr sz="1200" b="0">
+              <a:rPr sz="1100" b="0">
                 <a:solidFill>
                   <a:srgbClr val="282828"/>
                 </a:solidFill>
@@ -12361,22 +12795,40 @@
               <a:t>•  </a:t>
             </a:r>
             <a:r>
-              <a:rPr sz="1200" b="1">
+              <a:rPr sz="1100" b="1">
                 <a:solidFill>
                   <a:srgbClr val="282828"/>
                 </a:solidFill>
                 <a:latin typeface="Arial"/>
               </a:rPr>
-              <a:t>Layout:</a:t>
-            </a:r>
-            <a:r>
-              <a:rPr sz="1200" b="0">
+              <a:t>For hold alone, the vector Zernike is cheapest in photons</a:t>
+            </a:r>
+            <a:r>
+              <a:rPr sz="1100" b="0">
                 <a:solidFill>
                   <a:srgbClr val="282828"/>
                 </a:solidFill>
                 <a:latin typeface="Arial"/>
               </a:rPr>
-              <a:t> laser → 1×2 coupler → AOM-1 (80 MHz) and AOM-2 (80 MHz + 7.5 Hz), both synthesizers on a 10 MHz Rb standard; the measurement beam to the DM, the LO fiber to a splitter before the camera; the ×4 multipliers mixed to a 30 Hz camera trigger: four frames per 7.5 Hz fringe cycle – see next slide.</a:t>
+              <a:t> (~50×) and needs no stabilities of its own — but on the assumed polarization camera it is the slowest (~60 s per cycle).  Feng's camera makes COPHI slow (16 s), the Photonfocus fast (1.6 s), </a:t>
+            </a:r>
+            <a:r>
+              <a:rPr sz="1100" b="1">
+                <a:solidFill>
+                  <a:srgbClr val="282828"/>
+                </a:solidFill>
+                <a:latin typeface="Arial"/>
+              </a:rPr>
+              <a:t>the lock-in the fastest on the table (0.125 s)</a:t>
+            </a:r>
+            <a:r>
+              <a:rPr sz="1100" b="0">
+                <a:solidFill>
+                  <a:srgbClr val="282828"/>
+                </a:solidFill>
+                <a:latin typeface="Arial"/>
+              </a:rPr>
+              <a:t> if its well is as surveyed.</a:t>
             </a:r>
           </a:p>
           <a:p>
@@ -12386,7 +12838,7 @@
               </a:spcAft>
             </a:pPr>
             <a:r>
-              <a:rPr sz="1200" b="0">
+              <a:rPr sz="1100" b="0">
                 <a:solidFill>
                   <a:srgbClr val="282828"/>
                 </a:solidFill>
@@ -12395,22 +12847,22 @@
               <a:t>•  </a:t>
             </a:r>
             <a:r>
-              <a:rPr sz="1200" b="1">
+              <a:rPr sz="1100" b="1">
                 <a:solidFill>
                   <a:srgbClr val="282828"/>
                 </a:solidFill>
                 <a:latin typeface="Arial"/>
               </a:rPr>
-              <a:t>Algorithm:</a:t>
-            </a:r>
-            <a:r>
-              <a:rPr sz="1200" b="0">
+              <a:t>For capture and the absolute figure:</a:t>
+            </a:r>
+            <a:r>
+              <a:rPr sz="1100" b="0">
                 <a:solidFill>
                   <a:srgbClr val="282828"/>
                 </a:solidFill>
                 <a:latin typeface="Arial"/>
               </a:rPr>
-              <a:t> I = I₀ (1 + γ cos(φ + 2π f t)); frames at α = 0, π/2, π, 3π/2; φ = atan2(I₄ − I₂, I₁ − I₃); surface = ½ (φ/2π) λ (double pass).  Backup: the N-frame least-squares solution (Zygo's four-step is N = 4).</a:t>
+              <a:t> COPHI in either form.</a:t>
             </a:r>
           </a:p>
           <a:p>
@@ -12420,7 +12872,7 @@
               </a:spcAft>
             </a:pPr>
             <a:r>
-              <a:rPr sz="1200" b="0">
+              <a:rPr sz="1100" b="0">
                 <a:solidFill>
                   <a:srgbClr val="282828"/>
                 </a:solidFill>
@@ -12429,36 +12881,54 @@
               <a:t>•  </a:t>
             </a:r>
             <a:r>
-              <a:rPr sz="1200" b="1">
+              <a:rPr sz="1100" b="1">
                 <a:solidFill>
                   <a:srgbClr val="282828"/>
                 </a:solidFill>
                 <a:latin typeface="Arial"/>
               </a:rPr>
-              <a:t>Main purpose: stabilize the DM!</a:t>
-            </a:r>
-            <a:r>
-              <a:rPr sz="1200" b="0">
+              <a:t>For a flight DM:</a:t>
+            </a:r>
+            <a:r>
+              <a:rPr sz="1100" b="0">
                 <a:solidFill>
                   <a:srgbClr val="282828"/>
                 </a:solidFill>
                 <a:latin typeface="Arial"/>
               </a:rPr>
-              <a:t>  Run each DM in a local loop to hold it — our job 3.  For us to figure out: the camera, the photon budget, the error terms, estimated performance.</a:t>
+              <a:t> hold only and photons scarce → the Zernike sensor with a camera chosen for it; hold + capture + absolute, or speed → COPHI (the lock-in fastest by 20–500×).  </a:t>
+            </a:r>
+            <a:r>
+              <a:rPr sz="1100" b="1">
+                <a:solidFill>
+                  <a:srgbClr val="282828"/>
+                </a:solidFill>
+                <a:latin typeface="Arial"/>
+              </a:rPr>
+              <a:t>The hybrid</a:t>
+            </a:r>
+            <a:r>
+              <a:rPr sz="1100" b="0">
+                <a:solidFill>
+                  <a:srgbClr val="282828"/>
+                </a:solidFill>
+                <a:latin typeface="Arial"/>
+              </a:rPr>
+              <a:t> — Zernike for the hold, COPHI's two-color read for capture and commissioning — stays the conservative answer until the lock-in's vendor numbers are in.</a:t>
             </a:r>
           </a:p>
         </p:txBody>
       </p:sp>
       <p:sp>
         <p:nvSpPr>
-          <p:cNvPr id="5" name="TextBox 4"/>
+          <p:cNvPr id="6" name="TextBox 5"/>
           <p:cNvSpPr txBox="1"/>
           <p:nvPr/>
         </p:nvSpPr>
         <p:spPr>
           <a:xfrm>
-            <a:off x="6400800" y="1298448"/>
-            <a:ext cx="5394960" cy="274320"/>
+            <a:off x="411480" y="6986270"/>
+            <a:ext cx="11368735" cy="274320"/>
           </a:xfrm>
           <a:prstGeom prst="rect">
             <a:avLst/>
@@ -12477,172 +12947,13 @@
               </a:spcAft>
             </a:pPr>
             <a:r>
-              <a:rPr sz="1200" b="0">
-                <a:solidFill>
-                  <a:srgbClr val="282828"/>
-                </a:solidFill>
-                <a:latin typeface="Arial"/>
-              </a:rPr>
-              <a:t>•  </a:t>
-            </a:r>
-            <a:r>
-              <a:rPr sz="1200" b="1">
-                <a:solidFill>
-                  <a:srgbClr val="282828"/>
-                </a:solidFill>
-                <a:latin typeface="Arial"/>
-              </a:rPr>
-              <a:t>Built on our DM Gauge bench:</a:t>
-            </a:r>
-            <a:r>
-              <a:rPr sz="1200" b="0">
-                <a:solidFill>
-                  <a:srgbClr val="282828"/>
-                </a:solidFill>
-                <a:latin typeface="Arial"/>
-              </a:rPr>
-              <a:t> the bench with mirror and lens layouts, the 96 × 96 DM, swappable sensors: the core Twyman-Green interferometer (IFO), scalar and vector Zernike wavefront sensors (ZWFS), point-diffraction interferometers.</a:t>
-            </a:r>
-          </a:p>
-          <a:p>
-            <a:pPr>
-              <a:spcAft>
-                <a:spcPts val="600"/>
-              </a:spcAft>
-            </a:pPr>
-            <a:r>
-              <a:rPr sz="1200" b="0">
-                <a:solidFill>
-                  <a:srgbClr val="282828"/>
-                </a:solidFill>
-                <a:latin typeface="Arial"/>
-              </a:rPr>
-              <a:t>•  </a:t>
-            </a:r>
-            <a:r>
-              <a:rPr sz="1200" b="1">
-                <a:solidFill>
-                  <a:srgbClr val="282828"/>
-                </a:solidFill>
-                <a:latin typeface="Arial"/>
-              </a:rPr>
-              <a:t>The same scoring:</a:t>
-            </a:r>
-            <a:r>
-              <a:rPr sz="1200" b="0">
-                <a:solidFill>
-                  <a:srgbClr val="282828"/>
-                </a:solidFill>
-                <a:latin typeface="Arial"/>
-              </a:rPr>
-              <a:t> on a 30 nm working surface, the response matrix measured through the reading, the hold loop, the capture ladder, the photon rows.</a:t>
-            </a:r>
-          </a:p>
-          <a:p>
-            <a:pPr>
-              <a:spcAft>
-                <a:spcPts val="600"/>
-              </a:spcAft>
-            </a:pPr>
-            <a:r>
-              <a:rPr sz="1200" b="0">
-                <a:solidFill>
-                  <a:srgbClr val="282828"/>
-                </a:solidFill>
-                <a:latin typeface="Arial"/>
-              </a:rPr>
-              <a:t>•  </a:t>
-            </a:r>
-            <a:r>
-              <a:rPr sz="1200" b="1">
-                <a:solidFill>
-                  <a:srgbClr val="282828"/>
-                </a:solidFill>
-                <a:latin typeface="Arial"/>
-              </a:rPr>
-              <a:t>What is new:</a:t>
-            </a:r>
-            <a:r>
-              <a:rPr sz="1200" b="0">
-                <a:solidFill>
-                  <a:srgbClr val="282828"/>
-                </a:solidFill>
-                <a:latin typeface="Arial"/>
-              </a:rPr>
-              <a:t> the Local Oscillator (LO) arm (a fiber tip and collimator where the reference flat sat); frequency-set steps; each frame integrating a quarter of the beat; the LO's wavefront drift; the differential fiber phase within a scan; trigger jitter; a camera chosen for the job.</a:t>
-            </a:r>
-          </a:p>
-          <a:p>
-            <a:pPr>
-              <a:spcAft>
-                <a:spcPts val="600"/>
-              </a:spcAft>
-            </a:pPr>
-            <a:r>
-              <a:rPr sz="1200" b="0">
-                <a:solidFill>
-                  <a:srgbClr val="282828"/>
-                </a:solidFill>
-                <a:latin typeface="Arial"/>
-              </a:rPr>
-              <a:t>•  </a:t>
-            </a:r>
-            <a:r>
-              <a:rPr sz="1200" b="1">
-                <a:solidFill>
-                  <a:srgbClr val="282828"/>
-                </a:solidFill>
-                <a:latin typeface="Arial"/>
-              </a:rPr>
-              <a:t>What is absent:</a:t>
-            </a:r>
-            <a:r>
-              <a:rPr sz="1200" b="0">
-                <a:solidFill>
-                  <a:srgbClr val="282828"/>
-                </a:solidFill>
-                <a:latin typeface="Arial"/>
-              </a:rPr>
-              <a:t> the polarizing train — no analyzer, no quarter-wave plates, the same polarization in both arms — so the polarization gain the IFO carries (0.983–1.004) does not exist here.</a:t>
-            </a:r>
-          </a:p>
-        </p:txBody>
-      </p:sp>
-      <p:sp>
-        <p:nvSpPr>
-          <p:cNvPr id="6" name="TextBox 5"/>
-          <p:cNvSpPr txBox="1"/>
-          <p:nvPr/>
-        </p:nvSpPr>
-        <p:spPr>
-          <a:xfrm>
-            <a:off x="6400800" y="5074920"/>
-            <a:ext cx="5394960" cy="274320"/>
-          </a:xfrm>
-          <a:prstGeom prst="rect">
-            <a:avLst/>
-          </a:prstGeom>
-          <a:noFill/>
-        </p:spPr>
-        <p:txBody>
-          <a:bodyPr wrap="square">
-            <a:spAutoFit/>
-          </a:bodyPr>
-          <a:lstStyle/>
-          <a:p>
-            <a:pPr>
-              <a:spcAft>
-                <a:spcPts val="600"/>
-              </a:spcAft>
-            </a:pPr>
-            <a:r>
               <a:rPr sz="1050" b="0">
                 <a:solidFill>
                   <a:srgbClr val="6E6E6E"/>
                 </a:solidFill>
                 <a:latin typeface="Arial"/>
               </a:rPr>
-              <a:t>Feng's slide 8 is the implementation example this deck's block diagrams follow; TOM3 (SPIE 6268) is the photodiode heritage.</a:t>
+              <a:t>The Zernike rows are the gauge deck's (redo96_sens, zloop) with the polarization-camera timing from camS_oap; the COPHI rows this deck's; the lock-in rows are records (runs/lockin_, resources 2a07af9).</a:t>
             </a:r>
           </a:p>
         </p:txBody>
@@ -12655,7 +12966,7 @@
 </p:sld>
 </file>
 
-<file path=ppt/slides/slide20.xml><?xml version="1.0" encoding="utf-8"?>
+<file path=ppt/slides/slide21.xml><?xml version="1.0" encoding="utf-8"?>
 <p:sld xmlns:a="http://schemas.openxmlformats.org/drawingml/2006/main" xmlns:p="http://schemas.openxmlformats.org/presentationml/2006/main" xmlns:r="http://schemas.openxmlformats.org/officeDocument/2006/relationships">
   <p:cSld>
     <p:spTree>
@@ -13041,7 +13352,7 @@
                 </a:solidFill>
                 <a:latin typeface="Arial"/>
               </a:rPr>
-              <a:t> the lens rig's +0.1–0.2 % converged gain (a matrix-model term); the polarization-camera timings through the noise hook (slide 17); the lock-in's demodulation form from the vendor (two-tap square-wave assumed).</a:t>
+              <a:t> the lens rig's +0.1–0.2 % converged gain (a matrix-model term); the polarization-camera timings through the noise hook (slide 18); the lock-in's demodulation form from the vendor (two-tap square-wave assumed).</a:t>
             </a:r>
           </a:p>
           <a:p>
@@ -13127,7 +13438,7 @@
 </p:sld>
 </file>
 
-<file path=ppt/slides/slide21.xml><?xml version="1.0" encoding="utf-8"?>
+<file path=ppt/slides/slide22.xml><?xml version="1.0" encoding="utf-8"?>
 <p:sld xmlns:a="http://schemas.openxmlformats.org/drawingml/2006/main" xmlns:p="http://schemas.openxmlformats.org/presentationml/2006/main" xmlns:r="http://schemas.openxmlformats.org/officeDocument/2006/relationships">
   <p:cSld>
     <p:spTree>
@@ -13984,7 +14295,7 @@
 </p:sld>
 </file>
 
-<file path=ppt/slides/slide22.xml><?xml version="1.0" encoding="utf-8"?>
+<file path=ppt/slides/slide23.xml><?xml version="1.0" encoding="utf-8"?>
 <p:sld xmlns:a="http://schemas.openxmlformats.org/drawingml/2006/main" xmlns:p="http://schemas.openxmlformats.org/presentationml/2006/main" xmlns:r="http://schemas.openxmlformats.org/officeDocument/2006/relationships">
   <p:cSld>
     <p:spTree>
@@ -14085,7 +14396,7 @@
 </p:sld>
 </file>
 
-<file path=ppt/slides/slide23.xml><?xml version="1.0" encoding="utf-8"?>
+<file path=ppt/slides/slide24.xml><?xml version="1.0" encoding="utf-8"?>
 <p:sld xmlns:a="http://schemas.openxmlformats.org/drawingml/2006/main" xmlns:p="http://schemas.openxmlformats.org/presentationml/2006/main" xmlns:r="http://schemas.openxmlformats.org/officeDocument/2006/relationships">
   <p:cSld>
     <p:spTree>
@@ -14312,7 +14623,7 @@
 </p:sld>
 </file>
 
-<file path=ppt/slides/slide24.xml><?xml version="1.0" encoding="utf-8"?>
+<file path=ppt/slides/slide25.xml><?xml version="1.0" encoding="utf-8"?>
 <p:sld xmlns:a="http://schemas.openxmlformats.org/drawingml/2006/main" xmlns:p="http://schemas.openxmlformats.org/presentationml/2006/main" xmlns:r="http://schemas.openxmlformats.org/officeDocument/2006/relationships">
   <p:cSld>
     <p:spTree>
@@ -14903,7 +15214,7 @@
 </p:sld>
 </file>
 
-<file path=ppt/slides/slide25.xml><?xml version="1.0" encoding="utf-8"?>
+<file path=ppt/slides/slide26.xml><?xml version="1.0" encoding="utf-8"?>
 <p:sld xmlns:a="http://schemas.openxmlformats.org/drawingml/2006/main" xmlns:p="http://schemas.openxmlformats.org/presentationml/2006/main" xmlns:r="http://schemas.openxmlformats.org/officeDocument/2006/relationships">
   <p:cSld>
     <p:spTree>
@@ -16072,8 +16383,8 @@
         </p:nvSpPr>
         <p:spPr>
           <a:xfrm>
-            <a:off x="6172200" y="2103120"/>
-            <a:ext cx="4343400" cy="274320"/>
+            <a:off x="6400800" y="1999488"/>
+            <a:ext cx="5394960" cy="274320"/>
           </a:xfrm>
           <a:prstGeom prst="rect">
             <a:avLst/>
@@ -16098,7 +16409,7 @@
                 </a:solidFill>
                 <a:latin typeface="Arial"/>
               </a:rPr>
-              <a:t>make_cophi_block_fig.py; the camera rows name the surveyed parts; the lock-in alternative has its own diagram (slide 6).</a:t>
+              <a:t>make_cophi_block_fig.py; the camera rows name the surveyed parts; the lock-in alternative has its own diagram (slide 7).</a:t>
             </a:r>
           </a:p>
         </p:txBody>
@@ -16661,7 +16972,7 @@
                           </a:solidFill>
                           <a:latin typeface="Arial"/>
                         </a:rPr>
-                        <a:t>PM fiber tip + collimator at the reference flat's seat (slide 8); LO/test ~1, contrast 0.98</a:t>
+                        <a:t>PM fiber tip + collimator at the reference flat's seat (slide 9); LO/test ~1, contrast 0.98</a:t>
                       </a:r>
                     </a:p>
                   </a:txBody>
@@ -16863,7 +17174,7 @@
                           </a:solidFill>
                           <a:latin typeface="Arial"/>
                         </a:rPr>
-                        <a:t>well × frame rate decides (slide 12)</a:t>
+                        <a:t>well × frame rate decides (slide 13)</a:t>
                       </a:r>
                     </a:p>
                   </a:txBody>
@@ -16953,7 +17264,7 @@
                           </a:solidFill>
                           <a:latin typeface="Arial"/>
                         </a:rPr>
-                        <a:t>oversampling costs no photons (slide 10)</a:t>
+                        <a:t>oversampling costs no photons (slide 11)</a:t>
                       </a:r>
                     </a:p>
                   </a:txBody>
@@ -17111,7 +17422,7 @@
                           </a:solidFill>
                           <a:latin typeface="Arial"/>
                         </a:rPr>
-                        <a:t>fiber walk, jitter, LO drift, shot + read noise, the record's drifts (slide 13); the record's loop at the camera's cadence; two colors from cold (slides 15–16)</a:t>
+                        <a:t>fiber walk, jitter, LO drift, shot + read noise, the record's drifts (slide 14); the record's loop at the camera's cadence; two colors from cold (slides 16–17)</a:t>
                       </a:r>
                     </a:p>
                   </a:txBody>
@@ -18226,6 +18537,300 @@
 </file>
 
 <file path=ppt/slides/slide6.xml><?xml version="1.0" encoding="utf-8"?>
+<p:sld xmlns:a="http://schemas.openxmlformats.org/drawingml/2006/main" xmlns:p="http://schemas.openxmlformats.org/presentationml/2006/main" xmlns:r="http://schemas.openxmlformats.org/officeDocument/2006/relationships">
+  <p:cSld>
+    <p:spTree>
+      <p:nvGrpSpPr>
+        <p:cNvPr id="1" name=""/>
+        <p:cNvGrpSpPr/>
+        <p:nvPr/>
+      </p:nvGrpSpPr>
+      <p:grpSpPr/>
+      <p:sp>
+        <p:nvSpPr>
+          <p:cNvPr id="2" name="TextBox 1"/>
+          <p:cNvSpPr txBox="1"/>
+          <p:nvPr/>
+        </p:nvSpPr>
+        <p:spPr>
+          <a:xfrm>
+            <a:off x="411480" y="201168"/>
+            <a:ext cx="11368735" cy="914400"/>
+          </a:xfrm>
+          <a:prstGeom prst="rect">
+            <a:avLst/>
+          </a:prstGeom>
+          <a:noFill/>
+        </p:spPr>
+        <p:txBody>
+          <a:bodyPr wrap="square">
+            <a:spAutoFit/>
+          </a:bodyPr>
+          <a:lstStyle/>
+          <a:p>
+            <a:pPr>
+              <a:spcAft>
+                <a:spcPts val="400"/>
+              </a:spcAft>
+            </a:pPr>
+            <a:r>
+              <a:rPr sz="2400" b="1">
+                <a:solidFill>
+                  <a:srgbClr val="1F4E79"/>
+                </a:solidFill>
+                <a:latin typeface="Arial"/>
+              </a:rPr>
+              <a:t>How the lock-in detector works</a:t>
+            </a:r>
+          </a:p>
+          <a:p>
+            <a:pPr>
+              <a:spcAft>
+                <a:spcPts val="0"/>
+              </a:spcAft>
+            </a:pPr>
+            <a:r>
+              <a:rPr sz="1250" b="0">
+                <a:solidFill>
+                  <a:srgbClr val="6E6E6E"/>
+                </a:solidFill>
+                <a:latin typeface="Arial"/>
+              </a:rPr>
+              <a:t>One pixel sorts its photoelectrons into two storage nodes by a square-wave reference at the beat frequency; the node difference IS the lock-in product, formed before any readout — Feng's four-step inside the pixel, integrated over thousands of cycles</a:t>
+            </a:r>
+          </a:p>
+        </p:txBody>
+      </p:sp>
+      <p:sp>
+        <p:nvSpPr>
+          <p:cNvPr id="3" name="Rectangle 2"/>
+          <p:cNvSpPr/>
+          <p:nvPr/>
+        </p:nvSpPr>
+        <p:spPr>
+          <a:xfrm>
+            <a:off x="411480" y="1133856"/>
+            <a:ext cx="11368735" cy="20320"/>
+          </a:xfrm>
+          <a:prstGeom prst="rect">
+            <a:avLst/>
+          </a:prstGeom>
+          <a:solidFill>
+            <a:srgbClr val="B8C6D4"/>
+          </a:solidFill>
+          <a:ln>
+            <a:noFill/>
+          </a:ln>
+          <a:effectLst/>
+        </p:spPr>
+        <p:style>
+          <a:lnRef idx="1">
+            <a:schemeClr val="accent1"/>
+          </a:lnRef>
+          <a:fillRef idx="3">
+            <a:schemeClr val="accent1"/>
+          </a:fillRef>
+          <a:effectRef idx="2">
+            <a:schemeClr val="accent1"/>
+          </a:effectRef>
+          <a:fontRef idx="minor">
+            <a:schemeClr val="lt1"/>
+          </a:fontRef>
+        </p:style>
+        <p:txBody>
+          <a:bodyPr rtlCol="0" anchor="ctr"/>
+          <a:lstStyle/>
+          <a:p>
+            <a:pPr algn="ctr"/>
+          </a:p>
+        </p:txBody>
+      </p:sp>
+      <p:pic>
+        <p:nvPicPr>
+          <p:cNvPr id="4" name="Picture 3" descr="cophi_lid.png"/>
+          <p:cNvPicPr>
+            <a:picLocks noChangeAspect="1"/>
+          </p:cNvPicPr>
+          <p:nvPr/>
+        </p:nvPicPr>
+        <p:blipFill>
+          <a:blip r:embed="rId2"/>
+          <a:stretch>
+            <a:fillRect/>
+          </a:stretch>
+        </p:blipFill>
+        <p:spPr>
+          <a:xfrm>
+            <a:off x="1219047" y="1298448"/>
+            <a:ext cx="9753600" cy="4572000"/>
+          </a:xfrm>
+          <a:prstGeom prst="rect">
+            <a:avLst/>
+          </a:prstGeom>
+        </p:spPr>
+      </p:pic>
+      <p:sp>
+        <p:nvSpPr>
+          <p:cNvPr id="5" name="TextBox 4"/>
+          <p:cNvSpPr txBox="1"/>
+          <p:nvPr/>
+        </p:nvSpPr>
+        <p:spPr>
+          <a:xfrm>
+            <a:off x="411480" y="5870448"/>
+            <a:ext cx="5806440" cy="274320"/>
+          </a:xfrm>
+          <a:prstGeom prst="rect">
+            <a:avLst/>
+          </a:prstGeom>
+          <a:noFill/>
+        </p:spPr>
+        <p:txBody>
+          <a:bodyPr wrap="square">
+            <a:spAutoFit/>
+          </a:bodyPr>
+          <a:lstStyle/>
+          <a:p>
+            <a:pPr>
+              <a:spcAft>
+                <a:spcPts val="600"/>
+              </a:spcAft>
+            </a:pPr>
+            <a:r>
+              <a:rPr sz="1200" b="0">
+                <a:solidFill>
+                  <a:srgbClr val="282828"/>
+                </a:solidFill>
+                <a:latin typeface="Arial"/>
+              </a:rPr>
+              <a:t>•  </a:t>
+            </a:r>
+            <a:r>
+              <a:rPr sz="1200" b="1">
+                <a:solidFill>
+                  <a:srgbClr val="282828"/>
+                </a:solidFill>
+                <a:latin typeface="Arial"/>
+              </a:rPr>
+              <a:t>The reference:</a:t>
+            </a:r>
+            <a:r>
+              <a:rPr sz="1200" b="0">
+                <a:solidFill>
+                  <a:srgbClr val="282828"/>
+                </a:solidFill>
+                <a:latin typeface="Arial"/>
+              </a:rPr>
+              <a:t> a square wave at the beat f_b = |f₁ − f₂| (5 kHz), locked to the AOMs through the Rb clock, fed to the camera's reference input — one clock; software does only atan2(Q, I).</a:t>
+            </a:r>
+          </a:p>
+        </p:txBody>
+      </p:sp>
+      <p:sp>
+        <p:nvSpPr>
+          <p:cNvPr id="6" name="TextBox 5"/>
+          <p:cNvSpPr txBox="1"/>
+          <p:nvPr/>
+        </p:nvSpPr>
+        <p:spPr>
+          <a:xfrm>
+            <a:off x="6400800" y="5870448"/>
+            <a:ext cx="5394960" cy="274320"/>
+          </a:xfrm>
+          <a:prstGeom prst="rect">
+            <a:avLst/>
+          </a:prstGeom>
+          <a:noFill/>
+        </p:spPr>
+        <p:txBody>
+          <a:bodyPr wrap="square">
+            <a:spAutoFit/>
+          </a:bodyPr>
+          <a:lstStyle/>
+          <a:p>
+            <a:pPr>
+              <a:spcAft>
+                <a:spcPts val="600"/>
+              </a:spcAft>
+            </a:pPr>
+            <a:r>
+              <a:rPr sz="1200" b="0">
+                <a:solidFill>
+                  <a:srgbClr val="282828"/>
+                </a:solidFill>
+                <a:latin typeface="Arial"/>
+              </a:rPr>
+              <a:t>•  </a:t>
+            </a:r>
+            <a:r>
+              <a:rPr sz="1200" b="1">
+                <a:solidFill>
+                  <a:srgbClr val="282828"/>
+                </a:solidFill>
+                <a:latin typeface="Arial"/>
+              </a:rPr>
+              <a:t>Against a frame camera:</a:t>
+            </a:r>
+            <a:r>
+              <a:rPr sz="1200" b="0">
+                <a:solidFill>
+                  <a:srgbClr val="282828"/>
+                </a:solidFill>
+                <a:latin typeface="Arial"/>
+              </a:rPr>
+              <a:t> N cycles per sample, not a quarter cycle; the DC cancels in the difference (does it fill the nodes? vendor question 2); the square wave costs ×1.11 in σ (eq. 6).</a:t>
+            </a:r>
+          </a:p>
+        </p:txBody>
+      </p:sp>
+      <p:sp>
+        <p:nvSpPr>
+          <p:cNvPr id="7" name="TextBox 6"/>
+          <p:cNvSpPr txBox="1"/>
+          <p:nvPr/>
+        </p:nvSpPr>
+        <p:spPr>
+          <a:xfrm>
+            <a:off x="6400800" y="6641592"/>
+            <a:ext cx="5394960" cy="274320"/>
+          </a:xfrm>
+          <a:prstGeom prst="rect">
+            <a:avLst/>
+          </a:prstGeom>
+          <a:noFill/>
+        </p:spPr>
+        <p:txBody>
+          <a:bodyPr wrap="square">
+            <a:spAutoFit/>
+          </a:bodyPr>
+          <a:lstStyle/>
+          <a:p>
+            <a:pPr>
+              <a:spcAft>
+                <a:spcPts val="600"/>
+              </a:spcAft>
+            </a:pPr>
+            <a:r>
+              <a:rPr sz="1050" b="0">
+                <a:solidFill>
+                  <a:srgbClr val="6E6E6E"/>
+                </a:solidFill>
+                <a:latin typeface="Arial"/>
+              </a:rPr>
+              <a:t>make_cophi_lid_fig.py; the pixel is CSEM's demodulation pixel (Lange &amp; Seitz 2001), the heliCam's "dual-phase lock-in".</a:t>
+            </a:r>
+          </a:p>
+        </p:txBody>
+      </p:sp>
+    </p:spTree>
+  </p:cSld>
+  <p:clrMapOvr>
+    <a:masterClrMapping/>
+  </p:clrMapOvr>
+</p:sld>
+</file>
+
+<file path=ppt/slides/slide7.xml><?xml version="1.0" encoding="utf-8"?>
 <p:sld xmlns:a="http://schemas.openxmlformats.org/drawingml/2006/main" xmlns:p="http://schemas.openxmlformats.org/presentationml/2006/main" xmlns:r="http://schemas.openxmlformats.org/officeDocument/2006/relationships">
   <p:cSld>
     <p:spTree>
@@ -18502,7 +19107,7 @@
 </p:sld>
 </file>
 
-<file path=ppt/slides/slide7.xml><?xml version="1.0" encoding="utf-8"?>
+<file path=ppt/slides/slide8.xml><?xml version="1.0" encoding="utf-8"?>
 <p:sld xmlns:a="http://schemas.openxmlformats.org/drawingml/2006/main" xmlns:p="http://schemas.openxmlformats.org/presentationml/2006/main" xmlns:r="http://schemas.openxmlformats.org/officeDocument/2006/relationships">
   <p:cSld>
     <p:spTree>
@@ -18962,7 +19567,7 @@
 </p:sld>
 </file>
 
-<file path=ppt/slides/slide8.xml><?xml version="1.0" encoding="utf-8"?>
+<file path=ppt/slides/slide9.xml><?xml version="1.0" encoding="utf-8"?>
 <p:sld xmlns:a="http://schemas.openxmlformats.org/drawingml/2006/main" xmlns:p="http://schemas.openxmlformats.org/presentationml/2006/main" xmlns:r="http://schemas.openxmlformats.org/officeDocument/2006/relationships">
   <p:cSld>
     <p:spTree>
@@ -19236,7 +19841,7 @@
                 </a:solidFill>
                 <a:latin typeface="Arial"/>
               </a:rPr>
-              <a:t>–  the LO collimator's own wavefront, frozen into the null as the IFO freezes its reference; its motion is the LO-drift row (slide 13)</a:t>
+              <a:t>–  the LO collimator's own wavefront, frozen into the null as the IFO freezes its reference; its motion is the LO-drift row (slide 14)</a:t>
             </a:r>
           </a:p>
           <a:p>
@@ -19487,316 +20092,6 @@
                 <a:latin typeface="Arial"/>
               </a:rPr>
               <a:t>Stage bench (runs/bench_{lens,oap}; the layouts = bench_{lens,oap}_vlayout.png, the engine's own renders), gate tCophiBench 9/9 (registration, poke 1.001 converged, LO tilt, no-fringe refused by name, dark camera refused).</a:t>
-            </a:r>
-          </a:p>
-        </p:txBody>
-      </p:sp>
-    </p:spTree>
-  </p:cSld>
-  <p:clrMapOvr>
-    <a:masterClrMapping/>
-  </p:clrMapOvr>
-</p:sld>
-</file>
-
-<file path=ppt/slides/slide9.xml><?xml version="1.0" encoding="utf-8"?>
-<p:sld xmlns:a="http://schemas.openxmlformats.org/drawingml/2006/main" xmlns:p="http://schemas.openxmlformats.org/presentationml/2006/main" xmlns:r="http://schemas.openxmlformats.org/officeDocument/2006/relationships">
-  <p:cSld>
-    <p:spTree>
-      <p:nvGrpSpPr>
-        <p:cNvPr id="1" name=""/>
-        <p:cNvGrpSpPr/>
-        <p:nvPr/>
-      </p:nvGrpSpPr>
-      <p:grpSpPr/>
-      <p:sp>
-        <p:nvSpPr>
-          <p:cNvPr id="2" name="TextBox 1"/>
-          <p:cNvSpPr txBox="1"/>
-          <p:nvPr/>
-        </p:nvSpPr>
-        <p:spPr>
-          <a:xfrm>
-            <a:off x="411480" y="201168"/>
-            <a:ext cx="11368735" cy="914400"/>
-          </a:xfrm>
-          <a:prstGeom prst="rect">
-            <a:avLst/>
-          </a:prstGeom>
-          <a:noFill/>
-        </p:spPr>
-        <p:txBody>
-          <a:bodyPr wrap="square">
-            <a:spAutoFit/>
-          </a:bodyPr>
-          <a:lstStyle/>
-          <a:p>
-            <a:pPr>
-              <a:spcAft>
-                <a:spcPts val="400"/>
-              </a:spcAft>
-            </a:pPr>
-            <a:r>
-              <a:rPr sz="2400" b="1">
-                <a:solidFill>
-                  <a:srgbClr val="1F4E79"/>
-                </a:solidFill>
-                <a:latin typeface="Arial"/>
-              </a:rPr>
-              <a:t>Reading the 30 nm working surface, station by station</a:t>
-            </a:r>
-          </a:p>
-          <a:p>
-            <a:pPr>
-              <a:spcAft>
-                <a:spcPts val="0"/>
-              </a:spcAft>
-            </a:pPr>
-            <a:r>
-              <a:rPr sz="1250" b="0">
-                <a:solidFill>
-                  <a:srgbClr val="6E6E6E"/>
-                </a:solidFill>
-                <a:latin typeface="Arial"/>
-              </a:rPr>
-              <a:t>The same mirror command through the heterodyne train on the mirror rig, plain splitter; the last column is the raw map against the engine's own field</a:t>
-            </a:r>
-          </a:p>
-        </p:txBody>
-      </p:sp>
-      <p:sp>
-        <p:nvSpPr>
-          <p:cNvPr id="3" name="Rectangle 2"/>
-          <p:cNvSpPr/>
-          <p:nvPr/>
-        </p:nvSpPr>
-        <p:spPr>
-          <a:xfrm>
-            <a:off x="411480" y="1133856"/>
-            <a:ext cx="11368735" cy="20320"/>
-          </a:xfrm>
-          <a:prstGeom prst="rect">
-            <a:avLst/>
-          </a:prstGeom>
-          <a:solidFill>
-            <a:srgbClr val="B8C6D4"/>
-          </a:solidFill>
-          <a:ln>
-            <a:noFill/>
-          </a:ln>
-          <a:effectLst/>
-        </p:spPr>
-        <p:style>
-          <a:lnRef idx="1">
-            <a:schemeClr val="accent1"/>
-          </a:lnRef>
-          <a:fillRef idx="3">
-            <a:schemeClr val="accent1"/>
-          </a:fillRef>
-          <a:effectRef idx="2">
-            <a:schemeClr val="accent1"/>
-          </a:effectRef>
-          <a:fontRef idx="minor">
-            <a:schemeClr val="lt1"/>
-          </a:fontRef>
-        </p:style>
-        <p:txBody>
-          <a:bodyPr rtlCol="0" anchor="ctr"/>
-          <a:lstStyle/>
-          <a:p>
-            <a:pPr algn="ctr"/>
-          </a:p>
-        </p:txBody>
-      </p:sp>
-      <p:pic>
-        <p:nvPicPr>
-          <p:cNvPr id="4" name="Picture 3" descr="cophi_stations_oap.png"/>
-          <p:cNvPicPr>
-            <a:picLocks noChangeAspect="1"/>
-          </p:cNvPicPr>
-          <p:nvPr/>
-        </p:nvPicPr>
-        <p:blipFill>
-          <a:blip r:embed="rId2"/>
-          <a:stretch>
-            <a:fillRect/>
-          </a:stretch>
-        </p:blipFill>
-        <p:spPr>
-          <a:xfrm>
-            <a:off x="1293571" y="1298448"/>
-            <a:ext cx="9604553" cy="2897632"/>
-          </a:xfrm>
-          <a:prstGeom prst="rect">
-            <a:avLst/>
-          </a:prstGeom>
-        </p:spPr>
-      </p:pic>
-      <p:sp>
-        <p:nvSpPr>
-          <p:cNvPr id="5" name="TextBox 4"/>
-          <p:cNvSpPr txBox="1"/>
-          <p:nvPr/>
-        </p:nvSpPr>
-        <p:spPr>
-          <a:xfrm>
-            <a:off x="411480" y="4214367"/>
-            <a:ext cx="11368735" cy="394208"/>
-          </a:xfrm>
-          <a:prstGeom prst="rect">
-            <a:avLst/>
-          </a:prstGeom>
-          <a:noFill/>
-        </p:spPr>
-        <p:txBody>
-          <a:bodyPr wrap="square">
-            <a:spAutoFit/>
-          </a:bodyPr>
-          <a:lstStyle/>
-          <a:p>
-            <a:pPr algn="ctr">
-              <a:spcAft>
-                <a:spcPts val="0"/>
-              </a:spcAft>
-            </a:pPr>
-            <a:r>
-              <a:rPr sz="1000" b="0">
-                <a:solidFill>
-                  <a:srgbClr val="6E6E6E"/>
-                </a:solidFill>
-                <a:latin typeface="Arial"/>
-              </a:rPr>
-              <a:t>COPHI, mirror rig: the command; the test arm and the LO at the camera; two of the four buckets; the recovered surface, 31.9 nm rms; recovered minus the engine's field, 0.31 pm rms; the flat DM reads 0</a:t>
-            </a:r>
-          </a:p>
-        </p:txBody>
-      </p:sp>
-      <p:sp>
-        <p:nvSpPr>
-          <p:cNvPr id="6" name="TextBox 5"/>
-          <p:cNvSpPr txBox="1"/>
-          <p:nvPr/>
-        </p:nvSpPr>
-        <p:spPr>
-          <a:xfrm>
-            <a:off x="411480" y="4645151"/>
-            <a:ext cx="11368735" cy="274320"/>
-          </a:xfrm>
-          <a:prstGeom prst="rect">
-            <a:avLst/>
-          </a:prstGeom>
-          <a:noFill/>
-        </p:spPr>
-        <p:txBody>
-          <a:bodyPr wrap="square">
-            <a:spAutoFit/>
-          </a:bodyPr>
-          <a:lstStyle/>
-          <a:p>
-            <a:pPr>
-              <a:spcAft>
-                <a:spcPts val="600"/>
-              </a:spcAft>
-            </a:pPr>
-            <a:r>
-              <a:rPr sz="1500" b="0">
-                <a:solidFill>
-                  <a:srgbClr val="282828"/>
-                </a:solidFill>
-                <a:latin typeface="Arial"/>
-              </a:rPr>
-              <a:t>•  </a:t>
-            </a:r>
-            <a:r>
-              <a:rPr sz="1500" b="1">
-                <a:solidFill>
-                  <a:srgbClr val="282828"/>
-                </a:solidFill>
-                <a:latin typeface="Arial"/>
-              </a:rPr>
-              <a:t>Resolution shown:</a:t>
-            </a:r>
-            <a:r>
-              <a:rPr sz="1500" b="0">
-                <a:solidFill>
-                  <a:srgbClr val="282828"/>
-                </a:solidFill>
-                <a:latin typeface="Arial"/>
-              </a:rPr>
-              <a:t> camera grid 1024 × 1024, pupil 315 px across — </a:t>
-            </a:r>
-            <a:r>
-              <a:rPr sz="1500" b="1">
-                <a:solidFill>
-                  <a:srgbClr val="282828"/>
-                </a:solidFill>
-                <a:latin typeface="Arial"/>
-              </a:rPr>
-              <a:t>3.3 pixels per actuator across, ~11 per actuator in area</a:t>
-            </a:r>
-            <a:r>
-              <a:rPr sz="1500" b="0">
-                <a:solidFill>
-                  <a:srgbClr val="282828"/>
-                </a:solidFill>
-                <a:latin typeface="Arial"/>
-              </a:rPr>
-              <a:t> (6948 lit actuators on ~77,900 pupil pixels).</a:t>
-            </a:r>
-          </a:p>
-          <a:p>
-            <a:pPr marL="594360" indent="-137160">
-              <a:spcAft>
-                <a:spcPts val="500"/>
-              </a:spcAft>
-            </a:pPr>
-            <a:r>
-              <a:rPr sz="1300" b="0">
-                <a:solidFill>
-                  <a:srgbClr val="6E6E6E"/>
-                </a:solidFill>
-                <a:latin typeface="Arial"/>
-              </a:rPr>
-              <a:t>–  every real camera on the table samples finer (5–21 px per actuator, slide 10); what resolution buys and costs is slide 18</a:t>
-            </a:r>
-          </a:p>
-        </p:txBody>
-      </p:sp>
-      <p:sp>
-        <p:nvSpPr>
-          <p:cNvPr id="7" name="TextBox 6"/>
-          <p:cNvSpPr txBox="1"/>
-          <p:nvPr/>
-        </p:nvSpPr>
-        <p:spPr>
-          <a:xfrm>
-            <a:off x="411480" y="5659373"/>
-            <a:ext cx="11368735" cy="274320"/>
-          </a:xfrm>
-          <a:prstGeom prst="rect">
-            <a:avLst/>
-          </a:prstGeom>
-          <a:noFill/>
-        </p:spPr>
-        <p:txBody>
-          <a:bodyPr wrap="square">
-            <a:spAutoFit/>
-          </a:bodyPr>
-          <a:lstStyle/>
-          <a:p>
-            <a:pPr>
-              <a:spcAft>
-                <a:spcPts val="600"/>
-              </a:spcAft>
-            </a:pPr>
-            <a:r>
-              <a:rPr sz="1050" b="0">
-                <a:solidFill>
-                  <a:srgbClr val="6E6E6E"/>
-                </a:solidFill>
-                <a:latin typeface="Arial"/>
-              </a:rPr>
-              <a:t>Stage figs (runs/figs_oap_plain), noise-free; the deck's station-figure format (row 1 flat DM, row 2 the working surface).</a:t>
             </a:r>
           </a:p>
         </p:txBody>

--- a/demo_session/deck_cophi_baseline.pptx
+++ b/demo_session/deck_cophi_baseline.pptx
@@ -18661,8 +18661,8 @@
         </p:blipFill>
         <p:spPr>
           <a:xfrm>
-            <a:off x="1219047" y="1298448"/>
-            <a:ext cx="9753600" cy="4572000"/>
+            <a:off x="978891" y="1298448"/>
+            <a:ext cx="10233911" cy="4572000"/>
           </a:xfrm>
           <a:prstGeom prst="rect">
             <a:avLst/>
@@ -18972,7 +18972,7 @@
         </p:nvSpPr>
         <p:spPr>
           <a:xfrm>
-            <a:off x="4251960" y="1234440"/>
+            <a:off x="411480" y="6720840"/>
             <a:ext cx="5806440" cy="274320"/>
           </a:xfrm>
           <a:prstGeom prst="rect">
@@ -19016,7 +19016,7 @@
                 </a:solidFill>
                 <a:latin typeface="Arial"/>
               </a:rPr>
-              <a:t> synthesizer 2 at 80 MHz + 5 kHz; the ×4 / 30 Hz trigger chain becomes the 5 kHz reference; the camera is the lock-in device; the processing is atan2(Q, I) per frame, decimated to the loop rate.  Fiber, LO and hold loop are unchanged.</a:t>
+              <a:t> synthesizer 2 at 80 MHz + 5 kHz; the ×4 / 30 Hz trigger chain becomes the 5 kHz reference, fed to the pixels' transfer gates; the camera is drawn as the chain inside one pixel (slide 6: photodiode → gates → nodes → A − B, C − D) in series with the frame grabber; the processing is atan2(Q, I) per sample, decimated to the loop rate.  Fiber, LO and hold loop are unchanged.</a:t>
             </a:r>
           </a:p>
         </p:txBody>
@@ -19068,8 +19068,8 @@
         </p:nvSpPr>
         <p:spPr>
           <a:xfrm>
-            <a:off x="6172200" y="6611112"/>
-            <a:ext cx="5650992" cy="274320"/>
+            <a:off x="6400800" y="2660904"/>
+            <a:ext cx="5394960" cy="274320"/>
           </a:xfrm>
           <a:prstGeom prst="rect">
             <a:avLst/>
@@ -19094,7 +19094,7 @@
                 </a:solidFill>
                 <a:latin typeface="Arial"/>
               </a:rPr>
-              <a:t>make_cophi_block_fig.py (lock-in variant); the well-free device is the dashed alternative.</a:t>
+              <a:t>make_cophi_block_fig.py (lock-in variant); the pixel chain's inputs and outputs are slide 6's.</a:t>
             </a:r>
           </a:p>
         </p:txBody>

--- a/demo_session/deck_cophi_baseline.pptx
+++ b/demo_session/deck_cophi_baseline.pptx
@@ -17753,22 +17753,6 @@
             </a:r>
           </a:p>
           <a:p>
-            <a:pPr marL="594360" indent="-137160">
-              <a:spcAft>
-                <a:spcPts val="500"/>
-              </a:spcAft>
-            </a:pPr>
-            <a:r>
-              <a:rPr sz="1250" b="0">
-                <a:solidFill>
-                  <a:srgbClr val="6E6E6E"/>
-                </a:solidFill>
-                <a:latin typeface="Arial"/>
-              </a:rPr>
-              <a:t>–  a real lock-in pixel (CSEM lineage, heliCam) steers charge between two taps by a square-wave reference — Feng's four-step inside the pixel; the bucket penalty is ×1.11 in σ, carried in every lock-in row</a:t>
-            </a:r>
-          </a:p>
-          <a:p>
             <a:pPr marL="0" indent="0">
               <a:spcAft>
                 <a:spcPts val="600"/>
@@ -17830,7 +17814,7 @@
         </p:nvGraphicFramePr>
         <p:xfrm>
           <a:off x="6400800" y="1298448"/>
-          <a:ext cx="5394959" cy="4160520"/>
+          <a:ext cx="5394958" cy="3817620"/>
         </p:xfrm>
         <a:graphic>
           <a:graphicData uri="http://schemas.openxmlformats.org/drawingml/2006/table">
@@ -17839,11 +17823,11 @@
                 <a:tableStyleId>{5C22544A-7EE6-4342-B048-85BDC9FD1C3A}</a:tableStyleId>
               </a:tblPr>
               <a:tblGrid>
-                <a:gridCol w="1363561"/>
-                <a:gridCol w="612614"/>
-                <a:gridCol w="3418784"/>
+                <a:gridCol w="1165745"/>
+                <a:gridCol w="840420"/>
+                <a:gridCol w="3388793"/>
               </a:tblGrid>
-              <a:tr h="777240">
+              <a:tr h="605790">
                 <a:tc>
                   <a:txBody>
                     <a:bodyPr wrap="square"/>
@@ -18047,7 +18031,7 @@
                   </a:tcPr>
                 </a:tc>
               </a:tr>
-              <a:tr h="262890">
+              <a:tr h="434340">
                 <a:tc>
                   <a:txBody>
                     <a:bodyPr wrap="square"/>
@@ -18172,7 +18156,7 @@
                           </a:solidFill>
                           <a:latin typeface="Arial"/>
                         </a:rPr>
-                        <a:t>57.9 / 61.1 pm per 1 ms I/Q sample, mirror / lens (63 / 66 at an assumed 100 e⁻ read)</a:t>
+                        <a:t>57.9 / 61.1 pm per 1 ms sample, mirror / lens (63 / 66 at 100 e⁻ read)</a:t>
                       </a:r>
                     </a:p>
                   </a:txBody>
@@ -18183,7 +18167,7 @@
                   </a:tcPr>
                 </a:tc>
               </a:tr>
-              <a:tr h="777240">
+              <a:tr h="605790">
                 <a:tc>
                   <a:txBody>
                     <a:bodyPr wrap="square"/>
@@ -18240,7 +18224,7 @@
                           </a:solidFill>
                           <a:latin typeface="Arial"/>
                         </a:rPr>
-                        <a:t>3.35 / 3.73 (read 0, mirror / lens; 4.0 / 4.4 at read 100 assumed); ×1.11 in σ (×1.23 in time) for the pixel's two-tap square-wave demodulation — well-capped at the I/Q rate</a:t>
+                        <a:t>3.35 / 3.73 (mirror / lens; 4.0 / 4.4 at 100 e⁻ read); ×1.23 in time for the two-tap square wave; well-capped at the I/Q rate</a:t>
                       </a:r>
                     </a:p>
                   </a:txBody>
@@ -18251,7 +18235,7 @@
                   </a:tcPr>
                 </a:tc>
               </a:tr>
-              <a:tr h="777240">
+              <a:tr h="605790">
                 <a:tc>
                   <a:txBody>
                     <a:bodyPr wrap="square"/>
@@ -18264,7 +18248,7 @@
                           </a:solidFill>
                           <a:latin typeface="Arial"/>
                         </a:rPr>
-                        <a:t>if well-free: 10⁹ / 10¹⁰ e⁻/s per element (the sheet's own 2.5 × 10⁹)</a:t>
+                        <a:t>if well-free: 10⁹ / 10¹⁰ e⁻/s per element</a:t>
                       </a:r>
                     </a:p>
                   </a:txBody>
@@ -18308,7 +18292,7 @@
                           </a:solidFill>
                           <a:latin typeface="Arial"/>
                         </a:rPr>
-                        <a:t>0.84 / 0.084 s (0.34 s at 2.5 × 10⁹) — analytic, one store per sample</a:t>
+                        <a:t>0.84 / 0.084 s (0.34 at 2.5 × 10⁹); analytic</a:t>
                       </a:r>
                     </a:p>
                   </a:txBody>
@@ -18655,14 +18639,15 @@
         </p:nvPicPr>
         <p:blipFill>
           <a:blip r:embed="rId2"/>
+          <a:srcRect l="840" t="3790" b="4730"/>
           <a:stretch>
             <a:fillRect/>
           </a:stretch>
         </p:blipFill>
         <p:spPr>
           <a:xfrm>
-            <a:off x="978891" y="1298448"/>
-            <a:ext cx="10233911" cy="4572000"/>
+            <a:off x="411480" y="1188720"/>
+            <a:ext cx="11365992" cy="4681728"/>
           </a:xfrm>
           <a:prstGeom prst="rect">
             <a:avLst/>
@@ -18791,8 +18776,8 @@
         </p:nvSpPr>
         <p:spPr>
           <a:xfrm>
-            <a:off x="6400800" y="6641592"/>
-            <a:ext cx="5394960" cy="274320"/>
+            <a:off x="4343400" y="6565392"/>
+            <a:ext cx="7452360" cy="274320"/>
           </a:xfrm>
           <a:prstGeom prst="rect">
             <a:avLst/>
@@ -18972,7 +18957,7 @@
         </p:nvSpPr>
         <p:spPr>
           <a:xfrm>
-            <a:off x="411480" y="6720840"/>
+            <a:off x="4251960" y="1234440"/>
             <a:ext cx="5806440" cy="274320"/>
           </a:xfrm>
           <a:prstGeom prst="rect">
@@ -19068,8 +19053,8 @@
         </p:nvSpPr>
         <p:spPr>
           <a:xfrm>
-            <a:off x="6400800" y="2660904"/>
-            <a:ext cx="5394960" cy="274320"/>
+            <a:off x="6172200" y="6611112"/>
+            <a:ext cx="5650992" cy="274320"/>
           </a:xfrm>
           <a:prstGeom prst="rect">
             <a:avLst/>

--- a/demo_session/deck_cophi_baseline.pptx
+++ b/demo_session/deck_cophi_baseline.pptx
@@ -11367,8 +11367,8 @@
         </p:nvSpPr>
         <p:spPr>
           <a:xfrm>
-            <a:off x="6400800" y="6600317"/>
-            <a:ext cx="5394960" cy="274320"/>
+            <a:off x="457200" y="6400800"/>
+            <a:ext cx="11338560" cy="274320"/>
           </a:xfrm>
           <a:prstGeom prst="rect">
             <a:avLst/>
@@ -18459,7 +18459,7 @@
                 </a:solidFill>
                 <a:latin typeface="Arial"/>
               </a:rPr>
-              <a:t>The vendor question:</a:t>
+              <a:t>Questions for the vendor:</a:t>
             </a:r>
             <a:r>
               <a:rPr sz="1400" b="0">
@@ -18468,7 +18468,7 @@
                 </a:solidFill>
                 <a:latin typeface="Arial"/>
               </a:rPr>
-              <a:t> phase noise per pixel vs flux at t_c = 100 ms, and whether the full well bounds each internal 1 MSa/s sample or the 5.6 kSa/s output — for Heliotis, through Dave.</a:t>
+              <a:t> phase noise per pixel vs flux at t_c = 100 ms, and whether the full well bounds each internal 1 MSa/s sample or the 5.6 kSa/s output</a:t>
             </a:r>
           </a:p>
         </p:txBody>
@@ -18957,7 +18957,7 @@
         </p:nvSpPr>
         <p:spPr>
           <a:xfrm>
-            <a:off x="4251960" y="1234440"/>
+            <a:off x="3200400" y="1133856"/>
             <a:ext cx="5806440" cy="274320"/>
           </a:xfrm>
           <a:prstGeom prst="rect">
@@ -19014,7 +19014,7 @@
         </p:nvSpPr>
         <p:spPr>
           <a:xfrm>
-            <a:off x="4206240" y="2286000"/>
+            <a:off x="3200400" y="2240280"/>
             <a:ext cx="6080760" cy="274320"/>
           </a:xfrm>
           <a:prstGeom prst="rect">
@@ -19217,8 +19217,8 @@
         </p:blipFill>
         <p:spPr>
           <a:xfrm>
-            <a:off x="761847" y="1298448"/>
-            <a:ext cx="10668000" cy="3200400"/>
+            <a:off x="301752" y="1152144"/>
+            <a:ext cx="11585448" cy="3648456"/>
           </a:xfrm>
           <a:prstGeom prst="rect">
             <a:avLst/>
@@ -19233,7 +19233,7 @@
         </p:nvSpPr>
         <p:spPr>
           <a:xfrm>
-            <a:off x="411480" y="4498848"/>
+            <a:off x="411480" y="4572000"/>
             <a:ext cx="5806440" cy="274320"/>
           </a:xfrm>
           <a:prstGeom prst="rect">
@@ -19374,7 +19374,7 @@
         </p:nvSpPr>
         <p:spPr>
           <a:xfrm>
-            <a:off x="6400800" y="4498848"/>
+            <a:off x="6400800" y="4572000"/>
             <a:ext cx="5394960" cy="274320"/>
           </a:xfrm>
           <a:prstGeom prst="rect">
@@ -19513,7 +19513,7 @@
         </p:nvSpPr>
         <p:spPr>
           <a:xfrm>
-            <a:off x="6400800" y="7229094"/>
+            <a:off x="6400800" y="7302246"/>
             <a:ext cx="5394960" cy="274320"/>
           </a:xfrm>
           <a:prstGeom prst="rect">

--- a/demo_session/deck_cophi_baseline.pptx
+++ b/demo_session/deck_cophi_baseline.pptx
@@ -18957,7 +18957,7 @@
         </p:nvSpPr>
         <p:spPr>
           <a:xfrm>
-            <a:off x="3200400" y="1133856"/>
+            <a:off x="411480" y="6720840"/>
             <a:ext cx="5806440" cy="274320"/>
           </a:xfrm>
           <a:prstGeom prst="rect">
@@ -19001,7 +19001,7 @@
                 </a:solidFill>
                 <a:latin typeface="Arial"/>
               </a:rPr>
-              <a:t> synthesizer 2 at 80 MHz + 5 kHz; the ×4 / 30 Hz trigger chain becomes the 5 kHz reference, fed to the pixels' transfer gates; the camera is drawn as the chain inside one pixel (slide 6: photodiode → gates → nodes → A − B, C − D) in series with the frame grabber; the processing is atan2(Q, I) per sample, decimated to the loop rate.  Fiber, LO and hold loop are unchanged.</a:t>
+              <a:t> synthesizer 2 at 80 MHz + 5 kHz; the ×4 / 30 Hz trigger chain becomes the 5 kHz reference, fed to the pixels' transfer gates; the camera is drawn as the chain inside one pixel (slide 6: photodiode → gates → nodes → A − B, C − D → the sensor's own ADCs, 2 × 10 bit per pixel) so only digital I/Q leaves the camera, into a GigE receiver; the processing is atan2(Q, I) per sample, decimated to the loop rate.  Fiber, LO and hold loop are unchanged.</a:t>
             </a:r>
           </a:p>
         </p:txBody>

--- a/demo_session/deck_cophi_baseline.pptx
+++ b/demo_session/deck_cophi_baseline.pptx
@@ -5822,7 +5822,7 @@
         </p:nvSpPr>
         <p:spPr>
           <a:xfrm>
-            <a:off x="411480" y="4135374"/>
+            <a:off x="411480" y="5257800"/>
             <a:ext cx="11368735" cy="274320"/>
           </a:xfrm>
           <a:prstGeom prst="rect">
@@ -5842,7 +5842,7 @@
               </a:spcAft>
             </a:pPr>
             <a:r>
-              <a:rPr sz="1500" b="0">
+              <a:rPr sz="1200" b="0">
                 <a:solidFill>
                   <a:srgbClr val="282828"/>
                 </a:solidFill>
@@ -5851,7 +5851,7 @@
               <a:t>•  </a:t>
             </a:r>
             <a:r>
-              <a:rPr sz="1500" b="1">
+              <a:rPr sz="1200" b="1">
                 <a:solidFill>
                   <a:srgbClr val="282828"/>
                 </a:solidFill>
@@ -5860,7 +5860,7 @@
               <a:t>The one-step rows sit 0.5 % low for HET on both rigs — the estimator, not the reading:</a:t>
             </a:r>
             <a:r>
-              <a:rPr sz="1500" b="0">
+              <a:rPr sz="1200" b="0">
                 <a:solidFill>
                   <a:srgbClr val="282828"/>
                 </a:solidFill>
@@ -5876,7 +5876,7 @@
               </a:spcAft>
             </a:pPr>
             <a:r>
-              <a:rPr sz="1500" b="0">
+              <a:rPr sz="1200" b="0">
                 <a:solidFill>
                   <a:srgbClr val="282828"/>
                 </a:solidFill>
@@ -5885,7 +5885,7 @@
               <a:t>•  </a:t>
             </a:r>
             <a:r>
-              <a:rPr sz="1500" b="1">
+              <a:rPr sz="1200" b="1">
                 <a:solidFill>
                   <a:srgbClr val="282828"/>
                 </a:solidFill>
@@ -5894,7 +5894,7 @@
               <a:t>Driven to convergence (the servo use), HET reads exactly on the mirror rig, and the IFO shows its polarization gain in the open:</a:t>
             </a:r>
             <a:r>
-              <a:rPr sz="1500" b="0">
+              <a:rPr sz="1200" b="0">
                 <a:solidFill>
                   <a:srgbClr val="282828"/>
                 </a:solidFill>
@@ -5913,7 +5913,7 @@
         </p:nvSpPr>
         <p:spPr>
           <a:xfrm>
-            <a:off x="411480" y="5938266"/>
+            <a:off x="411480" y="6565392"/>
             <a:ext cx="11368735" cy="274320"/>
           </a:xfrm>
           <a:prstGeom prst="rect">
@@ -8607,8 +8607,8 @@
         </p:blipFill>
         <p:spPr>
           <a:xfrm>
-            <a:off x="731520" y="1179576"/>
-            <a:ext cx="9098280" cy="5623560"/>
+            <a:off x="731520" y="2286000"/>
+            <a:ext cx="10972800" cy="4389120"/>
           </a:xfrm>
           <a:prstGeom prst="rect">
             <a:avLst/>
@@ -8623,8 +8623,8 @@
         </p:nvSpPr>
         <p:spPr>
           <a:xfrm>
-            <a:off x="3657600" y="1152144"/>
-            <a:ext cx="8229600" cy="274320"/>
+            <a:off x="411480" y="1115568"/>
+            <a:ext cx="11338560" cy="274320"/>
           </a:xfrm>
           <a:prstGeom prst="rect">
             <a:avLst/>
@@ -8643,7 +8643,7 @@
               </a:spcAft>
             </a:pPr>
             <a:r>
-              <a:rPr sz="1200" b="0">
+              <a:rPr sz="1500" b="0">
                 <a:solidFill>
                   <a:srgbClr val="282828"/>
                 </a:solidFill>
@@ -8652,7 +8652,7 @@
               <a:t>•  </a:t>
             </a:r>
             <a:r>
-              <a:rPr sz="1200" b="1">
+              <a:rPr sz="1500" b="1">
                 <a:solidFill>
                   <a:srgbClr val="282828"/>
                 </a:solidFill>
@@ -8661,7 +8661,7 @@
               <a:t>Two colors, one camera, one 8-frame set:</a:t>
             </a:r>
             <a:r>
-              <a:rPr sz="1200" b="0">
+              <a:rPr sz="1500" b="0">
                 <a:solidFill>
                   <a:srgbClr val="282828"/>
                 </a:solidFill>
@@ -8680,7 +8680,7 @@
         </p:nvSpPr>
         <p:spPr>
           <a:xfrm>
-            <a:off x="5257800" y="2468880"/>
+            <a:off x="411480" y="1828800"/>
             <a:ext cx="5852160" cy="274320"/>
           </a:xfrm>
           <a:prstGeom prst="rect">
@@ -8719,8 +8719,8 @@
         </p:nvSpPr>
         <p:spPr>
           <a:xfrm>
-            <a:off x="4572000" y="1828800"/>
-            <a:ext cx="7315200" cy="274320"/>
+            <a:off x="6400800" y="1828800"/>
+            <a:ext cx="5394960" cy="274320"/>
           </a:xfrm>
           <a:prstGeom prst="rect">
             <a:avLst/>
@@ -16344,7 +16344,7 @@
         </p:nvSpPr>
         <p:spPr>
           <a:xfrm>
-            <a:off x="3429000" y="1426464"/>
+            <a:off x="5486400" y="1371600"/>
             <a:ext cx="5852160" cy="274320"/>
           </a:xfrm>
           <a:prstGeom prst="rect">
@@ -16383,8 +16383,8 @@
         </p:nvSpPr>
         <p:spPr>
           <a:xfrm>
-            <a:off x="6400800" y="1999488"/>
-            <a:ext cx="5394960" cy="274320"/>
+            <a:off x="6172200" y="2103120"/>
+            <a:ext cx="4343400" cy="274320"/>
           </a:xfrm>
           <a:prstGeom prst="rect">
             <a:avLst/>
@@ -18957,8 +18957,8 @@
         </p:nvSpPr>
         <p:spPr>
           <a:xfrm>
-            <a:off x="411480" y="6720840"/>
-            <a:ext cx="5806440" cy="274320"/>
+            <a:off x="5760720" y="1115568"/>
+            <a:ext cx="6035040" cy="274320"/>
           </a:xfrm>
           <a:prstGeom prst="rect">
             <a:avLst/>
@@ -19001,7 +19001,7 @@
                 </a:solidFill>
                 <a:latin typeface="Arial"/>
               </a:rPr>
-              <a:t> synthesizer 2 at 80 MHz + 5 kHz; the ×4 / 30 Hz trigger chain becomes the 5 kHz reference, fed to the pixels' transfer gates; the camera is drawn as the chain inside one pixel (slide 6: photodiode → gates → nodes → A − B, C − D → the sensor's own ADCs, 2 × 10 bit per pixel) so only digital I/Q leaves the camera, into a GigE receiver; the processing is atan2(Q, I) per sample, decimated to the loop rate.  Fiber, LO and hold loop are unchanged.</a:t>
+              <a:t> synthesizer 2 at 80 MHz + 5 kHz; the trigger chain becomes the 5 kHz reference to the pixels' gates; the camera is one pixel's chain (slide 6) ending in the sensor's ADCs — digital I/Q out to a GigE receiver; atan2(Q, I) per sample.  Fiber, LO, loop unchanged.</a:t>
             </a:r>
           </a:p>
         </p:txBody>
@@ -19014,8 +19014,8 @@
         </p:nvSpPr>
         <p:spPr>
           <a:xfrm>
-            <a:off x="3200400" y="2240280"/>
-            <a:ext cx="6080760" cy="274320"/>
+            <a:off x="5760720" y="2103120"/>
+            <a:ext cx="6035040" cy="274320"/>
           </a:xfrm>
           <a:prstGeom prst="rect">
             <a:avLst/>

--- a/demo_session/deck_cophi_baseline.pptx
+++ b/demo_session/deck_cophi_baseline.pptx
@@ -18468,7 +18468,7 @@
                 </a:solidFill>
                 <a:latin typeface="Arial"/>
               </a:rPr>
-              <a:t> phase noise per pixel vs flux at t_c = 100 ms, and whether the full well bounds each internal 1 MSa/s sample or the 5.6 kSa/s output</a:t>
+              <a:t> do the nodes hold the full DC before A − B is formed, or only the difference (slide 6)? is the 1 MSa/s internal sampling an analog accumulation read once per output sample? phase noise per pixel vs flux at t_c = 100 ms</a:t>
             </a:r>
           </a:p>
         </p:txBody>
@@ -18647,7 +18647,7 @@
         <p:spPr>
           <a:xfrm>
             <a:off x="411480" y="1188720"/>
-            <a:ext cx="11365992" cy="4681728"/>
+            <a:ext cx="11365992" cy="3931920"/>
           </a:xfrm>
           <a:prstGeom prst="rect">
             <a:avLst/>
@@ -18662,7 +18662,7 @@
         </p:nvSpPr>
         <p:spPr>
           <a:xfrm>
-            <a:off x="411480" y="5870448"/>
+            <a:off x="411480" y="5120640"/>
             <a:ext cx="5806440" cy="274320"/>
           </a:xfrm>
           <a:prstGeom prst="rect">
@@ -18719,7 +18719,7 @@
         </p:nvSpPr>
         <p:spPr>
           <a:xfrm>
-            <a:off x="6400800" y="5870448"/>
+            <a:off x="6400800" y="5120640"/>
             <a:ext cx="5394960" cy="274320"/>
           </a:xfrm>
           <a:prstGeom prst="rect">
@@ -18763,7 +18763,39 @@
                 </a:solidFill>
                 <a:latin typeface="Arial"/>
               </a:rPr>
-              <a:t> N cycles per sample, not a quarter cycle; the DC cancels in the difference (does it fill the nodes? vendor question 2); the square wave costs ×1.11 in σ (eq. 6).</a:t>
+              <a:t> N cycles per sample, not a quarter cycle; the square wave costs ×1.11 in σ (eq. 6).</a:t>
+            </a:r>
+          </a:p>
+          <a:p>
+            <a:pPr marL="594360" indent="-137160">
+              <a:spcAft>
+                <a:spcPts val="500"/>
+              </a:spcAft>
+            </a:pPr>
+            <a:r>
+              <a:rPr sz="1050" b="0">
+                <a:solidFill>
+                  <a:srgbClr val="6E6E6E"/>
+                </a:solidFill>
+                <a:latin typeface="Arial"/>
+              </a:rPr>
+              <a:t>–  read noise is paid once per N-cycle sample, not per bucket: 1/N in variance per photon; shot noise unchanged (every photoelectron counts, stored or drained)</a:t>
+            </a:r>
+          </a:p>
+          <a:p>
+            <a:pPr marL="594360" indent="-137160">
+              <a:spcAft>
+                <a:spcPts val="500"/>
+              </a:spcAft>
+            </a:pPr>
+            <a:r>
+              <a:rPr sz="1050" b="0">
+                <a:solidFill>
+                  <a:srgbClr val="6E6E6E"/>
+                </a:solidFill>
+                <a:latin typeface="Arial"/>
+              </a:rPr>
+              <a:t>–  the vendor question: must the nodes hold the full DC before A − B is formed (the well caps photons per sample — our numbers), or is the common part drained so they hold only the difference (~10× more photons)?</a:t>
             </a:r>
           </a:p>
         </p:txBody>
@@ -18776,7 +18808,7 @@
         </p:nvSpPr>
         <p:spPr>
           <a:xfrm>
-            <a:off x="4343400" y="6565392"/>
+            <a:off x="4343400" y="6601968"/>
             <a:ext cx="7452360" cy="274320"/>
           </a:xfrm>
           <a:prstGeom prst="rect">

--- a/demo_session/deck_cophi_baseline.pptx
+++ b/demo_session/deck_cophi_baseline.pptx
@@ -18779,7 +18779,7 @@
                 </a:solidFill>
                 <a:latin typeface="Arial"/>
               </a:rPr>
-              <a:t>–  read noise is paid once per N-cycle sample, not per bucket: 1/N in variance per photon; shot noise unchanged (every photoelectron counts, stored or drained)</a:t>
+              <a:t>–  per PHOTON: read noise is paid once per N-cycle sample, not per bucket (1/N in variance); shot noise is unchanged — averaging more samples helps only by bringing more photons, as it would any camera</a:t>
             </a:r>
           </a:p>
           <a:p>
@@ -18795,7 +18795,7 @@
                 </a:solidFill>
                 <a:latin typeface="Arial"/>
               </a:rPr>
-              <a:t>–  the vendor question: must the nodes hold the full DC before A − B is formed (the well caps photons per sample — our numbers), or is the common part drained so they hold only the difference (~10× more photons)?</a:t>
+              <a:t>–  per SECOND: the well empties every 1 ms sample — 5 × 10⁸ e⁻/s per pixel usable vs the Photonfocus's 3 × 10⁷ (200 ke × 150 fps); that 17× in photons is most of 42 → 3.4 s per pm (the vendor's drain question: slide 5)</a:t>
             </a:r>
           </a:p>
         </p:txBody>

--- a/demo_session/deck_cophi_baseline.pptx
+++ b/demo_session/deck_cophi_baseline.pptx
@@ -4738,8 +4738,8 @@
         </p:nvSpPr>
         <p:spPr>
           <a:xfrm>
-            <a:off x="411480" y="6834505"/>
-            <a:ext cx="11368735" cy="274320"/>
+            <a:off x="411480" y="6428232"/>
+            <a:ext cx="11365992" cy="274320"/>
           </a:xfrm>
           <a:prstGeom prst="rect">
             <a:avLst/>
@@ -5822,8 +5822,8 @@
         </p:nvSpPr>
         <p:spPr>
           <a:xfrm>
-            <a:off x="411480" y="5257800"/>
-            <a:ext cx="11368735" cy="274320"/>
+            <a:off x="411480" y="4572000"/>
+            <a:ext cx="11365992" cy="274320"/>
           </a:xfrm>
           <a:prstGeom prst="rect">
             <a:avLst/>
@@ -5842,7 +5842,7 @@
               </a:spcAft>
             </a:pPr>
             <a:r>
-              <a:rPr sz="1200" b="0">
+              <a:rPr sz="1400" b="0">
                 <a:solidFill>
                   <a:srgbClr val="282828"/>
                 </a:solidFill>
@@ -5851,7 +5851,7 @@
               <a:t>•  </a:t>
             </a:r>
             <a:r>
-              <a:rPr sz="1200" b="1">
+              <a:rPr sz="1400" b="1">
                 <a:solidFill>
                   <a:srgbClr val="282828"/>
                 </a:solidFill>
@@ -5860,7 +5860,7 @@
               <a:t>The one-step rows sit 0.5 % low for HET on both rigs — the estimator, not the reading:</a:t>
             </a:r>
             <a:r>
-              <a:rPr sz="1200" b="0">
+              <a:rPr sz="1400" b="0">
                 <a:solidFill>
                   <a:srgbClr val="282828"/>
                 </a:solidFill>
@@ -5876,7 +5876,7 @@
               </a:spcAft>
             </a:pPr>
             <a:r>
-              <a:rPr sz="1200" b="0">
+              <a:rPr sz="1400" b="0">
                 <a:solidFill>
                   <a:srgbClr val="282828"/>
                 </a:solidFill>
@@ -5885,7 +5885,7 @@
               <a:t>•  </a:t>
             </a:r>
             <a:r>
-              <a:rPr sz="1200" b="1">
+              <a:rPr sz="1400" b="1">
                 <a:solidFill>
                   <a:srgbClr val="282828"/>
                 </a:solidFill>
@@ -5894,7 +5894,7 @@
               <a:t>Driven to convergence (the servo use), HET reads exactly on the mirror rig, and the IFO shows its polarization gain in the open:</a:t>
             </a:r>
             <a:r>
-              <a:rPr sz="1200" b="0">
+              <a:rPr sz="1400" b="0">
                 <a:solidFill>
                   <a:srgbClr val="282828"/>
                 </a:solidFill>
@@ -5913,8 +5913,8 @@
         </p:nvSpPr>
         <p:spPr>
           <a:xfrm>
-            <a:off x="411480" y="6565392"/>
-            <a:ext cx="11368735" cy="274320"/>
+            <a:off x="411480" y="6172200"/>
+            <a:ext cx="11365992" cy="274320"/>
           </a:xfrm>
           <a:prstGeom prst="rect">
             <a:avLst/>
@@ -8442,8 +8442,8 @@
         </p:nvSpPr>
         <p:spPr>
           <a:xfrm>
-            <a:off x="6400800" y="6254495"/>
-            <a:ext cx="5394960" cy="274320"/>
+            <a:off x="457200" y="6254496"/>
+            <a:ext cx="11338560" cy="274320"/>
           </a:xfrm>
           <a:prstGeom prst="rect">
             <a:avLst/>
@@ -12927,8 +12927,8 @@
         </p:nvSpPr>
         <p:spPr>
           <a:xfrm>
-            <a:off x="411480" y="6986270"/>
-            <a:ext cx="11368735" cy="274320"/>
+            <a:off x="420624" y="6336792"/>
+            <a:ext cx="11365992" cy="274320"/>
           </a:xfrm>
           <a:prstGeom prst="rect">
             <a:avLst/>
@@ -14256,8 +14256,8 @@
         </p:nvSpPr>
         <p:spPr>
           <a:xfrm>
-            <a:off x="411480" y="6708267"/>
-            <a:ext cx="11368735" cy="274320"/>
+            <a:off x="420624" y="6382512"/>
+            <a:ext cx="11365992" cy="274320"/>
           </a:xfrm>
           <a:prstGeom prst="rect">
             <a:avLst/>
@@ -18647,7 +18647,7 @@
         <p:spPr>
           <a:xfrm>
             <a:off x="411480" y="1188720"/>
-            <a:ext cx="11365992" cy="3931920"/>
+            <a:ext cx="11365992" cy="4389120"/>
           </a:xfrm>
           <a:prstGeom prst="rect">
             <a:avLst/>
@@ -18662,7 +18662,7 @@
         </p:nvSpPr>
         <p:spPr>
           <a:xfrm>
-            <a:off x="411480" y="5120640"/>
+            <a:off x="365760" y="5705856"/>
             <a:ext cx="5806440" cy="274320"/>
           </a:xfrm>
           <a:prstGeom prst="rect">
@@ -18709,6 +18709,40 @@
               <a:t> a square wave at the beat f_b = |f₁ − f₂| (5 kHz), locked to the AOMs through the Rb clock, fed to the camera's reference input — one clock; software does only atan2(Q, I).</a:t>
             </a:r>
           </a:p>
+          <a:p>
+            <a:pPr>
+              <a:spcAft>
+                <a:spcPts val="600"/>
+              </a:spcAft>
+            </a:pPr>
+            <a:r>
+              <a:rPr sz="1200" b="0">
+                <a:solidFill>
+                  <a:srgbClr val="282828"/>
+                </a:solidFill>
+                <a:latin typeface="Arial"/>
+              </a:rPr>
+              <a:t>•  </a:t>
+            </a:r>
+            <a:r>
+              <a:rPr sz="1200" b="1">
+                <a:solidFill>
+                  <a:srgbClr val="282828"/>
+                </a:solidFill>
+                <a:latin typeface="Arial"/>
+              </a:rPr>
+              <a:t>The ADC is on chip:</a:t>
+            </a:r>
+            <a:r>
+              <a:rPr sz="1200" b="0">
+                <a:solidFill>
+                  <a:srgbClr val="282828"/>
+                </a:solidFill>
+                <a:latin typeface="Arial"/>
+              </a:rPr>
+              <a:t> readouts are digital I and Q.</a:t>
+            </a:r>
+          </a:p>
         </p:txBody>
       </p:sp>
       <p:sp>
@@ -18719,8 +18753,8 @@
         </p:nvSpPr>
         <p:spPr>
           <a:xfrm>
-            <a:off x="6400800" y="5120640"/>
-            <a:ext cx="5394960" cy="274320"/>
+            <a:off x="6382512" y="5715000"/>
+            <a:ext cx="5733288" cy="274320"/>
           </a:xfrm>
           <a:prstGeom prst="rect">
             <a:avLst/>
@@ -18763,7 +18797,7 @@
                 </a:solidFill>
                 <a:latin typeface="Arial"/>
               </a:rPr>
-              <a:t> N cycles per sample, not a quarter cycle; the square wave costs ×1.11 in σ (eq. 6).</a:t>
+              <a:t> N cycles per sample, not 1 sample per quarter cycle.</a:t>
             </a:r>
           </a:p>
           <a:p>
@@ -18779,23 +18813,7 @@
                 </a:solidFill>
                 <a:latin typeface="Arial"/>
               </a:rPr>
-              <a:t>–  per PHOTON: read noise is paid once per N-cycle sample, not per bucket (1/N in variance); shot noise is unchanged — averaging more samples helps only by bringing more photons, as it would any camera</a:t>
-            </a:r>
-          </a:p>
-          <a:p>
-            <a:pPr marL="594360" indent="-137160">
-              <a:spcAft>
-                <a:spcPts val="500"/>
-              </a:spcAft>
-            </a:pPr>
-            <a:r>
-              <a:rPr sz="1050" b="0">
-                <a:solidFill>
-                  <a:srgbClr val="6E6E6E"/>
-                </a:solidFill>
-                <a:latin typeface="Arial"/>
-              </a:rPr>
-              <a:t>–  per SECOND: the well empties every 1 ms sample — 5 × 10⁸ e⁻/s per pixel usable vs the Photonfocus's 3 × 10⁷ (200 ke × 150 fps); that 17× in photons is most of 42 → 3.4 s per pm (the vendor's drain question: slide 5)</a:t>
+              <a:t>–  the well empties every 1 ms sample — 5 × 10⁸ e⁻/s per pixel usable vs the Photonfocus's 3 × 10⁷ (200 ke × 150 fps); that 17× in photons is most of 42 → 3.4 s per pm (the vendor's drain question: slide 5)</a:t>
             </a:r>
           </a:p>
         </p:txBody>

--- a/demo_session/deck_cophi_baseline.pptx
+++ b/demo_session/deck_cophi_baseline.pptx
@@ -8600,15 +8600,15 @@
         </p:nvPicPr>
         <p:blipFill>
           <a:blip r:embed="rId2"/>
-          <a:srcRect t="3060" b="2370"/>
+          <a:srcRect/>
           <a:stretch>
             <a:fillRect/>
           </a:stretch>
         </p:blipFill>
         <p:spPr>
           <a:xfrm>
-            <a:off x="731520" y="2286000"/>
-            <a:ext cx="10972800" cy="4389120"/>
+            <a:off x="2194560" y="1874519"/>
+            <a:ext cx="7799831" cy="4572000"/>
           </a:xfrm>
           <a:prstGeom prst="rect">
             <a:avLst/>
@@ -8667,7 +8667,7 @@
                 </a:solidFill>
                 <a:latin typeface="Arial"/>
               </a:rPr>
-              <a:t> beats of 7.5 Hz and 3.75 Hz are 4 and 8 frames at the same 30 fps, so each color is demodulated at its own bucket centers from the same frames; the colors do not interfere (THz apart).</a:t>
+              <a:t> beats of 7.5 Hz and 3.75 Hz are 4 and 8 frames at the same 30 fps, so each color is demodulated at its own bucket centers from the same frames; the colors do not interfere (THz apart).  Lock-in form: time-multiplexed, one color per 1 ms sample (slide 17).</a:t>
             </a:r>
           </a:p>
         </p:txBody>
@@ -8680,8 +8680,8 @@
         </p:nvSpPr>
         <p:spPr>
           <a:xfrm>
-            <a:off x="411480" y="1828800"/>
-            <a:ext cx="5852160" cy="274320"/>
+            <a:off x="411480" y="6473952"/>
+            <a:ext cx="8686800" cy="274320"/>
           </a:xfrm>
           <a:prstGeom prst="rect">
             <a:avLst/>
@@ -8719,8 +8719,8 @@
         </p:nvSpPr>
         <p:spPr>
           <a:xfrm>
-            <a:off x="6400800" y="1828800"/>
-            <a:ext cx="5394960" cy="274320"/>
+            <a:off x="411480" y="6656832"/>
+            <a:ext cx="11338560" cy="274320"/>
           </a:xfrm>
           <a:prstGeom prst="rect">
             <a:avLst/>
@@ -9062,7 +9062,23 @@
                 </a:solidFill>
                 <a:latin typeface="Arial"/>
               </a:rPr>
-              <a:t> one reference at a time, so the two colors alternate on I/Q samples (2 ms per pair) — zero wrong orders to 480 nm rms, 0.12 nm per pixel; temporal unwrapping at 1 kHz tolerates 158 µm/s.</a:t>
+              <a:t> the two colors take alternate 1 ms samples, each color's AOM pair gated on for its sample, so ONE color is on the sensor at a time (500 Hz per color, 2 ms per pair) — zero wrong orders to 480 nm rms, 0.12 nm per pixel; temporal unwrapping at 1 kHz tolerates 158 µm/s.</a:t>
+            </a:r>
+          </a:p>
+          <a:p>
+            <a:pPr marL="594360" indent="-137160">
+              <a:spcAft>
+                <a:spcPts val="500"/>
+              </a:spcAft>
+            </a:pPr>
+            <a:r>
+              <a:rPr sz="1050" b="0">
+                <a:solidFill>
+                  <a:srgbClr val="6E6E6E"/>
+                </a:solidFill>
+                <a:latin typeface="Arial"/>
+              </a:rPr>
+              <a:t>–  the pixel has one reference and one pair of accumulators: both colors on at once would put the second beat and the second color's DC into A−B and C−D.  That form works only with beats an integer number of kHz apart (the cross term then integrates to zero over the 1 ms sample, square-wave harmonics included) and costs √2 in shot noise and half the well per color; not modeled.</a:t>
             </a:r>
           </a:p>
         </p:txBody>
@@ -16264,15 +16280,15 @@
         </p:nvPicPr>
         <p:blipFill>
           <a:blip r:embed="rId2"/>
-          <a:srcRect t="3660" b="2840"/>
+          <a:srcRect/>
           <a:stretch>
             <a:fillRect/>
           </a:stretch>
         </p:blipFill>
         <p:spPr>
           <a:xfrm>
-            <a:off x="914400" y="1408176"/>
-            <a:ext cx="9994392" cy="5394960"/>
+            <a:off x="1188720" y="1572768"/>
+            <a:ext cx="9820656" cy="4937760"/>
           </a:xfrm>
           <a:prstGeom prst="rect">
             <a:avLst/>
@@ -16344,7 +16360,7 @@
         </p:nvSpPr>
         <p:spPr>
           <a:xfrm>
-            <a:off x="5486400" y="1371600"/>
+            <a:off x="5806440" y="1353312"/>
             <a:ext cx="5852160" cy="274320"/>
           </a:xfrm>
           <a:prstGeom prst="rect">
@@ -16383,8 +16399,8 @@
         </p:nvSpPr>
         <p:spPr>
           <a:xfrm>
-            <a:off x="6172200" y="2103120"/>
-            <a:ext cx="4343400" cy="274320"/>
+            <a:off x="411480" y="6510528"/>
+            <a:ext cx="11338560" cy="274320"/>
           </a:xfrm>
           <a:prstGeom prst="rect">
             <a:avLst/>
@@ -18984,15 +19000,15 @@
         </p:nvPicPr>
         <p:blipFill>
           <a:blip r:embed="rId2"/>
-          <a:srcRect t="3010" b="2600"/>
+          <a:srcRect/>
           <a:stretch>
             <a:fillRect/>
           </a:stretch>
         </p:blipFill>
         <p:spPr>
           <a:xfrm>
-            <a:off x="740664" y="1106424"/>
-            <a:ext cx="10296144" cy="5614416"/>
+            <a:off x="1380744" y="1719072"/>
+            <a:ext cx="9436608" cy="4754880"/>
           </a:xfrm>
           <a:prstGeom prst="rect">
             <a:avLst/>
@@ -19007,8 +19023,8 @@
         </p:nvSpPr>
         <p:spPr>
           <a:xfrm>
-            <a:off x="5760720" y="1115568"/>
-            <a:ext cx="6035040" cy="274320"/>
+            <a:off x="411480" y="1115568"/>
+            <a:ext cx="11338560" cy="274320"/>
           </a:xfrm>
           <a:prstGeom prst="rect">
             <a:avLst/>
@@ -19027,7 +19043,7 @@
               </a:spcAft>
             </a:pPr>
             <a:r>
-              <a:rPr sz="1200" b="0">
+              <a:rPr sz="1500" b="0">
                 <a:solidFill>
                   <a:srgbClr val="282828"/>
                 </a:solidFill>
@@ -19036,7 +19052,7 @@
               <a:t>•  </a:t>
             </a:r>
             <a:r>
-              <a:rPr sz="1200" b="1">
+              <a:rPr sz="1500" b="1">
                 <a:solidFill>
                   <a:srgbClr val="282828"/>
                 </a:solidFill>
@@ -19045,7 +19061,7 @@
               <a:t>What changes from slide 3:</a:t>
             </a:r>
             <a:r>
-              <a:rPr sz="1200" b="0">
+              <a:rPr sz="1500" b="0">
                 <a:solidFill>
                   <a:srgbClr val="282828"/>
                 </a:solidFill>
@@ -19064,8 +19080,8 @@
         </p:nvSpPr>
         <p:spPr>
           <a:xfrm>
-            <a:off x="5760720" y="2103120"/>
-            <a:ext cx="6035040" cy="274320"/>
+            <a:off x="411480" y="6473952"/>
+            <a:ext cx="8686800" cy="274320"/>
           </a:xfrm>
           <a:prstGeom prst="rect">
             <a:avLst/>
@@ -19103,8 +19119,8 @@
         </p:nvSpPr>
         <p:spPr>
           <a:xfrm>
-            <a:off x="6172200" y="6611112"/>
-            <a:ext cx="5650992" cy="274320"/>
+            <a:off x="411480" y="6656832"/>
+            <a:ext cx="11338560" cy="274320"/>
           </a:xfrm>
           <a:prstGeom prst="rect">
             <a:avLst/>
